--- a/Projet_4/soutenance projet 4 _ actualisee .pptx
+++ b/Projet_4/soutenance projet 4 _ actualisee .pptx
@@ -86,7 +86,7 @@
         <p:txBody>
           <a:bodyPr/>
           <a:p>
-            <a:fld id="{DA94CE1A-419A-4066-B4F6-8C0F2DEB2464}" type="slidenum">
+            <a:fld id="{DE069F60-E196-4606-A2E4-96EB48D335CA}" type="slidenum">
               <a:t>&lt;#&gt;</a:t>
             </a:fld>
           </a:p>
@@ -295,7 +295,7 @@
         <p:txBody>
           <a:bodyPr/>
           <a:p>
-            <a:fld id="{BDB3054C-A7A9-446B-82DC-CAA4002C386B}" type="slidenum">
+            <a:fld id="{7E7B9B1B-D887-424E-8AA7-71488C30D976}" type="slidenum">
               <a:t>&lt;#&gt;</a:t>
             </a:fld>
           </a:p>
@@ -590,7 +590,7 @@
         <p:txBody>
           <a:bodyPr/>
           <a:p>
-            <a:fld id="{C8181940-867C-41E7-86FD-AE0CD9A21E92}" type="slidenum">
+            <a:fld id="{CB31B84C-2D8E-4BD5-87D0-95B0015DF4FF}" type="slidenum">
               <a:t>&lt;#&gt;</a:t>
             </a:fld>
           </a:p>
@@ -971,7 +971,7 @@
         <p:txBody>
           <a:bodyPr/>
           <a:p>
-            <a:fld id="{E3542A86-9069-4B96-975F-918F949D88ED}" type="slidenum">
+            <a:fld id="{CAE9498A-D93D-45C0-8298-339CB49281E3}" type="slidenum">
               <a:t>&lt;#&gt;</a:t>
             </a:fld>
           </a:p>
@@ -1054,7 +1054,7 @@
         <p:txBody>
           <a:bodyPr/>
           <a:p>
-            <a:fld id="{7FA76D17-6F83-4AFD-9048-5A43614478C5}" type="slidenum">
+            <a:fld id="{A1BB5B48-A846-4809-BCDB-A154256DAB2F}" type="slidenum">
               <a:t>&lt;#&gt;</a:t>
             </a:fld>
           </a:p>
@@ -1217,7 +1217,7 @@
         <p:txBody>
           <a:bodyPr/>
           <a:p>
-            <a:fld id="{80FFA659-0E69-4335-86DC-23504D987E16}" type="slidenum">
+            <a:fld id="{CE48133D-F79B-4A3C-9B6B-11BC394540EA}" type="slidenum">
               <a:t>&lt;#&gt;</a:t>
             </a:fld>
           </a:p>
@@ -1383,7 +1383,7 @@
         <p:txBody>
           <a:bodyPr/>
           <a:p>
-            <a:fld id="{B83EB65A-9CF6-4F65-8003-F8A9054DCDE6}" type="slidenum">
+            <a:fld id="{6E5D6110-6AB0-41CD-8B2D-775EA5F310C9}" type="slidenum">
               <a:t>&lt;#&gt;</a:t>
             </a:fld>
           </a:p>
@@ -1592,7 +1592,7 @@
         <p:txBody>
           <a:bodyPr/>
           <a:p>
-            <a:fld id="{0DF51D74-4A47-40FF-B24E-1A81A48185CA}" type="slidenum">
+            <a:fld id="{14D2A93A-524E-46D2-9943-37F8C1EE0393}" type="slidenum">
               <a:t>&lt;#&gt;</a:t>
             </a:fld>
           </a:p>
@@ -1715,7 +1715,7 @@
         <p:txBody>
           <a:bodyPr/>
           <a:p>
-            <a:fld id="{DA313EB8-802F-4F44-AE46-DB22B10BD359}" type="slidenum">
+            <a:fld id="{5D15F4C4-950C-47EF-9115-FC99C86B3D1A}" type="slidenum">
               <a:t>&lt;#&gt;</a:t>
             </a:fld>
           </a:p>
@@ -1836,7 +1836,7 @@
         <p:txBody>
           <a:bodyPr/>
           <a:p>
-            <a:fld id="{8CFDD9F5-92E7-495F-A4B1-CAB6E4E0D36F}" type="slidenum">
+            <a:fld id="{1E16ACB5-0E6E-4C95-A67A-CFD4A418DA04}" type="slidenum">
               <a:t>&lt;#&gt;</a:t>
             </a:fld>
           </a:p>
@@ -2088,7 +2088,7 @@
         <p:txBody>
           <a:bodyPr/>
           <a:p>
-            <a:fld id="{15817088-BE21-4D75-9A2B-F8C1ABDD5225}" type="slidenum">
+            <a:fld id="{AB2CE225-D7D0-4525-9510-139153632A6E}" type="slidenum">
               <a:t>&lt;#&gt;</a:t>
             </a:fld>
           </a:p>
@@ -2251,7 +2251,7 @@
         <p:txBody>
           <a:bodyPr/>
           <a:p>
-            <a:fld id="{7A8C44A1-12FE-4E66-B920-ADF397F2F1A1}" type="slidenum">
+            <a:fld id="{4EB6F4F9-613B-40CB-97F8-5430C3AA9B88}" type="slidenum">
               <a:t>&lt;#&gt;</a:t>
             </a:fld>
           </a:p>
@@ -2503,7 +2503,7 @@
         <p:txBody>
           <a:bodyPr/>
           <a:p>
-            <a:fld id="{C914C244-E347-4C67-81D9-E731FE0A78FE}" type="slidenum">
+            <a:fld id="{A8740CF8-3C94-49FE-AADE-7E85AC8476D8}" type="slidenum">
               <a:t>&lt;#&gt;</a:t>
             </a:fld>
           </a:p>
@@ -2755,7 +2755,7 @@
         <p:txBody>
           <a:bodyPr/>
           <a:p>
-            <a:fld id="{E7B9D316-2E71-43DB-9F67-1ECACAC7E958}" type="slidenum">
+            <a:fld id="{09D7AC5D-41C5-4A99-A4F9-19035DFCD0CC}" type="slidenum">
               <a:t>&lt;#&gt;</a:t>
             </a:fld>
           </a:p>
@@ -2964,7 +2964,7 @@
         <p:txBody>
           <a:bodyPr/>
           <a:p>
-            <a:fld id="{8D3090B4-269A-4441-9290-A79CFFA98A84}" type="slidenum">
+            <a:fld id="{D8E3A8E4-7DCF-4512-97FF-1876349FF251}" type="slidenum">
               <a:t>&lt;#&gt;</a:t>
             </a:fld>
           </a:p>
@@ -3259,7 +3259,7 @@
         <p:txBody>
           <a:bodyPr/>
           <a:p>
-            <a:fld id="{74D472A5-EAFE-4A58-BC87-B54EE6ABA730}" type="slidenum">
+            <a:fld id="{B32D4DA1-B002-4D4F-8A3E-D88C8BCC9A40}" type="slidenum">
               <a:t>&lt;#&gt;</a:t>
             </a:fld>
           </a:p>
@@ -3640,7 +3640,7 @@
         <p:txBody>
           <a:bodyPr/>
           <a:p>
-            <a:fld id="{CEFABF4E-79F3-49D3-B897-ADEBA48B31EC}" type="slidenum">
+            <a:fld id="{4EB44EF0-263F-4AE2-A865-F85EBA4C2F70}" type="slidenum">
               <a:t>&lt;#&gt;</a:t>
             </a:fld>
           </a:p>
@@ -3723,7 +3723,7 @@
         <p:txBody>
           <a:bodyPr/>
           <a:p>
-            <a:fld id="{0DAEDBFF-2832-4D57-87C3-707507D3A124}" type="slidenum">
+            <a:fld id="{77CDB229-C112-409C-8C2D-56D9A4A7B080}" type="slidenum">
               <a:t>&lt;#&gt;</a:t>
             </a:fld>
           </a:p>
@@ -3886,7 +3886,7 @@
         <p:txBody>
           <a:bodyPr/>
           <a:p>
-            <a:fld id="{B678B6FB-2B14-40DB-AA09-86198DDD0EAF}" type="slidenum">
+            <a:fld id="{014AAE5E-195C-4725-B32A-7D69507912C5}" type="slidenum">
               <a:t>&lt;#&gt;</a:t>
             </a:fld>
           </a:p>
@@ -4052,7 +4052,7 @@
         <p:txBody>
           <a:bodyPr/>
           <a:p>
-            <a:fld id="{E38CAC14-A673-4614-9E57-C7F3E54F93AB}" type="slidenum">
+            <a:fld id="{1003908A-1816-4F48-8D4B-E6828533046E}" type="slidenum">
               <a:t>&lt;#&gt;</a:t>
             </a:fld>
           </a:p>
@@ -4261,7 +4261,7 @@
         <p:txBody>
           <a:bodyPr/>
           <a:p>
-            <a:fld id="{9A93C29A-0F2D-4486-81B7-DD18A6E4F150}" type="slidenum">
+            <a:fld id="{5676AD01-63C0-4C1F-9217-7000A32DC23C}" type="slidenum">
               <a:t>&lt;#&gt;</a:t>
             </a:fld>
           </a:p>
@@ -4384,7 +4384,7 @@
         <p:txBody>
           <a:bodyPr/>
           <a:p>
-            <a:fld id="{BCD1BA45-EA17-419B-A20C-F6C247AD223B}" type="slidenum">
+            <a:fld id="{AF536312-BE39-4101-BEF7-8183C217A65B}" type="slidenum">
               <a:t>&lt;#&gt;</a:t>
             </a:fld>
           </a:p>
@@ -4550,7 +4550,7 @@
         <p:txBody>
           <a:bodyPr/>
           <a:p>
-            <a:fld id="{42BDF788-FA0E-4F53-B94C-E89576F8F20C}" type="slidenum">
+            <a:fld id="{4ABFF19B-BB6C-4E8A-95EB-C5BD516BE573}" type="slidenum">
               <a:t>&lt;#&gt;</a:t>
             </a:fld>
           </a:p>
@@ -4671,7 +4671,7 @@
         <p:txBody>
           <a:bodyPr/>
           <a:p>
-            <a:fld id="{CD9228B1-9AE6-4435-AF82-591CDCEAEA52}" type="slidenum">
+            <a:fld id="{7C726A3A-0C51-46E8-985C-6FF64CA34AAF}" type="slidenum">
               <a:t>&lt;#&gt;</a:t>
             </a:fld>
           </a:p>
@@ -4923,7 +4923,7 @@
         <p:txBody>
           <a:bodyPr/>
           <a:p>
-            <a:fld id="{5EC0191E-48BD-4B79-BB28-EA78BE3C2644}" type="slidenum">
+            <a:fld id="{05122502-CE03-41B2-990E-49DDCA88B532}" type="slidenum">
               <a:t>&lt;#&gt;</a:t>
             </a:fld>
           </a:p>
@@ -5175,7 +5175,7 @@
         <p:txBody>
           <a:bodyPr/>
           <a:p>
-            <a:fld id="{6095CA48-04A7-428B-88FD-CB12F8C76A5B}" type="slidenum">
+            <a:fld id="{22095135-F372-486B-9404-D238F3073716}" type="slidenum">
               <a:t>&lt;#&gt;</a:t>
             </a:fld>
           </a:p>
@@ -5427,7 +5427,7 @@
         <p:txBody>
           <a:bodyPr/>
           <a:p>
-            <a:fld id="{FFA71497-4A1D-4A8F-BC3C-9834390E0A74}" type="slidenum">
+            <a:fld id="{E7C06C3E-88DE-4C39-92E6-36DC17064838}" type="slidenum">
               <a:t>&lt;#&gt;</a:t>
             </a:fld>
           </a:p>
@@ -5636,7 +5636,7 @@
         <p:txBody>
           <a:bodyPr/>
           <a:p>
-            <a:fld id="{BFF4FC5E-9C65-455D-8109-3988C47CCA19}" type="slidenum">
+            <a:fld id="{92ED4D04-3C51-4C5C-A305-FF68C0DC72C2}" type="slidenum">
               <a:t>&lt;#&gt;</a:t>
             </a:fld>
           </a:p>
@@ -5931,7 +5931,7 @@
         <p:txBody>
           <a:bodyPr/>
           <a:p>
-            <a:fld id="{7C90C96F-3542-451F-A8D0-7C85C4F9501D}" type="slidenum">
+            <a:fld id="{CCDDD6AA-729F-4793-912E-FB76CB24B8AC}" type="slidenum">
               <a:t>&lt;#&gt;</a:t>
             </a:fld>
           </a:p>
@@ -6312,7 +6312,7 @@
         <p:txBody>
           <a:bodyPr/>
           <a:p>
-            <a:fld id="{CDA08B53-2319-4AF6-872E-FA2D81C38B62}" type="slidenum">
+            <a:fld id="{C18D62DC-DF4B-49C4-B58C-4D510A5C7E79}" type="slidenum">
               <a:t>&lt;#&gt;</a:t>
             </a:fld>
           </a:p>
@@ -6395,7 +6395,7 @@
         <p:txBody>
           <a:bodyPr/>
           <a:p>
-            <a:fld id="{C3AC0D83-A9C7-477F-AB29-9EF7B65978EF}" type="slidenum">
+            <a:fld id="{A6E73DD1-4280-46B4-817A-4746E5F6F05A}" type="slidenum">
               <a:t>&lt;#&gt;</a:t>
             </a:fld>
           </a:p>
@@ -6558,7 +6558,7 @@
         <p:txBody>
           <a:bodyPr/>
           <a:p>
-            <a:fld id="{59423092-7B08-4AA2-9F9B-C33363160456}" type="slidenum">
+            <a:fld id="{E6D53E1A-DA1E-41F6-B0E9-58CB0B5E5490}" type="slidenum">
               <a:t>&lt;#&gt;</a:t>
             </a:fld>
           </a:p>
@@ -6724,7 +6724,7 @@
         <p:txBody>
           <a:bodyPr/>
           <a:p>
-            <a:fld id="{838556C9-23C5-4307-961C-6AABC273D417}" type="slidenum">
+            <a:fld id="{1C8DA571-D82B-4BEB-9E3F-594EF4715A44}" type="slidenum">
               <a:t>&lt;#&gt;</a:t>
             </a:fld>
           </a:p>
@@ -6933,7 +6933,7 @@
         <p:txBody>
           <a:bodyPr/>
           <a:p>
-            <a:fld id="{47A79E6F-5761-4C6E-8C74-4A56F6E2E652}" type="slidenum">
+            <a:fld id="{1DCEA018-D53A-4AD3-A691-4D33FDD3383C}" type="slidenum">
               <a:t>&lt;#&gt;</a:t>
             </a:fld>
           </a:p>
@@ -7142,7 +7142,7 @@
         <p:txBody>
           <a:bodyPr/>
           <a:p>
-            <a:fld id="{69AAED5B-3738-4A85-8F16-EDD81798FD93}" type="slidenum">
+            <a:fld id="{DCBE9C44-5694-4314-8FF2-D1C589A4FC56}" type="slidenum">
               <a:t>&lt;#&gt;</a:t>
             </a:fld>
           </a:p>
@@ -7265,7 +7265,7 @@
         <p:txBody>
           <a:bodyPr/>
           <a:p>
-            <a:fld id="{24924490-237B-4C35-B16A-9686FBDC620E}" type="slidenum">
+            <a:fld id="{93E3FE54-5D0C-475C-896C-E92DC54AA89F}" type="slidenum">
               <a:t>&lt;#&gt;</a:t>
             </a:fld>
           </a:p>
@@ -7386,7 +7386,7 @@
         <p:txBody>
           <a:bodyPr/>
           <a:p>
-            <a:fld id="{CE2A8896-D0A0-4B10-AA1B-DF450475557C}" type="slidenum">
+            <a:fld id="{221AA84B-60F5-4CCD-863A-1AABA6D81268}" type="slidenum">
               <a:t>&lt;#&gt;</a:t>
             </a:fld>
           </a:p>
@@ -7638,7 +7638,7 @@
         <p:txBody>
           <a:bodyPr/>
           <a:p>
-            <a:fld id="{93F8A182-0FB8-4D90-8BCF-97DAC23EF09F}" type="slidenum">
+            <a:fld id="{C04A1B50-5957-47FA-B1CF-A3AF66584349}" type="slidenum">
               <a:t>&lt;#&gt;</a:t>
             </a:fld>
           </a:p>
@@ -7890,7 +7890,7 @@
         <p:txBody>
           <a:bodyPr/>
           <a:p>
-            <a:fld id="{8E523596-B119-4645-BA85-171993C7E33A}" type="slidenum">
+            <a:fld id="{4C57A140-ED4D-4C7A-A930-C149F5831046}" type="slidenum">
               <a:t>&lt;#&gt;</a:t>
             </a:fld>
           </a:p>
@@ -8142,7 +8142,7 @@
         <p:txBody>
           <a:bodyPr/>
           <a:p>
-            <a:fld id="{620743BB-7DBF-40C2-9543-5A5D567F63CE}" type="slidenum">
+            <a:fld id="{30EE1DB4-C465-454C-88CD-87AB6E9608EF}" type="slidenum">
               <a:t>&lt;#&gt;</a:t>
             </a:fld>
           </a:p>
@@ -8351,7 +8351,7 @@
         <p:txBody>
           <a:bodyPr/>
           <a:p>
-            <a:fld id="{63E8A9C9-60FE-4D62-80DE-E03EFC56EB35}" type="slidenum">
+            <a:fld id="{278D2FAF-9BE7-48C7-B5B2-049930754267}" type="slidenum">
               <a:t>&lt;#&gt;</a:t>
             </a:fld>
           </a:p>
@@ -8646,7 +8646,7 @@
         <p:txBody>
           <a:bodyPr/>
           <a:p>
-            <a:fld id="{39DD9D92-84D1-4D61-8D0E-F1A1D19FB336}" type="slidenum">
+            <a:fld id="{9CF5EED7-91D2-4E23-8183-CC938AFDEEF1}" type="slidenum">
               <a:t>&lt;#&gt;</a:t>
             </a:fld>
           </a:p>
@@ -9027,7 +9027,7 @@
         <p:txBody>
           <a:bodyPr/>
           <a:p>
-            <a:fld id="{B40870CD-D5F9-4533-B1C5-2575A7704AD0}" type="slidenum">
+            <a:fld id="{B0D1DF71-C1C1-4439-8857-F6FAAAAA2C10}" type="slidenum">
               <a:t>&lt;#&gt;</a:t>
             </a:fld>
           </a:p>
@@ -9150,7 +9150,7 @@
         <p:txBody>
           <a:bodyPr/>
           <a:p>
-            <a:fld id="{64641728-D50D-46BD-A21F-0BEE99807C36}" type="slidenum">
+            <a:fld id="{EA02DEA7-0257-42B6-8C5B-C455462E876B}" type="slidenum">
               <a:t>&lt;#&gt;</a:t>
             </a:fld>
           </a:p>
@@ -9271,7 +9271,7 @@
         <p:txBody>
           <a:bodyPr/>
           <a:p>
-            <a:fld id="{15AF9D21-47AE-4BE2-A4EB-EC7C596BBAC6}" type="slidenum">
+            <a:fld id="{44396515-E619-4D68-BAD3-4BA1A9E19842}" type="slidenum">
               <a:t>&lt;#&gt;</a:t>
             </a:fld>
           </a:p>
@@ -9523,7 +9523,7 @@
         <p:txBody>
           <a:bodyPr/>
           <a:p>
-            <a:fld id="{11AB0DCC-7C3D-4D32-83C5-EF61B4BD6A1F}" type="slidenum">
+            <a:fld id="{7B7B2149-1BBD-43D5-B11B-5F601B56B899}" type="slidenum">
               <a:t>&lt;#&gt;</a:t>
             </a:fld>
           </a:p>
@@ -9775,7 +9775,7 @@
         <p:txBody>
           <a:bodyPr/>
           <a:p>
-            <a:fld id="{AD268B27-5F55-438F-9AFD-701FAA38C0A6}" type="slidenum">
+            <a:fld id="{CAF15A29-EDC3-45B3-ABA9-F2F910D87763}" type="slidenum">
               <a:t>&lt;#&gt;</a:t>
             </a:fld>
           </a:p>
@@ -10027,7 +10027,7 @@
         <p:txBody>
           <a:bodyPr/>
           <a:p>
-            <a:fld id="{112433AF-F698-4B80-965A-82E6938D288B}" type="slidenum">
+            <a:fld id="{20ECAF5B-3FC1-4069-80D4-34CFB20203FA}" type="slidenum">
               <a:t>&lt;#&gt;</a:t>
             </a:fld>
           </a:p>
@@ -10092,15 +10092,15 @@
         <p:spPr>
           <a:xfrm>
             <a:off x="0" y="0"/>
-            <a:ext cx="9143280" cy="304200"/>
+            <a:ext cx="9142920" cy="303840"/>
           </a:xfrm>
           <a:custGeom>
             <a:avLst/>
             <a:gdLst>
-              <a:gd name="textAreaLeft" fmla="*/ 0 w 9143280"/>
-              <a:gd name="textAreaRight" fmla="*/ 9144000 w 9143280"/>
-              <a:gd name="textAreaTop" fmla="*/ 0 h 304200"/>
-              <a:gd name="textAreaBottom" fmla="*/ 304920 h 304200"/>
+              <a:gd name="textAreaLeft" fmla="*/ 0 w 9142920"/>
+              <a:gd name="textAreaRight" fmla="*/ 9144000 w 9142920"/>
+              <a:gd name="textAreaTop" fmla="*/ 0 h 303840"/>
+              <a:gd name="textAreaBottom" fmla="*/ 304920 h 303840"/>
             </a:gdLst>
             <a:ahLst/>
             <a:rect l="textAreaLeft" t="textAreaTop" r="textAreaRight" b="textAreaBottom"/>
@@ -10167,15 +10167,15 @@
         <p:spPr>
           <a:xfrm>
             <a:off x="0" y="0"/>
-            <a:ext cx="9143280" cy="304200"/>
+            <a:ext cx="9142920" cy="303840"/>
           </a:xfrm>
           <a:custGeom>
             <a:avLst/>
             <a:gdLst>
-              <a:gd name="textAreaLeft" fmla="*/ 0 w 9143280"/>
-              <a:gd name="textAreaRight" fmla="*/ 9144000 w 9143280"/>
-              <a:gd name="textAreaTop" fmla="*/ 0 h 304200"/>
-              <a:gd name="textAreaBottom" fmla="*/ 304920 h 304200"/>
+              <a:gd name="textAreaLeft" fmla="*/ 0 w 9142920"/>
+              <a:gd name="textAreaRight" fmla="*/ 9144000 w 9142920"/>
+              <a:gd name="textAreaTop" fmla="*/ 0 h 303840"/>
+              <a:gd name="textAreaBottom" fmla="*/ 304920 h 303840"/>
             </a:gdLst>
             <a:ahLst/>
             <a:rect l="textAreaLeft" t="textAreaTop" r="textAreaRight" b="textAreaBottom"/>
@@ -10242,15 +10242,15 @@
         <p:spPr>
           <a:xfrm>
             <a:off x="685800" y="2832120"/>
-            <a:ext cx="7848000" cy="720"/>
+            <a:ext cx="7847640" cy="360"/>
           </a:xfrm>
           <a:custGeom>
             <a:avLst/>
             <a:gdLst>
-              <a:gd name="textAreaLeft" fmla="*/ 0 w 7848000"/>
-              <a:gd name="textAreaRight" fmla="*/ 7848720 w 7848000"/>
-              <a:gd name="textAreaTop" fmla="*/ 0 h 720"/>
-              <a:gd name="textAreaBottom" fmla="*/ 1440 h 720"/>
+              <a:gd name="textAreaLeft" fmla="*/ 0 w 7847640"/>
+              <a:gd name="textAreaRight" fmla="*/ 7848720 w 7847640"/>
+              <a:gd name="textAreaTop" fmla="*/ 0 h 360"/>
+              <a:gd name="textAreaBottom" fmla="*/ 1440 h 360"/>
             </a:gdLst>
             <a:ahLst/>
             <a:rect l="textAreaLeft" t="textAreaTop" r="textAreaRight" b="textAreaBottom"/>
@@ -10312,7 +10312,7 @@
         <p:spPr>
           <a:xfrm>
             <a:off x="3108960" y="5315040"/>
-            <a:ext cx="2925360" cy="285120"/>
+            <a:ext cx="2925000" cy="284760"/>
           </a:xfrm>
           <a:prstGeom prst="rect">
             <a:avLst/>
@@ -10384,7 +10384,7 @@
         <p:spPr>
           <a:xfrm>
             <a:off x="6583680" y="5315040"/>
-            <a:ext cx="2102400" cy="285120"/>
+            <a:ext cx="2102040" cy="284760"/>
           </a:xfrm>
           <a:prstGeom prst="rect">
             <a:avLst/>
@@ -10425,7 +10425,7 @@
                 <a:tab algn="l" pos="0"/>
               </a:tabLst>
             </a:pPr>
-            <a:fld id="{6080B5E8-FA10-4A10-93F1-C4D33614CE75}" type="slidenum">
+            <a:fld id="{80A65E5D-315A-4D0A-A871-79D8C538D88B}" type="slidenum">
               <a:rPr b="0" lang="fr-FR" sz="1400" spc="-1" strike="noStrike">
                 <a:solidFill>
                   <a:srgbClr val="b2b2b2"/>
@@ -10456,7 +10456,7 @@
         <p:spPr>
           <a:xfrm>
             <a:off x="457200" y="5315040"/>
-            <a:ext cx="2102400" cy="285120"/>
+            <a:ext cx="2102040" cy="284760"/>
           </a:xfrm>
           <a:prstGeom prst="rect">
             <a:avLst/>
@@ -10830,15 +10830,15 @@
         <p:spPr>
           <a:xfrm>
             <a:off x="0" y="0"/>
-            <a:ext cx="9143280" cy="304200"/>
+            <a:ext cx="9142920" cy="303840"/>
           </a:xfrm>
           <a:custGeom>
             <a:avLst/>
             <a:gdLst>
-              <a:gd name="textAreaLeft" fmla="*/ 0 w 9143280"/>
-              <a:gd name="textAreaRight" fmla="*/ 9144000 w 9143280"/>
-              <a:gd name="textAreaTop" fmla="*/ 0 h 304200"/>
-              <a:gd name="textAreaBottom" fmla="*/ 304920 h 304200"/>
+              <a:gd name="textAreaLeft" fmla="*/ 0 w 9142920"/>
+              <a:gd name="textAreaRight" fmla="*/ 9144000 w 9142920"/>
+              <a:gd name="textAreaTop" fmla="*/ 0 h 303840"/>
+              <a:gd name="textAreaBottom" fmla="*/ 304920 h 303840"/>
             </a:gdLst>
             <a:ahLst/>
             <a:rect l="textAreaLeft" t="textAreaTop" r="textAreaRight" b="textAreaBottom"/>
@@ -10909,7 +10909,7 @@
         <p:spPr>
           <a:xfrm>
             <a:off x="3108960" y="5315040"/>
-            <a:ext cx="2925360" cy="285120"/>
+            <a:ext cx="2925000" cy="284760"/>
           </a:xfrm>
           <a:prstGeom prst="rect">
             <a:avLst/>
@@ -10981,7 +10981,7 @@
         <p:spPr>
           <a:xfrm>
             <a:off x="6583680" y="5315040"/>
-            <a:ext cx="2102400" cy="285120"/>
+            <a:ext cx="2102040" cy="284760"/>
           </a:xfrm>
           <a:prstGeom prst="rect">
             <a:avLst/>
@@ -11022,7 +11022,7 @@
                 <a:tab algn="l" pos="0"/>
               </a:tabLst>
             </a:pPr>
-            <a:fld id="{34B844BA-8BF1-4980-81D8-B7EB52E182C7}" type="slidenum">
+            <a:fld id="{0D0E0D8B-6579-4A3F-9856-E607E935ED55}" type="slidenum">
               <a:rPr b="0" lang="fr-FR" sz="1400" spc="-1" strike="noStrike">
                 <a:solidFill>
                   <a:srgbClr val="b2b2b2"/>
@@ -11053,7 +11053,7 @@
         <p:spPr>
           <a:xfrm>
             <a:off x="457200" y="5315040"/>
-            <a:ext cx="2102400" cy="285120"/>
+            <a:ext cx="2102040" cy="284760"/>
           </a:xfrm>
           <a:prstGeom prst="rect">
             <a:avLst/>
@@ -11427,15 +11427,15 @@
         <p:spPr>
           <a:xfrm>
             <a:off x="0" y="0"/>
-            <a:ext cx="9143280" cy="304200"/>
+            <a:ext cx="9142920" cy="303840"/>
           </a:xfrm>
           <a:custGeom>
             <a:avLst/>
             <a:gdLst>
-              <a:gd name="textAreaLeft" fmla="*/ 0 w 9143280"/>
-              <a:gd name="textAreaRight" fmla="*/ 9144000 w 9143280"/>
-              <a:gd name="textAreaTop" fmla="*/ 0 h 304200"/>
-              <a:gd name="textAreaBottom" fmla="*/ 304920 h 304200"/>
+              <a:gd name="textAreaLeft" fmla="*/ 0 w 9142920"/>
+              <a:gd name="textAreaRight" fmla="*/ 9144000 w 9142920"/>
+              <a:gd name="textAreaTop" fmla="*/ 0 h 303840"/>
+              <a:gd name="textAreaBottom" fmla="*/ 304920 h 303840"/>
             </a:gdLst>
             <a:ahLst/>
             <a:rect l="textAreaLeft" t="textAreaTop" r="textAreaRight" b="textAreaBottom"/>
@@ -11502,15 +11502,15 @@
         <p:spPr>
           <a:xfrm>
             <a:off x="0" y="374400"/>
-            <a:ext cx="9143280" cy="5340240"/>
+            <a:ext cx="9142920" cy="5339880"/>
           </a:xfrm>
           <a:custGeom>
             <a:avLst/>
             <a:gdLst>
-              <a:gd name="textAreaLeft" fmla="*/ 0 w 9143280"/>
-              <a:gd name="textAreaRight" fmla="*/ 9144000 w 9143280"/>
-              <a:gd name="textAreaTop" fmla="*/ 0 h 5340240"/>
-              <a:gd name="textAreaBottom" fmla="*/ 5340960 h 5340240"/>
+              <a:gd name="textAreaLeft" fmla="*/ 0 w 9142920"/>
+              <a:gd name="textAreaRight" fmla="*/ 9144000 w 9142920"/>
+              <a:gd name="textAreaTop" fmla="*/ 0 h 5339880"/>
+              <a:gd name="textAreaBottom" fmla="*/ 5340960 h 5339880"/>
             </a:gdLst>
             <a:ahLst/>
             <a:rect l="textAreaLeft" t="textAreaTop" r="textAreaRight" b="textAreaBottom"/>
@@ -11577,15 +11577,15 @@
         <p:spPr>
           <a:xfrm>
             <a:off x="0" y="304920"/>
-            <a:ext cx="9143280" cy="69120"/>
+            <a:ext cx="9142920" cy="68760"/>
           </a:xfrm>
           <a:custGeom>
             <a:avLst/>
             <a:gdLst>
-              <a:gd name="textAreaLeft" fmla="*/ 0 w 9143280"/>
-              <a:gd name="textAreaRight" fmla="*/ 9144000 w 9143280"/>
-              <a:gd name="textAreaTop" fmla="*/ 0 h 69120"/>
-              <a:gd name="textAreaBottom" fmla="*/ 69840 h 69120"/>
+              <a:gd name="textAreaLeft" fmla="*/ 0 w 9142920"/>
+              <a:gd name="textAreaRight" fmla="*/ 9144000 w 9142920"/>
+              <a:gd name="textAreaTop" fmla="*/ 0 h 68760"/>
+              <a:gd name="textAreaBottom" fmla="*/ 69840 h 68760"/>
             </a:gdLst>
             <a:ahLst/>
             <a:rect l="textAreaLeft" t="textAreaTop" r="textAreaRight" b="textAreaBottom"/>
@@ -11652,15 +11652,15 @@
         <p:spPr>
           <a:xfrm>
             <a:off x="0" y="0"/>
-            <a:ext cx="9143280" cy="304200"/>
+            <a:ext cx="9142920" cy="303840"/>
           </a:xfrm>
           <a:custGeom>
             <a:avLst/>
             <a:gdLst>
-              <a:gd name="textAreaLeft" fmla="*/ 0 w 9143280"/>
-              <a:gd name="textAreaRight" fmla="*/ 9144000 w 9143280"/>
-              <a:gd name="textAreaTop" fmla="*/ 0 h 304200"/>
-              <a:gd name="textAreaBottom" fmla="*/ 304920 h 304200"/>
+              <a:gd name="textAreaLeft" fmla="*/ 0 w 9142920"/>
+              <a:gd name="textAreaRight" fmla="*/ 9144000 w 9142920"/>
+              <a:gd name="textAreaTop" fmla="*/ 0 h 303840"/>
+              <a:gd name="textAreaBottom" fmla="*/ 304920 h 303840"/>
             </a:gdLst>
             <a:ahLst/>
             <a:rect l="textAreaLeft" t="textAreaTop" r="textAreaRight" b="textAreaBottom"/>
@@ -11727,15 +11727,15 @@
         <p:spPr>
           <a:xfrm>
             <a:off x="731520" y="3832920"/>
-            <a:ext cx="7848000" cy="720"/>
+            <a:ext cx="7847640" cy="360"/>
           </a:xfrm>
           <a:custGeom>
             <a:avLst/>
             <a:gdLst>
-              <a:gd name="textAreaLeft" fmla="*/ 0 w 7848000"/>
-              <a:gd name="textAreaRight" fmla="*/ 7848720 w 7848000"/>
-              <a:gd name="textAreaTop" fmla="*/ 0 h 720"/>
-              <a:gd name="textAreaBottom" fmla="*/ 1440 h 720"/>
+              <a:gd name="textAreaLeft" fmla="*/ 0 w 7847640"/>
+              <a:gd name="textAreaRight" fmla="*/ 7848720 w 7847640"/>
+              <a:gd name="textAreaTop" fmla="*/ 0 h 360"/>
+              <a:gd name="textAreaBottom" fmla="*/ 1440 h 360"/>
             </a:gdLst>
             <a:ahLst/>
             <a:rect l="textAreaLeft" t="textAreaTop" r="textAreaRight" b="textAreaBottom"/>
@@ -11797,7 +11797,7 @@
         <p:spPr>
           <a:xfrm>
             <a:off x="3108960" y="5315040"/>
-            <a:ext cx="2925360" cy="285120"/>
+            <a:ext cx="2925000" cy="284760"/>
           </a:xfrm>
           <a:prstGeom prst="rect">
             <a:avLst/>
@@ -11869,7 +11869,7 @@
         <p:spPr>
           <a:xfrm>
             <a:off x="6583680" y="5315040"/>
-            <a:ext cx="2102400" cy="285120"/>
+            <a:ext cx="2102040" cy="284760"/>
           </a:xfrm>
           <a:prstGeom prst="rect">
             <a:avLst/>
@@ -11910,7 +11910,7 @@
                 <a:tab algn="l" pos="0"/>
               </a:tabLst>
             </a:pPr>
-            <a:fld id="{8C3C48FE-6836-477C-BC0A-14FBD03A6336}" type="slidenum">
+            <a:fld id="{A8FBE6B1-A170-4103-91CC-FA79C28F5C91}" type="slidenum">
               <a:rPr b="0" lang="fr-FR" sz="1400" spc="-1" strike="noStrike">
                 <a:solidFill>
                   <a:srgbClr val="b2b2b2"/>
@@ -11941,7 +11941,7 @@
         <p:spPr>
           <a:xfrm>
             <a:off x="457200" y="5315040"/>
-            <a:ext cx="2102400" cy="285120"/>
+            <a:ext cx="2102040" cy="284760"/>
           </a:xfrm>
           <a:prstGeom prst="rect">
             <a:avLst/>
@@ -12315,15 +12315,15 @@
         <p:spPr>
           <a:xfrm>
             <a:off x="0" y="0"/>
-            <a:ext cx="9143280" cy="304200"/>
+            <a:ext cx="9142920" cy="303840"/>
           </a:xfrm>
           <a:custGeom>
             <a:avLst/>
             <a:gdLst>
-              <a:gd name="textAreaLeft" fmla="*/ 0 w 9143280"/>
-              <a:gd name="textAreaRight" fmla="*/ 9144000 w 9143280"/>
-              <a:gd name="textAreaTop" fmla="*/ 0 h 304200"/>
-              <a:gd name="textAreaBottom" fmla="*/ 304920 h 304200"/>
+              <a:gd name="textAreaLeft" fmla="*/ 0 w 9142920"/>
+              <a:gd name="textAreaRight" fmla="*/ 9144000 w 9142920"/>
+              <a:gd name="textAreaTop" fmla="*/ 0 h 303840"/>
+              <a:gd name="textAreaBottom" fmla="*/ 304920 h 303840"/>
             </a:gdLst>
             <a:ahLst/>
             <a:rect l="textAreaLeft" t="textAreaTop" r="textAreaRight" b="textAreaBottom"/>
@@ -12390,15 +12390,15 @@
         <p:spPr>
           <a:xfrm>
             <a:off x="0" y="374400"/>
-            <a:ext cx="9143280" cy="5340240"/>
+            <a:ext cx="9142920" cy="5339880"/>
           </a:xfrm>
           <a:custGeom>
             <a:avLst/>
             <a:gdLst>
-              <a:gd name="textAreaLeft" fmla="*/ 0 w 9143280"/>
-              <a:gd name="textAreaRight" fmla="*/ 9144000 w 9143280"/>
-              <a:gd name="textAreaTop" fmla="*/ 0 h 5340240"/>
-              <a:gd name="textAreaBottom" fmla="*/ 5340960 h 5340240"/>
+              <a:gd name="textAreaLeft" fmla="*/ 0 w 9142920"/>
+              <a:gd name="textAreaRight" fmla="*/ 9144000 w 9142920"/>
+              <a:gd name="textAreaTop" fmla="*/ 0 h 5339880"/>
+              <a:gd name="textAreaBottom" fmla="*/ 5340960 h 5339880"/>
             </a:gdLst>
             <a:ahLst/>
             <a:rect l="textAreaLeft" t="textAreaTop" r="textAreaRight" b="textAreaBottom"/>
@@ -12465,15 +12465,15 @@
         <p:spPr>
           <a:xfrm>
             <a:off x="0" y="304920"/>
-            <a:ext cx="9143280" cy="69120"/>
+            <a:ext cx="9142920" cy="68760"/>
           </a:xfrm>
           <a:custGeom>
             <a:avLst/>
             <a:gdLst>
-              <a:gd name="textAreaLeft" fmla="*/ 0 w 9143280"/>
-              <a:gd name="textAreaRight" fmla="*/ 9144000 w 9143280"/>
-              <a:gd name="textAreaTop" fmla="*/ 0 h 69120"/>
-              <a:gd name="textAreaBottom" fmla="*/ 69840 h 69120"/>
+              <a:gd name="textAreaLeft" fmla="*/ 0 w 9142920"/>
+              <a:gd name="textAreaRight" fmla="*/ 9144000 w 9142920"/>
+              <a:gd name="textAreaTop" fmla="*/ 0 h 68760"/>
+              <a:gd name="textAreaBottom" fmla="*/ 69840 h 68760"/>
             </a:gdLst>
             <a:ahLst/>
             <a:rect l="textAreaLeft" t="textAreaTop" r="textAreaRight" b="textAreaBottom"/>
@@ -12540,15 +12540,15 @@
         <p:spPr>
           <a:xfrm>
             <a:off x="0" y="0"/>
-            <a:ext cx="9143280" cy="304200"/>
+            <a:ext cx="9142920" cy="303840"/>
           </a:xfrm>
           <a:custGeom>
             <a:avLst/>
             <a:gdLst>
-              <a:gd name="textAreaLeft" fmla="*/ 0 w 9143280"/>
-              <a:gd name="textAreaRight" fmla="*/ 9144000 w 9143280"/>
-              <a:gd name="textAreaTop" fmla="*/ 0 h 304200"/>
-              <a:gd name="textAreaBottom" fmla="*/ 304920 h 304200"/>
+              <a:gd name="textAreaLeft" fmla="*/ 0 w 9142920"/>
+              <a:gd name="textAreaRight" fmla="*/ 9144000 w 9142920"/>
+              <a:gd name="textAreaTop" fmla="*/ 0 h 303840"/>
+              <a:gd name="textAreaBottom" fmla="*/ 304920 h 303840"/>
             </a:gdLst>
             <a:ahLst/>
             <a:rect l="textAreaLeft" t="textAreaTop" r="textAreaRight" b="textAreaBottom"/>
@@ -12615,15 +12615,15 @@
         <p:spPr>
           <a:xfrm>
             <a:off x="731520" y="3832920"/>
-            <a:ext cx="7848000" cy="720"/>
+            <a:ext cx="7847640" cy="360"/>
           </a:xfrm>
           <a:custGeom>
             <a:avLst/>
             <a:gdLst>
-              <a:gd name="textAreaLeft" fmla="*/ 0 w 7848000"/>
-              <a:gd name="textAreaRight" fmla="*/ 7848720 w 7848000"/>
-              <a:gd name="textAreaTop" fmla="*/ 0 h 720"/>
-              <a:gd name="textAreaBottom" fmla="*/ 1440 h 720"/>
+              <a:gd name="textAreaLeft" fmla="*/ 0 w 7847640"/>
+              <a:gd name="textAreaRight" fmla="*/ 7848720 w 7847640"/>
+              <a:gd name="textAreaTop" fmla="*/ 0 h 360"/>
+              <a:gd name="textAreaBottom" fmla="*/ 1440 h 360"/>
             </a:gdLst>
             <a:ahLst/>
             <a:rect l="textAreaLeft" t="textAreaTop" r="textAreaRight" b="textAreaBottom"/>
@@ -12685,7 +12685,7 @@
         <p:spPr>
           <a:xfrm>
             <a:off x="3108960" y="5315040"/>
-            <a:ext cx="2925360" cy="285120"/>
+            <a:ext cx="2925000" cy="284760"/>
           </a:xfrm>
           <a:prstGeom prst="rect">
             <a:avLst/>
@@ -12757,7 +12757,7 @@
         <p:spPr>
           <a:xfrm>
             <a:off x="6583680" y="5315040"/>
-            <a:ext cx="2102400" cy="285120"/>
+            <a:ext cx="2102040" cy="284760"/>
           </a:xfrm>
           <a:prstGeom prst="rect">
             <a:avLst/>
@@ -12798,7 +12798,7 @@
                 <a:tab algn="l" pos="0"/>
               </a:tabLst>
             </a:pPr>
-            <a:fld id="{2A6826A0-CCEB-4DDB-8258-ACBD15BF059A}" type="slidenum">
+            <a:fld id="{77482E64-C93B-48C5-87B3-99E6ABC083DC}" type="slidenum">
               <a:rPr b="0" lang="fr-FR" sz="1400" spc="-1" strike="noStrike">
                 <a:solidFill>
                   <a:srgbClr val="b2b2b2"/>
@@ -12829,7 +12829,7 @@
         <p:spPr>
           <a:xfrm>
             <a:off x="457200" y="5315040"/>
-            <a:ext cx="2102400" cy="285120"/>
+            <a:ext cx="2102040" cy="284760"/>
           </a:xfrm>
           <a:prstGeom prst="rect">
             <a:avLst/>
@@ -13200,7 +13200,7 @@
         <p:spPr>
           <a:xfrm>
             <a:off x="764640" y="848520"/>
-            <a:ext cx="7708680" cy="1840680"/>
+            <a:ext cx="7708320" cy="1840320"/>
           </a:xfrm>
           <a:prstGeom prst="rect">
             <a:avLst/>
@@ -13237,7 +13237,7 @@
               <a:t>PROJET</a:t>
             </a:r>
             <a:r>
-              <a:rPr b="0" lang="fr-FR" sz="4000" spc="704" strike="noStrike">
+              <a:rPr b="0" lang="fr-FR" sz="4000" spc="701" strike="noStrike">
                 <a:solidFill>
                   <a:srgbClr val="d2523b"/>
                 </a:solidFill>
@@ -13255,7 +13255,7 @@
               <a:t>4</a:t>
             </a:r>
             <a:r>
-              <a:rPr b="0" lang="fr-FR" sz="4000" spc="749" strike="noStrike">
+              <a:rPr b="0" lang="fr-FR" sz="4000" spc="746" strike="noStrike">
                 <a:solidFill>
                   <a:srgbClr val="d2523b"/>
                 </a:solidFill>
@@ -13273,7 +13273,7 @@
               <a:t>–</a:t>
             </a:r>
             <a:r>
-              <a:rPr b="0" lang="fr-FR" sz="4000" spc="769" strike="noStrike">
+              <a:rPr b="0" lang="fr-FR" sz="4000" spc="766" strike="noStrike">
                 <a:solidFill>
                   <a:srgbClr val="d2523b"/>
                 </a:solidFill>
@@ -13291,7 +13291,7 @@
               <a:t>«</a:t>
             </a:r>
             <a:r>
-              <a:rPr b="0" lang="fr-FR" sz="4000" spc="775" strike="noStrike">
+              <a:rPr b="0" lang="fr-FR" sz="4000" spc="772" strike="noStrike">
                 <a:solidFill>
                   <a:srgbClr val="d2523b"/>
                 </a:solidFill>
@@ -13309,7 +13309,7 @@
               <a:t>ANTICIPEZ</a:t>
             </a:r>
             <a:r>
-              <a:rPr b="0" lang="fr-FR" sz="4000" spc="749" strike="noStrike">
+              <a:rPr b="0" lang="fr-FR" sz="4000" spc="746" strike="noStrike">
                 <a:solidFill>
                   <a:srgbClr val="d2523b"/>
                 </a:solidFill>
@@ -13336,25 +13336,25 @@
               <a:t>BESOINS</a:t>
             </a:r>
             <a:r>
+              <a:rPr b="0" lang="fr-FR" sz="4000" spc="63" strike="noStrike">
+                <a:solidFill>
+                  <a:srgbClr val="d2523b"/>
+                </a:solidFill>
+                <a:latin typeface="Arial"/>
+              </a:rPr>
+              <a:t>  </a:t>
+            </a:r>
+            <a:r>
+              <a:rPr b="0" lang="fr-FR" sz="4000" spc="-1" strike="noStrike">
+                <a:solidFill>
+                  <a:srgbClr val="d2523b"/>
+                </a:solidFill>
+                <a:latin typeface="Arial"/>
+              </a:rPr>
+              <a:t>EN</a:t>
+            </a:r>
+            <a:r>
               <a:rPr b="0" lang="fr-FR" sz="4000" spc="66" strike="noStrike">
-                <a:solidFill>
-                  <a:srgbClr val="d2523b"/>
-                </a:solidFill>
-                <a:latin typeface="Arial"/>
-              </a:rPr>
-              <a:t>  </a:t>
-            </a:r>
-            <a:r>
-              <a:rPr b="0" lang="fr-FR" sz="4000" spc="-1" strike="noStrike">
-                <a:solidFill>
-                  <a:srgbClr val="d2523b"/>
-                </a:solidFill>
-                <a:latin typeface="Arial"/>
-              </a:rPr>
-              <a:t>EN</a:t>
-            </a:r>
-            <a:r>
-              <a:rPr b="0" lang="fr-FR" sz="4000" spc="69" strike="noStrike">
                 <a:solidFill>
                   <a:srgbClr val="d2523b"/>
                 </a:solidFill>
@@ -13456,7 +13456,7 @@
         <p:spPr>
           <a:xfrm>
             <a:off x="764640" y="2873880"/>
-            <a:ext cx="2927880" cy="3326400"/>
+            <a:ext cx="2927520" cy="3326040"/>
           </a:xfrm>
           <a:prstGeom prst="rect">
             <a:avLst/>
@@ -13493,7 +13493,7 @@
               <a:t>Soutenance</a:t>
             </a:r>
             <a:r>
-              <a:rPr b="0" lang="fr-FR" sz="2400" spc="21" strike="noStrike">
+              <a:rPr b="0" lang="fr-FR" sz="2400" spc="18" strike="noStrike">
                 <a:solidFill>
                   <a:srgbClr val="56566d"/>
                 </a:solidFill>
@@ -13535,16 +13535,7 @@
                 </a:solidFill>
                 <a:latin typeface="Arial"/>
               </a:rPr>
-              <a:t>Décembre</a:t>
-            </a:r>
-            <a:r>
-              <a:rPr b="0" lang="fr-FR" sz="2400" spc="1" strike="noStrike">
-                <a:solidFill>
-                  <a:srgbClr val="56566d"/>
-                </a:solidFill>
-                <a:latin typeface="Arial"/>
-              </a:rPr>
-              <a:t> </a:t>
+              <a:t>Décembre </a:t>
             </a:r>
             <a:r>
               <a:rPr b="0" lang="fr-FR" sz="2400" spc="-21" strike="noStrike">
@@ -13577,7 +13568,7 @@
         <p:spPr>
           <a:xfrm>
             <a:off x="8100360" y="4585680"/>
-            <a:ext cx="719280" cy="719280"/>
+            <a:ext cx="718920" cy="718920"/>
           </a:xfrm>
           <a:prstGeom prst="rect">
             <a:avLst/>
@@ -13596,7 +13587,7 @@
         <p:spPr>
           <a:xfrm>
             <a:off x="7700040" y="27000"/>
-            <a:ext cx="124200" cy="226080"/>
+            <a:ext cx="123840" cy="226080"/>
           </a:xfrm>
           <a:prstGeom prst="rect">
             <a:avLst/>
@@ -13683,15 +13674,15 @@
         <p:spPr>
           <a:xfrm>
             <a:off x="0" y="0"/>
-            <a:ext cx="9143280" cy="304200"/>
+            <a:ext cx="9142920" cy="303840"/>
           </a:xfrm>
           <a:custGeom>
             <a:avLst/>
             <a:gdLst>
-              <a:gd name="textAreaLeft" fmla="*/ 0 w 9143280"/>
-              <a:gd name="textAreaRight" fmla="*/ 9144000 w 9143280"/>
-              <a:gd name="textAreaTop" fmla="*/ 0 h 304200"/>
-              <a:gd name="textAreaBottom" fmla="*/ 304920 h 304200"/>
+              <a:gd name="textAreaLeft" fmla="*/ 0 w 9142920"/>
+              <a:gd name="textAreaRight" fmla="*/ 9144000 w 9142920"/>
+              <a:gd name="textAreaTop" fmla="*/ 0 h 303840"/>
+              <a:gd name="textAreaBottom" fmla="*/ 304920 h 303840"/>
             </a:gdLst>
             <a:ahLst/>
             <a:rect l="textAreaLeft" t="textAreaTop" r="textAreaRight" b="textAreaBottom"/>
@@ -13758,7 +13749,7 @@
         <p:spPr>
           <a:xfrm>
             <a:off x="5580000" y="204480"/>
-            <a:ext cx="3319560" cy="987840"/>
+            <a:ext cx="3319200" cy="987840"/>
           </a:xfrm>
           <a:prstGeom prst="rect">
             <a:avLst/>
@@ -13848,7 +13839,7 @@
         <p:spPr>
           <a:xfrm>
             <a:off x="4520160" y="1186200"/>
-            <a:ext cx="328680" cy="182160"/>
+            <a:ext cx="328320" cy="181800"/>
           </a:xfrm>
           <a:prstGeom prst="rect">
             <a:avLst/>
@@ -13902,7 +13893,7 @@
         <p:spPr>
           <a:xfrm>
             <a:off x="7700040" y="27000"/>
-            <a:ext cx="222840" cy="226080"/>
+            <a:ext cx="222480" cy="226080"/>
           </a:xfrm>
           <a:prstGeom prst="rect">
             <a:avLst/>
@@ -13963,7 +13954,7 @@
         <p:spPr>
           <a:xfrm>
             <a:off x="60480" y="379080"/>
-            <a:ext cx="5109120" cy="5299920"/>
+            <a:ext cx="5108760" cy="5299560"/>
           </a:xfrm>
           <a:prstGeom prst="rect">
             <a:avLst/>
@@ -13982,7 +13973,7 @@
         <p:spPr>
           <a:xfrm>
             <a:off x="5587920" y="1117800"/>
-            <a:ext cx="3272760" cy="1398240"/>
+            <a:ext cx="3272400" cy="1398240"/>
           </a:xfrm>
           <a:prstGeom prst="rect">
             <a:avLst/>
@@ -14288,7 +14279,7 @@
         <p:spPr>
           <a:xfrm>
             <a:off x="5587920" y="2783160"/>
-            <a:ext cx="3354120" cy="2510280"/>
+            <a:ext cx="3353760" cy="2510280"/>
           </a:xfrm>
           <a:prstGeom prst="rect">
             <a:avLst/>
@@ -14863,7 +14854,7 @@
               <a:t>LargestPropertyUseTypeGFA</a:t>
             </a:r>
             <a:r>
-              <a:rPr b="0" lang="fr-FR" sz="900" spc="55" strike="noStrike">
+              <a:rPr b="0" lang="fr-FR" sz="900" spc="52" strike="noStrike">
                 <a:solidFill>
                   <a:srgbClr val="292934"/>
                 </a:solidFill>
@@ -14883,7 +14874,7 @@
               <a:t>et</a:t>
             </a:r>
             <a:r>
-              <a:rPr b="0" lang="fr-FR" sz="900" spc="106" strike="noStrike">
+              <a:rPr b="0" lang="fr-FR" sz="900" spc="103" strike="noStrike">
                 <a:solidFill>
                   <a:srgbClr val="292934"/>
                 </a:solidFill>
@@ -15144,7 +15135,7 @@
         <p:spPr>
           <a:xfrm>
             <a:off x="801000" y="2264400"/>
-            <a:ext cx="4844880" cy="1474920"/>
+            <a:ext cx="4844520" cy="1474560"/>
           </a:xfrm>
           <a:prstGeom prst="rect">
             <a:avLst/>
@@ -15261,7 +15252,7 @@
         <p:spPr>
           <a:xfrm>
             <a:off x="7700040" y="27000"/>
-            <a:ext cx="205200" cy="226080"/>
+            <a:ext cx="204840" cy="226080"/>
           </a:xfrm>
           <a:prstGeom prst="rect">
             <a:avLst/>
@@ -15348,9 +15339,9 @@
         <p:grpSpPr>
           <a:xfrm>
             <a:off x="2267640" y="1273320"/>
-            <a:ext cx="4694400" cy="3599640"/>
+            <a:ext cx="4694040" cy="3599280"/>
             <a:chOff x="2267640" y="1273320"/>
-            <a:chExt cx="4694400" cy="3599640"/>
+            <a:chExt cx="4694040" cy="3599280"/>
           </a:xfrm>
         </p:grpSpPr>
         <p:sp>
@@ -15362,15 +15353,15 @@
           <p:spPr>
             <a:xfrm>
               <a:off x="2267640" y="1273320"/>
-              <a:ext cx="4694400" cy="3599640"/>
+              <a:ext cx="4694040" cy="3599280"/>
             </a:xfrm>
             <a:custGeom>
               <a:avLst/>
               <a:gdLst>
-                <a:gd name="textAreaLeft" fmla="*/ 0 w 4694400"/>
-                <a:gd name="textAreaRight" fmla="*/ 4695120 w 4694400"/>
-                <a:gd name="textAreaTop" fmla="*/ 0 h 3599640"/>
-                <a:gd name="textAreaBottom" fmla="*/ 3600360 h 3599640"/>
+                <a:gd name="textAreaLeft" fmla="*/ 0 w 4694040"/>
+                <a:gd name="textAreaRight" fmla="*/ 4695120 w 4694040"/>
+                <a:gd name="textAreaTop" fmla="*/ 0 h 3599280"/>
+                <a:gd name="textAreaBottom" fmla="*/ 3600360 h 3599280"/>
               </a:gdLst>
               <a:ahLst/>
               <a:rect l="textAreaLeft" t="textAreaTop" r="textAreaRight" b="textAreaBottom"/>
@@ -15437,15 +15428,15 @@
           <p:spPr>
             <a:xfrm>
               <a:off x="2267640" y="1273320"/>
-              <a:ext cx="4694400" cy="3599640"/>
+              <a:ext cx="4694040" cy="3599280"/>
             </a:xfrm>
             <a:custGeom>
               <a:avLst/>
               <a:gdLst>
-                <a:gd name="textAreaLeft" fmla="*/ 0 w 4694400"/>
-                <a:gd name="textAreaRight" fmla="*/ 4695120 w 4694400"/>
-                <a:gd name="textAreaTop" fmla="*/ 0 h 3599640"/>
-                <a:gd name="textAreaBottom" fmla="*/ 3600360 h 3599640"/>
+                <a:gd name="textAreaLeft" fmla="*/ 0 w 4694040"/>
+                <a:gd name="textAreaRight" fmla="*/ 4695120 w 4694040"/>
+                <a:gd name="textAreaTop" fmla="*/ 0 h 3599280"/>
+                <a:gd name="textAreaBottom" fmla="*/ 3600360 h 3599280"/>
               </a:gdLst>
               <a:ahLst/>
               <a:rect l="textAreaLeft" t="textAreaTop" r="textAreaRight" b="textAreaBottom"/>
@@ -15513,15 +15504,15 @@
           <p:spPr>
             <a:xfrm>
               <a:off x="2271600" y="2634840"/>
-              <a:ext cx="305280" cy="357480"/>
+              <a:ext cx="304920" cy="357120"/>
             </a:xfrm>
             <a:custGeom>
               <a:avLst/>
               <a:gdLst>
-                <a:gd name="textAreaLeft" fmla="*/ 0 w 305280"/>
-                <a:gd name="textAreaRight" fmla="*/ 306000 w 305280"/>
-                <a:gd name="textAreaTop" fmla="*/ 0 h 357480"/>
-                <a:gd name="textAreaBottom" fmla="*/ 358200 h 357480"/>
+                <a:gd name="textAreaLeft" fmla="*/ 0 w 304920"/>
+                <a:gd name="textAreaRight" fmla="*/ 306000 w 304920"/>
+                <a:gd name="textAreaTop" fmla="*/ 0 h 357120"/>
+                <a:gd name="textAreaBottom" fmla="*/ 358200 h 357120"/>
               </a:gdLst>
               <a:ahLst/>
               <a:rect l="textAreaLeft" t="textAreaTop" r="textAreaRight" b="textAreaBottom"/>
@@ -15597,15 +15588,15 @@
           <p:spPr>
             <a:xfrm>
               <a:off x="2704320" y="2127240"/>
-              <a:ext cx="1442160" cy="1372320"/>
+              <a:ext cx="1441800" cy="1371960"/>
             </a:xfrm>
             <a:custGeom>
               <a:avLst/>
               <a:gdLst>
-                <a:gd name="textAreaLeft" fmla="*/ 0 w 1442160"/>
-                <a:gd name="textAreaRight" fmla="*/ 1442880 w 1442160"/>
-                <a:gd name="textAreaTop" fmla="*/ 0 h 1372320"/>
-                <a:gd name="textAreaBottom" fmla="*/ 1373040 h 1372320"/>
+                <a:gd name="textAreaLeft" fmla="*/ 0 w 1441800"/>
+                <a:gd name="textAreaRight" fmla="*/ 1442880 w 1441800"/>
+                <a:gd name="textAreaTop" fmla="*/ 0 h 1371960"/>
+                <a:gd name="textAreaBottom" fmla="*/ 1373040 h 1371960"/>
               </a:gdLst>
               <a:ahLst/>
               <a:rect l="textAreaLeft" t="textAreaTop" r="textAreaRight" b="textAreaBottom"/>
@@ -15732,15 +15723,15 @@
           <p:spPr>
             <a:xfrm>
               <a:off x="2704320" y="2127240"/>
-              <a:ext cx="1442160" cy="1372320"/>
+              <a:ext cx="1441800" cy="1371960"/>
             </a:xfrm>
             <a:custGeom>
               <a:avLst/>
               <a:gdLst>
-                <a:gd name="textAreaLeft" fmla="*/ 0 w 1442160"/>
-                <a:gd name="textAreaRight" fmla="*/ 1442880 w 1442160"/>
-                <a:gd name="textAreaTop" fmla="*/ 0 h 1372320"/>
-                <a:gd name="textAreaBottom" fmla="*/ 1373040 h 1372320"/>
+                <a:gd name="textAreaLeft" fmla="*/ 0 w 1441800"/>
+                <a:gd name="textAreaRight" fmla="*/ 1442880 w 1441800"/>
+                <a:gd name="textAreaTop" fmla="*/ 0 h 1371960"/>
+                <a:gd name="textAreaBottom" fmla="*/ 1373040 h 1371960"/>
               </a:gdLst>
               <a:ahLst/>
               <a:rect l="textAreaLeft" t="textAreaTop" r="textAreaRight" b="textAreaBottom"/>
@@ -15873,7 +15864,7 @@
         <p:spPr>
           <a:xfrm>
             <a:off x="536040" y="526320"/>
-            <a:ext cx="7741080" cy="966240"/>
+            <a:ext cx="7740720" cy="965880"/>
           </a:xfrm>
           <a:prstGeom prst="rect">
             <a:avLst/>
@@ -15981,7 +15972,7 @@
         <p:spPr>
           <a:xfrm>
             <a:off x="7700040" y="27000"/>
-            <a:ext cx="222840" cy="226080"/>
+            <a:ext cx="222480" cy="226080"/>
           </a:xfrm>
           <a:prstGeom prst="rect">
             <a:avLst/>
@@ -16038,9 +16029,9 @@
         <p:grpSpPr>
           <a:xfrm>
             <a:off x="684720" y="2127240"/>
-            <a:ext cx="1442160" cy="1372320"/>
+            <a:ext cx="1441800" cy="1371960"/>
             <a:chOff x="684720" y="2127240"/>
-            <a:chExt cx="1442160" cy="1372320"/>
+            <a:chExt cx="1441800" cy="1371960"/>
           </a:xfrm>
         </p:grpSpPr>
         <p:sp>
@@ -16052,15 +16043,15 @@
           <p:spPr>
             <a:xfrm>
               <a:off x="684720" y="2127240"/>
-              <a:ext cx="1442160" cy="1372320"/>
+              <a:ext cx="1441800" cy="1371960"/>
             </a:xfrm>
             <a:custGeom>
               <a:avLst/>
               <a:gdLst>
-                <a:gd name="textAreaLeft" fmla="*/ 0 w 1442160"/>
-                <a:gd name="textAreaRight" fmla="*/ 1442880 w 1442160"/>
-                <a:gd name="textAreaTop" fmla="*/ 0 h 1372320"/>
-                <a:gd name="textAreaBottom" fmla="*/ 1373040 h 1372320"/>
+                <a:gd name="textAreaLeft" fmla="*/ 0 w 1441800"/>
+                <a:gd name="textAreaRight" fmla="*/ 1442880 w 1441800"/>
+                <a:gd name="textAreaTop" fmla="*/ 0 h 1371960"/>
+                <a:gd name="textAreaBottom" fmla="*/ 1373040 h 1371960"/>
               </a:gdLst>
               <a:ahLst/>
               <a:rect l="textAreaLeft" t="textAreaTop" r="textAreaRight" b="textAreaBottom"/>
@@ -16187,15 +16178,15 @@
           <p:spPr>
             <a:xfrm>
               <a:off x="684720" y="2127240"/>
-              <a:ext cx="1442160" cy="1372320"/>
+              <a:ext cx="1441800" cy="1371960"/>
             </a:xfrm>
             <a:custGeom>
               <a:avLst/>
               <a:gdLst>
-                <a:gd name="textAreaLeft" fmla="*/ 0 w 1442160"/>
-                <a:gd name="textAreaRight" fmla="*/ 1442880 w 1442160"/>
-                <a:gd name="textAreaTop" fmla="*/ 0 h 1372320"/>
-                <a:gd name="textAreaBottom" fmla="*/ 1373040 h 1372320"/>
+                <a:gd name="textAreaLeft" fmla="*/ 0 w 1441800"/>
+                <a:gd name="textAreaRight" fmla="*/ 1442880 w 1441800"/>
+                <a:gd name="textAreaTop" fmla="*/ 0 h 1371960"/>
+                <a:gd name="textAreaBottom" fmla="*/ 1373040 h 1371960"/>
               </a:gdLst>
               <a:ahLst/>
               <a:rect l="textAreaLeft" t="textAreaTop" r="textAreaRight" b="textAreaBottom"/>
@@ -16324,7 +16315,7 @@
         <p:spPr>
           <a:xfrm>
             <a:off x="819000" y="2313000"/>
-            <a:ext cx="1172880" cy="952920"/>
+            <a:ext cx="1172520" cy="952920"/>
           </a:xfrm>
           <a:prstGeom prst="rect">
             <a:avLst/>
@@ -16483,7 +16474,7 @@
         <p:spPr>
           <a:xfrm>
             <a:off x="2842560" y="2585880"/>
-            <a:ext cx="1179720" cy="411480"/>
+            <a:ext cx="1179360" cy="411480"/>
           </a:xfrm>
           <a:prstGeom prst="rect">
             <a:avLst/>
@@ -16593,9 +16584,9 @@
         <p:grpSpPr>
           <a:xfrm>
             <a:off x="4291200" y="2127240"/>
-            <a:ext cx="2142000" cy="1372320"/>
+            <a:ext cx="2141640" cy="1371960"/>
             <a:chOff x="4291200" y="2127240"/>
-            <a:chExt cx="2142000" cy="1372320"/>
+            <a:chExt cx="2141640" cy="1371960"/>
           </a:xfrm>
         </p:grpSpPr>
         <p:sp>
@@ -16607,15 +16598,15 @@
           <p:spPr>
             <a:xfrm>
               <a:off x="4291200" y="2634840"/>
-              <a:ext cx="305280" cy="357480"/>
+              <a:ext cx="304920" cy="357120"/>
             </a:xfrm>
             <a:custGeom>
               <a:avLst/>
               <a:gdLst>
-                <a:gd name="textAreaLeft" fmla="*/ 0 w 305280"/>
-                <a:gd name="textAreaRight" fmla="*/ 306000 w 305280"/>
-                <a:gd name="textAreaTop" fmla="*/ 0 h 357480"/>
-                <a:gd name="textAreaBottom" fmla="*/ 358200 h 357480"/>
+                <a:gd name="textAreaLeft" fmla="*/ 0 w 304920"/>
+                <a:gd name="textAreaRight" fmla="*/ 306000 w 304920"/>
+                <a:gd name="textAreaTop" fmla="*/ 0 h 357120"/>
+                <a:gd name="textAreaBottom" fmla="*/ 358200 h 357120"/>
               </a:gdLst>
               <a:ahLst/>
               <a:rect l="textAreaLeft" t="textAreaTop" r="textAreaRight" b="textAreaBottom"/>
@@ -16691,15 +16682,15 @@
           <p:spPr>
             <a:xfrm>
               <a:off x="4723920" y="2127240"/>
-              <a:ext cx="1709280" cy="1372320"/>
+              <a:ext cx="1708920" cy="1371960"/>
             </a:xfrm>
             <a:custGeom>
               <a:avLst/>
               <a:gdLst>
-                <a:gd name="textAreaLeft" fmla="*/ 0 w 1709280"/>
-                <a:gd name="textAreaRight" fmla="*/ 1710000 w 1709280"/>
-                <a:gd name="textAreaTop" fmla="*/ 0 h 1372320"/>
-                <a:gd name="textAreaBottom" fmla="*/ 1373040 h 1372320"/>
+                <a:gd name="textAreaLeft" fmla="*/ 0 w 1708920"/>
+                <a:gd name="textAreaRight" fmla="*/ 1710000 w 1708920"/>
+                <a:gd name="textAreaTop" fmla="*/ 0 h 1371960"/>
+                <a:gd name="textAreaBottom" fmla="*/ 1373040 h 1371960"/>
               </a:gdLst>
               <a:ahLst/>
               <a:rect l="textAreaLeft" t="textAreaTop" r="textAreaRight" b="textAreaBottom"/>
@@ -16826,15 +16817,15 @@
           <p:spPr>
             <a:xfrm>
               <a:off x="4723920" y="2127240"/>
-              <a:ext cx="1709280" cy="1372320"/>
+              <a:ext cx="1708920" cy="1371960"/>
             </a:xfrm>
             <a:custGeom>
               <a:avLst/>
               <a:gdLst>
-                <a:gd name="textAreaLeft" fmla="*/ 0 w 1709280"/>
-                <a:gd name="textAreaRight" fmla="*/ 1710000 w 1709280"/>
-                <a:gd name="textAreaTop" fmla="*/ 0 h 1372320"/>
-                <a:gd name="textAreaBottom" fmla="*/ 1373040 h 1372320"/>
+                <a:gd name="textAreaLeft" fmla="*/ 0 w 1708920"/>
+                <a:gd name="textAreaRight" fmla="*/ 1710000 w 1708920"/>
+                <a:gd name="textAreaTop" fmla="*/ 0 h 1371960"/>
+                <a:gd name="textAreaBottom" fmla="*/ 1373040 h 1371960"/>
               </a:gdLst>
               <a:ahLst/>
               <a:rect l="textAreaLeft" t="textAreaTop" r="textAreaRight" b="textAreaBottom"/>
@@ -16963,7 +16954,7 @@
         <p:spPr>
           <a:xfrm>
             <a:off x="4818240" y="2176560"/>
-            <a:ext cx="1405800" cy="1216440"/>
+            <a:ext cx="1405440" cy="1216440"/>
           </a:xfrm>
           <a:prstGeom prst="rect">
             <a:avLst/>
@@ -17272,9 +17263,9 @@
         <p:grpSpPr>
           <a:xfrm>
             <a:off x="6577920" y="2127240"/>
-            <a:ext cx="2024640" cy="1372320"/>
+            <a:ext cx="2024280" cy="1371960"/>
             <a:chOff x="6577920" y="2127240"/>
-            <a:chExt cx="2024640" cy="1372320"/>
+            <a:chExt cx="2024280" cy="1371960"/>
           </a:xfrm>
         </p:grpSpPr>
         <p:sp>
@@ -17286,15 +17277,15 @@
           <p:spPr>
             <a:xfrm>
               <a:off x="6577920" y="2634840"/>
-              <a:ext cx="305280" cy="357480"/>
+              <a:ext cx="304920" cy="357120"/>
             </a:xfrm>
             <a:custGeom>
               <a:avLst/>
               <a:gdLst>
-                <a:gd name="textAreaLeft" fmla="*/ 0 w 305280"/>
-                <a:gd name="textAreaRight" fmla="*/ 306000 w 305280"/>
-                <a:gd name="textAreaTop" fmla="*/ 0 h 357480"/>
-                <a:gd name="textAreaBottom" fmla="*/ 358200 h 357480"/>
+                <a:gd name="textAreaLeft" fmla="*/ 0 w 304920"/>
+                <a:gd name="textAreaRight" fmla="*/ 306000 w 304920"/>
+                <a:gd name="textAreaTop" fmla="*/ 0 h 357120"/>
+                <a:gd name="textAreaBottom" fmla="*/ 358200 h 357120"/>
               </a:gdLst>
               <a:ahLst/>
               <a:rect l="textAreaLeft" t="textAreaTop" r="textAreaRight" b="textAreaBottom"/>
@@ -17370,15 +17361,15 @@
           <p:spPr>
             <a:xfrm>
               <a:off x="7010640" y="2127240"/>
-              <a:ext cx="1591920" cy="1372320"/>
+              <a:ext cx="1591560" cy="1371960"/>
             </a:xfrm>
             <a:custGeom>
               <a:avLst/>
               <a:gdLst>
-                <a:gd name="textAreaLeft" fmla="*/ 0 w 1591920"/>
-                <a:gd name="textAreaRight" fmla="*/ 1592640 w 1591920"/>
-                <a:gd name="textAreaTop" fmla="*/ 0 h 1372320"/>
-                <a:gd name="textAreaBottom" fmla="*/ 1373040 h 1372320"/>
+                <a:gd name="textAreaLeft" fmla="*/ 0 w 1591560"/>
+                <a:gd name="textAreaRight" fmla="*/ 1592640 w 1591560"/>
+                <a:gd name="textAreaTop" fmla="*/ 0 h 1371960"/>
+                <a:gd name="textAreaBottom" fmla="*/ 1373040 h 1371960"/>
               </a:gdLst>
               <a:ahLst/>
               <a:rect l="textAreaLeft" t="textAreaTop" r="textAreaRight" b="textAreaBottom"/>
@@ -17505,15 +17496,15 @@
           <p:spPr>
             <a:xfrm>
               <a:off x="7010640" y="2127240"/>
-              <a:ext cx="1591920" cy="1372320"/>
+              <a:ext cx="1591560" cy="1371960"/>
             </a:xfrm>
             <a:custGeom>
               <a:avLst/>
               <a:gdLst>
-                <a:gd name="textAreaLeft" fmla="*/ 0 w 1591920"/>
-                <a:gd name="textAreaRight" fmla="*/ 1592640 w 1591920"/>
-                <a:gd name="textAreaTop" fmla="*/ 0 h 1372320"/>
-                <a:gd name="textAreaBottom" fmla="*/ 1373040 h 1372320"/>
+                <a:gd name="textAreaLeft" fmla="*/ 0 w 1591560"/>
+                <a:gd name="textAreaRight" fmla="*/ 1592640 w 1591560"/>
+                <a:gd name="textAreaTop" fmla="*/ 0 h 1371960"/>
+                <a:gd name="textAreaBottom" fmla="*/ 1373040 h 1371960"/>
               </a:gdLst>
               <a:ahLst/>
               <a:rect l="textAreaLeft" t="textAreaTop" r="textAreaRight" b="textAreaBottom"/>
@@ -17642,7 +17633,7 @@
         <p:spPr>
           <a:xfrm>
             <a:off x="7097760" y="2401560"/>
-            <a:ext cx="1418400" cy="775080"/>
+            <a:ext cx="1418040" cy="775080"/>
           </a:xfrm>
           <a:prstGeom prst="rect">
             <a:avLst/>
@@ -17809,9 +17800,9 @@
         <p:grpSpPr>
           <a:xfrm>
             <a:off x="3679200" y="3721680"/>
-            <a:ext cx="1656000" cy="287640"/>
+            <a:ext cx="1655640" cy="287280"/>
             <a:chOff x="3679200" y="3721680"/>
-            <a:chExt cx="1656000" cy="287640"/>
+            <a:chExt cx="1655640" cy="287280"/>
           </a:xfrm>
         </p:grpSpPr>
         <p:sp>
@@ -17823,15 +17814,15 @@
           <p:spPr>
             <a:xfrm>
               <a:off x="3679200" y="3721680"/>
-              <a:ext cx="834840" cy="287640"/>
+              <a:ext cx="834480" cy="287280"/>
             </a:xfrm>
             <a:custGeom>
               <a:avLst/>
               <a:gdLst>
-                <a:gd name="textAreaLeft" fmla="*/ 0 w 834840"/>
-                <a:gd name="textAreaRight" fmla="*/ 835560 w 834840"/>
-                <a:gd name="textAreaTop" fmla="*/ 0 h 287640"/>
-                <a:gd name="textAreaBottom" fmla="*/ 288360 h 287640"/>
+                <a:gd name="textAreaLeft" fmla="*/ 0 w 834480"/>
+                <a:gd name="textAreaRight" fmla="*/ 835560 w 834480"/>
+                <a:gd name="textAreaTop" fmla="*/ 0 h 287280"/>
+                <a:gd name="textAreaBottom" fmla="*/ 288360 h 287280"/>
               </a:gdLst>
               <a:ahLst/>
               <a:rect l="textAreaLeft" t="textAreaTop" r="textAreaRight" b="textAreaBottom"/>
@@ -17985,15 +17976,15 @@
           <p:spPr>
             <a:xfrm>
               <a:off x="4500000" y="3721680"/>
-              <a:ext cx="834840" cy="287640"/>
+              <a:ext cx="834480" cy="287280"/>
             </a:xfrm>
             <a:custGeom>
               <a:avLst/>
               <a:gdLst>
-                <a:gd name="textAreaLeft" fmla="*/ 0 w 834840"/>
-                <a:gd name="textAreaRight" fmla="*/ 835560 w 834840"/>
-                <a:gd name="textAreaTop" fmla="*/ 0 h 287640"/>
-                <a:gd name="textAreaBottom" fmla="*/ 288360 h 287640"/>
+                <a:gd name="textAreaLeft" fmla="*/ 0 w 834480"/>
+                <a:gd name="textAreaRight" fmla="*/ 835560 w 834480"/>
+                <a:gd name="textAreaTop" fmla="*/ 0 h 287280"/>
+                <a:gd name="textAreaBottom" fmla="*/ 288360 h 287280"/>
               </a:gdLst>
               <a:ahLst/>
               <a:rect l="textAreaLeft" t="textAreaTop" r="textAreaRight" b="textAreaBottom"/>
@@ -18153,15 +18144,15 @@
           <p:spPr>
             <a:xfrm>
               <a:off x="3679200" y="3721680"/>
-              <a:ext cx="1656000" cy="287640"/>
+              <a:ext cx="1655640" cy="287280"/>
             </a:xfrm>
             <a:custGeom>
               <a:avLst/>
               <a:gdLst>
-                <a:gd name="textAreaLeft" fmla="*/ 0 w 1656000"/>
-                <a:gd name="textAreaRight" fmla="*/ 1656720 w 1656000"/>
-                <a:gd name="textAreaTop" fmla="*/ 0 h 287640"/>
-                <a:gd name="textAreaBottom" fmla="*/ 288360 h 287640"/>
+                <a:gd name="textAreaLeft" fmla="*/ 0 w 1655640"/>
+                <a:gd name="textAreaRight" fmla="*/ 1656720 w 1655640"/>
+                <a:gd name="textAreaTop" fmla="*/ 0 h 287280"/>
+                <a:gd name="textAreaBottom" fmla="*/ 288360 h 287280"/>
               </a:gdLst>
               <a:ahLst/>
               <a:rect l="textAreaLeft" t="textAreaTop" r="textAreaRight" b="textAreaBottom"/>
@@ -18415,7 +18406,7 @@
         <p:spPr>
           <a:xfrm>
             <a:off x="3745080" y="4039200"/>
-            <a:ext cx="1420920" cy="498600"/>
+            <a:ext cx="1420560" cy="498600"/>
           </a:xfrm>
           <a:prstGeom prst="rect">
             <a:avLst/>
@@ -18505,7 +18496,7 @@
         <p:spPr>
           <a:xfrm>
             <a:off x="2359440" y="1300680"/>
-            <a:ext cx="2746800" cy="286560"/>
+            <a:ext cx="2746440" cy="286560"/>
           </a:xfrm>
           <a:prstGeom prst="rect">
             <a:avLst/>
@@ -18562,27 +18553,7 @@
                 <a:latin typeface="Arial"/>
                 <a:ea typeface="DejaVu Sans"/>
               </a:rPr>
-              <a:t>chaque</a:t>
-            </a:r>
-            <a:r>
-              <a:rPr b="0" lang="fr-FR" sz="1800" spc="1" strike="noStrike">
-                <a:solidFill>
-                  <a:srgbClr val="46524b"/>
-                </a:solidFill>
-                <a:latin typeface="Arial"/>
-                <a:ea typeface="DejaVu Sans"/>
-              </a:rPr>
-              <a:t> </a:t>
-            </a:r>
-            <a:r>
-              <a:rPr b="0" lang="fr-FR" sz="1800" spc="-1" strike="noStrike">
-                <a:solidFill>
-                  <a:srgbClr val="46524b"/>
-                </a:solidFill>
-                <a:latin typeface="Arial"/>
-                <a:ea typeface="DejaVu Sans"/>
-              </a:rPr>
-              <a:t>algorithme </a:t>
+              <a:t>chaque algorithme </a:t>
             </a:r>
             <a:r>
               <a:rPr b="0" lang="fr-FR" sz="1800" spc="-26" strike="noStrike">
@@ -18612,7 +18583,7 @@
         <p:spPr>
           <a:xfrm>
             <a:off x="474480" y="5047560"/>
-            <a:ext cx="5430960" cy="377280"/>
+            <a:ext cx="5430600" cy="377280"/>
           </a:xfrm>
           <a:prstGeom prst="rect">
             <a:avLst/>
@@ -18963,7 +18934,7 @@
         <p:spPr>
           <a:xfrm>
             <a:off x="536040" y="526320"/>
-            <a:ext cx="7741080" cy="1231200"/>
+            <a:ext cx="8463960" cy="1230840"/>
           </a:xfrm>
           <a:prstGeom prst="rect">
             <a:avLst/>
@@ -19071,7 +19042,7 @@
         <p:spPr>
           <a:xfrm>
             <a:off x="7700040" y="27000"/>
-            <a:ext cx="222840" cy="226080"/>
+            <a:ext cx="222480" cy="226080"/>
           </a:xfrm>
           <a:prstGeom prst="rect">
             <a:avLst/>
@@ -19465,25 +19436,7 @@
                           </a:solidFill>
                           <a:latin typeface="Arial"/>
                         </a:rPr>
-                        <a:t>Alpha</a:t>
-                      </a:r>
-                      <a:r>
-                        <a:rPr b="0" lang="fr-FR" sz="1800" spc="1" strike="noStrike">
-                          <a:solidFill>
-                            <a:srgbClr val="292934"/>
-                          </a:solidFill>
-                          <a:latin typeface="Arial"/>
-                        </a:rPr>
-                        <a:t> </a:t>
-                      </a:r>
-                      <a:r>
-                        <a:rPr b="0" lang="fr-FR" sz="1800" spc="-1" strike="noStrike">
-                          <a:solidFill>
-                            <a:srgbClr val="292934"/>
-                          </a:solidFill>
-                          <a:latin typeface="Arial"/>
-                        </a:rPr>
-                        <a:t>: </a:t>
+                        <a:t>Alpha : </a:t>
                       </a:r>
                       <a:r>
                         <a:rPr b="0" lang="fr-FR" sz="1800" spc="-12" strike="noStrike">
@@ -19522,7 +19475,7 @@
                         <a:t>,</a:t>
                       </a:r>
                       <a:r>
-                        <a:rPr b="0" lang="fr-FR" sz="1800" spc="7" strike="noStrike">
+                        <a:rPr b="0" lang="fr-FR" sz="1800" spc="4" strike="noStrike">
                           <a:solidFill>
                             <a:srgbClr val="292934"/>
                           </a:solidFill>
@@ -19625,25 +19578,7 @@
                           </a:solidFill>
                           <a:latin typeface="Arial"/>
                         </a:rPr>
-                        <a:t>Gamma</a:t>
-                      </a:r>
-                      <a:r>
-                        <a:rPr b="0" lang="fr-FR" sz="1800" spc="1" strike="noStrike">
-                          <a:solidFill>
-                            <a:srgbClr val="292934"/>
-                          </a:solidFill>
-                          <a:latin typeface="Arial"/>
-                        </a:rPr>
-                        <a:t> </a:t>
-                      </a:r>
-                      <a:r>
-                        <a:rPr b="0" lang="fr-FR" sz="1800" spc="-1" strike="noStrike">
-                          <a:solidFill>
-                            <a:srgbClr val="292934"/>
-                          </a:solidFill>
-                          <a:latin typeface="Arial"/>
-                        </a:rPr>
-                        <a:t>:</a:t>
+                        <a:t>Gamma :</a:t>
                       </a:r>
                       <a:r>
                         <a:rPr b="0" lang="fr-FR" sz="1800" spc="-7" strike="noStrike">
@@ -19709,7 +19644,7 @@
                         <a:t>7</a:t>
                       </a:r>
                       <a:r>
-                        <a:rPr b="0" lang="fr-FR" sz="1800" spc="256" strike="noStrike" baseline="25000">
+                        <a:rPr b="0" lang="fr-FR" sz="1800" spc="253" strike="noStrike" baseline="25000">
                           <a:solidFill>
                             <a:srgbClr val="292934"/>
                           </a:solidFill>
@@ -20071,7 +20006,7 @@
                         <a:t>...</a:t>
                       </a:r>
                       <a:r>
-                        <a:rPr b="0" lang="fr-FR" sz="1800" spc="7" strike="noStrike">
+                        <a:rPr b="0" lang="fr-FR" sz="1800" spc="4" strike="noStrike">
                           <a:solidFill>
                             <a:srgbClr val="292934"/>
                           </a:solidFill>
@@ -20089,7 +20024,7 @@
                         <a:t>,</a:t>
                       </a:r>
                       <a:r>
-                        <a:rPr b="0" lang="fr-FR" sz="1800" spc="7" strike="noStrike">
+                        <a:rPr b="0" lang="fr-FR" sz="1800" spc="4" strike="noStrike">
                           <a:solidFill>
                             <a:srgbClr val="292934"/>
                           </a:solidFill>
@@ -20382,11 +20317,6 @@
                       <a:noAutofit/>
                     </a:bodyPr>
                     <a:p>
-                      <a:pPr>
-                        <a:lnSpc>
-                          <a:spcPct val="100000"/>
-                        </a:lnSpc>
-                      </a:pPr>
                       <a:endParaRPr b="0" lang="fr-FR" sz="100" spc="-1" strike="noStrike">
                         <a:solidFill>
                           <a:srgbClr val="000000"/>
@@ -20429,11 +20359,6 @@
                       <a:noAutofit/>
                     </a:bodyPr>
                     <a:p>
-                      <a:pPr>
-                        <a:lnSpc>
-                          <a:spcPct val="100000"/>
-                        </a:lnSpc>
-                      </a:pPr>
                       <a:endParaRPr b="0" lang="fr-FR" sz="100" spc="-1" strike="noStrike">
                         <a:solidFill>
                           <a:srgbClr val="000000"/>
@@ -20530,11 +20455,6 @@
                       <a:noAutofit/>
                     </a:bodyPr>
                     <a:p>
-                      <a:pPr>
-                        <a:lnSpc>
-                          <a:spcPct val="100000"/>
-                        </a:lnSpc>
-                      </a:pPr>
                       <a:endParaRPr b="0" lang="fr-FR" sz="100" spc="-1" strike="noStrike">
                         <a:solidFill>
                           <a:srgbClr val="000000"/>
@@ -21115,11 +21035,6 @@
                       <a:noAutofit/>
                     </a:bodyPr>
                     <a:p>
-                      <a:pPr>
-                        <a:lnSpc>
-                          <a:spcPct val="100000"/>
-                        </a:lnSpc>
-                      </a:pPr>
                       <a:endParaRPr b="0" lang="fr-FR" sz="1900" spc="-1" strike="noStrike">
                         <a:solidFill>
                           <a:srgbClr val="000000"/>
@@ -21484,11 +21399,6 @@
                       <a:noAutofit/>
                     </a:bodyPr>
                     <a:p>
-                      <a:pPr>
-                        <a:lnSpc>
-                          <a:spcPct val="100000"/>
-                        </a:lnSpc>
-                      </a:pPr>
                       <a:endParaRPr b="0" lang="fr-FR" sz="1900" spc="-1" strike="noStrike">
                         <a:solidFill>
                           <a:srgbClr val="000000"/>
@@ -21772,11 +21682,6 @@
                       <a:noAutofit/>
                     </a:bodyPr>
                     <a:p>
-                      <a:pPr>
-                        <a:lnSpc>
-                          <a:spcPct val="100000"/>
-                        </a:lnSpc>
-                      </a:pPr>
                       <a:endParaRPr b="0" lang="fr-FR" sz="1700" spc="-1" strike="noStrike">
                         <a:solidFill>
                           <a:srgbClr val="000000"/>
@@ -21956,11 +21861,6 @@
                       <a:noAutofit/>
                     </a:bodyPr>
                     <a:p>
-                      <a:pPr>
-                        <a:lnSpc>
-                          <a:spcPct val="100000"/>
-                        </a:lnSpc>
-                      </a:pPr>
                       <a:endParaRPr b="0" lang="fr-FR" sz="1900" spc="-1" strike="noStrike">
                         <a:solidFill>
                           <a:srgbClr val="000000"/>
@@ -22003,11 +21903,6 @@
                       <a:noAutofit/>
                     </a:bodyPr>
                     <a:p>
-                      <a:pPr>
-                        <a:lnSpc>
-                          <a:spcPct val="100000"/>
-                        </a:lnSpc>
-                      </a:pPr>
                       <a:endParaRPr b="0" lang="fr-FR" sz="1900" spc="-1" strike="noStrike">
                         <a:solidFill>
                           <a:srgbClr val="000000"/>
@@ -22050,11 +21945,6 @@
                       <a:noAutofit/>
                     </a:bodyPr>
                     <a:p>
-                      <a:pPr>
-                        <a:lnSpc>
-                          <a:spcPct val="100000"/>
-                        </a:lnSpc>
-                      </a:pPr>
                       <a:endParaRPr b="0" lang="fr-FR" sz="1900" spc="-1" strike="noStrike">
                         <a:solidFill>
                           <a:srgbClr val="000000"/>
@@ -22105,7 +21995,7 @@
         <p:spPr>
           <a:xfrm>
             <a:off x="402480" y="4758120"/>
-            <a:ext cx="3934440" cy="286560"/>
+            <a:ext cx="3934080" cy="286560"/>
           </a:xfrm>
           <a:prstGeom prst="rect">
             <a:avLst/>
@@ -22252,9 +22142,9 @@
         <p:grpSpPr>
           <a:xfrm>
             <a:off x="3004920" y="3005640"/>
-            <a:ext cx="5986080" cy="2179440"/>
+            <a:ext cx="5985720" cy="2179080"/>
             <a:chOff x="3004920" y="3005640"/>
-            <a:chExt cx="5986080" cy="2179440"/>
+            <a:chExt cx="5985720" cy="2179080"/>
           </a:xfrm>
         </p:grpSpPr>
         <p:pic>
@@ -22270,7 +22160,7 @@
           <p:spPr>
             <a:xfrm>
               <a:off x="3004920" y="3005640"/>
-              <a:ext cx="5986080" cy="2179440"/>
+              <a:ext cx="5985720" cy="2179080"/>
             </a:xfrm>
             <a:prstGeom prst="rect">
               <a:avLst/>
@@ -22289,15 +22179,15 @@
           <p:spPr>
             <a:xfrm>
               <a:off x="3492000" y="4801680"/>
-              <a:ext cx="1079280" cy="359280"/>
+              <a:ext cx="1078920" cy="358920"/>
             </a:xfrm>
             <a:custGeom>
               <a:avLst/>
               <a:gdLst>
-                <a:gd name="textAreaLeft" fmla="*/ 0 w 1079280"/>
-                <a:gd name="textAreaRight" fmla="*/ 1080000 w 1079280"/>
-                <a:gd name="textAreaTop" fmla="*/ 0 h 359280"/>
-                <a:gd name="textAreaBottom" fmla="*/ 360000 h 359280"/>
+                <a:gd name="textAreaLeft" fmla="*/ 0 w 1078920"/>
+                <a:gd name="textAreaRight" fmla="*/ 1080000 w 1078920"/>
+                <a:gd name="textAreaTop" fmla="*/ 0 h 358920"/>
+                <a:gd name="textAreaBottom" fmla="*/ 360000 h 358920"/>
               </a:gdLst>
               <a:ahLst/>
               <a:rect l="textAreaLeft" t="textAreaTop" r="textAreaRight" b="textAreaBottom"/>
@@ -22370,7 +22260,7 @@
         <p:spPr>
           <a:xfrm>
             <a:off x="330120" y="283320"/>
-            <a:ext cx="4331160" cy="988200"/>
+            <a:ext cx="6329880" cy="987840"/>
           </a:xfrm>
           <a:prstGeom prst="rect">
             <a:avLst/>
@@ -22460,7 +22350,7 @@
         <p:spPr>
           <a:xfrm>
             <a:off x="7700040" y="27000"/>
-            <a:ext cx="222840" cy="226080"/>
+            <a:ext cx="222480" cy="226080"/>
           </a:xfrm>
           <a:prstGeom prst="rect">
             <a:avLst/>
@@ -22517,15 +22407,15 @@
         <p:spPr>
           <a:xfrm>
             <a:off x="4500000" y="1057320"/>
-            <a:ext cx="1439640" cy="1512000"/>
+            <a:ext cx="1439280" cy="1511640"/>
           </a:xfrm>
           <a:custGeom>
             <a:avLst/>
             <a:gdLst>
-              <a:gd name="textAreaLeft" fmla="*/ 0 w 1439640"/>
-              <a:gd name="textAreaRight" fmla="*/ 1440360 w 1439640"/>
-              <a:gd name="textAreaTop" fmla="*/ 0 h 1512000"/>
-              <a:gd name="textAreaBottom" fmla="*/ 1512720 h 1512000"/>
+              <a:gd name="textAreaLeft" fmla="*/ 0 w 1439280"/>
+              <a:gd name="textAreaRight" fmla="*/ 1440360 w 1439280"/>
+              <a:gd name="textAreaTop" fmla="*/ 0 h 1511640"/>
+              <a:gd name="textAreaBottom" fmla="*/ 1512720 h 1511640"/>
             </a:gdLst>
             <a:ahLst/>
             <a:rect l="textAreaLeft" t="textAreaTop" r="textAreaRight" b="textAreaBottom"/>
@@ -22593,7 +22483,7 @@
         <p:spPr>
           <a:xfrm>
             <a:off x="330120" y="771120"/>
-            <a:ext cx="2912040" cy="4279680"/>
+            <a:ext cx="2911680" cy="4279680"/>
           </a:xfrm>
           <a:prstGeom prst="rect">
             <a:avLst/>
@@ -23351,7 +23241,7 @@
         <p:spPr>
           <a:xfrm>
             <a:off x="4481280" y="481320"/>
-            <a:ext cx="4626360" cy="2330280"/>
+            <a:ext cx="4626000" cy="2329920"/>
           </a:xfrm>
           <a:prstGeom prst="rect">
             <a:avLst/>
@@ -23400,7 +23290,7 @@
         <p:spPr>
           <a:xfrm>
             <a:off x="7700040" y="27000"/>
-            <a:ext cx="222840" cy="226080"/>
+            <a:ext cx="222480" cy="226080"/>
           </a:xfrm>
           <a:prstGeom prst="rect">
             <a:avLst/>
@@ -23461,7 +23351,7 @@
         <p:spPr>
           <a:xfrm>
             <a:off x="536040" y="221400"/>
-            <a:ext cx="6447240" cy="1856160"/>
+            <a:ext cx="6446880" cy="1855800"/>
           </a:xfrm>
           <a:prstGeom prst="rect">
             <a:avLst/>
@@ -23796,7 +23686,7 @@
         <p:spPr>
           <a:xfrm>
             <a:off x="536040" y="5083920"/>
-            <a:ext cx="7021080" cy="438480"/>
+            <a:ext cx="7020720" cy="438480"/>
           </a:xfrm>
           <a:prstGeom prst="rect">
             <a:avLst/>
@@ -24143,9 +24033,9 @@
         <p:grpSpPr>
           <a:xfrm>
             <a:off x="690120" y="1783800"/>
-            <a:ext cx="1967040" cy="2867040"/>
+            <a:ext cx="1966680" cy="2866680"/>
             <a:chOff x="690120" y="1783800"/>
-            <a:chExt cx="1967040" cy="2867040"/>
+            <a:chExt cx="1966680" cy="2866680"/>
           </a:xfrm>
         </p:grpSpPr>
         <p:sp>
@@ -24157,15 +24047,15 @@
           <p:spPr>
             <a:xfrm>
               <a:off x="690120" y="1783800"/>
-              <a:ext cx="1967040" cy="2867040"/>
+              <a:ext cx="1966680" cy="2866680"/>
             </a:xfrm>
             <a:custGeom>
               <a:avLst/>
               <a:gdLst>
-                <a:gd name="textAreaLeft" fmla="*/ 0 w 1967040"/>
-                <a:gd name="textAreaRight" fmla="*/ 1967760 w 1967040"/>
-                <a:gd name="textAreaTop" fmla="*/ 0 h 2867040"/>
-                <a:gd name="textAreaBottom" fmla="*/ 2867760 h 2867040"/>
+                <a:gd name="textAreaLeft" fmla="*/ 0 w 1966680"/>
+                <a:gd name="textAreaRight" fmla="*/ 1967760 w 1966680"/>
+                <a:gd name="textAreaTop" fmla="*/ 0 h 2866680"/>
+                <a:gd name="textAreaBottom" fmla="*/ 2867760 h 2866680"/>
               </a:gdLst>
               <a:ahLst/>
               <a:rect l="textAreaLeft" t="textAreaTop" r="textAreaRight" b="textAreaBottom"/>
@@ -24316,15 +24206,15 @@
           <p:spPr>
             <a:xfrm>
               <a:off x="690120" y="1783800"/>
-              <a:ext cx="1967040" cy="2867040"/>
+              <a:ext cx="1966680" cy="2866680"/>
             </a:xfrm>
             <a:custGeom>
               <a:avLst/>
               <a:gdLst>
-                <a:gd name="textAreaLeft" fmla="*/ 0 w 1967040"/>
-                <a:gd name="textAreaRight" fmla="*/ 1967760 w 1967040"/>
-                <a:gd name="textAreaTop" fmla="*/ 0 h 2867040"/>
-                <a:gd name="textAreaBottom" fmla="*/ 2867760 h 2867040"/>
+                <a:gd name="textAreaLeft" fmla="*/ 0 w 1966680"/>
+                <a:gd name="textAreaRight" fmla="*/ 1967760 w 1966680"/>
+                <a:gd name="textAreaTop" fmla="*/ 0 h 2866680"/>
+                <a:gd name="textAreaBottom" fmla="*/ 2867760 h 2866680"/>
               </a:gdLst>
               <a:ahLst/>
               <a:rect l="textAreaLeft" t="textAreaTop" r="textAreaRight" b="textAreaBottom"/>
@@ -24477,7 +24367,7 @@
         <p:spPr>
           <a:xfrm>
             <a:off x="788760" y="1850400"/>
-            <a:ext cx="1478160" cy="627120"/>
+            <a:ext cx="1477800" cy="627120"/>
           </a:xfrm>
           <a:prstGeom prst="rect">
             <a:avLst/>
@@ -24642,7 +24532,7 @@
               <a:t>Toutes</a:t>
             </a:r>
             <a:r>
-              <a:rPr b="0" lang="fr-FR" sz="1100" spc="265" strike="noStrike">
+              <a:rPr b="0" lang="fr-FR" sz="1100" spc="262" strike="noStrike">
                 <a:solidFill>
                   <a:srgbClr val="ffffff"/>
                 </a:solidFill>
@@ -24699,7 +24589,7 @@
         <p:spPr>
           <a:xfrm>
             <a:off x="788760" y="2634120"/>
-            <a:ext cx="1622880" cy="470520"/>
+            <a:ext cx="1622520" cy="470520"/>
           </a:xfrm>
           <a:prstGeom prst="rect">
             <a:avLst/>
@@ -24885,7 +24775,7 @@
         <p:spPr>
           <a:xfrm>
             <a:off x="788760" y="3261960"/>
-            <a:ext cx="1657440" cy="180360"/>
+            <a:ext cx="1657080" cy="180360"/>
           </a:xfrm>
           <a:prstGeom prst="rect">
             <a:avLst/>
@@ -25041,15 +24931,15 @@
         <p:spPr>
           <a:xfrm>
             <a:off x="2854080" y="2973600"/>
-            <a:ext cx="416520" cy="487440"/>
+            <a:ext cx="416160" cy="487080"/>
           </a:xfrm>
           <a:custGeom>
             <a:avLst/>
             <a:gdLst>
-              <a:gd name="textAreaLeft" fmla="*/ 0 w 416520"/>
-              <a:gd name="textAreaRight" fmla="*/ 417240 w 416520"/>
-              <a:gd name="textAreaTop" fmla="*/ 0 h 487440"/>
-              <a:gd name="textAreaBottom" fmla="*/ 488160 h 487440"/>
+              <a:gd name="textAreaLeft" fmla="*/ 0 w 416160"/>
+              <a:gd name="textAreaRight" fmla="*/ 417240 w 416160"/>
+              <a:gd name="textAreaTop" fmla="*/ 0 h 487080"/>
+              <a:gd name="textAreaBottom" fmla="*/ 488160 h 487080"/>
             </a:gdLst>
             <a:ahLst/>
             <a:rect l="textAreaLeft" t="textAreaTop" r="textAreaRight" b="textAreaBottom"/>
@@ -25125,9 +25015,9 @@
         <p:grpSpPr>
           <a:xfrm>
             <a:off x="3444480" y="1793520"/>
-            <a:ext cx="1966680" cy="2847960"/>
+            <a:ext cx="1966320" cy="2847600"/>
             <a:chOff x="3444480" y="1793520"/>
-            <a:chExt cx="1966680" cy="2847960"/>
+            <a:chExt cx="1966320" cy="2847600"/>
           </a:xfrm>
         </p:grpSpPr>
         <p:sp>
@@ -25139,15 +25029,15 @@
           <p:spPr>
             <a:xfrm>
               <a:off x="3444480" y="1793520"/>
-              <a:ext cx="1966680" cy="2847960"/>
+              <a:ext cx="1966320" cy="2847600"/>
             </a:xfrm>
             <a:custGeom>
               <a:avLst/>
               <a:gdLst>
-                <a:gd name="textAreaLeft" fmla="*/ 0 w 1966680"/>
-                <a:gd name="textAreaRight" fmla="*/ 1967400 w 1966680"/>
-                <a:gd name="textAreaTop" fmla="*/ 0 h 2847960"/>
-                <a:gd name="textAreaBottom" fmla="*/ 2848680 h 2847960"/>
+                <a:gd name="textAreaLeft" fmla="*/ 0 w 1966320"/>
+                <a:gd name="textAreaRight" fmla="*/ 1967400 w 1966320"/>
+                <a:gd name="textAreaTop" fmla="*/ 0 h 2847600"/>
+                <a:gd name="textAreaBottom" fmla="*/ 2848680 h 2847600"/>
               </a:gdLst>
               <a:ahLst/>
               <a:rect l="textAreaLeft" t="textAreaTop" r="textAreaRight" b="textAreaBottom"/>
@@ -25298,15 +25188,15 @@
           <p:spPr>
             <a:xfrm>
               <a:off x="3444480" y="1793520"/>
-              <a:ext cx="1966680" cy="2847960"/>
+              <a:ext cx="1966320" cy="2847600"/>
             </a:xfrm>
             <a:custGeom>
               <a:avLst/>
               <a:gdLst>
-                <a:gd name="textAreaLeft" fmla="*/ 0 w 1966680"/>
-                <a:gd name="textAreaRight" fmla="*/ 1967400 w 1966680"/>
-                <a:gd name="textAreaTop" fmla="*/ 0 h 2847960"/>
-                <a:gd name="textAreaBottom" fmla="*/ 2848680 h 2847960"/>
+                <a:gd name="textAreaLeft" fmla="*/ 0 w 1966320"/>
+                <a:gd name="textAreaRight" fmla="*/ 1967400 w 1966320"/>
+                <a:gd name="textAreaTop" fmla="*/ 0 h 2847600"/>
+                <a:gd name="textAreaBottom" fmla="*/ 2848680 h 2847600"/>
               </a:gdLst>
               <a:ahLst/>
               <a:rect l="textAreaLeft" t="textAreaTop" r="textAreaRight" b="textAreaBottom"/>
@@ -25459,7 +25349,7 @@
         <p:spPr>
           <a:xfrm>
             <a:off x="3543120" y="1860120"/>
-            <a:ext cx="1478880" cy="772560"/>
+            <a:ext cx="1478520" cy="772560"/>
           </a:xfrm>
           <a:prstGeom prst="rect">
             <a:avLst/>
@@ -25671,7 +25561,7 @@
         <p:spPr>
           <a:xfrm>
             <a:off x="3543120" y="2788200"/>
-            <a:ext cx="1623600" cy="466920"/>
+            <a:ext cx="1623240" cy="466920"/>
           </a:xfrm>
           <a:prstGeom prst="rect">
             <a:avLst/>
@@ -25857,7 +25747,7 @@
         <p:spPr>
           <a:xfrm>
             <a:off x="3543120" y="3414960"/>
-            <a:ext cx="1310400" cy="325800"/>
+            <a:ext cx="1310040" cy="325800"/>
           </a:xfrm>
           <a:prstGeom prst="rect">
             <a:avLst/>
@@ -25993,15 +25883,15 @@
         <p:spPr>
           <a:xfrm>
             <a:off x="5608440" y="2973600"/>
-            <a:ext cx="416520" cy="487440"/>
+            <a:ext cx="416160" cy="487080"/>
           </a:xfrm>
           <a:custGeom>
             <a:avLst/>
             <a:gdLst>
-              <a:gd name="textAreaLeft" fmla="*/ 0 w 416520"/>
-              <a:gd name="textAreaRight" fmla="*/ 417240 w 416520"/>
-              <a:gd name="textAreaTop" fmla="*/ 0 h 487440"/>
-              <a:gd name="textAreaBottom" fmla="*/ 488160 h 487440"/>
+              <a:gd name="textAreaLeft" fmla="*/ 0 w 416160"/>
+              <a:gd name="textAreaRight" fmla="*/ 417240 w 416160"/>
+              <a:gd name="textAreaTop" fmla="*/ 0 h 487080"/>
+              <a:gd name="textAreaBottom" fmla="*/ 488160 h 487080"/>
             </a:gdLst>
             <a:ahLst/>
             <a:rect l="textAreaLeft" t="textAreaTop" r="textAreaRight" b="textAreaBottom"/>
@@ -26077,9 +25967,9 @@
         <p:grpSpPr>
           <a:xfrm>
             <a:off x="6198480" y="1793520"/>
-            <a:ext cx="1967040" cy="2847960"/>
+            <a:ext cx="1966680" cy="2847600"/>
             <a:chOff x="6198480" y="1793520"/>
-            <a:chExt cx="1967040" cy="2847960"/>
+            <a:chExt cx="1966680" cy="2847600"/>
           </a:xfrm>
         </p:grpSpPr>
         <p:sp>
@@ -26091,15 +25981,15 @@
           <p:spPr>
             <a:xfrm>
               <a:off x="6198480" y="1793520"/>
-              <a:ext cx="1967040" cy="2847960"/>
+              <a:ext cx="1966680" cy="2847600"/>
             </a:xfrm>
             <a:custGeom>
               <a:avLst/>
               <a:gdLst>
-                <a:gd name="textAreaLeft" fmla="*/ 0 w 1967040"/>
-                <a:gd name="textAreaRight" fmla="*/ 1967760 w 1967040"/>
-                <a:gd name="textAreaTop" fmla="*/ 0 h 2847960"/>
-                <a:gd name="textAreaBottom" fmla="*/ 2848680 h 2847960"/>
+                <a:gd name="textAreaLeft" fmla="*/ 0 w 1966680"/>
+                <a:gd name="textAreaRight" fmla="*/ 1967760 w 1966680"/>
+                <a:gd name="textAreaTop" fmla="*/ 0 h 2847600"/>
+                <a:gd name="textAreaBottom" fmla="*/ 2848680 h 2847600"/>
               </a:gdLst>
               <a:ahLst/>
               <a:rect l="textAreaLeft" t="textAreaTop" r="textAreaRight" b="textAreaBottom"/>
@@ -26250,15 +26140,15 @@
           <p:spPr>
             <a:xfrm>
               <a:off x="6198480" y="1793520"/>
-              <a:ext cx="1967040" cy="2847960"/>
+              <a:ext cx="1966680" cy="2847600"/>
             </a:xfrm>
             <a:custGeom>
               <a:avLst/>
               <a:gdLst>
-                <a:gd name="textAreaLeft" fmla="*/ 0 w 1967040"/>
-                <a:gd name="textAreaRight" fmla="*/ 1967760 w 1967040"/>
-                <a:gd name="textAreaTop" fmla="*/ 0 h 2847960"/>
-                <a:gd name="textAreaBottom" fmla="*/ 2848680 h 2847960"/>
+                <a:gd name="textAreaLeft" fmla="*/ 0 w 1966680"/>
+                <a:gd name="textAreaRight" fmla="*/ 1967760 w 1966680"/>
+                <a:gd name="textAreaTop" fmla="*/ 0 h 2847600"/>
+                <a:gd name="textAreaBottom" fmla="*/ 2848680 h 2847600"/>
               </a:gdLst>
               <a:ahLst/>
               <a:rect l="textAreaLeft" t="textAreaTop" r="textAreaRight" b="textAreaBottom"/>
@@ -26411,7 +26301,7 @@
         <p:spPr>
           <a:xfrm>
             <a:off x="6272640" y="1860120"/>
-            <a:ext cx="1743480" cy="917280"/>
+            <a:ext cx="1743120" cy="917280"/>
           </a:xfrm>
           <a:prstGeom prst="rect">
             <a:avLst/>
@@ -26653,7 +26543,7 @@
         <p:spPr>
           <a:xfrm>
             <a:off x="6297840" y="2933280"/>
-            <a:ext cx="1622880" cy="325800"/>
+            <a:ext cx="1622520" cy="325800"/>
           </a:xfrm>
           <a:prstGeom prst="rect">
             <a:avLst/>
@@ -26809,7 +26699,7 @@
         <p:spPr>
           <a:xfrm>
             <a:off x="6297840" y="3414960"/>
-            <a:ext cx="1232280" cy="325800"/>
+            <a:ext cx="1231920" cy="325800"/>
           </a:xfrm>
           <a:prstGeom prst="rect">
             <a:avLst/>
@@ -26975,7 +26865,7 @@
         <p:spPr>
           <a:xfrm>
             <a:off x="801000" y="2264400"/>
-            <a:ext cx="6584760" cy="1474560"/>
+            <a:ext cx="6584400" cy="1474560"/>
           </a:xfrm>
           <a:prstGeom prst="rect">
             <a:avLst/>
@@ -27102,7 +26992,7 @@
         <p:spPr>
           <a:xfrm>
             <a:off x="801000" y="3882240"/>
-            <a:ext cx="5290560" cy="378000"/>
+            <a:ext cx="5290200" cy="378000"/>
           </a:xfrm>
           <a:prstGeom prst="rect">
             <a:avLst/>
@@ -27199,17 +27089,7 @@
                 <a:latin typeface="Arial"/>
                 <a:ea typeface="DejaVu Sans"/>
               </a:rPr>
-              <a:t>améliorations</a:t>
-            </a:r>
-            <a:r>
-              <a:rPr b="0" lang="fr-FR" sz="2400" spc="1" strike="noStrike">
-                <a:solidFill>
-                  <a:srgbClr val="ffc000"/>
-                </a:solidFill>
-                <a:latin typeface="Arial"/>
-                <a:ea typeface="DejaVu Sans"/>
-              </a:rPr>
-              <a:t> </a:t>
+              <a:t>améliorations </a:t>
             </a:r>
             <a:r>
               <a:rPr b="0" lang="fr-FR" sz="2400" spc="-12" strike="noStrike">
@@ -27239,7 +27119,7 @@
         <p:spPr>
           <a:xfrm>
             <a:off x="7700040" y="27000"/>
-            <a:ext cx="222840" cy="226080"/>
+            <a:ext cx="222480" cy="226080"/>
           </a:xfrm>
           <a:prstGeom prst="rect">
             <a:avLst/>
@@ -27330,7 +27210,7 @@
         <p:spPr>
           <a:xfrm>
             <a:off x="5194440" y="2130840"/>
-            <a:ext cx="3295080" cy="1208880"/>
+            <a:ext cx="3294720" cy="1208520"/>
           </a:xfrm>
           <a:prstGeom prst="rect">
             <a:avLst/>
@@ -27349,9 +27229,9 @@
         <p:grpSpPr>
           <a:xfrm>
             <a:off x="513000" y="1686240"/>
-            <a:ext cx="4470480" cy="3013920"/>
+            <a:ext cx="4470120" cy="3013560"/>
             <a:chOff x="513000" y="1686240"/>
-            <a:chExt cx="4470480" cy="3013920"/>
+            <a:chExt cx="4470120" cy="3013560"/>
           </a:xfrm>
         </p:grpSpPr>
         <p:pic>
@@ -27367,7 +27247,7 @@
           <p:spPr>
             <a:xfrm>
               <a:off x="513000" y="1686240"/>
-              <a:ext cx="4470480" cy="2813760"/>
+              <a:ext cx="4470120" cy="2813400"/>
             </a:xfrm>
             <a:prstGeom prst="rect">
               <a:avLst/>
@@ -27386,15 +27266,15 @@
           <p:spPr>
             <a:xfrm>
               <a:off x="1091160" y="2386440"/>
-              <a:ext cx="1732680" cy="2313720"/>
+              <a:ext cx="1732320" cy="2313360"/>
             </a:xfrm>
             <a:custGeom>
               <a:avLst/>
               <a:gdLst>
-                <a:gd name="textAreaLeft" fmla="*/ 0 w 1732680"/>
-                <a:gd name="textAreaRight" fmla="*/ 1733400 w 1732680"/>
-                <a:gd name="textAreaTop" fmla="*/ 0 h 2313720"/>
-                <a:gd name="textAreaBottom" fmla="*/ 2314440 h 2313720"/>
+                <a:gd name="textAreaLeft" fmla="*/ 0 w 1732320"/>
+                <a:gd name="textAreaRight" fmla="*/ 1733400 w 1732320"/>
+                <a:gd name="textAreaTop" fmla="*/ 0 h 2313360"/>
+                <a:gd name="textAreaBottom" fmla="*/ 2314440 h 2313360"/>
               </a:gdLst>
               <a:ahLst/>
               <a:rect l="textAreaLeft" t="textAreaTop" r="textAreaRight" b="textAreaBottom"/>
@@ -27473,7 +27353,7 @@
         <p:spPr>
           <a:xfrm>
             <a:off x="536040" y="319320"/>
-            <a:ext cx="7356960" cy="1805760"/>
+            <a:ext cx="7356600" cy="1805400"/>
           </a:xfrm>
           <a:prstGeom prst="rect">
             <a:avLst/>
@@ -27664,7 +27544,7 @@
         <p:spPr>
           <a:xfrm>
             <a:off x="7700040" y="27000"/>
-            <a:ext cx="222840" cy="226080"/>
+            <a:ext cx="222480" cy="226080"/>
           </a:xfrm>
           <a:prstGeom prst="rect">
             <a:avLst/>
@@ -27721,15 +27601,15 @@
         <p:spPr>
           <a:xfrm>
             <a:off x="5220000" y="2641320"/>
-            <a:ext cx="3250440" cy="215640"/>
+            <a:ext cx="3250080" cy="215280"/>
           </a:xfrm>
           <a:custGeom>
             <a:avLst/>
             <a:gdLst>
-              <a:gd name="textAreaLeft" fmla="*/ 0 w 3250440"/>
-              <a:gd name="textAreaRight" fmla="*/ 3251160 w 3250440"/>
-              <a:gd name="textAreaTop" fmla="*/ 0 h 215640"/>
-              <a:gd name="textAreaBottom" fmla="*/ 216360 h 215640"/>
+              <a:gd name="textAreaLeft" fmla="*/ 0 w 3250080"/>
+              <a:gd name="textAreaRight" fmla="*/ 3251160 w 3250080"/>
+              <a:gd name="textAreaTop" fmla="*/ 0 h 215280"/>
+              <a:gd name="textAreaBottom" fmla="*/ 216360 h 215280"/>
             </a:gdLst>
             <a:ahLst/>
             <a:rect l="textAreaLeft" t="textAreaTop" r="textAreaRight" b="textAreaBottom"/>
@@ -27797,7 +27677,7 @@
         <p:spPr>
           <a:xfrm>
             <a:off x="186480" y="4830120"/>
-            <a:ext cx="4941000" cy="835200"/>
+            <a:ext cx="4940640" cy="835200"/>
           </a:xfrm>
           <a:prstGeom prst="rect">
             <a:avLst/>
@@ -28118,7 +27998,7 @@
         <p:spPr>
           <a:xfrm>
             <a:off x="5431320" y="3701520"/>
-            <a:ext cx="2694240" cy="1990080"/>
+            <a:ext cx="2693880" cy="1989720"/>
           </a:xfrm>
           <a:prstGeom prst="rect">
             <a:avLst/>
@@ -28167,9 +28047,9 @@
         <p:grpSpPr>
           <a:xfrm>
             <a:off x="21960" y="1914840"/>
-            <a:ext cx="9064440" cy="3539880"/>
+            <a:ext cx="9064080" cy="3539520"/>
             <a:chOff x="21960" y="1914840"/>
-            <a:chExt cx="9064440" cy="3539880"/>
+            <a:chExt cx="9064080" cy="3539520"/>
           </a:xfrm>
         </p:grpSpPr>
         <p:pic>
@@ -28185,7 +28065,7 @@
           <p:spPr>
             <a:xfrm>
               <a:off x="21960" y="1914840"/>
-              <a:ext cx="8999640" cy="3539880"/>
+              <a:ext cx="8999280" cy="3539520"/>
             </a:xfrm>
             <a:prstGeom prst="rect">
               <a:avLst/>
@@ -28204,15 +28084,15 @@
           <p:spPr>
             <a:xfrm>
               <a:off x="4971960" y="2425320"/>
-              <a:ext cx="2407680" cy="2394000"/>
+              <a:ext cx="2407320" cy="2393640"/>
             </a:xfrm>
             <a:custGeom>
               <a:avLst/>
               <a:gdLst>
-                <a:gd name="textAreaLeft" fmla="*/ 0 w 2407680"/>
-                <a:gd name="textAreaRight" fmla="*/ 2408400 w 2407680"/>
-                <a:gd name="textAreaTop" fmla="*/ 0 h 2394000"/>
-                <a:gd name="textAreaBottom" fmla="*/ 2394720 h 2394000"/>
+                <a:gd name="textAreaLeft" fmla="*/ 0 w 2407320"/>
+                <a:gd name="textAreaRight" fmla="*/ 2408400 w 2407320"/>
+                <a:gd name="textAreaTop" fmla="*/ 0 h 2393640"/>
+                <a:gd name="textAreaBottom" fmla="*/ 2394720 h 2393640"/>
               </a:gdLst>
               <a:ahLst/>
               <a:rect l="textAreaLeft" t="textAreaTop" r="textAreaRight" b="textAreaBottom"/>
@@ -28270,15 +28150,15 @@
           <p:spPr>
             <a:xfrm>
               <a:off x="6959880" y="2601360"/>
-              <a:ext cx="2126520" cy="2259720"/>
+              <a:ext cx="2126160" cy="2259360"/>
             </a:xfrm>
             <a:custGeom>
               <a:avLst/>
               <a:gdLst>
-                <a:gd name="textAreaLeft" fmla="*/ 0 w 2126520"/>
-                <a:gd name="textAreaRight" fmla="*/ 2127240 w 2126520"/>
-                <a:gd name="textAreaTop" fmla="*/ 0 h 2259720"/>
-                <a:gd name="textAreaBottom" fmla="*/ 2260440 h 2259720"/>
+                <a:gd name="textAreaLeft" fmla="*/ 0 w 2126160"/>
+                <a:gd name="textAreaRight" fmla="*/ 2127240 w 2126160"/>
+                <a:gd name="textAreaTop" fmla="*/ 0 h 2259360"/>
+                <a:gd name="textAreaBottom" fmla="*/ 2260440 h 2259360"/>
               </a:gdLst>
               <a:ahLst/>
               <a:rect l="textAreaLeft" t="textAreaTop" r="textAreaRight" b="textAreaBottom"/>
@@ -28778,15 +28658,15 @@
           <p:spPr>
             <a:xfrm>
               <a:off x="3291480" y="3217680"/>
-              <a:ext cx="1064160" cy="450720"/>
+              <a:ext cx="1063800" cy="450360"/>
             </a:xfrm>
             <a:custGeom>
               <a:avLst/>
               <a:gdLst>
-                <a:gd name="textAreaLeft" fmla="*/ 0 w 1064160"/>
-                <a:gd name="textAreaRight" fmla="*/ 1064880 w 1064160"/>
-                <a:gd name="textAreaTop" fmla="*/ 0 h 450720"/>
-                <a:gd name="textAreaBottom" fmla="*/ 451440 h 450720"/>
+                <a:gd name="textAreaLeft" fmla="*/ 0 w 1063800"/>
+                <a:gd name="textAreaRight" fmla="*/ 1064880 w 1063800"/>
+                <a:gd name="textAreaTop" fmla="*/ 0 h 450360"/>
+                <a:gd name="textAreaBottom" fmla="*/ 451440 h 450360"/>
               </a:gdLst>
               <a:ahLst/>
               <a:rect l="textAreaLeft" t="textAreaTop" r="textAreaRight" b="textAreaBottom"/>
@@ -28862,15 +28742,15 @@
           <p:spPr>
             <a:xfrm>
               <a:off x="3291480" y="3217680"/>
-              <a:ext cx="1064160" cy="450720"/>
+              <a:ext cx="1063800" cy="450360"/>
             </a:xfrm>
             <a:custGeom>
               <a:avLst/>
               <a:gdLst>
-                <a:gd name="textAreaLeft" fmla="*/ 0 w 1064160"/>
-                <a:gd name="textAreaRight" fmla="*/ 1064880 w 1064160"/>
-                <a:gd name="textAreaTop" fmla="*/ 0 h 450720"/>
-                <a:gd name="textAreaBottom" fmla="*/ 451440 h 450720"/>
+                <a:gd name="textAreaLeft" fmla="*/ 0 w 1063800"/>
+                <a:gd name="textAreaRight" fmla="*/ 1064880 w 1063800"/>
+                <a:gd name="textAreaTop" fmla="*/ 0 h 450360"/>
+                <a:gd name="textAreaBottom" fmla="*/ 451440 h 450360"/>
               </a:gdLst>
               <a:ahLst/>
               <a:rect l="textAreaLeft" t="textAreaTop" r="textAreaRight" b="textAreaBottom"/>
@@ -28952,7 +28832,7 @@
         <p:spPr>
           <a:xfrm>
             <a:off x="536040" y="526320"/>
-            <a:ext cx="7741080" cy="966240"/>
+            <a:ext cx="7740720" cy="965880"/>
           </a:xfrm>
           <a:prstGeom prst="rect">
             <a:avLst/>
@@ -29042,7 +28922,7 @@
         <p:spPr>
           <a:xfrm>
             <a:off x="536040" y="1359360"/>
-            <a:ext cx="2851200" cy="378000"/>
+            <a:ext cx="2850840" cy="378000"/>
           </a:xfrm>
           <a:prstGeom prst="rect">
             <a:avLst/>
@@ -29148,7 +29028,7 @@
         <p:spPr>
           <a:xfrm>
             <a:off x="7700040" y="27000"/>
-            <a:ext cx="222840" cy="226080"/>
+            <a:ext cx="222480" cy="226080"/>
           </a:xfrm>
           <a:prstGeom prst="rect">
             <a:avLst/>
@@ -29205,7 +29085,7 @@
         <p:spPr>
           <a:xfrm>
             <a:off x="3499200" y="3273840"/>
-            <a:ext cx="417240" cy="286560"/>
+            <a:ext cx="416880" cy="286560"/>
           </a:xfrm>
           <a:prstGeom prst="rect">
             <a:avLst/>
@@ -29296,7 +29176,7 @@
         <p:spPr>
           <a:xfrm>
             <a:off x="536040" y="526320"/>
-            <a:ext cx="7741080" cy="966240"/>
+            <a:ext cx="7740720" cy="965880"/>
           </a:xfrm>
           <a:prstGeom prst="rect">
             <a:avLst/>
@@ -29426,7 +29306,7 @@
         <p:spPr>
           <a:xfrm>
             <a:off x="536040" y="1359360"/>
-            <a:ext cx="8019360" cy="3910320"/>
+            <a:ext cx="8019000" cy="3909960"/>
           </a:xfrm>
           <a:prstGeom prst="rect">
             <a:avLst/>
@@ -29690,7 +29570,7 @@
               <a:t>Random</a:t>
             </a:r>
             <a:r>
-              <a:rPr b="0" lang="fr-FR" sz="2400" spc="7" strike="noStrike">
+              <a:rPr b="0" lang="fr-FR" sz="2400" spc="4" strike="noStrike">
                 <a:solidFill>
                   <a:srgbClr val="292934"/>
                 </a:solidFill>
@@ -29750,16 +29630,7 @@
                 </a:solidFill>
                 <a:latin typeface="Arial"/>
               </a:rPr>
-              <a:t>search</a:t>
-            </a:r>
-            <a:r>
-              <a:rPr b="0" lang="fr-FR" sz="2400" spc="1" strike="noStrike">
-                <a:solidFill>
-                  <a:srgbClr val="292934"/>
-                </a:solidFill>
-                <a:latin typeface="Arial"/>
-              </a:rPr>
-              <a:t> </a:t>
+              <a:t>search </a:t>
             </a:r>
             <a:r>
               <a:rPr b="0" lang="fr-FR" sz="2400" spc="-26" strike="noStrike">
@@ -29823,142 +29694,142 @@
               <a:t>obtenue</a:t>
             </a:r>
             <a:r>
+              <a:rPr b="0" lang="fr-FR" sz="2400" spc="4" strike="noStrike">
+                <a:solidFill>
+                  <a:srgbClr val="292934"/>
+                </a:solidFill>
+                <a:latin typeface="Arial"/>
+              </a:rPr>
+              <a:t> </a:t>
+            </a:r>
+            <a:r>
+              <a:rPr b="0" lang="fr-FR" sz="2400" spc="-1" strike="noStrike">
+                <a:solidFill>
+                  <a:srgbClr val="292934"/>
+                </a:solidFill>
+                <a:latin typeface="Arial"/>
+              </a:rPr>
+              <a:t>sur</a:t>
+            </a:r>
+            <a:r>
+              <a:rPr b="0" lang="fr-FR" sz="2400" spc="-12" strike="noStrike">
+                <a:solidFill>
+                  <a:srgbClr val="292934"/>
+                </a:solidFill>
+                <a:latin typeface="Arial"/>
+              </a:rPr>
+              <a:t> </a:t>
+            </a:r>
+            <a:r>
+              <a:rPr b="0" lang="fr-FR" sz="2400" spc="-1" strike="noStrike">
+                <a:solidFill>
+                  <a:srgbClr val="292934"/>
+                </a:solidFill>
+                <a:latin typeface="Arial"/>
+              </a:rPr>
+              <a:t>jeu</a:t>
+            </a:r>
+            <a:r>
+              <a:rPr b="0" lang="fr-FR" sz="2400" spc="-21" strike="noStrike">
+                <a:solidFill>
+                  <a:srgbClr val="292934"/>
+                </a:solidFill>
+                <a:latin typeface="Arial"/>
+              </a:rPr>
+              <a:t> </a:t>
+            </a:r>
+            <a:r>
+              <a:rPr b="0" lang="fr-FR" sz="2400" spc="-1" strike="noStrike">
+                <a:solidFill>
+                  <a:srgbClr val="292934"/>
+                </a:solidFill>
+                <a:latin typeface="Arial"/>
+              </a:rPr>
+              <a:t>de test</a:t>
+            </a:r>
+            <a:r>
+              <a:rPr b="0" lang="fr-FR" sz="2400" spc="-26" strike="noStrike">
+                <a:solidFill>
+                  <a:srgbClr val="292934"/>
+                </a:solidFill>
+                <a:latin typeface="Arial"/>
+              </a:rPr>
+              <a:t> </a:t>
+            </a:r>
+            <a:r>
+              <a:rPr b="0" lang="fr-FR" sz="2400" spc="-1" strike="noStrike">
+                <a:solidFill>
+                  <a:srgbClr val="292934"/>
+                </a:solidFill>
+                <a:latin typeface="Arial"/>
+              </a:rPr>
+              <a:t>:</a:t>
+            </a:r>
+            <a:r>
+              <a:rPr b="0" lang="fr-FR" sz="2400" spc="-26" strike="noStrike">
+                <a:solidFill>
+                  <a:srgbClr val="292934"/>
+                </a:solidFill>
+                <a:latin typeface="Arial"/>
+              </a:rPr>
+              <a:t> </a:t>
+            </a:r>
+            <a:r>
+              <a:rPr b="0" lang="fr-FR" sz="2400" spc="-1" strike="noStrike">
+                <a:solidFill>
+                  <a:srgbClr val="ff0000"/>
+                </a:solidFill>
+                <a:latin typeface="Arial"/>
+              </a:rPr>
+              <a:t>1,14</a:t>
+            </a:r>
+            <a:r>
+              <a:rPr b="0" lang="fr-FR" sz="2400" spc="-15" strike="noStrike">
+                <a:solidFill>
+                  <a:srgbClr val="ff0000"/>
+                </a:solidFill>
+                <a:latin typeface="Arial"/>
+              </a:rPr>
+              <a:t> </a:t>
+            </a:r>
+            <a:r>
+              <a:rPr b="0" lang="fr-FR" sz="2400" spc="-1" strike="noStrike">
+                <a:solidFill>
+                  <a:srgbClr val="ff0000"/>
+                </a:solidFill>
+                <a:latin typeface="Arial"/>
+              </a:rPr>
+              <a:t>&lt;</a:t>
+            </a:r>
+            <a:r>
+              <a:rPr b="0" lang="fr-FR" sz="2400" spc="-12" strike="noStrike">
+                <a:solidFill>
+                  <a:srgbClr val="ff0000"/>
+                </a:solidFill>
+                <a:latin typeface="Arial"/>
+              </a:rPr>
+              <a:t> 1,26</a:t>
+            </a:r>
+            <a:r>
+              <a:rPr b="0" lang="fr-FR" sz="2400" spc="-140" strike="noStrike">
+                <a:solidFill>
+                  <a:srgbClr val="ff0000"/>
+                </a:solidFill>
+                <a:latin typeface="Arial"/>
+              </a:rPr>
+              <a:t> </a:t>
+            </a:r>
+            <a:r>
+              <a:rPr b="0" lang="fr-FR" sz="2400" spc="-1" strike="noStrike">
+                <a:solidFill>
+                  <a:srgbClr val="292934"/>
+                </a:solidFill>
+                <a:latin typeface="Arial"/>
+              </a:rPr>
+              <a:t>Améliore</a:t>
+            </a:r>
+            <a:r>
               <a:rPr b="0" lang="fr-FR" sz="2400" spc="7" strike="noStrike">
-                <a:solidFill>
-                  <a:srgbClr val="292934"/>
-                </a:solidFill>
-                <a:latin typeface="Arial"/>
-              </a:rPr>
-              <a:t> </a:t>
-            </a:r>
-            <a:r>
-              <a:rPr b="0" lang="fr-FR" sz="2400" spc="-1" strike="noStrike">
-                <a:solidFill>
-                  <a:srgbClr val="292934"/>
-                </a:solidFill>
-                <a:latin typeface="Arial"/>
-              </a:rPr>
-              <a:t>sur</a:t>
-            </a:r>
-            <a:r>
-              <a:rPr b="0" lang="fr-FR" sz="2400" spc="-12" strike="noStrike">
-                <a:solidFill>
-                  <a:srgbClr val="292934"/>
-                </a:solidFill>
-                <a:latin typeface="Arial"/>
-              </a:rPr>
-              <a:t> </a:t>
-            </a:r>
-            <a:r>
-              <a:rPr b="0" lang="fr-FR" sz="2400" spc="-1" strike="noStrike">
-                <a:solidFill>
-                  <a:srgbClr val="292934"/>
-                </a:solidFill>
-                <a:latin typeface="Arial"/>
-              </a:rPr>
-              <a:t>jeu</a:t>
-            </a:r>
-            <a:r>
-              <a:rPr b="0" lang="fr-FR" sz="2400" spc="-21" strike="noStrike">
-                <a:solidFill>
-                  <a:srgbClr val="292934"/>
-                </a:solidFill>
-                <a:latin typeface="Arial"/>
-              </a:rPr>
-              <a:t> </a:t>
-            </a:r>
-            <a:r>
-              <a:rPr b="0" lang="fr-FR" sz="2400" spc="-1" strike="noStrike">
-                <a:solidFill>
-                  <a:srgbClr val="292934"/>
-                </a:solidFill>
-                <a:latin typeface="Arial"/>
-              </a:rPr>
-              <a:t>de test</a:t>
-            </a:r>
-            <a:r>
-              <a:rPr b="0" lang="fr-FR" sz="2400" spc="-26" strike="noStrike">
-                <a:solidFill>
-                  <a:srgbClr val="292934"/>
-                </a:solidFill>
-                <a:latin typeface="Arial"/>
-              </a:rPr>
-              <a:t> </a:t>
-            </a:r>
-            <a:r>
-              <a:rPr b="0" lang="fr-FR" sz="2400" spc="-1" strike="noStrike">
-                <a:solidFill>
-                  <a:srgbClr val="292934"/>
-                </a:solidFill>
-                <a:latin typeface="Arial"/>
-              </a:rPr>
-              <a:t>:</a:t>
-            </a:r>
-            <a:r>
-              <a:rPr b="0" lang="fr-FR" sz="2400" spc="-26" strike="noStrike">
-                <a:solidFill>
-                  <a:srgbClr val="292934"/>
-                </a:solidFill>
-                <a:latin typeface="Arial"/>
-              </a:rPr>
-              <a:t> </a:t>
-            </a:r>
-            <a:r>
-              <a:rPr b="0" lang="fr-FR" sz="2400" spc="-1" strike="noStrike">
-                <a:solidFill>
-                  <a:srgbClr val="ff0000"/>
-                </a:solidFill>
-                <a:latin typeface="Arial"/>
-              </a:rPr>
-              <a:t>1,14</a:t>
-            </a:r>
-            <a:r>
-              <a:rPr b="0" lang="fr-FR" sz="2400" spc="-15" strike="noStrike">
-                <a:solidFill>
-                  <a:srgbClr val="ff0000"/>
-                </a:solidFill>
-                <a:latin typeface="Arial"/>
-              </a:rPr>
-              <a:t> </a:t>
-            </a:r>
-            <a:r>
-              <a:rPr b="0" lang="fr-FR" sz="2400" spc="-1" strike="noStrike">
-                <a:solidFill>
-                  <a:srgbClr val="ff0000"/>
-                </a:solidFill>
-                <a:latin typeface="Arial"/>
-              </a:rPr>
-              <a:t>&lt;</a:t>
-            </a:r>
-            <a:r>
-              <a:rPr b="0" lang="fr-FR" sz="2400" spc="-12" strike="noStrike">
-                <a:solidFill>
-                  <a:srgbClr val="ff0000"/>
-                </a:solidFill>
-                <a:latin typeface="Arial"/>
-              </a:rPr>
-              <a:t> 1,26</a:t>
-            </a:r>
-            <a:r>
-              <a:rPr b="0" lang="fr-FR" sz="2400" spc="-140" strike="noStrike">
-                <a:solidFill>
-                  <a:srgbClr val="ff0000"/>
-                </a:solidFill>
-                <a:latin typeface="Arial"/>
-              </a:rPr>
-              <a:t> </a:t>
-            </a:r>
-            <a:r>
-              <a:rPr b="0" lang="fr-FR" sz="2400" spc="-1" strike="noStrike">
-                <a:solidFill>
-                  <a:srgbClr val="292934"/>
-                </a:solidFill>
-                <a:latin typeface="Arial"/>
-              </a:rPr>
-              <a:t>Améliore</a:t>
-            </a:r>
-            <a:r>
-              <a:rPr b="0" lang="fr-FR" sz="2400" spc="9" strike="noStrike">
                 <a:solidFill>
                   <a:srgbClr val="292934"/>
                 </a:solidFill>
@@ -30144,7 +30015,7 @@
               <a:t>réaliser</a:t>
             </a:r>
             <a:r>
-              <a:rPr b="0" lang="fr-FR" sz="2400" spc="15" strike="noStrike">
+              <a:rPr b="0" lang="fr-FR" sz="2400" spc="12" strike="noStrike">
                 <a:solidFill>
                   <a:srgbClr val="292934"/>
                 </a:solidFill>
@@ -30364,7 +30235,7 @@
         <p:spPr>
           <a:xfrm>
             <a:off x="7700040" y="27000"/>
-            <a:ext cx="222840" cy="226080"/>
+            <a:ext cx="222480" cy="226080"/>
           </a:xfrm>
           <a:prstGeom prst="rect">
             <a:avLst/>
@@ -30455,7 +30326,7 @@
         <p:spPr>
           <a:xfrm>
             <a:off x="536040" y="526320"/>
-            <a:ext cx="7741080" cy="966240"/>
+            <a:ext cx="7740720" cy="965880"/>
           </a:xfrm>
           <a:prstGeom prst="rect">
             <a:avLst/>
@@ -30509,7 +30380,7 @@
         <p:spPr>
           <a:xfrm>
             <a:off x="536040" y="1357560"/>
-            <a:ext cx="5764320" cy="3588120"/>
+            <a:ext cx="5763960" cy="3588120"/>
           </a:xfrm>
           <a:prstGeom prst="rect">
             <a:avLst/>
@@ -30978,7 +30849,7 @@
         <p:spPr>
           <a:xfrm>
             <a:off x="7700040" y="27000"/>
-            <a:ext cx="124200" cy="226080"/>
+            <a:ext cx="123840" cy="226080"/>
           </a:xfrm>
           <a:prstGeom prst="rect">
             <a:avLst/>
@@ -31069,7 +30940,7 @@
         <p:spPr>
           <a:xfrm>
             <a:off x="536040" y="526320"/>
-            <a:ext cx="7741080" cy="966240"/>
+            <a:ext cx="7740720" cy="965880"/>
           </a:xfrm>
           <a:prstGeom prst="rect">
             <a:avLst/>
@@ -31177,7 +31048,7 @@
         <p:spPr>
           <a:xfrm>
             <a:off x="536040" y="1359360"/>
-            <a:ext cx="4647960" cy="378000"/>
+            <a:ext cx="4647600" cy="378000"/>
           </a:xfrm>
           <a:prstGeom prst="rect">
             <a:avLst/>
@@ -31303,7 +31174,7 @@
         <p:spPr>
           <a:xfrm>
             <a:off x="7700040" y="27000"/>
-            <a:ext cx="222840" cy="226080"/>
+            <a:ext cx="222480" cy="226080"/>
           </a:xfrm>
           <a:prstGeom prst="rect">
             <a:avLst/>
@@ -31360,9 +31231,9 @@
         <p:grpSpPr>
           <a:xfrm>
             <a:off x="5990040" y="3270600"/>
-            <a:ext cx="513720" cy="886320"/>
+            <a:ext cx="513360" cy="885960"/>
             <a:chOff x="5990040" y="3270600"/>
-            <a:chExt cx="513720" cy="886320"/>
+            <a:chExt cx="513360" cy="885960"/>
           </a:xfrm>
         </p:grpSpPr>
         <p:pic>
@@ -31378,7 +31249,7 @@
           <p:spPr>
             <a:xfrm>
               <a:off x="6305760" y="3613320"/>
-              <a:ext cx="198000" cy="198000"/>
+              <a:ext cx="197640" cy="197640"/>
             </a:xfrm>
             <a:prstGeom prst="rect">
               <a:avLst/>
@@ -31401,7 +31272,7 @@
           <p:spPr>
             <a:xfrm>
               <a:off x="5990040" y="3613320"/>
-              <a:ext cx="198000" cy="198000"/>
+              <a:ext cx="197640" cy="197640"/>
             </a:xfrm>
             <a:prstGeom prst="rect">
               <a:avLst/>
@@ -31420,15 +31291,15 @@
           <p:spPr>
             <a:xfrm>
               <a:off x="6037920" y="3270600"/>
-              <a:ext cx="172080" cy="172080"/>
+              <a:ext cx="171720" cy="171720"/>
             </a:xfrm>
             <a:custGeom>
               <a:avLst/>
               <a:gdLst>
-                <a:gd name="textAreaLeft" fmla="*/ 0 w 172080"/>
-                <a:gd name="textAreaRight" fmla="*/ 172800 w 172080"/>
-                <a:gd name="textAreaTop" fmla="*/ 0 h 172080"/>
-                <a:gd name="textAreaBottom" fmla="*/ 172800 h 172080"/>
+                <a:gd name="textAreaLeft" fmla="*/ 0 w 171720"/>
+                <a:gd name="textAreaRight" fmla="*/ 172800 w 171720"/>
+                <a:gd name="textAreaTop" fmla="*/ 0 h 171720"/>
+                <a:gd name="textAreaBottom" fmla="*/ 172800 h 171720"/>
               </a:gdLst>
               <a:ahLst/>
               <a:rect l="textAreaLeft" t="textAreaTop" r="textAreaRight" b="textAreaBottom"/>
@@ -31531,15 +31402,15 @@
           <p:spPr>
             <a:xfrm>
               <a:off x="6037920" y="3270600"/>
-              <a:ext cx="172080" cy="172080"/>
+              <a:ext cx="171720" cy="171720"/>
             </a:xfrm>
             <a:custGeom>
               <a:avLst/>
               <a:gdLst>
-                <a:gd name="textAreaLeft" fmla="*/ 0 w 172080"/>
-                <a:gd name="textAreaRight" fmla="*/ 172800 w 172080"/>
-                <a:gd name="textAreaTop" fmla="*/ 0 h 172080"/>
-                <a:gd name="textAreaBottom" fmla="*/ 172800 h 172080"/>
+                <a:gd name="textAreaLeft" fmla="*/ 0 w 171720"/>
+                <a:gd name="textAreaRight" fmla="*/ 172800 w 171720"/>
+                <a:gd name="textAreaTop" fmla="*/ 0 h 171720"/>
+                <a:gd name="textAreaBottom" fmla="*/ 172800 h 171720"/>
               </a:gdLst>
               <a:ahLst/>
               <a:rect l="textAreaLeft" t="textAreaTop" r="textAreaRight" b="textAreaBottom"/>
@@ -31643,15 +31514,15 @@
           <p:spPr>
             <a:xfrm>
               <a:off x="6192360" y="3425400"/>
-              <a:ext cx="172080" cy="172080"/>
+              <a:ext cx="171720" cy="171720"/>
             </a:xfrm>
             <a:custGeom>
               <a:avLst/>
               <a:gdLst>
-                <a:gd name="textAreaLeft" fmla="*/ 0 w 172080"/>
-                <a:gd name="textAreaRight" fmla="*/ 172800 w 172080"/>
-                <a:gd name="textAreaTop" fmla="*/ 0 h 172080"/>
-                <a:gd name="textAreaBottom" fmla="*/ 172800 h 172080"/>
+                <a:gd name="textAreaLeft" fmla="*/ 0 w 171720"/>
+                <a:gd name="textAreaRight" fmla="*/ 172800 w 171720"/>
+                <a:gd name="textAreaTop" fmla="*/ 0 h 171720"/>
+                <a:gd name="textAreaBottom" fmla="*/ 172800 h 171720"/>
               </a:gdLst>
               <a:ahLst/>
               <a:rect l="textAreaLeft" t="textAreaTop" r="textAreaRight" b="textAreaBottom"/>
@@ -31754,15 +31625,15 @@
           <p:spPr>
             <a:xfrm>
               <a:off x="6192360" y="3425400"/>
-              <a:ext cx="172080" cy="172080"/>
+              <a:ext cx="171720" cy="171720"/>
             </a:xfrm>
             <a:custGeom>
               <a:avLst/>
               <a:gdLst>
-                <a:gd name="textAreaLeft" fmla="*/ 0 w 172080"/>
-                <a:gd name="textAreaRight" fmla="*/ 172800 w 172080"/>
-                <a:gd name="textAreaTop" fmla="*/ 0 h 172080"/>
-                <a:gd name="textAreaBottom" fmla="*/ 172800 h 172080"/>
+                <a:gd name="textAreaLeft" fmla="*/ 0 w 171720"/>
+                <a:gd name="textAreaRight" fmla="*/ 172800 w 171720"/>
+                <a:gd name="textAreaTop" fmla="*/ 0 h 171720"/>
+                <a:gd name="textAreaBottom" fmla="*/ 172800 h 171720"/>
               </a:gdLst>
               <a:ahLst/>
               <a:rect l="textAreaLeft" t="textAreaTop" r="textAreaRight" b="textAreaBottom"/>
@@ -31866,15 +31737,15 @@
           <p:spPr>
             <a:xfrm>
               <a:off x="6037920" y="3984840"/>
-              <a:ext cx="172080" cy="172080"/>
+              <a:ext cx="171720" cy="171720"/>
             </a:xfrm>
             <a:custGeom>
               <a:avLst/>
               <a:gdLst>
-                <a:gd name="textAreaLeft" fmla="*/ 0 w 172080"/>
-                <a:gd name="textAreaRight" fmla="*/ 172800 w 172080"/>
-                <a:gd name="textAreaTop" fmla="*/ 0 h 172080"/>
-                <a:gd name="textAreaBottom" fmla="*/ 172800 h 172080"/>
+                <a:gd name="textAreaLeft" fmla="*/ 0 w 171720"/>
+                <a:gd name="textAreaRight" fmla="*/ 172800 w 171720"/>
+                <a:gd name="textAreaTop" fmla="*/ 0 h 171720"/>
+                <a:gd name="textAreaBottom" fmla="*/ 172800 h 171720"/>
               </a:gdLst>
               <a:ahLst/>
               <a:rect l="textAreaLeft" t="textAreaTop" r="textAreaRight" b="textAreaBottom"/>
@@ -31977,15 +31848,15 @@
           <p:spPr>
             <a:xfrm>
               <a:off x="6037920" y="3984840"/>
-              <a:ext cx="172080" cy="172080"/>
+              <a:ext cx="171720" cy="171720"/>
             </a:xfrm>
             <a:custGeom>
               <a:avLst/>
               <a:gdLst>
-                <a:gd name="textAreaLeft" fmla="*/ 0 w 172080"/>
-                <a:gd name="textAreaRight" fmla="*/ 172800 w 172080"/>
-                <a:gd name="textAreaTop" fmla="*/ 0 h 172080"/>
-                <a:gd name="textAreaBottom" fmla="*/ 172800 h 172080"/>
+                <a:gd name="textAreaLeft" fmla="*/ 0 w 171720"/>
+                <a:gd name="textAreaRight" fmla="*/ 172800 w 171720"/>
+                <a:gd name="textAreaTop" fmla="*/ 0 h 171720"/>
+                <a:gd name="textAreaBottom" fmla="*/ 172800 h 171720"/>
               </a:gdLst>
               <a:ahLst/>
               <a:rect l="textAreaLeft" t="textAreaTop" r="textAreaRight" b="textAreaBottom"/>
@@ -32089,15 +31960,15 @@
           <p:spPr>
             <a:xfrm>
               <a:off x="6202080" y="3831120"/>
-              <a:ext cx="172080" cy="172080"/>
+              <a:ext cx="171720" cy="171720"/>
             </a:xfrm>
             <a:custGeom>
               <a:avLst/>
               <a:gdLst>
-                <a:gd name="textAreaLeft" fmla="*/ 0 w 172080"/>
-                <a:gd name="textAreaRight" fmla="*/ 172800 w 172080"/>
-                <a:gd name="textAreaTop" fmla="*/ 0 h 172080"/>
-                <a:gd name="textAreaBottom" fmla="*/ 172800 h 172080"/>
+                <a:gd name="textAreaLeft" fmla="*/ 0 w 171720"/>
+                <a:gd name="textAreaRight" fmla="*/ 172800 w 171720"/>
+                <a:gd name="textAreaTop" fmla="*/ 0 h 171720"/>
+                <a:gd name="textAreaBottom" fmla="*/ 172800 h 171720"/>
               </a:gdLst>
               <a:ahLst/>
               <a:rect l="textAreaLeft" t="textAreaTop" r="textAreaRight" b="textAreaBottom"/>
@@ -32200,15 +32071,15 @@
           <p:spPr>
             <a:xfrm>
               <a:off x="6202080" y="3831120"/>
-              <a:ext cx="172080" cy="172080"/>
+              <a:ext cx="171720" cy="171720"/>
             </a:xfrm>
             <a:custGeom>
               <a:avLst/>
               <a:gdLst>
-                <a:gd name="textAreaLeft" fmla="*/ 0 w 172080"/>
-                <a:gd name="textAreaRight" fmla="*/ 172800 w 172080"/>
-                <a:gd name="textAreaTop" fmla="*/ 0 h 172080"/>
-                <a:gd name="textAreaBottom" fmla="*/ 172800 h 172080"/>
+                <a:gd name="textAreaLeft" fmla="*/ 0 w 171720"/>
+                <a:gd name="textAreaRight" fmla="*/ 172800 w 171720"/>
+                <a:gd name="textAreaTop" fmla="*/ 0 h 171720"/>
+                <a:gd name="textAreaBottom" fmla="*/ 172800 h 171720"/>
               </a:gdLst>
               <a:ahLst/>
               <a:rect l="textAreaLeft" t="textAreaTop" r="textAreaRight" b="textAreaBottom"/>
@@ -32317,7 +32188,7 @@
         <p:spPr>
           <a:xfrm>
             <a:off x="5675040" y="3613320"/>
-            <a:ext cx="198000" cy="198000"/>
+            <a:ext cx="197640" cy="197640"/>
           </a:xfrm>
           <a:prstGeom prst="rect">
             <a:avLst/>
@@ -32340,7 +32211,7 @@
         <p:spPr>
           <a:xfrm>
             <a:off x="5359320" y="3613320"/>
-            <a:ext cx="198000" cy="198000"/>
+            <a:ext cx="197640" cy="197640"/>
           </a:xfrm>
           <a:prstGeom prst="rect">
             <a:avLst/>
@@ -32363,7 +32234,7 @@
         <p:spPr>
           <a:xfrm>
             <a:off x="5043240" y="3613320"/>
-            <a:ext cx="198360" cy="198000"/>
+            <a:ext cx="198000" cy="197640"/>
           </a:xfrm>
           <a:prstGeom prst="rect">
             <a:avLst/>
@@ -32382,9 +32253,9 @@
         <p:grpSpPr>
           <a:xfrm>
             <a:off x="4568760" y="3540240"/>
-            <a:ext cx="344880" cy="344160"/>
+            <a:ext cx="344520" cy="343800"/>
             <a:chOff x="4568760" y="3540240"/>
-            <a:chExt cx="344880" cy="344160"/>
+            <a:chExt cx="344520" cy="343800"/>
           </a:xfrm>
         </p:grpSpPr>
         <p:sp>
@@ -32396,15 +32267,15 @@
           <p:spPr>
             <a:xfrm>
               <a:off x="4568760" y="3540240"/>
-              <a:ext cx="344880" cy="344160"/>
+              <a:ext cx="344520" cy="343800"/>
             </a:xfrm>
             <a:custGeom>
               <a:avLst/>
               <a:gdLst>
-                <a:gd name="textAreaLeft" fmla="*/ 0 w 344880"/>
-                <a:gd name="textAreaRight" fmla="*/ 345600 w 344880"/>
-                <a:gd name="textAreaTop" fmla="*/ 0 h 344160"/>
-                <a:gd name="textAreaBottom" fmla="*/ 344880 h 344160"/>
+                <a:gd name="textAreaLeft" fmla="*/ 0 w 344520"/>
+                <a:gd name="textAreaRight" fmla="*/ 345600 w 344520"/>
+                <a:gd name="textAreaTop" fmla="*/ 0 h 343800"/>
+                <a:gd name="textAreaBottom" fmla="*/ 344880 h 343800"/>
               </a:gdLst>
               <a:ahLst/>
               <a:rect l="textAreaLeft" t="textAreaTop" r="textAreaRight" b="textAreaBottom"/>
@@ -32531,15 +32402,15 @@
           <p:spPr>
             <a:xfrm>
               <a:off x="4568760" y="3540240"/>
-              <a:ext cx="344880" cy="344160"/>
+              <a:ext cx="344520" cy="343800"/>
             </a:xfrm>
             <a:custGeom>
               <a:avLst/>
               <a:gdLst>
-                <a:gd name="textAreaLeft" fmla="*/ 0 w 344880"/>
-                <a:gd name="textAreaRight" fmla="*/ 345600 w 344880"/>
-                <a:gd name="textAreaTop" fmla="*/ 0 h 344160"/>
-                <a:gd name="textAreaBottom" fmla="*/ 344880 h 344160"/>
+                <a:gd name="textAreaLeft" fmla="*/ 0 w 344520"/>
+                <a:gd name="textAreaRight" fmla="*/ 345600 w 344520"/>
+                <a:gd name="textAreaTop" fmla="*/ 0 h 343800"/>
+                <a:gd name="textAreaBottom" fmla="*/ 344880 h 343800"/>
               </a:gdLst>
               <a:ahLst/>
               <a:rect l="textAreaLeft" t="textAreaTop" r="textAreaRight" b="textAreaBottom"/>
@@ -32668,9 +32539,9 @@
         <p:grpSpPr>
           <a:xfrm>
             <a:off x="2694240" y="2837160"/>
-            <a:ext cx="1744200" cy="1744200"/>
+            <a:ext cx="1743840" cy="1743840"/>
             <a:chOff x="2694240" y="2837160"/>
-            <a:chExt cx="1744200" cy="1744200"/>
+            <a:chExt cx="1743840" cy="1743840"/>
           </a:xfrm>
         </p:grpSpPr>
         <p:sp>
@@ -32682,15 +32553,15 @@
           <p:spPr>
             <a:xfrm>
               <a:off x="2694240" y="2837160"/>
-              <a:ext cx="1744200" cy="1744200"/>
+              <a:ext cx="1743840" cy="1743840"/>
             </a:xfrm>
             <a:custGeom>
               <a:avLst/>
               <a:gdLst>
-                <a:gd name="textAreaLeft" fmla="*/ 0 w 1744200"/>
-                <a:gd name="textAreaRight" fmla="*/ 1744920 w 1744200"/>
-                <a:gd name="textAreaTop" fmla="*/ 0 h 1744200"/>
-                <a:gd name="textAreaBottom" fmla="*/ 1744920 h 1744200"/>
+                <a:gd name="textAreaLeft" fmla="*/ 0 w 1743840"/>
+                <a:gd name="textAreaRight" fmla="*/ 1744920 w 1743840"/>
+                <a:gd name="textAreaTop" fmla="*/ 0 h 1743840"/>
+                <a:gd name="textAreaBottom" fmla="*/ 1744920 h 1743840"/>
               </a:gdLst>
               <a:ahLst/>
               <a:rect l="textAreaLeft" t="textAreaTop" r="textAreaRight" b="textAreaBottom"/>
@@ -33105,15 +32976,15 @@
           <p:spPr>
             <a:xfrm>
               <a:off x="2694240" y="2837160"/>
-              <a:ext cx="1744200" cy="1744200"/>
+              <a:ext cx="1743840" cy="1743840"/>
             </a:xfrm>
             <a:custGeom>
               <a:avLst/>
               <a:gdLst>
-                <a:gd name="textAreaLeft" fmla="*/ 0 w 1744200"/>
-                <a:gd name="textAreaRight" fmla="*/ 1744920 w 1744200"/>
-                <a:gd name="textAreaTop" fmla="*/ 0 h 1744200"/>
-                <a:gd name="textAreaBottom" fmla="*/ 1744920 h 1744200"/>
+                <a:gd name="textAreaLeft" fmla="*/ 0 w 1743840"/>
+                <a:gd name="textAreaRight" fmla="*/ 1744920 w 1743840"/>
+                <a:gd name="textAreaTop" fmla="*/ 0 h 1743840"/>
+                <a:gd name="textAreaBottom" fmla="*/ 1744920 h 1743840"/>
               </a:gdLst>
               <a:ahLst/>
               <a:rect l="textAreaLeft" t="textAreaTop" r="textAreaRight" b="textAreaBottom"/>
@@ -33530,7 +33401,7 @@
         <p:spPr>
           <a:xfrm>
             <a:off x="2979000" y="3420360"/>
-            <a:ext cx="1177920" cy="525600"/>
+            <a:ext cx="1177560" cy="525600"/>
           </a:xfrm>
           <a:prstGeom prst="rect">
             <a:avLst/>
@@ -33594,7 +33465,7 @@
         <p:spPr>
           <a:xfrm>
             <a:off x="2211840" y="2269080"/>
-            <a:ext cx="198360" cy="198000"/>
+            <a:ext cx="198000" cy="197640"/>
           </a:xfrm>
           <a:prstGeom prst="rect">
             <a:avLst/>
@@ -33617,7 +33488,7 @@
         <p:spPr>
           <a:xfrm>
             <a:off x="1856520" y="2269080"/>
-            <a:ext cx="198000" cy="198000"/>
+            <a:ext cx="197640" cy="197640"/>
           </a:xfrm>
           <a:prstGeom prst="rect">
             <a:avLst/>
@@ -33640,7 +33511,7 @@
         <p:spPr>
           <a:xfrm>
             <a:off x="1500840" y="2269080"/>
-            <a:ext cx="198360" cy="198000"/>
+            <a:ext cx="198000" cy="197640"/>
           </a:xfrm>
           <a:prstGeom prst="rect">
             <a:avLst/>
@@ -33663,7 +33534,7 @@
         <p:spPr>
           <a:xfrm>
             <a:off x="1145520" y="2269080"/>
-            <a:ext cx="198000" cy="198000"/>
+            <a:ext cx="197640" cy="197640"/>
           </a:xfrm>
           <a:prstGeom prst="rect">
             <a:avLst/>
@@ -33686,7 +33557,7 @@
         <p:spPr>
           <a:xfrm>
             <a:off x="789480" y="2269080"/>
-            <a:ext cx="198360" cy="198000"/>
+            <a:ext cx="198000" cy="197640"/>
           </a:xfrm>
           <a:prstGeom prst="rect">
             <a:avLst/>
@@ -33709,7 +33580,7 @@
         <p:spPr>
           <a:xfrm>
             <a:off x="434160" y="2269080"/>
-            <a:ext cx="198360" cy="198000"/>
+            <a:ext cx="198000" cy="197640"/>
           </a:xfrm>
           <a:prstGeom prst="rect">
             <a:avLst/>
@@ -33728,9 +33599,9 @@
         <p:grpSpPr>
           <a:xfrm>
             <a:off x="2210040" y="2382480"/>
-            <a:ext cx="910440" cy="2816640"/>
+            <a:ext cx="910080" cy="2816280"/>
             <a:chOff x="2210040" y="2382480"/>
-            <a:chExt cx="910440" cy="2816640"/>
+            <a:chExt cx="910080" cy="2816280"/>
           </a:xfrm>
         </p:grpSpPr>
         <p:sp>
@@ -33742,15 +33613,15 @@
           <p:spPr>
             <a:xfrm>
               <a:off x="2775600" y="2556720"/>
-              <a:ext cx="344880" cy="344160"/>
+              <a:ext cx="344520" cy="343800"/>
             </a:xfrm>
             <a:custGeom>
               <a:avLst/>
               <a:gdLst>
-                <a:gd name="textAreaLeft" fmla="*/ 0 w 344880"/>
-                <a:gd name="textAreaRight" fmla="*/ 345600 w 344880"/>
-                <a:gd name="textAreaTop" fmla="*/ 0 h 344160"/>
-                <a:gd name="textAreaBottom" fmla="*/ 344880 h 344160"/>
+                <a:gd name="textAreaLeft" fmla="*/ 0 w 344520"/>
+                <a:gd name="textAreaRight" fmla="*/ 345600 w 344520"/>
+                <a:gd name="textAreaTop" fmla="*/ 0 h 343800"/>
+                <a:gd name="textAreaBottom" fmla="*/ 344880 h 343800"/>
               </a:gdLst>
               <a:ahLst/>
               <a:rect l="textAreaLeft" t="textAreaTop" r="textAreaRight" b="textAreaBottom"/>
@@ -33877,15 +33748,15 @@
           <p:spPr>
             <a:xfrm>
               <a:off x="2775600" y="2556720"/>
-              <a:ext cx="344880" cy="344160"/>
+              <a:ext cx="344520" cy="343800"/>
             </a:xfrm>
             <a:custGeom>
               <a:avLst/>
               <a:gdLst>
-                <a:gd name="textAreaLeft" fmla="*/ 0 w 344880"/>
-                <a:gd name="textAreaRight" fmla="*/ 345600 w 344880"/>
-                <a:gd name="textAreaTop" fmla="*/ 0 h 344160"/>
-                <a:gd name="textAreaBottom" fmla="*/ 344880 h 344160"/>
+                <a:gd name="textAreaLeft" fmla="*/ 0 w 344520"/>
+                <a:gd name="textAreaRight" fmla="*/ 345600 w 344520"/>
+                <a:gd name="textAreaTop" fmla="*/ 0 h 343800"/>
+                <a:gd name="textAreaBottom" fmla="*/ 344880 h 343800"/>
               </a:gdLst>
               <a:ahLst/>
               <a:rect l="textAreaLeft" t="textAreaTop" r="textAreaRight" b="textAreaBottom"/>
@@ -34017,7 +33888,7 @@
           <p:spPr>
             <a:xfrm>
               <a:off x="2567520" y="2382480"/>
-              <a:ext cx="198360" cy="198000"/>
+              <a:ext cx="198000" cy="197640"/>
             </a:xfrm>
             <a:prstGeom prst="rect">
               <a:avLst/>
@@ -34036,15 +33907,15 @@
           <p:spPr>
             <a:xfrm>
               <a:off x="2320560" y="3096720"/>
-              <a:ext cx="344880" cy="344160"/>
+              <a:ext cx="344520" cy="343800"/>
             </a:xfrm>
             <a:custGeom>
               <a:avLst/>
               <a:gdLst>
-                <a:gd name="textAreaLeft" fmla="*/ 0 w 344880"/>
-                <a:gd name="textAreaRight" fmla="*/ 345600 w 344880"/>
-                <a:gd name="textAreaTop" fmla="*/ 0 h 344160"/>
-                <a:gd name="textAreaBottom" fmla="*/ 344880 h 344160"/>
+                <a:gd name="textAreaLeft" fmla="*/ 0 w 344520"/>
+                <a:gd name="textAreaRight" fmla="*/ 345600 w 344520"/>
+                <a:gd name="textAreaTop" fmla="*/ 0 h 343800"/>
+                <a:gd name="textAreaBottom" fmla="*/ 344880 h 343800"/>
               </a:gdLst>
               <a:ahLst/>
               <a:rect l="textAreaLeft" t="textAreaTop" r="textAreaRight" b="textAreaBottom"/>
@@ -34171,15 +34042,15 @@
           <p:spPr>
             <a:xfrm>
               <a:off x="2320560" y="3096720"/>
-              <a:ext cx="344880" cy="344160"/>
+              <a:ext cx="344520" cy="343800"/>
             </a:xfrm>
             <a:custGeom>
               <a:avLst/>
               <a:gdLst>
-                <a:gd name="textAreaLeft" fmla="*/ 0 w 344880"/>
-                <a:gd name="textAreaRight" fmla="*/ 345600 w 344880"/>
-                <a:gd name="textAreaTop" fmla="*/ 0 h 344160"/>
-                <a:gd name="textAreaBottom" fmla="*/ 344880 h 344160"/>
+                <a:gd name="textAreaLeft" fmla="*/ 0 w 344520"/>
+                <a:gd name="textAreaRight" fmla="*/ 345600 w 344520"/>
+                <a:gd name="textAreaTop" fmla="*/ 0 h 343800"/>
+                <a:gd name="textAreaBottom" fmla="*/ 344880 h 343800"/>
               </a:gdLst>
               <a:ahLst/>
               <a:rect l="textAreaLeft" t="textAreaTop" r="textAreaRight" b="textAreaBottom"/>
@@ -34307,15 +34178,15 @@
           <p:spPr>
             <a:xfrm>
               <a:off x="2320560" y="3925080"/>
-              <a:ext cx="344880" cy="344160"/>
+              <a:ext cx="344520" cy="343800"/>
             </a:xfrm>
             <a:custGeom>
               <a:avLst/>
               <a:gdLst>
-                <a:gd name="textAreaLeft" fmla="*/ 0 w 344880"/>
-                <a:gd name="textAreaRight" fmla="*/ 345600 w 344880"/>
-                <a:gd name="textAreaTop" fmla="*/ 0 h 344160"/>
-                <a:gd name="textAreaBottom" fmla="*/ 344880 h 344160"/>
+                <a:gd name="textAreaLeft" fmla="*/ 0 w 344520"/>
+                <a:gd name="textAreaRight" fmla="*/ 345600 w 344520"/>
+                <a:gd name="textAreaTop" fmla="*/ 0 h 343800"/>
+                <a:gd name="textAreaBottom" fmla="*/ 344880 h 343800"/>
               </a:gdLst>
               <a:ahLst/>
               <a:rect l="textAreaLeft" t="textAreaTop" r="textAreaRight" b="textAreaBottom"/>
@@ -34442,15 +34313,15 @@
           <p:spPr>
             <a:xfrm>
               <a:off x="2320560" y="3925080"/>
-              <a:ext cx="344880" cy="344160"/>
+              <a:ext cx="344520" cy="343800"/>
             </a:xfrm>
             <a:custGeom>
               <a:avLst/>
               <a:gdLst>
-                <a:gd name="textAreaLeft" fmla="*/ 0 w 344880"/>
-                <a:gd name="textAreaRight" fmla="*/ 345600 w 344880"/>
-                <a:gd name="textAreaTop" fmla="*/ 0 h 344160"/>
-                <a:gd name="textAreaBottom" fmla="*/ 344880 h 344160"/>
+                <a:gd name="textAreaLeft" fmla="*/ 0 w 344520"/>
+                <a:gd name="textAreaRight" fmla="*/ 345600 w 344520"/>
+                <a:gd name="textAreaTop" fmla="*/ 0 h 343800"/>
+                <a:gd name="textAreaBottom" fmla="*/ 344880 h 343800"/>
               </a:gdLst>
               <a:ahLst/>
               <a:rect l="textAreaLeft" t="textAreaTop" r="textAreaRight" b="textAreaBottom"/>
@@ -34578,15 +34449,15 @@
           <p:spPr>
             <a:xfrm>
               <a:off x="2775600" y="4520520"/>
-              <a:ext cx="344880" cy="344160"/>
+              <a:ext cx="344520" cy="343800"/>
             </a:xfrm>
             <a:custGeom>
               <a:avLst/>
               <a:gdLst>
-                <a:gd name="textAreaLeft" fmla="*/ 0 w 344880"/>
-                <a:gd name="textAreaRight" fmla="*/ 345600 w 344880"/>
-                <a:gd name="textAreaTop" fmla="*/ 0 h 344160"/>
-                <a:gd name="textAreaBottom" fmla="*/ 344880 h 344160"/>
+                <a:gd name="textAreaLeft" fmla="*/ 0 w 344520"/>
+                <a:gd name="textAreaRight" fmla="*/ 345600 w 344520"/>
+                <a:gd name="textAreaTop" fmla="*/ 0 h 343800"/>
+                <a:gd name="textAreaBottom" fmla="*/ 344880 h 343800"/>
               </a:gdLst>
               <a:ahLst/>
               <a:rect l="textAreaLeft" t="textAreaTop" r="textAreaRight" b="textAreaBottom"/>
@@ -34713,15 +34584,15 @@
           <p:spPr>
             <a:xfrm>
               <a:off x="2775600" y="4520520"/>
-              <a:ext cx="344880" cy="344160"/>
+              <a:ext cx="344520" cy="343800"/>
             </a:xfrm>
             <a:custGeom>
               <a:avLst/>
               <a:gdLst>
-                <a:gd name="textAreaLeft" fmla="*/ 0 w 344880"/>
-                <a:gd name="textAreaRight" fmla="*/ 345600 w 344880"/>
-                <a:gd name="textAreaTop" fmla="*/ 0 h 344160"/>
-                <a:gd name="textAreaBottom" fmla="*/ 344880 h 344160"/>
+                <a:gd name="textAreaLeft" fmla="*/ 0 w 344520"/>
+                <a:gd name="textAreaRight" fmla="*/ 345600 w 344520"/>
+                <a:gd name="textAreaTop" fmla="*/ 0 h 343800"/>
+                <a:gd name="textAreaBottom" fmla="*/ 344880 h 343800"/>
               </a:gdLst>
               <a:ahLst/>
               <a:rect l="textAreaLeft" t="textAreaTop" r="textAreaRight" b="textAreaBottom"/>
@@ -34853,7 +34724,7 @@
           <p:spPr>
             <a:xfrm>
               <a:off x="2564640" y="4838040"/>
-              <a:ext cx="198360" cy="198360"/>
+              <a:ext cx="198000" cy="198000"/>
             </a:xfrm>
             <a:prstGeom prst="rect">
               <a:avLst/>
@@ -34876,7 +34747,7 @@
           <p:spPr>
             <a:xfrm>
               <a:off x="2210040" y="5000760"/>
-              <a:ext cx="198000" cy="198360"/>
+              <a:ext cx="197640" cy="198000"/>
             </a:xfrm>
             <a:prstGeom prst="rect">
               <a:avLst/>
@@ -34896,7 +34767,7 @@
         <p:spPr>
           <a:xfrm>
             <a:off x="432360" y="2029680"/>
-            <a:ext cx="1818720" cy="255240"/>
+            <a:ext cx="1818360" cy="255240"/>
           </a:xfrm>
           <a:prstGeom prst="rect">
             <a:avLst/>
@@ -34997,7 +34868,7 @@
         <p:spPr>
           <a:xfrm>
             <a:off x="2021760" y="3154320"/>
-            <a:ext cx="198000" cy="198000"/>
+            <a:ext cx="197640" cy="197640"/>
           </a:xfrm>
           <a:prstGeom prst="rect">
             <a:avLst/>
@@ -35020,7 +34891,7 @@
         <p:spPr>
           <a:xfrm>
             <a:off x="1693440" y="3154320"/>
-            <a:ext cx="198360" cy="198000"/>
+            <a:ext cx="198000" cy="197640"/>
           </a:xfrm>
           <a:prstGeom prst="rect">
             <a:avLst/>
@@ -35043,7 +34914,7 @@
         <p:spPr>
           <a:xfrm>
             <a:off x="1366200" y="3154320"/>
-            <a:ext cx="198000" cy="198000"/>
+            <a:ext cx="197640" cy="197640"/>
           </a:xfrm>
           <a:prstGeom prst="rect">
             <a:avLst/>
@@ -35066,7 +34937,7 @@
         <p:spPr>
           <a:xfrm>
             <a:off x="1038960" y="3154320"/>
-            <a:ext cx="198360" cy="198000"/>
+            <a:ext cx="198000" cy="197640"/>
           </a:xfrm>
           <a:prstGeom prst="rect">
             <a:avLst/>
@@ -35089,7 +34960,7 @@
         <p:spPr>
           <a:xfrm>
             <a:off x="711000" y="3154320"/>
-            <a:ext cx="198360" cy="198000"/>
+            <a:ext cx="198000" cy="197640"/>
           </a:xfrm>
           <a:prstGeom prst="rect">
             <a:avLst/>
@@ -35112,7 +34983,7 @@
         <p:spPr>
           <a:xfrm>
             <a:off x="383400" y="3154320"/>
-            <a:ext cx="198360" cy="198000"/>
+            <a:ext cx="198000" cy="197640"/>
           </a:xfrm>
           <a:prstGeom prst="rect">
             <a:avLst/>
@@ -35131,7 +35002,7 @@
         <p:spPr>
           <a:xfrm>
             <a:off x="383040" y="2916360"/>
-            <a:ext cx="1198080" cy="255240"/>
+            <a:ext cx="1197720" cy="255240"/>
           </a:xfrm>
           <a:prstGeom prst="rect">
             <a:avLst/>
@@ -35212,7 +35083,7 @@
         <p:spPr>
           <a:xfrm>
             <a:off x="2021760" y="4116960"/>
-            <a:ext cx="198000" cy="198000"/>
+            <a:ext cx="197640" cy="197640"/>
           </a:xfrm>
           <a:prstGeom prst="rect">
             <a:avLst/>
@@ -35235,7 +35106,7 @@
         <p:spPr>
           <a:xfrm>
             <a:off x="1693440" y="4116960"/>
-            <a:ext cx="198360" cy="198000"/>
+            <a:ext cx="198000" cy="197640"/>
           </a:xfrm>
           <a:prstGeom prst="rect">
             <a:avLst/>
@@ -35258,7 +35129,7 @@
         <p:spPr>
           <a:xfrm>
             <a:off x="1366200" y="4116960"/>
-            <a:ext cx="198000" cy="198000"/>
+            <a:ext cx="197640" cy="197640"/>
           </a:xfrm>
           <a:prstGeom prst="rect">
             <a:avLst/>
@@ -35281,7 +35152,7 @@
         <p:spPr>
           <a:xfrm>
             <a:off x="1038960" y="4116960"/>
-            <a:ext cx="198360" cy="198000"/>
+            <a:ext cx="198000" cy="197640"/>
           </a:xfrm>
           <a:prstGeom prst="rect">
             <a:avLst/>
@@ -35304,7 +35175,7 @@
         <p:spPr>
           <a:xfrm>
             <a:off x="711000" y="4116960"/>
-            <a:ext cx="198360" cy="198000"/>
+            <a:ext cx="198000" cy="197640"/>
           </a:xfrm>
           <a:prstGeom prst="rect">
             <a:avLst/>
@@ -35327,7 +35198,7 @@
         <p:spPr>
           <a:xfrm>
             <a:off x="383400" y="4116960"/>
-            <a:ext cx="198360" cy="198000"/>
+            <a:ext cx="198000" cy="197640"/>
           </a:xfrm>
           <a:prstGeom prst="rect">
             <a:avLst/>
@@ -35346,7 +35217,7 @@
         <p:spPr>
           <a:xfrm>
             <a:off x="383040" y="3666960"/>
-            <a:ext cx="1705680" cy="468000"/>
+            <a:ext cx="1705320" cy="468000"/>
           </a:xfrm>
           <a:prstGeom prst="rect">
             <a:avLst/>
@@ -35457,7 +35328,7 @@
         <p:spPr>
           <a:xfrm>
             <a:off x="1854360" y="5000760"/>
-            <a:ext cx="198360" cy="198360"/>
+            <a:ext cx="198000" cy="198000"/>
           </a:xfrm>
           <a:prstGeom prst="rect">
             <a:avLst/>
@@ -35480,7 +35351,7 @@
         <p:spPr>
           <a:xfrm>
             <a:off x="1499760" y="5000760"/>
-            <a:ext cx="198000" cy="198360"/>
+            <a:ext cx="197640" cy="198000"/>
           </a:xfrm>
           <a:prstGeom prst="rect">
             <a:avLst/>
@@ -35503,7 +35374,7 @@
         <p:spPr>
           <a:xfrm>
             <a:off x="1144800" y="5000760"/>
-            <a:ext cx="198360" cy="198360"/>
+            <a:ext cx="198000" cy="198000"/>
           </a:xfrm>
           <a:prstGeom prst="rect">
             <a:avLst/>
@@ -35526,7 +35397,7 @@
         <p:spPr>
           <a:xfrm>
             <a:off x="789480" y="5000760"/>
-            <a:ext cx="198360" cy="198360"/>
+            <a:ext cx="198000" cy="198000"/>
           </a:xfrm>
           <a:prstGeom prst="rect">
             <a:avLst/>
@@ -35549,7 +35420,7 @@
         <p:spPr>
           <a:xfrm>
             <a:off x="434880" y="5000760"/>
-            <a:ext cx="198360" cy="198360"/>
+            <a:ext cx="198000" cy="198000"/>
           </a:xfrm>
           <a:prstGeom prst="rect">
             <a:avLst/>
@@ -35568,7 +35439,7 @@
         <p:spPr>
           <a:xfrm>
             <a:off x="432360" y="4755960"/>
-            <a:ext cx="1792440" cy="255240"/>
+            <a:ext cx="1792080" cy="255240"/>
           </a:xfrm>
           <a:prstGeom prst="rect">
             <a:avLst/>
@@ -35645,7 +35516,7 @@
         <p:spPr>
           <a:xfrm>
             <a:off x="7020360" y="3073680"/>
-            <a:ext cx="1439640" cy="894960"/>
+            <a:ext cx="1439280" cy="894960"/>
           </a:xfrm>
           <a:prstGeom prst="rect">
             <a:avLst/>
@@ -35723,7 +35594,7 @@
         <p:spPr>
           <a:xfrm>
             <a:off x="6668280" y="4397760"/>
-            <a:ext cx="2112480" cy="560880"/>
+            <a:ext cx="2112120" cy="560880"/>
           </a:xfrm>
           <a:prstGeom prst="rect">
             <a:avLst/>
@@ -35847,7 +35718,7 @@
         <p:spPr>
           <a:xfrm>
             <a:off x="6408000" y="1105920"/>
-            <a:ext cx="2663640" cy="1860120"/>
+            <a:ext cx="2663280" cy="1859760"/>
           </a:xfrm>
           <a:prstGeom prst="rect">
             <a:avLst/>
@@ -35900,7 +35771,7 @@
         <p:spPr>
           <a:xfrm>
             <a:off x="2057760" y="2264400"/>
-            <a:ext cx="5117400" cy="2206080"/>
+            <a:ext cx="5117040" cy="2205720"/>
           </a:xfrm>
           <a:prstGeom prst="rect">
             <a:avLst/>
@@ -35999,7 +35870,7 @@
         <p:spPr>
           <a:xfrm>
             <a:off x="7700040" y="27000"/>
-            <a:ext cx="222840" cy="226080"/>
+            <a:ext cx="222480" cy="226080"/>
           </a:xfrm>
           <a:prstGeom prst="rect">
             <a:avLst/>
@@ -36086,7 +35957,7 @@
         <p:spPr>
           <a:xfrm>
             <a:off x="801000" y="2312280"/>
-            <a:ext cx="7658640" cy="743400"/>
+            <a:ext cx="7658280" cy="743400"/>
           </a:xfrm>
           <a:prstGeom prst="rect">
             <a:avLst/>
@@ -36183,7 +36054,7 @@
         <p:spPr>
           <a:xfrm>
             <a:off x="801000" y="3809160"/>
-            <a:ext cx="4344120" cy="1218960"/>
+            <a:ext cx="4343760" cy="1218960"/>
           </a:xfrm>
           <a:prstGeom prst="rect">
             <a:avLst/>
@@ -36220,27 +36091,7 @@
                 <a:latin typeface="Arial"/>
                 <a:ea typeface="DejaVu Sans"/>
               </a:rPr>
-              <a:t>Rappel</a:t>
-            </a:r>
-            <a:r>
-              <a:rPr b="0" lang="fr-FR" sz="2400" spc="1" strike="noStrike">
-                <a:solidFill>
-                  <a:srgbClr val="f3f1dc"/>
-                </a:solidFill>
-                <a:latin typeface="Arial"/>
-                <a:ea typeface="DejaVu Sans"/>
-              </a:rPr>
-              <a:t> </a:t>
-            </a:r>
-            <a:r>
-              <a:rPr b="0" lang="fr-FR" sz="2400" spc="-1" strike="noStrike">
-                <a:solidFill>
-                  <a:srgbClr val="f3f1dc"/>
-                </a:solidFill>
-                <a:latin typeface="Arial"/>
-                <a:ea typeface="DejaVu Sans"/>
-              </a:rPr>
-              <a:t>de</a:t>
+              <a:t>Rappel de</a:t>
             </a:r>
             <a:r>
               <a:rPr b="0" lang="fr-FR" sz="2400" spc="-32" strike="noStrike">
@@ -36376,7 +36227,7 @@
         <p:spPr>
           <a:xfrm>
             <a:off x="7700040" y="27000"/>
-            <a:ext cx="124200" cy="226080"/>
+            <a:ext cx="123840" cy="226080"/>
           </a:xfrm>
           <a:prstGeom prst="rect">
             <a:avLst/>
@@ -36467,7 +36318,7 @@
         <p:spPr>
           <a:xfrm>
             <a:off x="536040" y="526320"/>
-            <a:ext cx="7741080" cy="966600"/>
+            <a:ext cx="7740720" cy="966240"/>
           </a:xfrm>
           <a:prstGeom prst="rect">
             <a:avLst/>
@@ -36575,7 +36426,7 @@
         <p:spPr>
           <a:xfrm>
             <a:off x="536040" y="1322280"/>
-            <a:ext cx="7917840" cy="3872880"/>
+            <a:ext cx="7917480" cy="3544560"/>
           </a:xfrm>
           <a:prstGeom prst="rect">
             <a:avLst/>
@@ -36684,7 +36535,7 @@
               <a:t>disponibles</a:t>
             </a:r>
             <a:r>
-              <a:rPr b="0" lang="fr-FR" sz="2400" spc="29" strike="noStrike">
+              <a:rPr b="0" lang="fr-FR" sz="2400" spc="26" strike="noStrike">
                 <a:solidFill>
                   <a:srgbClr val="292934"/>
                 </a:solidFill>
@@ -36861,7 +36712,17 @@
                 <a:latin typeface="Arial"/>
                 <a:ea typeface="DejaVu Sans"/>
               </a:rPr>
-              <a:t>les</a:t>
+              <a:t>l’</a:t>
+            </a:r>
+            <a:r>
+              <a:rPr b="0" lang="fr-FR" sz="2400" spc="-1" strike="noStrike">
+                <a:solidFill>
+                  <a:srgbClr val="292934"/>
+                </a:solidFill>
+                <a:latin typeface="Arial"/>
+                <a:ea typeface="DejaVu Sans"/>
+              </a:rPr>
+              <a:t>année</a:t>
             </a:r>
             <a:r>
               <a:rPr b="0" lang="fr-FR" sz="2400" spc="-15" strike="noStrike">
@@ -36872,56 +36733,6 @@
                 <a:ea typeface="DejaVu Sans"/>
               </a:rPr>
               <a:t> </a:t>
-            </a:r>
-            <a:r>
-              <a:rPr b="0" lang="fr-FR" sz="2400" spc="-1" strike="noStrike">
-                <a:solidFill>
-                  <a:srgbClr val="292934"/>
-                </a:solidFill>
-                <a:latin typeface="Arial"/>
-                <a:ea typeface="DejaVu Sans"/>
-              </a:rPr>
-              <a:t>années</a:t>
-            </a:r>
-            <a:r>
-              <a:rPr b="0" lang="fr-FR" sz="2400" spc="-15" strike="noStrike">
-                <a:solidFill>
-                  <a:srgbClr val="292934"/>
-                </a:solidFill>
-                <a:latin typeface="Arial"/>
-                <a:ea typeface="DejaVu Sans"/>
-              </a:rPr>
-              <a:t> </a:t>
-            </a:r>
-            <a:r>
-              <a:rPr b="0" lang="fr-FR" sz="2400" spc="-1" strike="noStrike">
-                <a:solidFill>
-                  <a:srgbClr val="292934"/>
-                </a:solidFill>
-                <a:latin typeface="Arial"/>
-                <a:ea typeface="DejaVu Sans"/>
-              </a:rPr>
-              <a:t>2015</a:t>
-            </a:r>
-            <a:r>
-              <a:rPr b="0" lang="fr-FR" sz="2400" spc="-12" strike="noStrike">
-                <a:solidFill>
-                  <a:srgbClr val="292934"/>
-                </a:solidFill>
-                <a:latin typeface="Arial"/>
-                <a:ea typeface="DejaVu Sans"/>
-              </a:rPr>
-              <a:t> </a:t>
-            </a:r>
-            <a:r>
-              <a:rPr b="0" lang="fr-FR" sz="2400" spc="-26" strike="noStrike">
-                <a:solidFill>
-                  <a:srgbClr val="292934"/>
-                </a:solidFill>
-                <a:latin typeface="Arial"/>
-                <a:ea typeface="DejaVu Sans"/>
-              </a:rPr>
-              <a:t>et </a:t>
             </a:r>
             <a:r>
               <a:rPr b="0" lang="fr-FR" sz="2400" spc="-21" strike="noStrike">
@@ -37861,7 +37672,7 @@
         <p:spPr>
           <a:xfrm>
             <a:off x="7255800" y="625320"/>
-            <a:ext cx="1582920" cy="459720"/>
+            <a:ext cx="1582560" cy="459360"/>
           </a:xfrm>
           <a:prstGeom prst="rect">
             <a:avLst/>
@@ -37880,7 +37691,7 @@
         <p:spPr>
           <a:xfrm>
             <a:off x="7700040" y="27000"/>
-            <a:ext cx="124200" cy="226080"/>
+            <a:ext cx="123840" cy="226080"/>
           </a:xfrm>
           <a:prstGeom prst="rect">
             <a:avLst/>
@@ -37971,7 +37782,7 @@
         <p:spPr>
           <a:xfrm>
             <a:off x="536040" y="526320"/>
-            <a:ext cx="7741080" cy="966600"/>
+            <a:ext cx="7740720" cy="966240"/>
           </a:xfrm>
           <a:prstGeom prst="rect">
             <a:avLst/>
@@ -38079,7 +37890,7 @@
         <p:spPr>
           <a:xfrm>
             <a:off x="536040" y="1286280"/>
-            <a:ext cx="8055000" cy="4007160"/>
+            <a:ext cx="8054640" cy="4007160"/>
           </a:xfrm>
           <a:prstGeom prst="rect">
             <a:avLst/>
@@ -39020,7 +38831,7 @@
         <p:spPr>
           <a:xfrm>
             <a:off x="7700040" y="27000"/>
-            <a:ext cx="124200" cy="226080"/>
+            <a:ext cx="123840" cy="226080"/>
           </a:xfrm>
           <a:prstGeom prst="rect">
             <a:avLst/>
@@ -39081,7 +38892,7 @@
         <p:spPr>
           <a:xfrm>
             <a:off x="7255800" y="625320"/>
-            <a:ext cx="1582920" cy="459720"/>
+            <a:ext cx="1582560" cy="459360"/>
           </a:xfrm>
           <a:prstGeom prst="rect">
             <a:avLst/>
@@ -39130,7 +38941,7 @@
         <p:spPr>
           <a:xfrm>
             <a:off x="801000" y="2264400"/>
-            <a:ext cx="7414920" cy="1474560"/>
+            <a:ext cx="7414560" cy="1474560"/>
           </a:xfrm>
           <a:prstGeom prst="rect">
             <a:avLst/>
@@ -39297,7 +39108,7 @@
         <p:spPr>
           <a:xfrm>
             <a:off x="801000" y="3809160"/>
-            <a:ext cx="2750760" cy="1231920"/>
+            <a:ext cx="2750400" cy="1231920"/>
           </a:xfrm>
           <a:prstGeom prst="rect">
             <a:avLst/>
@@ -39400,7 +39211,7 @@
         <p:spPr>
           <a:xfrm>
             <a:off x="7700040" y="27000"/>
-            <a:ext cx="124200" cy="226080"/>
+            <a:ext cx="123840" cy="226080"/>
           </a:xfrm>
           <a:prstGeom prst="rect">
             <a:avLst/>
@@ -39491,7 +39302,7 @@
         <p:spPr>
           <a:xfrm>
             <a:off x="536040" y="526320"/>
-            <a:ext cx="7741080" cy="966240"/>
+            <a:ext cx="7740720" cy="965880"/>
           </a:xfrm>
           <a:prstGeom prst="rect">
             <a:avLst/>
@@ -39545,7 +39356,7 @@
         <p:spPr>
           <a:xfrm>
             <a:off x="258120" y="1308960"/>
-            <a:ext cx="6374160" cy="4048560"/>
+            <a:ext cx="6373800" cy="2798280"/>
           </a:xfrm>
           <a:prstGeom prst="rect">
             <a:avLst/>
@@ -39602,10 +39413,10 @@
                 <a:latin typeface="Arial"/>
                 <a:ea typeface="DejaVu Sans"/>
               </a:rPr>
-              <a:t>»</a:t>
-            </a:r>
-            <a:r>
-              <a:rPr b="1" lang="fr-FR" sz="1700" spc="1" strike="noStrike">
+              <a:t>» du</a:t>
+            </a:r>
+            <a:r>
+              <a:rPr b="1" lang="fr-FR" sz="1700" spc="-7" strike="noStrike">
                 <a:solidFill>
                   <a:srgbClr val="292934"/>
                 </a:solidFill>
@@ -39622,47 +39433,7 @@
                 <a:latin typeface="Arial"/>
                 <a:ea typeface="DejaVu Sans"/>
               </a:rPr>
-              <a:t>du</a:t>
-            </a:r>
-            <a:r>
-              <a:rPr b="1" lang="fr-FR" sz="1700" spc="-7" strike="noStrike">
-                <a:solidFill>
-                  <a:srgbClr val="292934"/>
-                </a:solidFill>
-                <a:latin typeface="Arial"/>
-                <a:ea typeface="DejaVu Sans"/>
-              </a:rPr>
-              <a:t> </a:t>
-            </a:r>
-            <a:r>
-              <a:rPr b="1" lang="fr-FR" sz="1700" spc="-1" strike="noStrike">
-                <a:solidFill>
-                  <a:srgbClr val="292934"/>
-                </a:solidFill>
-                <a:latin typeface="Arial"/>
-                <a:ea typeface="DejaVu Sans"/>
-              </a:rPr>
-              <a:t>jeu de</a:t>
-            </a:r>
-            <a:r>
-              <a:rPr b="1" lang="fr-FR" sz="1700" spc="1" strike="noStrike">
-                <a:solidFill>
-                  <a:srgbClr val="292934"/>
-                </a:solidFill>
-                <a:latin typeface="Arial"/>
-                <a:ea typeface="DejaVu Sans"/>
-              </a:rPr>
-              <a:t> </a:t>
-            </a:r>
-            <a:r>
-              <a:rPr b="1" lang="fr-FR" sz="1700" spc="-1" strike="noStrike">
-                <a:solidFill>
-                  <a:srgbClr val="292934"/>
-                </a:solidFill>
-                <a:latin typeface="Arial"/>
-                <a:ea typeface="DejaVu Sans"/>
-              </a:rPr>
-              <a:t>données</a:t>
+              <a:t>jeu de données</a:t>
             </a:r>
             <a:r>
               <a:rPr b="1" lang="fr-FR" sz="1700" spc="-15" strike="noStrike">
@@ -39714,147 +39485,7 @@
                 <a:latin typeface="Arial"/>
                 <a:ea typeface="DejaVu Sans"/>
               </a:rPr>
-              <a:t>Données</a:t>
-            </a:r>
-            <a:r>
-              <a:rPr b="0" lang="fr-FR" sz="1700" spc="-26" strike="noStrike">
-                <a:solidFill>
-                  <a:srgbClr val="292934"/>
-                </a:solidFill>
-                <a:latin typeface="Arial"/>
-                <a:ea typeface="DejaVu Sans"/>
-              </a:rPr>
-              <a:t> </a:t>
-            </a:r>
-            <a:r>
-              <a:rPr b="0" lang="fr-FR" sz="1700" spc="-1" strike="noStrike">
-                <a:solidFill>
-                  <a:srgbClr val="292934"/>
-                </a:solidFill>
-                <a:latin typeface="Arial"/>
-                <a:ea typeface="DejaVu Sans"/>
-              </a:rPr>
-              <a:t>2015 et</a:t>
-            </a:r>
-            <a:r>
-              <a:rPr b="0" lang="fr-FR" sz="1700" spc="-15" strike="noStrike">
-                <a:solidFill>
-                  <a:srgbClr val="292934"/>
-                </a:solidFill>
-                <a:latin typeface="Arial"/>
-                <a:ea typeface="DejaVu Sans"/>
-              </a:rPr>
-              <a:t> </a:t>
-            </a:r>
-            <a:r>
-              <a:rPr b="0" lang="fr-FR" sz="1700" spc="-1" strike="noStrike">
-                <a:solidFill>
-                  <a:srgbClr val="292934"/>
-                </a:solidFill>
-                <a:latin typeface="Arial"/>
-                <a:ea typeface="DejaVu Sans"/>
-              </a:rPr>
-              <a:t>2016</a:t>
-            </a:r>
-            <a:r>
-              <a:rPr b="0" lang="fr-FR" sz="1700" spc="-12" strike="noStrike">
-                <a:solidFill>
-                  <a:srgbClr val="292934"/>
-                </a:solidFill>
-                <a:latin typeface="Arial"/>
-                <a:ea typeface="DejaVu Sans"/>
-              </a:rPr>
-              <a:t> </a:t>
-            </a:r>
-            <a:r>
-              <a:rPr b="0" lang="fr-FR" sz="1700" spc="-1" strike="noStrike">
-                <a:solidFill>
-                  <a:srgbClr val="292934"/>
-                </a:solidFill>
-                <a:latin typeface="Arial"/>
-                <a:ea typeface="DejaVu Sans"/>
-              </a:rPr>
-              <a:t>non</a:t>
-            </a:r>
-            <a:r>
-              <a:rPr b="0" lang="fr-FR" sz="1700" spc="-7" strike="noStrike">
-                <a:solidFill>
-                  <a:srgbClr val="292934"/>
-                </a:solidFill>
-                <a:latin typeface="Arial"/>
-                <a:ea typeface="DejaVu Sans"/>
-              </a:rPr>
-              <a:t> </a:t>
-            </a:r>
-            <a:r>
-              <a:rPr b="0" lang="fr-FR" sz="1700" spc="-1" strike="noStrike">
-                <a:solidFill>
-                  <a:srgbClr val="292934"/>
-                </a:solidFill>
-                <a:latin typeface="Arial"/>
-                <a:ea typeface="DejaVu Sans"/>
-              </a:rPr>
-              <a:t>alignées</a:t>
-            </a:r>
-            <a:r>
-              <a:rPr b="0" lang="fr-FR" sz="1700" spc="-21" strike="noStrike">
-                <a:solidFill>
-                  <a:srgbClr val="292934"/>
-                </a:solidFill>
-                <a:latin typeface="Arial"/>
-                <a:ea typeface="DejaVu Sans"/>
-              </a:rPr>
-              <a:t> </a:t>
-            </a:r>
-            <a:r>
-              <a:rPr b="0" lang="fr-FR" sz="1700" spc="-1" strike="noStrike">
-                <a:solidFill>
-                  <a:srgbClr val="292934"/>
-                </a:solidFill>
-                <a:latin typeface="Arial"/>
-                <a:ea typeface="DejaVu Sans"/>
-              </a:rPr>
-              <a:t>:</a:t>
-            </a:r>
-            <a:r>
-              <a:rPr b="0" lang="fr-FR" sz="1700" spc="-15" strike="noStrike">
-                <a:solidFill>
-                  <a:srgbClr val="292934"/>
-                </a:solidFill>
-                <a:latin typeface="Arial"/>
-                <a:ea typeface="DejaVu Sans"/>
-              </a:rPr>
-              <a:t> </a:t>
-            </a:r>
-            <a:r>
-              <a:rPr b="0" lang="fr-FR" sz="1700" spc="-1" strike="noStrike">
-                <a:solidFill>
-                  <a:srgbClr val="292934"/>
-                </a:solidFill>
-                <a:latin typeface="Arial"/>
-                <a:ea typeface="DejaVu Sans"/>
-              </a:rPr>
-              <a:t>(colonnes</a:t>
-            </a:r>
-            <a:r>
-              <a:rPr b="0" lang="fr-FR" sz="1700" spc="-15" strike="noStrike">
-                <a:solidFill>
-                  <a:srgbClr val="292934"/>
-                </a:solidFill>
-                <a:latin typeface="Arial"/>
-                <a:ea typeface="DejaVu Sans"/>
-              </a:rPr>
-              <a:t> </a:t>
-            </a:r>
-            <a:r>
-              <a:rPr b="0" lang="fr-FR" sz="1700" spc="-12" strike="noStrike">
-                <a:solidFill>
-                  <a:srgbClr val="292934"/>
-                </a:solidFill>
-                <a:latin typeface="Arial"/>
-                <a:ea typeface="DejaVu Sans"/>
-              </a:rPr>
-              <a:t>différentes,</a:t>
+              <a:t> </a:t>
             </a:r>
             <a:endParaRPr b="0" lang="fr-FR" sz="1700" spc="-1" strike="noStrike">
               <a:solidFill>
@@ -39864,278 +39495,16 @@
             </a:endParaRPr>
           </a:p>
           <a:p>
-            <a:pPr marL="195120">
+            <a:pPr marL="195480" indent="-182880">
               <a:lnSpc>
                 <a:spcPts val="1834"/>
               </a:lnSpc>
-              <a:tabLst>
-                <a:tab algn="l" pos="195480"/>
-              </a:tabLst>
-            </a:pPr>
-            <a:r>
-              <a:rPr b="0" lang="fr-FR" sz="1700" spc="-1" strike="noStrike">
-                <a:solidFill>
-                  <a:srgbClr val="292934"/>
-                </a:solidFill>
-                <a:latin typeface="Arial"/>
-                <a:ea typeface="DejaVu Sans"/>
-              </a:rPr>
-              <a:t>informations</a:t>
-            </a:r>
-            <a:r>
-              <a:rPr b="0" lang="fr-FR" sz="1700" spc="-66" strike="noStrike">
-                <a:solidFill>
-                  <a:srgbClr val="292934"/>
-                </a:solidFill>
-                <a:latin typeface="Arial"/>
-                <a:ea typeface="DejaVu Sans"/>
-              </a:rPr>
-              <a:t> </a:t>
-            </a:r>
-            <a:r>
-              <a:rPr b="0" lang="fr-FR" sz="1700" spc="-1" strike="noStrike">
-                <a:solidFill>
-                  <a:srgbClr val="292934"/>
-                </a:solidFill>
-                <a:latin typeface="Arial"/>
-                <a:ea typeface="DejaVu Sans"/>
-              </a:rPr>
-              <a:t>réparties</a:t>
-            </a:r>
-            <a:r>
-              <a:rPr b="0" lang="fr-FR" sz="1700" spc="-46" strike="noStrike">
-                <a:solidFill>
-                  <a:srgbClr val="292934"/>
-                </a:solidFill>
-                <a:latin typeface="Arial"/>
-                <a:ea typeface="DejaVu Sans"/>
-              </a:rPr>
-              <a:t> </a:t>
-            </a:r>
-            <a:r>
-              <a:rPr b="0" lang="fr-FR" sz="1700" spc="-12" strike="noStrike">
-                <a:solidFill>
-                  <a:srgbClr val="292934"/>
-                </a:solidFill>
-                <a:latin typeface="Arial"/>
-                <a:ea typeface="DejaVu Sans"/>
-              </a:rPr>
-              <a:t>différemment)</a:t>
-            </a:r>
-            <a:endParaRPr b="0" lang="fr-FR" sz="1700" spc="-1" strike="noStrike">
-              <a:solidFill>
-                <a:srgbClr val="000000"/>
-              </a:solidFill>
-              <a:latin typeface="Arial"/>
-            </a:endParaRPr>
-          </a:p>
-          <a:p>
-            <a:pPr marL="195120">
-              <a:lnSpc>
-                <a:spcPct val="100000"/>
-              </a:lnSpc>
-              <a:spcBef>
-                <a:spcPts val="26"/>
-              </a:spcBef>
-              <a:tabLst>
-                <a:tab algn="l" pos="195480"/>
-              </a:tabLst>
-            </a:pPr>
-            <a:endParaRPr b="0" lang="fr-FR" sz="1750" spc="-1" strike="noStrike">
-              <a:solidFill>
-                <a:srgbClr val="000000"/>
-              </a:solidFill>
-              <a:latin typeface="Arial"/>
-            </a:endParaRPr>
-          </a:p>
-          <a:p>
-            <a:pPr marL="195480" indent="-182880">
-              <a:lnSpc>
-                <a:spcPct val="100000"/>
-              </a:lnSpc>
-              <a:spcBef>
-                <a:spcPts val="6"/>
-              </a:spcBef>
               <a:buClr>
                 <a:srgbClr val="92a199"/>
               </a:buClr>
               <a:buSzPct val="85000"/>
               <a:buFont typeface="Symbol"/>
               <a:buChar char=""/>
-              <a:tabLst>
-                <a:tab algn="l" pos="195480"/>
-              </a:tabLst>
-            </a:pPr>
-            <a:r>
-              <a:rPr b="0" lang="fr-FR" sz="1700" spc="-1" strike="noStrike">
-                <a:solidFill>
-                  <a:srgbClr val="292934"/>
-                </a:solidFill>
-                <a:latin typeface="Arial"/>
-                <a:ea typeface="DejaVu Sans"/>
-              </a:rPr>
-              <a:t>Casse</a:t>
-            </a:r>
-            <a:r>
-              <a:rPr b="0" lang="fr-FR" sz="1700" spc="-21" strike="noStrike">
-                <a:solidFill>
-                  <a:srgbClr val="292934"/>
-                </a:solidFill>
-                <a:latin typeface="Arial"/>
-                <a:ea typeface="DejaVu Sans"/>
-              </a:rPr>
-              <a:t> </a:t>
-            </a:r>
-            <a:r>
-              <a:rPr b="0" lang="fr-FR" sz="1700" spc="-1" strike="noStrike">
-                <a:solidFill>
-                  <a:srgbClr val="292934"/>
-                </a:solidFill>
-                <a:latin typeface="Arial"/>
-                <a:ea typeface="DejaVu Sans"/>
-              </a:rPr>
-              <a:t>de</a:t>
-            </a:r>
-            <a:r>
-              <a:rPr b="0" lang="fr-FR" sz="1700" spc="-12" strike="noStrike">
-                <a:solidFill>
-                  <a:srgbClr val="292934"/>
-                </a:solidFill>
-                <a:latin typeface="Arial"/>
-                <a:ea typeface="DejaVu Sans"/>
-              </a:rPr>
-              <a:t> </a:t>
-            </a:r>
-            <a:r>
-              <a:rPr b="0" lang="fr-FR" sz="1700" spc="-1" strike="noStrike">
-                <a:solidFill>
-                  <a:srgbClr val="292934"/>
-                </a:solidFill>
-                <a:latin typeface="Arial"/>
-                <a:ea typeface="DejaVu Sans"/>
-              </a:rPr>
-              <a:t>certaines</a:t>
-            </a:r>
-            <a:r>
-              <a:rPr b="0" lang="fr-FR" sz="1700" spc="-7" strike="noStrike">
-                <a:solidFill>
-                  <a:srgbClr val="292934"/>
-                </a:solidFill>
-                <a:latin typeface="Arial"/>
-                <a:ea typeface="DejaVu Sans"/>
-              </a:rPr>
-              <a:t> </a:t>
-            </a:r>
-            <a:r>
-              <a:rPr b="0" lang="fr-FR" sz="1700" spc="-1" strike="noStrike">
-                <a:solidFill>
-                  <a:srgbClr val="292934"/>
-                </a:solidFill>
-                <a:latin typeface="Arial"/>
-                <a:ea typeface="DejaVu Sans"/>
-              </a:rPr>
-              <a:t>colonnes</a:t>
-            </a:r>
-            <a:r>
-              <a:rPr b="0" lang="fr-FR" sz="1700" spc="-7" strike="noStrike">
-                <a:solidFill>
-                  <a:srgbClr val="292934"/>
-                </a:solidFill>
-                <a:latin typeface="Arial"/>
-                <a:ea typeface="DejaVu Sans"/>
-              </a:rPr>
-              <a:t> </a:t>
-            </a:r>
-            <a:r>
-              <a:rPr b="0" lang="fr-FR" sz="1700" spc="-1" strike="noStrike">
-                <a:solidFill>
-                  <a:srgbClr val="292934"/>
-                </a:solidFill>
-                <a:latin typeface="Arial"/>
-                <a:ea typeface="DejaVu Sans"/>
-              </a:rPr>
-              <a:t>/</a:t>
-            </a:r>
-            <a:r>
-              <a:rPr b="0" lang="fr-FR" sz="1700" spc="-12" strike="noStrike">
-                <a:solidFill>
-                  <a:srgbClr val="292934"/>
-                </a:solidFill>
-                <a:latin typeface="Arial"/>
-                <a:ea typeface="DejaVu Sans"/>
-              </a:rPr>
-              <a:t> </a:t>
-            </a:r>
-            <a:r>
-              <a:rPr b="0" lang="fr-FR" sz="1700" spc="-1" strike="noStrike">
-                <a:solidFill>
-                  <a:srgbClr val="292934"/>
-                </a:solidFill>
-                <a:latin typeface="Arial"/>
-                <a:ea typeface="DejaVu Sans"/>
-              </a:rPr>
-              <a:t>informations</a:t>
-            </a:r>
-            <a:r>
-              <a:rPr b="0" lang="fr-FR" sz="1700" spc="-7" strike="noStrike">
-                <a:solidFill>
-                  <a:srgbClr val="292934"/>
-                </a:solidFill>
-                <a:latin typeface="Arial"/>
-                <a:ea typeface="DejaVu Sans"/>
-              </a:rPr>
-              <a:t> </a:t>
-            </a:r>
-            <a:r>
-              <a:rPr b="0" lang="fr-FR" sz="1700" spc="-12" strike="noStrike">
-                <a:solidFill>
-                  <a:srgbClr val="292934"/>
-                </a:solidFill>
-                <a:latin typeface="Arial"/>
-                <a:ea typeface="DejaVu Sans"/>
-              </a:rPr>
-              <a:t>quasi-identiques</a:t>
-            </a:r>
-            <a:endParaRPr b="0" lang="fr-FR" sz="1700" spc="-1" strike="noStrike">
-              <a:solidFill>
-                <a:srgbClr val="000000"/>
-              </a:solidFill>
-              <a:latin typeface="Arial"/>
-            </a:endParaRPr>
-          </a:p>
-          <a:p>
-            <a:pPr>
-              <a:lnSpc>
-                <a:spcPct val="100000"/>
-              </a:lnSpc>
-              <a:spcBef>
-                <a:spcPts val="26"/>
-              </a:spcBef>
-              <a:tabLst>
-                <a:tab algn="l" pos="195480"/>
-              </a:tabLst>
-            </a:pPr>
-            <a:endParaRPr b="0" lang="fr-FR" sz="1750" spc="-1" strike="noStrike">
-              <a:solidFill>
-                <a:srgbClr val="000000"/>
-              </a:solidFill>
-              <a:latin typeface="Arial"/>
-            </a:endParaRPr>
-          </a:p>
-          <a:p>
-            <a:pPr marL="195480" indent="-182880">
-              <a:lnSpc>
-                <a:spcPct val="100000"/>
-              </a:lnSpc>
-              <a:spcBef>
-                <a:spcPts val="6"/>
-              </a:spcBef>
-              <a:buClr>
-                <a:srgbClr val="92a199"/>
-              </a:buClr>
-              <a:buSzPct val="85000"/>
-              <a:buFont typeface="Arial"/>
-              <a:buChar char="•"/>
               <a:tabLst>
                 <a:tab algn="l" pos="195480"/>
               </a:tabLst>
@@ -41211,303 +40580,6 @@
                 <a:tab algn="l" pos="469800"/>
               </a:tabLst>
             </a:pPr>
-            <a:r>
-              <a:rPr b="0" lang="fr-FR" sz="1400" spc="-1" strike="noStrike">
-                <a:solidFill>
-                  <a:srgbClr val="292934"/>
-                </a:solidFill>
-                <a:latin typeface="Arial"/>
-                <a:ea typeface="DejaVu Sans"/>
-              </a:rPr>
-              <a:t>Ecart</a:t>
-            </a:r>
-            <a:r>
-              <a:rPr b="0" lang="fr-FR" sz="1400" spc="-41" strike="noStrike">
-                <a:solidFill>
-                  <a:srgbClr val="292934"/>
-                </a:solidFill>
-                <a:latin typeface="Arial"/>
-                <a:ea typeface="DejaVu Sans"/>
-              </a:rPr>
-              <a:t> </a:t>
-            </a:r>
-            <a:r>
-              <a:rPr b="0" lang="fr-FR" sz="1400" spc="-1" strike="noStrike">
-                <a:solidFill>
-                  <a:srgbClr val="292934"/>
-                </a:solidFill>
-                <a:latin typeface="Arial"/>
-                <a:ea typeface="DejaVu Sans"/>
-              </a:rPr>
-              <a:t>de</a:t>
-            </a:r>
-            <a:r>
-              <a:rPr b="0" lang="fr-FR" sz="1400" spc="-21" strike="noStrike">
-                <a:solidFill>
-                  <a:srgbClr val="292934"/>
-                </a:solidFill>
-                <a:latin typeface="Arial"/>
-                <a:ea typeface="DejaVu Sans"/>
-              </a:rPr>
-              <a:t> </a:t>
-            </a:r>
-            <a:r>
-              <a:rPr b="0" lang="fr-FR" sz="1400" spc="-12" strike="noStrike">
-                <a:solidFill>
-                  <a:srgbClr val="292934"/>
-                </a:solidFill>
-                <a:latin typeface="Arial"/>
-                <a:ea typeface="DejaVu Sans"/>
-              </a:rPr>
-              <a:t>consommation</a:t>
-            </a:r>
-            <a:r>
-              <a:rPr b="0" lang="fr-FR" sz="1400" spc="-55" strike="noStrike">
-                <a:solidFill>
-                  <a:srgbClr val="292934"/>
-                </a:solidFill>
-                <a:latin typeface="Arial"/>
-                <a:ea typeface="DejaVu Sans"/>
-              </a:rPr>
-              <a:t> </a:t>
-            </a:r>
-            <a:r>
-              <a:rPr b="0" lang="fr-FR" sz="1400" spc="-1" strike="noStrike">
-                <a:solidFill>
-                  <a:srgbClr val="292934"/>
-                </a:solidFill>
-                <a:latin typeface="Arial"/>
-                <a:ea typeface="DejaVu Sans"/>
-              </a:rPr>
-              <a:t>entre</a:t>
-            </a:r>
-            <a:r>
-              <a:rPr b="0" lang="fr-FR" sz="1400" spc="-46" strike="noStrike">
-                <a:solidFill>
-                  <a:srgbClr val="292934"/>
-                </a:solidFill>
-                <a:latin typeface="Arial"/>
-                <a:ea typeface="DejaVu Sans"/>
-              </a:rPr>
-              <a:t> </a:t>
-            </a:r>
-            <a:r>
-              <a:rPr b="0" lang="fr-FR" sz="1400" spc="-1" strike="noStrike">
-                <a:solidFill>
-                  <a:srgbClr val="292934"/>
-                </a:solidFill>
-                <a:latin typeface="Arial"/>
-                <a:ea typeface="DejaVu Sans"/>
-              </a:rPr>
-              <a:t>2015</a:t>
-            </a:r>
-            <a:r>
-              <a:rPr b="0" lang="fr-FR" sz="1400" spc="-32" strike="noStrike">
-                <a:solidFill>
-                  <a:srgbClr val="292934"/>
-                </a:solidFill>
-                <a:latin typeface="Arial"/>
-                <a:ea typeface="DejaVu Sans"/>
-              </a:rPr>
-              <a:t> </a:t>
-            </a:r>
-            <a:r>
-              <a:rPr b="0" lang="fr-FR" sz="1400" spc="-1" strike="noStrike">
-                <a:solidFill>
-                  <a:srgbClr val="292934"/>
-                </a:solidFill>
-                <a:latin typeface="Arial"/>
-                <a:ea typeface="DejaVu Sans"/>
-              </a:rPr>
-              <a:t>et</a:t>
-            </a:r>
-            <a:r>
-              <a:rPr b="0" lang="fr-FR" sz="1400" spc="-26" strike="noStrike">
-                <a:solidFill>
-                  <a:srgbClr val="292934"/>
-                </a:solidFill>
-                <a:latin typeface="Arial"/>
-                <a:ea typeface="DejaVu Sans"/>
-              </a:rPr>
-              <a:t> </a:t>
-            </a:r>
-            <a:r>
-              <a:rPr b="0" lang="fr-FR" sz="1400" spc="-1" strike="noStrike">
-                <a:solidFill>
-                  <a:srgbClr val="292934"/>
-                </a:solidFill>
-                <a:latin typeface="Arial"/>
-                <a:ea typeface="DejaVu Sans"/>
-              </a:rPr>
-              <a:t>2016</a:t>
-            </a:r>
-            <a:r>
-              <a:rPr b="0" lang="fr-FR" sz="1400" spc="-46" strike="noStrike">
-                <a:solidFill>
-                  <a:srgbClr val="292934"/>
-                </a:solidFill>
-                <a:latin typeface="Arial"/>
-                <a:ea typeface="DejaVu Sans"/>
-              </a:rPr>
-              <a:t> </a:t>
-            </a:r>
-            <a:r>
-              <a:rPr b="0" lang="fr-FR" sz="1400" spc="-1" strike="noStrike">
-                <a:solidFill>
-                  <a:srgbClr val="292934"/>
-                </a:solidFill>
-                <a:latin typeface="Arial"/>
-                <a:ea typeface="DejaVu Sans"/>
-              </a:rPr>
-              <a:t>pour</a:t>
-            </a:r>
-            <a:r>
-              <a:rPr b="0" lang="fr-FR" sz="1400" spc="-32" strike="noStrike">
-                <a:solidFill>
-                  <a:srgbClr val="292934"/>
-                </a:solidFill>
-                <a:latin typeface="Arial"/>
-                <a:ea typeface="DejaVu Sans"/>
-              </a:rPr>
-              <a:t> </a:t>
-            </a:r>
-            <a:r>
-              <a:rPr b="0" lang="fr-FR" sz="1400" spc="-1" strike="noStrike">
-                <a:solidFill>
-                  <a:srgbClr val="292934"/>
-                </a:solidFill>
-                <a:latin typeface="Arial"/>
-                <a:ea typeface="DejaVu Sans"/>
-              </a:rPr>
-              <a:t>les</a:t>
-            </a:r>
-            <a:r>
-              <a:rPr b="0" lang="fr-FR" sz="1400" spc="-32" strike="noStrike">
-                <a:solidFill>
-                  <a:srgbClr val="292934"/>
-                </a:solidFill>
-                <a:latin typeface="Arial"/>
-                <a:ea typeface="DejaVu Sans"/>
-              </a:rPr>
-              <a:t> </a:t>
-            </a:r>
-            <a:r>
-              <a:rPr b="0" lang="fr-FR" sz="1400" spc="-1" strike="noStrike">
-                <a:solidFill>
-                  <a:srgbClr val="292934"/>
-                </a:solidFill>
-                <a:latin typeface="Arial"/>
-                <a:ea typeface="DejaVu Sans"/>
-              </a:rPr>
-              <a:t>mêmes</a:t>
-            </a:r>
-            <a:r>
-              <a:rPr b="0" lang="fr-FR" sz="1400" spc="-32" strike="noStrike">
-                <a:solidFill>
-                  <a:srgbClr val="292934"/>
-                </a:solidFill>
-                <a:latin typeface="Arial"/>
-                <a:ea typeface="DejaVu Sans"/>
-              </a:rPr>
-              <a:t> </a:t>
-            </a:r>
-            <a:r>
-              <a:rPr b="0" lang="fr-FR" sz="1400" spc="-1" strike="noStrike">
-                <a:solidFill>
-                  <a:srgbClr val="292934"/>
-                </a:solidFill>
-                <a:latin typeface="Arial"/>
-                <a:ea typeface="DejaVu Sans"/>
-              </a:rPr>
-              <a:t>bâtiments</a:t>
-            </a:r>
-            <a:r>
-              <a:rPr b="0" lang="fr-FR" sz="1400" spc="-55" strike="noStrike">
-                <a:solidFill>
-                  <a:srgbClr val="292934"/>
-                </a:solidFill>
-                <a:latin typeface="Arial"/>
-                <a:ea typeface="DejaVu Sans"/>
-              </a:rPr>
-              <a:t> </a:t>
-            </a:r>
-            <a:r>
-              <a:rPr b="0" lang="fr-FR" sz="1400" spc="-52" strike="noStrike">
-                <a:solidFill>
-                  <a:srgbClr val="292934"/>
-                </a:solidFill>
-                <a:latin typeface="Arial"/>
-                <a:ea typeface="DejaVu Sans"/>
-              </a:rPr>
-              <a:t>:</a:t>
-            </a:r>
-            <a:endParaRPr b="0" lang="fr-FR" sz="1400" spc="-1" strike="noStrike">
-              <a:solidFill>
-                <a:srgbClr val="000000"/>
-              </a:solidFill>
-              <a:latin typeface="Arial"/>
-            </a:endParaRPr>
-          </a:p>
-          <a:p>
-            <a:pPr marL="469800">
-              <a:lnSpc>
-                <a:spcPts val="1511"/>
-              </a:lnSpc>
-              <a:tabLst>
-                <a:tab algn="l" pos="469440"/>
-                <a:tab algn="l" pos="469800"/>
-              </a:tabLst>
-            </a:pPr>
-            <a:r>
-              <a:rPr b="0" lang="fr-FR" sz="1400" spc="-1" strike="noStrike">
-                <a:solidFill>
-                  <a:srgbClr val="292934"/>
-                </a:solidFill>
-                <a:latin typeface="Cambria Math"/>
-                <a:ea typeface="DejaVu Sans"/>
-              </a:rPr>
-              <a:t>µ</a:t>
-            </a:r>
-            <a:r>
-              <a:rPr b="0" lang="fr-FR" sz="1400" spc="-7" strike="noStrike">
-                <a:solidFill>
-                  <a:srgbClr val="292934"/>
-                </a:solidFill>
-                <a:latin typeface="Cambria Math"/>
-                <a:ea typeface="DejaVu Sans"/>
-              </a:rPr>
-              <a:t> </a:t>
-            </a:r>
-            <a:r>
-              <a:rPr b="0" lang="fr-FR" sz="1400" spc="-1" strike="noStrike">
-                <a:solidFill>
-                  <a:srgbClr val="292934"/>
-                </a:solidFill>
-                <a:latin typeface="Cambria Math"/>
-                <a:ea typeface="DejaVu Sans"/>
-              </a:rPr>
-              <a:t>+</a:t>
-            </a:r>
-            <a:r>
-              <a:rPr b="0" lang="fr-FR" sz="1400" spc="7" strike="noStrike">
-                <a:solidFill>
-                  <a:srgbClr val="292934"/>
-                </a:solidFill>
-                <a:latin typeface="Cambria Math"/>
-                <a:ea typeface="DejaVu Sans"/>
-              </a:rPr>
-              <a:t> </a:t>
-            </a:r>
-            <a:r>
-              <a:rPr b="0" lang="fr-FR" sz="1400" spc="-35" strike="noStrike">
-                <a:solidFill>
-                  <a:srgbClr val="292934"/>
-                </a:solidFill>
-                <a:latin typeface="Cambria Math"/>
-                <a:ea typeface="DejaVu Sans"/>
-              </a:rPr>
-              <a:t>3𝜎</a:t>
-            </a:r>
             <a:endParaRPr b="0" lang="fr-FR" sz="1400" spc="-1" strike="noStrike">
               <a:solidFill>
                 <a:srgbClr val="000000"/>
@@ -41526,7 +40598,7 @@
         <p:spPr>
           <a:xfrm>
             <a:off x="7700040" y="27000"/>
-            <a:ext cx="124200" cy="226080"/>
+            <a:ext cx="123840" cy="226080"/>
           </a:xfrm>
           <a:prstGeom prst="rect">
             <a:avLst/>
@@ -41587,7 +40659,7 @@
         <p:spPr>
           <a:xfrm>
             <a:off x="7568640" y="625320"/>
-            <a:ext cx="1467360" cy="2633040"/>
+            <a:ext cx="1467000" cy="2632680"/>
           </a:xfrm>
           <a:prstGeom prst="rect">
             <a:avLst/>
@@ -41610,7 +40682,7 @@
         <p:spPr>
           <a:xfrm>
             <a:off x="6665760" y="3802680"/>
-            <a:ext cx="2426400" cy="1741680"/>
+            <a:ext cx="2426040" cy="1741320"/>
           </a:xfrm>
           <a:prstGeom prst="rect">
             <a:avLst/>
@@ -41659,9 +40731,9 @@
         <p:grpSpPr>
           <a:xfrm>
             <a:off x="6732360" y="3721680"/>
-            <a:ext cx="2252880" cy="1943640"/>
+            <a:ext cx="2252520" cy="1943280"/>
             <a:chOff x="6732360" y="3721680"/>
-            <a:chExt cx="2252880" cy="1943640"/>
+            <a:chExt cx="2252520" cy="1943280"/>
           </a:xfrm>
         </p:grpSpPr>
         <p:sp>
@@ -41673,15 +40745,15 @@
           <p:spPr>
             <a:xfrm>
               <a:off x="6732360" y="3721680"/>
-              <a:ext cx="2252880" cy="1943640"/>
+              <a:ext cx="2252520" cy="1943280"/>
             </a:xfrm>
             <a:custGeom>
               <a:avLst/>
               <a:gdLst>
-                <a:gd name="textAreaLeft" fmla="*/ 0 w 2252880"/>
-                <a:gd name="textAreaRight" fmla="*/ 2253600 w 2252880"/>
-                <a:gd name="textAreaTop" fmla="*/ 0 h 1943640"/>
-                <a:gd name="textAreaBottom" fmla="*/ 1944360 h 1943640"/>
+                <a:gd name="textAreaLeft" fmla="*/ 0 w 2252520"/>
+                <a:gd name="textAreaRight" fmla="*/ 2253600 w 2252520"/>
+                <a:gd name="textAreaTop" fmla="*/ 0 h 1943280"/>
+                <a:gd name="textAreaBottom" fmla="*/ 1944360 h 1943280"/>
               </a:gdLst>
               <a:ahLst/>
               <a:rect l="textAreaLeft" t="textAreaTop" r="textAreaRight" b="textAreaBottom"/>
@@ -41748,15 +40820,15 @@
           <p:spPr>
             <a:xfrm>
               <a:off x="6732360" y="3721680"/>
-              <a:ext cx="2252880" cy="1943640"/>
+              <a:ext cx="2252520" cy="1943280"/>
             </a:xfrm>
             <a:custGeom>
               <a:avLst/>
               <a:gdLst>
-                <a:gd name="textAreaLeft" fmla="*/ 0 w 2252880"/>
-                <a:gd name="textAreaRight" fmla="*/ 2253600 w 2252880"/>
-                <a:gd name="textAreaTop" fmla="*/ 0 h 1943640"/>
-                <a:gd name="textAreaBottom" fmla="*/ 1944360 h 1943640"/>
+                <a:gd name="textAreaLeft" fmla="*/ 0 w 2252520"/>
+                <a:gd name="textAreaRight" fmla="*/ 2253600 w 2252520"/>
+                <a:gd name="textAreaTop" fmla="*/ 0 h 1943280"/>
+                <a:gd name="textAreaBottom" fmla="*/ 1944360 h 1943280"/>
               </a:gdLst>
               <a:ahLst/>
               <a:rect l="textAreaLeft" t="textAreaTop" r="textAreaRight" b="textAreaBottom"/>
@@ -41824,15 +40896,15 @@
           <p:spPr>
             <a:xfrm>
               <a:off x="7668720" y="3794040"/>
-              <a:ext cx="1188000" cy="849600"/>
+              <a:ext cx="1187640" cy="849240"/>
             </a:xfrm>
             <a:custGeom>
               <a:avLst/>
               <a:gdLst>
-                <a:gd name="textAreaLeft" fmla="*/ 0 w 1188000"/>
-                <a:gd name="textAreaRight" fmla="*/ 1188720 w 1188000"/>
-                <a:gd name="textAreaTop" fmla="*/ 0 h 849600"/>
-                <a:gd name="textAreaBottom" fmla="*/ 850320 h 849600"/>
+                <a:gd name="textAreaLeft" fmla="*/ 0 w 1187640"/>
+                <a:gd name="textAreaRight" fmla="*/ 1188720 w 1187640"/>
+                <a:gd name="textAreaTop" fmla="*/ 0 h 849240"/>
+                <a:gd name="textAreaBottom" fmla="*/ 850320 h 849240"/>
               </a:gdLst>
               <a:ahLst/>
               <a:rect l="textAreaLeft" t="textAreaTop" r="textAreaRight" b="textAreaBottom"/>
@@ -41961,15 +41033,15 @@
           <p:spPr>
             <a:xfrm>
               <a:off x="7668720" y="3794040"/>
-              <a:ext cx="1188000" cy="849600"/>
+              <a:ext cx="1187640" cy="849240"/>
             </a:xfrm>
             <a:custGeom>
               <a:avLst/>
               <a:gdLst>
-                <a:gd name="textAreaLeft" fmla="*/ 0 w 1188000"/>
-                <a:gd name="textAreaRight" fmla="*/ 1188720 w 1188000"/>
-                <a:gd name="textAreaTop" fmla="*/ 0 h 849600"/>
-                <a:gd name="textAreaBottom" fmla="*/ 850320 h 849600"/>
+                <a:gd name="textAreaLeft" fmla="*/ 0 w 1187640"/>
+                <a:gd name="textAreaRight" fmla="*/ 1188720 w 1187640"/>
+                <a:gd name="textAreaTop" fmla="*/ 0 h 849240"/>
+                <a:gd name="textAreaBottom" fmla="*/ 850320 h 849240"/>
               </a:gdLst>
               <a:ahLst/>
               <a:rect l="textAreaLeft" t="textAreaTop" r="textAreaRight" b="textAreaBottom"/>
@@ -42102,7 +41174,7 @@
         <p:spPr>
           <a:xfrm>
             <a:off x="536040" y="526320"/>
-            <a:ext cx="4346640" cy="1231200"/>
+            <a:ext cx="8463960" cy="1230840"/>
           </a:xfrm>
           <a:prstGeom prst="rect">
             <a:avLst/>
@@ -42174,7 +41246,7 @@
         <p:spPr>
           <a:xfrm>
             <a:off x="536040" y="1117800"/>
-            <a:ext cx="6551280" cy="2020680"/>
+            <a:ext cx="6550920" cy="2020680"/>
           </a:xfrm>
           <a:prstGeom prst="rect">
             <a:avLst/>
@@ -43391,27 +42463,7 @@
                 <a:latin typeface="Arial"/>
                 <a:ea typeface="DejaVu Sans"/>
               </a:rPr>
-              <a:t>n</a:t>
-            </a:r>
-            <a:r>
-              <a:rPr b="0" lang="fr-FR" sz="1200" spc="1" strike="noStrike">
-                <a:solidFill>
-                  <a:srgbClr val="292934"/>
-                </a:solidFill>
-                <a:latin typeface="Arial"/>
-                <a:ea typeface="DejaVu Sans"/>
-              </a:rPr>
-              <a:t> </a:t>
-            </a:r>
-            <a:r>
-              <a:rPr b="0" lang="fr-FR" sz="1200" spc="-1" strike="noStrike">
-                <a:solidFill>
-                  <a:srgbClr val="292934"/>
-                </a:solidFill>
-                <a:latin typeface="Arial"/>
-                <a:ea typeface="DejaVu Sans"/>
-              </a:rPr>
-              <a:t>catégories</a:t>
+              <a:t>n catégories</a:t>
             </a:r>
             <a:r>
               <a:rPr b="0" lang="fr-FR" sz="1200" spc="-32" strike="noStrike">
@@ -43511,7 +42563,7 @@
         <p:spPr>
           <a:xfrm>
             <a:off x="536040" y="3048480"/>
-            <a:ext cx="5222160" cy="1437120"/>
+            <a:ext cx="5221800" cy="1437120"/>
           </a:xfrm>
           <a:prstGeom prst="rect">
             <a:avLst/>
@@ -44934,7 +43986,7 @@
         <p:spPr>
           <a:xfrm>
             <a:off x="536040" y="4612320"/>
-            <a:ext cx="3054240" cy="194760"/>
+            <a:ext cx="3053880" cy="194760"/>
           </a:xfrm>
           <a:prstGeom prst="rect">
             <a:avLst/>
@@ -45051,7 +44103,7 @@
         <p:spPr>
           <a:xfrm>
             <a:off x="7700040" y="27000"/>
-            <a:ext cx="124200" cy="226080"/>
+            <a:ext cx="123840" cy="226080"/>
           </a:xfrm>
           <a:prstGeom prst="rect">
             <a:avLst/>
@@ -45112,7 +44164,7 @@
         <p:spPr>
           <a:xfrm>
             <a:off x="5393520" y="5017680"/>
-            <a:ext cx="834120" cy="659160"/>
+            <a:ext cx="833760" cy="658800"/>
           </a:xfrm>
           <a:prstGeom prst="rect">
             <a:avLst/>
@@ -45131,9 +44183,9 @@
         <p:grpSpPr>
           <a:xfrm>
             <a:off x="4025160" y="5038920"/>
-            <a:ext cx="1295640" cy="629280"/>
+            <a:ext cx="1295280" cy="628920"/>
             <a:chOff x="4025160" y="5038920"/>
-            <a:chExt cx="1295640" cy="629280"/>
+            <a:chExt cx="1295280" cy="628920"/>
           </a:xfrm>
         </p:grpSpPr>
         <p:pic>
@@ -45149,7 +44201,7 @@
           <p:spPr>
             <a:xfrm>
               <a:off x="4025160" y="5038920"/>
-              <a:ext cx="894600" cy="629280"/>
+              <a:ext cx="894240" cy="628920"/>
             </a:xfrm>
             <a:prstGeom prst="rect">
               <a:avLst/>
@@ -45168,15 +44220,15 @@
           <p:spPr>
             <a:xfrm>
               <a:off x="4961520" y="5292360"/>
-              <a:ext cx="359280" cy="143280"/>
+              <a:ext cx="358920" cy="142920"/>
             </a:xfrm>
             <a:custGeom>
               <a:avLst/>
               <a:gdLst>
-                <a:gd name="textAreaLeft" fmla="*/ 0 w 359280"/>
-                <a:gd name="textAreaRight" fmla="*/ 360000 w 359280"/>
-                <a:gd name="textAreaTop" fmla="*/ 0 h 143280"/>
-                <a:gd name="textAreaBottom" fmla="*/ 144000 h 143280"/>
+                <a:gd name="textAreaLeft" fmla="*/ 0 w 358920"/>
+                <a:gd name="textAreaRight" fmla="*/ 360000 w 358920"/>
+                <a:gd name="textAreaTop" fmla="*/ 0 h 142920"/>
+                <a:gd name="textAreaBottom" fmla="*/ 144000 h 142920"/>
               </a:gdLst>
               <a:ahLst/>
               <a:rect l="textAreaLeft" t="textAreaTop" r="textAreaRight" b="textAreaBottom"/>
@@ -45252,15 +44304,15 @@
           <p:spPr>
             <a:xfrm>
               <a:off x="4961520" y="5292360"/>
-              <a:ext cx="359280" cy="143280"/>
+              <a:ext cx="358920" cy="142920"/>
             </a:xfrm>
             <a:custGeom>
               <a:avLst/>
               <a:gdLst>
-                <a:gd name="textAreaLeft" fmla="*/ 0 w 359280"/>
-                <a:gd name="textAreaRight" fmla="*/ 360000 w 359280"/>
-                <a:gd name="textAreaTop" fmla="*/ 0 h 143280"/>
-                <a:gd name="textAreaBottom" fmla="*/ 144000 h 143280"/>
+                <a:gd name="textAreaLeft" fmla="*/ 0 w 358920"/>
+                <a:gd name="textAreaRight" fmla="*/ 360000 w 358920"/>
+                <a:gd name="textAreaTop" fmla="*/ 0 h 142920"/>
+                <a:gd name="textAreaBottom" fmla="*/ 144000 h 142920"/>
               </a:gdLst>
               <a:ahLst/>
               <a:rect l="textAreaLeft" t="textAreaTop" r="textAreaRight" b="textAreaBottom"/>
@@ -45338,7 +44390,7 @@
         <p:spPr>
           <a:xfrm>
             <a:off x="7719120" y="3804120"/>
-            <a:ext cx="1051560" cy="696240"/>
+            <a:ext cx="1051200" cy="696240"/>
           </a:xfrm>
           <a:prstGeom prst="rect">
             <a:avLst/>
@@ -45546,9 +44598,9 @@
         <p:grpSpPr>
           <a:xfrm>
             <a:off x="6876360" y="3794040"/>
-            <a:ext cx="791640" cy="849600"/>
+            <a:ext cx="791280" cy="849240"/>
             <a:chOff x="6876360" y="3794040"/>
-            <a:chExt cx="791640" cy="849600"/>
+            <a:chExt cx="791280" cy="849240"/>
           </a:xfrm>
         </p:grpSpPr>
         <p:sp>
@@ -45560,15 +44612,15 @@
           <p:spPr>
             <a:xfrm>
               <a:off x="6876360" y="3794040"/>
-              <a:ext cx="791640" cy="849600"/>
+              <a:ext cx="791280" cy="849240"/>
             </a:xfrm>
             <a:custGeom>
               <a:avLst/>
               <a:gdLst>
-                <a:gd name="textAreaLeft" fmla="*/ 0 w 791640"/>
-                <a:gd name="textAreaRight" fmla="*/ 792360 w 791640"/>
-                <a:gd name="textAreaTop" fmla="*/ 0 h 849600"/>
-                <a:gd name="textAreaBottom" fmla="*/ 850320 h 849600"/>
+                <a:gd name="textAreaLeft" fmla="*/ 0 w 791280"/>
+                <a:gd name="textAreaRight" fmla="*/ 792360 w 791280"/>
+                <a:gd name="textAreaTop" fmla="*/ 0 h 849240"/>
+                <a:gd name="textAreaBottom" fmla="*/ 850320 h 849240"/>
               </a:gdLst>
               <a:ahLst/>
               <a:rect l="textAreaLeft" t="textAreaTop" r="textAreaRight" b="textAreaBottom"/>
@@ -45695,15 +44747,15 @@
           <p:spPr>
             <a:xfrm>
               <a:off x="6876360" y="3794040"/>
-              <a:ext cx="791640" cy="849600"/>
+              <a:ext cx="791280" cy="849240"/>
             </a:xfrm>
             <a:custGeom>
               <a:avLst/>
               <a:gdLst>
-                <a:gd name="textAreaLeft" fmla="*/ 0 w 791640"/>
-                <a:gd name="textAreaRight" fmla="*/ 792360 w 791640"/>
-                <a:gd name="textAreaTop" fmla="*/ 0 h 849600"/>
-                <a:gd name="textAreaBottom" fmla="*/ 850320 h 849600"/>
+                <a:gd name="textAreaLeft" fmla="*/ 0 w 791280"/>
+                <a:gd name="textAreaRight" fmla="*/ 792360 w 791280"/>
+                <a:gd name="textAreaTop" fmla="*/ 0 h 849240"/>
+                <a:gd name="textAreaBottom" fmla="*/ 850320 h 849240"/>
               </a:gdLst>
               <a:ahLst/>
               <a:rect l="textAreaLeft" t="textAreaTop" r="textAreaRight" b="textAreaBottom"/>
@@ -45832,7 +44884,7 @@
         <p:spPr>
           <a:xfrm>
             <a:off x="7012800" y="3819960"/>
-            <a:ext cx="533880" cy="753480"/>
+            <a:ext cx="533520" cy="753480"/>
           </a:xfrm>
           <a:prstGeom prst="rect">
             <a:avLst/>
@@ -45949,9 +45001,9 @@
         <p:grpSpPr>
           <a:xfrm>
             <a:off x="7668720" y="4728960"/>
-            <a:ext cx="1188000" cy="849600"/>
+            <a:ext cx="1187640" cy="849240"/>
             <a:chOff x="7668720" y="4728960"/>
-            <a:chExt cx="1188000" cy="849600"/>
+            <a:chExt cx="1187640" cy="849240"/>
           </a:xfrm>
         </p:grpSpPr>
         <p:sp>
@@ -45963,15 +45015,15 @@
           <p:spPr>
             <a:xfrm>
               <a:off x="7668720" y="4728960"/>
-              <a:ext cx="1188000" cy="849600"/>
+              <a:ext cx="1187640" cy="849240"/>
             </a:xfrm>
             <a:custGeom>
               <a:avLst/>
               <a:gdLst>
-                <a:gd name="textAreaLeft" fmla="*/ 0 w 1188000"/>
-                <a:gd name="textAreaRight" fmla="*/ 1188720 w 1188000"/>
-                <a:gd name="textAreaTop" fmla="*/ 0 h 849600"/>
-                <a:gd name="textAreaBottom" fmla="*/ 850320 h 849600"/>
+                <a:gd name="textAreaLeft" fmla="*/ 0 w 1187640"/>
+                <a:gd name="textAreaRight" fmla="*/ 1188720 w 1187640"/>
+                <a:gd name="textAreaTop" fmla="*/ 0 h 849240"/>
+                <a:gd name="textAreaBottom" fmla="*/ 850320 h 849240"/>
               </a:gdLst>
               <a:ahLst/>
               <a:rect l="textAreaLeft" t="textAreaTop" r="textAreaRight" b="textAreaBottom"/>
@@ -46100,15 +45152,15 @@
           <p:spPr>
             <a:xfrm>
               <a:off x="7668720" y="4728960"/>
-              <a:ext cx="1188000" cy="849600"/>
+              <a:ext cx="1187640" cy="849240"/>
             </a:xfrm>
             <a:custGeom>
               <a:avLst/>
               <a:gdLst>
-                <a:gd name="textAreaLeft" fmla="*/ 0 w 1188000"/>
-                <a:gd name="textAreaRight" fmla="*/ 1188720 w 1188000"/>
-                <a:gd name="textAreaTop" fmla="*/ 0 h 849600"/>
-                <a:gd name="textAreaBottom" fmla="*/ 850320 h 849600"/>
+                <a:gd name="textAreaLeft" fmla="*/ 0 w 1187640"/>
+                <a:gd name="textAreaRight" fmla="*/ 1188720 w 1187640"/>
+                <a:gd name="textAreaTop" fmla="*/ 0 h 849240"/>
+                <a:gd name="textAreaBottom" fmla="*/ 850320 h 849240"/>
               </a:gdLst>
               <a:ahLst/>
               <a:rect l="textAreaLeft" t="textAreaTop" r="textAreaRight" b="textAreaBottom"/>
@@ -46237,7 +45289,7 @@
         <p:spPr>
           <a:xfrm>
             <a:off x="7719120" y="4739040"/>
-            <a:ext cx="1051560" cy="695880"/>
+            <a:ext cx="1051200" cy="695880"/>
           </a:xfrm>
           <a:prstGeom prst="rect">
             <a:avLst/>
@@ -46445,9 +45497,9 @@
         <p:grpSpPr>
           <a:xfrm>
             <a:off x="6876360" y="4728960"/>
-            <a:ext cx="791640" cy="849600"/>
+            <a:ext cx="791280" cy="849240"/>
             <a:chOff x="6876360" y="4728960"/>
-            <a:chExt cx="791640" cy="849600"/>
+            <a:chExt cx="791280" cy="849240"/>
           </a:xfrm>
         </p:grpSpPr>
         <p:sp>
@@ -46459,15 +45511,15 @@
           <p:spPr>
             <a:xfrm>
               <a:off x="6876360" y="4728960"/>
-              <a:ext cx="791640" cy="849600"/>
+              <a:ext cx="791280" cy="849240"/>
             </a:xfrm>
             <a:custGeom>
               <a:avLst/>
               <a:gdLst>
-                <a:gd name="textAreaLeft" fmla="*/ 0 w 791640"/>
-                <a:gd name="textAreaRight" fmla="*/ 792360 w 791640"/>
-                <a:gd name="textAreaTop" fmla="*/ 0 h 849600"/>
-                <a:gd name="textAreaBottom" fmla="*/ 850320 h 849600"/>
+                <a:gd name="textAreaLeft" fmla="*/ 0 w 791280"/>
+                <a:gd name="textAreaRight" fmla="*/ 792360 w 791280"/>
+                <a:gd name="textAreaTop" fmla="*/ 0 h 849240"/>
+                <a:gd name="textAreaBottom" fmla="*/ 850320 h 849240"/>
               </a:gdLst>
               <a:ahLst/>
               <a:rect l="textAreaLeft" t="textAreaTop" r="textAreaRight" b="textAreaBottom"/>
@@ -46594,15 +45646,15 @@
           <p:spPr>
             <a:xfrm>
               <a:off x="6876360" y="4728960"/>
-              <a:ext cx="791640" cy="849600"/>
+              <a:ext cx="791280" cy="849240"/>
             </a:xfrm>
             <a:custGeom>
               <a:avLst/>
               <a:gdLst>
-                <a:gd name="textAreaLeft" fmla="*/ 0 w 791640"/>
-                <a:gd name="textAreaRight" fmla="*/ 792360 w 791640"/>
-                <a:gd name="textAreaTop" fmla="*/ 0 h 849600"/>
-                <a:gd name="textAreaBottom" fmla="*/ 850320 h 849600"/>
+                <a:gd name="textAreaLeft" fmla="*/ 0 w 791280"/>
+                <a:gd name="textAreaRight" fmla="*/ 792360 w 791280"/>
+                <a:gd name="textAreaTop" fmla="*/ 0 h 849240"/>
+                <a:gd name="textAreaBottom" fmla="*/ 850320 h 849240"/>
               </a:gdLst>
               <a:ahLst/>
               <a:rect l="textAreaLeft" t="textAreaTop" r="textAreaRight" b="textAreaBottom"/>
@@ -46731,7 +45783,7 @@
         <p:spPr>
           <a:xfrm>
             <a:off x="7012800" y="4755240"/>
-            <a:ext cx="533880" cy="759960"/>
+            <a:ext cx="533520" cy="759960"/>
           </a:xfrm>
           <a:prstGeom prst="rect">
             <a:avLst/>
@@ -46878,15 +45930,15 @@
         <p:spPr>
           <a:xfrm>
             <a:off x="0" y="0"/>
-            <a:ext cx="9143280" cy="304200"/>
+            <a:ext cx="9142920" cy="303840"/>
           </a:xfrm>
           <a:custGeom>
             <a:avLst/>
             <a:gdLst>
-              <a:gd name="textAreaLeft" fmla="*/ 0 w 9143280"/>
-              <a:gd name="textAreaRight" fmla="*/ 9144000 w 9143280"/>
-              <a:gd name="textAreaTop" fmla="*/ 0 h 304200"/>
-              <a:gd name="textAreaBottom" fmla="*/ 304920 h 304200"/>
+              <a:gd name="textAreaLeft" fmla="*/ 0 w 9142920"/>
+              <a:gd name="textAreaRight" fmla="*/ 9144000 w 9142920"/>
+              <a:gd name="textAreaTop" fmla="*/ 0 h 303840"/>
+              <a:gd name="textAreaBottom" fmla="*/ 304920 h 303840"/>
             </a:gdLst>
             <a:ahLst/>
             <a:rect l="textAreaLeft" t="textAreaTop" r="textAreaRight" b="textAreaBottom"/>
@@ -46957,7 +46009,7 @@
         <p:spPr>
           <a:xfrm>
             <a:off x="107280" y="347040"/>
-            <a:ext cx="2442600" cy="966240"/>
+            <a:ext cx="2442240" cy="965880"/>
           </a:xfrm>
           <a:prstGeom prst="rect">
             <a:avLst/>
@@ -47011,7 +46063,7 @@
         <p:spPr>
           <a:xfrm>
             <a:off x="7700040" y="27000"/>
-            <a:ext cx="124200" cy="226080"/>
+            <a:ext cx="123840" cy="226080"/>
           </a:xfrm>
           <a:prstGeom prst="rect">
             <a:avLst/>
@@ -47072,7 +46124,7 @@
         <p:spPr>
           <a:xfrm>
             <a:off x="251640" y="878040"/>
-            <a:ext cx="4266720" cy="2237040"/>
+            <a:ext cx="4266360" cy="2236680"/>
           </a:xfrm>
           <a:prstGeom prst="rect">
             <a:avLst/>
@@ -47095,7 +46147,7 @@
         <p:spPr>
           <a:xfrm>
             <a:off x="370080" y="3210120"/>
-            <a:ext cx="4113000" cy="2163960"/>
+            <a:ext cx="4112640" cy="2163600"/>
           </a:xfrm>
           <a:prstGeom prst="rect">
             <a:avLst/>
@@ -47118,7 +46170,7 @@
         <p:spPr>
           <a:xfrm>
             <a:off x="4880520" y="918720"/>
-            <a:ext cx="4051800" cy="2180520"/>
+            <a:ext cx="4051440" cy="2180160"/>
           </a:xfrm>
           <a:prstGeom prst="rect">
             <a:avLst/>
@@ -47141,7 +46193,7 @@
         <p:spPr>
           <a:xfrm>
             <a:off x="4808520" y="3300480"/>
-            <a:ext cx="4120200" cy="2167920"/>
+            <a:ext cx="4119840" cy="2167560"/>
           </a:xfrm>
           <a:prstGeom prst="rect">
             <a:avLst/>

--- a/Projet_4/soutenance projet 4 _ actualisee .pptx
+++ b/Projet_4/soutenance projet 4 _ actualisee .pptx
@@ -86,7 +86,7 @@
         <p:txBody>
           <a:bodyPr/>
           <a:p>
-            <a:fld id="{DE069F60-E196-4606-A2E4-96EB48D335CA}" type="slidenum">
+            <a:fld id="{88658874-CB08-442A-8A9A-4431A2B979A0}" type="slidenum">
               <a:t>&lt;#&gt;</a:t>
             </a:fld>
           </a:p>
@@ -295,7 +295,7 @@
         <p:txBody>
           <a:bodyPr/>
           <a:p>
-            <a:fld id="{7E7B9B1B-D887-424E-8AA7-71488C30D976}" type="slidenum">
+            <a:fld id="{7D0F238D-E615-4961-ABCA-020A62811628}" type="slidenum">
               <a:t>&lt;#&gt;</a:t>
             </a:fld>
           </a:p>
@@ -590,7 +590,7 @@
         <p:txBody>
           <a:bodyPr/>
           <a:p>
-            <a:fld id="{CB31B84C-2D8E-4BD5-87D0-95B0015DF4FF}" type="slidenum">
+            <a:fld id="{4DD3E97F-D02D-41AB-A49E-D485DD417862}" type="slidenum">
               <a:t>&lt;#&gt;</a:t>
             </a:fld>
           </a:p>
@@ -971,7 +971,7 @@
         <p:txBody>
           <a:bodyPr/>
           <a:p>
-            <a:fld id="{CAE9498A-D93D-45C0-8298-339CB49281E3}" type="slidenum">
+            <a:fld id="{64CA9E07-90B9-4B4A-9C56-E752E9E62F0B}" type="slidenum">
               <a:t>&lt;#&gt;</a:t>
             </a:fld>
           </a:p>
@@ -1054,7 +1054,7 @@
         <p:txBody>
           <a:bodyPr/>
           <a:p>
-            <a:fld id="{A1BB5B48-A846-4809-BCDB-A154256DAB2F}" type="slidenum">
+            <a:fld id="{42A3F293-9B26-47FA-AF30-375E1349D584}" type="slidenum">
               <a:t>&lt;#&gt;</a:t>
             </a:fld>
           </a:p>
@@ -1217,7 +1217,7 @@
         <p:txBody>
           <a:bodyPr/>
           <a:p>
-            <a:fld id="{CE48133D-F79B-4A3C-9B6B-11BC394540EA}" type="slidenum">
+            <a:fld id="{C3F5C33B-C07C-474C-B339-B78F97336398}" type="slidenum">
               <a:t>&lt;#&gt;</a:t>
             </a:fld>
           </a:p>
@@ -1383,7 +1383,7 @@
         <p:txBody>
           <a:bodyPr/>
           <a:p>
-            <a:fld id="{6E5D6110-6AB0-41CD-8B2D-775EA5F310C9}" type="slidenum">
+            <a:fld id="{83200844-C80F-439B-8451-3596A51C4CBE}" type="slidenum">
               <a:t>&lt;#&gt;</a:t>
             </a:fld>
           </a:p>
@@ -1592,7 +1592,7 @@
         <p:txBody>
           <a:bodyPr/>
           <a:p>
-            <a:fld id="{14D2A93A-524E-46D2-9943-37F8C1EE0393}" type="slidenum">
+            <a:fld id="{1F536FA7-DE54-45CA-BA0B-489DE5524B08}" type="slidenum">
               <a:t>&lt;#&gt;</a:t>
             </a:fld>
           </a:p>
@@ -1715,7 +1715,7 @@
         <p:txBody>
           <a:bodyPr/>
           <a:p>
-            <a:fld id="{5D15F4C4-950C-47EF-9115-FC99C86B3D1A}" type="slidenum">
+            <a:fld id="{6EACBAC7-EEBF-4DF8-AB43-F94092DFAD83}" type="slidenum">
               <a:t>&lt;#&gt;</a:t>
             </a:fld>
           </a:p>
@@ -1836,7 +1836,7 @@
         <p:txBody>
           <a:bodyPr/>
           <a:p>
-            <a:fld id="{1E16ACB5-0E6E-4C95-A67A-CFD4A418DA04}" type="slidenum">
+            <a:fld id="{7BCAD27B-1470-4AA0-AC9A-E21C086303FF}" type="slidenum">
               <a:t>&lt;#&gt;</a:t>
             </a:fld>
           </a:p>
@@ -2088,7 +2088,7 @@
         <p:txBody>
           <a:bodyPr/>
           <a:p>
-            <a:fld id="{AB2CE225-D7D0-4525-9510-139153632A6E}" type="slidenum">
+            <a:fld id="{AE72402D-4306-45B2-BC69-7350C6C03B63}" type="slidenum">
               <a:t>&lt;#&gt;</a:t>
             </a:fld>
           </a:p>
@@ -2251,7 +2251,7 @@
         <p:txBody>
           <a:bodyPr/>
           <a:p>
-            <a:fld id="{4EB6F4F9-613B-40CB-97F8-5430C3AA9B88}" type="slidenum">
+            <a:fld id="{1824446B-794D-462E-A26A-46111D140605}" type="slidenum">
               <a:t>&lt;#&gt;</a:t>
             </a:fld>
           </a:p>
@@ -2503,7 +2503,7 @@
         <p:txBody>
           <a:bodyPr/>
           <a:p>
-            <a:fld id="{A8740CF8-3C94-49FE-AADE-7E85AC8476D8}" type="slidenum">
+            <a:fld id="{10BB19B0-CC44-46F0-A4A4-0A72AA6A17DB}" type="slidenum">
               <a:t>&lt;#&gt;</a:t>
             </a:fld>
           </a:p>
@@ -2755,7 +2755,7 @@
         <p:txBody>
           <a:bodyPr/>
           <a:p>
-            <a:fld id="{09D7AC5D-41C5-4A99-A4F9-19035DFCD0CC}" type="slidenum">
+            <a:fld id="{9949C56A-BC6B-43C2-BE59-D0EECD7BCC3B}" type="slidenum">
               <a:t>&lt;#&gt;</a:t>
             </a:fld>
           </a:p>
@@ -2964,7 +2964,7 @@
         <p:txBody>
           <a:bodyPr/>
           <a:p>
-            <a:fld id="{D8E3A8E4-7DCF-4512-97FF-1876349FF251}" type="slidenum">
+            <a:fld id="{BB6029FB-351F-4390-9622-5F995B163012}" type="slidenum">
               <a:t>&lt;#&gt;</a:t>
             </a:fld>
           </a:p>
@@ -3259,7 +3259,7 @@
         <p:txBody>
           <a:bodyPr/>
           <a:p>
-            <a:fld id="{B32D4DA1-B002-4D4F-8A3E-D88C8BCC9A40}" type="slidenum">
+            <a:fld id="{73AE1B60-2430-41E5-BA24-8191FBB9E448}" type="slidenum">
               <a:t>&lt;#&gt;</a:t>
             </a:fld>
           </a:p>
@@ -3640,7 +3640,7 @@
         <p:txBody>
           <a:bodyPr/>
           <a:p>
-            <a:fld id="{4EB44EF0-263F-4AE2-A865-F85EBA4C2F70}" type="slidenum">
+            <a:fld id="{6BE6B1DF-0779-4045-8E7B-7D9D5D66D582}" type="slidenum">
               <a:t>&lt;#&gt;</a:t>
             </a:fld>
           </a:p>
@@ -3723,7 +3723,7 @@
         <p:txBody>
           <a:bodyPr/>
           <a:p>
-            <a:fld id="{77CDB229-C112-409C-8C2D-56D9A4A7B080}" type="slidenum">
+            <a:fld id="{C440FE88-95B2-4098-8C1B-CF2086A7A2F3}" type="slidenum">
               <a:t>&lt;#&gt;</a:t>
             </a:fld>
           </a:p>
@@ -3886,7 +3886,7 @@
         <p:txBody>
           <a:bodyPr/>
           <a:p>
-            <a:fld id="{014AAE5E-195C-4725-B32A-7D69507912C5}" type="slidenum">
+            <a:fld id="{6307B3E9-08BD-44AC-A256-6D2F54A7D76C}" type="slidenum">
               <a:t>&lt;#&gt;</a:t>
             </a:fld>
           </a:p>
@@ -4052,7 +4052,7 @@
         <p:txBody>
           <a:bodyPr/>
           <a:p>
-            <a:fld id="{1003908A-1816-4F48-8D4B-E6828533046E}" type="slidenum">
+            <a:fld id="{BB8BE44E-7639-42FA-9247-D97B915BBBEF}" type="slidenum">
               <a:t>&lt;#&gt;</a:t>
             </a:fld>
           </a:p>
@@ -4261,7 +4261,7 @@
         <p:txBody>
           <a:bodyPr/>
           <a:p>
-            <a:fld id="{5676AD01-63C0-4C1F-9217-7000A32DC23C}" type="slidenum">
+            <a:fld id="{371D68C9-6E1B-4E40-A56B-1341375BF94C}" type="slidenum">
               <a:t>&lt;#&gt;</a:t>
             </a:fld>
           </a:p>
@@ -4384,7 +4384,7 @@
         <p:txBody>
           <a:bodyPr/>
           <a:p>
-            <a:fld id="{AF536312-BE39-4101-BEF7-8183C217A65B}" type="slidenum">
+            <a:fld id="{CF256940-311A-474A-8DF5-C9848966C341}" type="slidenum">
               <a:t>&lt;#&gt;</a:t>
             </a:fld>
           </a:p>
@@ -4550,7 +4550,7 @@
         <p:txBody>
           <a:bodyPr/>
           <a:p>
-            <a:fld id="{4ABFF19B-BB6C-4E8A-95EB-C5BD516BE573}" type="slidenum">
+            <a:fld id="{5D2D1E43-9527-4D06-8263-D6B83B9E16A0}" type="slidenum">
               <a:t>&lt;#&gt;</a:t>
             </a:fld>
           </a:p>
@@ -4671,7 +4671,7 @@
         <p:txBody>
           <a:bodyPr/>
           <a:p>
-            <a:fld id="{7C726A3A-0C51-46E8-985C-6FF64CA34AAF}" type="slidenum">
+            <a:fld id="{5125E2B7-D72E-4CF0-A710-777388B3D780}" type="slidenum">
               <a:t>&lt;#&gt;</a:t>
             </a:fld>
           </a:p>
@@ -4923,7 +4923,7 @@
         <p:txBody>
           <a:bodyPr/>
           <a:p>
-            <a:fld id="{05122502-CE03-41B2-990E-49DDCA88B532}" type="slidenum">
+            <a:fld id="{F9DE2BF4-3983-4310-92EE-C1D24A4740FF}" type="slidenum">
               <a:t>&lt;#&gt;</a:t>
             </a:fld>
           </a:p>
@@ -5175,7 +5175,7 @@
         <p:txBody>
           <a:bodyPr/>
           <a:p>
-            <a:fld id="{22095135-F372-486B-9404-D238F3073716}" type="slidenum">
+            <a:fld id="{0A633E99-4809-4C36-9E93-D9CABA1B2E69}" type="slidenum">
               <a:t>&lt;#&gt;</a:t>
             </a:fld>
           </a:p>
@@ -5427,7 +5427,7 @@
         <p:txBody>
           <a:bodyPr/>
           <a:p>
-            <a:fld id="{E7C06C3E-88DE-4C39-92E6-36DC17064838}" type="slidenum">
+            <a:fld id="{B8ED3869-37C2-46BA-ADA8-DB123D698885}" type="slidenum">
               <a:t>&lt;#&gt;</a:t>
             </a:fld>
           </a:p>
@@ -5636,7 +5636,7 @@
         <p:txBody>
           <a:bodyPr/>
           <a:p>
-            <a:fld id="{92ED4D04-3C51-4C5C-A305-FF68C0DC72C2}" type="slidenum">
+            <a:fld id="{4CA20BF6-EAD5-480A-B0A1-6813B09930F4}" type="slidenum">
               <a:t>&lt;#&gt;</a:t>
             </a:fld>
           </a:p>
@@ -5931,7 +5931,7 @@
         <p:txBody>
           <a:bodyPr/>
           <a:p>
-            <a:fld id="{CCDDD6AA-729F-4793-912E-FB76CB24B8AC}" type="slidenum">
+            <a:fld id="{8A20D9D2-21A6-4AE9-AEF0-DFAFB80DA137}" type="slidenum">
               <a:t>&lt;#&gt;</a:t>
             </a:fld>
           </a:p>
@@ -6312,7 +6312,7 @@
         <p:txBody>
           <a:bodyPr/>
           <a:p>
-            <a:fld id="{C18D62DC-DF4B-49C4-B58C-4D510A5C7E79}" type="slidenum">
+            <a:fld id="{53626954-E67E-4621-9FC3-3E4A3D3E8E9F}" type="slidenum">
               <a:t>&lt;#&gt;</a:t>
             </a:fld>
           </a:p>
@@ -6395,7 +6395,7 @@
         <p:txBody>
           <a:bodyPr/>
           <a:p>
-            <a:fld id="{A6E73DD1-4280-46B4-817A-4746E5F6F05A}" type="slidenum">
+            <a:fld id="{F333F752-4637-4489-A5BF-A227AFF43406}" type="slidenum">
               <a:t>&lt;#&gt;</a:t>
             </a:fld>
           </a:p>
@@ -6558,7 +6558,7 @@
         <p:txBody>
           <a:bodyPr/>
           <a:p>
-            <a:fld id="{E6D53E1A-DA1E-41F6-B0E9-58CB0B5E5490}" type="slidenum">
+            <a:fld id="{961E081F-4CCC-4B5F-9BBA-B03C8D6FD6E4}" type="slidenum">
               <a:t>&lt;#&gt;</a:t>
             </a:fld>
           </a:p>
@@ -6724,7 +6724,7 @@
         <p:txBody>
           <a:bodyPr/>
           <a:p>
-            <a:fld id="{1C8DA571-D82B-4BEB-9E3F-594EF4715A44}" type="slidenum">
+            <a:fld id="{C640EF7F-1F28-467F-90F9-3B2DFBFB8D74}" type="slidenum">
               <a:t>&lt;#&gt;</a:t>
             </a:fld>
           </a:p>
@@ -6933,7 +6933,7 @@
         <p:txBody>
           <a:bodyPr/>
           <a:p>
-            <a:fld id="{1DCEA018-D53A-4AD3-A691-4D33FDD3383C}" type="slidenum">
+            <a:fld id="{41B68AB3-B9E0-4AF7-868D-D3A83A207C9D}" type="slidenum">
               <a:t>&lt;#&gt;</a:t>
             </a:fld>
           </a:p>
@@ -7142,7 +7142,7 @@
         <p:txBody>
           <a:bodyPr/>
           <a:p>
-            <a:fld id="{DCBE9C44-5694-4314-8FF2-D1C589A4FC56}" type="slidenum">
+            <a:fld id="{982A5D84-F34C-4725-AB9D-F2A757AB93A2}" type="slidenum">
               <a:t>&lt;#&gt;</a:t>
             </a:fld>
           </a:p>
@@ -7265,7 +7265,7 @@
         <p:txBody>
           <a:bodyPr/>
           <a:p>
-            <a:fld id="{93E3FE54-5D0C-475C-896C-E92DC54AA89F}" type="slidenum">
+            <a:fld id="{126F75DC-5BAF-426F-AF2A-509FCE55BF55}" type="slidenum">
               <a:t>&lt;#&gt;</a:t>
             </a:fld>
           </a:p>
@@ -7386,7 +7386,7 @@
         <p:txBody>
           <a:bodyPr/>
           <a:p>
-            <a:fld id="{221AA84B-60F5-4CCD-863A-1AABA6D81268}" type="slidenum">
+            <a:fld id="{71588952-AE61-4059-AA09-7B994CA7B6CD}" type="slidenum">
               <a:t>&lt;#&gt;</a:t>
             </a:fld>
           </a:p>
@@ -7638,7 +7638,7 @@
         <p:txBody>
           <a:bodyPr/>
           <a:p>
-            <a:fld id="{C04A1B50-5957-47FA-B1CF-A3AF66584349}" type="slidenum">
+            <a:fld id="{F7B7DAF4-D020-484B-BFCD-E744E21BC90B}" type="slidenum">
               <a:t>&lt;#&gt;</a:t>
             </a:fld>
           </a:p>
@@ -7890,7 +7890,7 @@
         <p:txBody>
           <a:bodyPr/>
           <a:p>
-            <a:fld id="{4C57A140-ED4D-4C7A-A930-C149F5831046}" type="slidenum">
+            <a:fld id="{AE0E7CA5-484E-4A95-9D16-AC8507D0DFD0}" type="slidenum">
               <a:t>&lt;#&gt;</a:t>
             </a:fld>
           </a:p>
@@ -8142,7 +8142,7 @@
         <p:txBody>
           <a:bodyPr/>
           <a:p>
-            <a:fld id="{30EE1DB4-C465-454C-88CD-87AB6E9608EF}" type="slidenum">
+            <a:fld id="{7E7B5FB7-7220-46C7-862E-A9B028FDAFE1}" type="slidenum">
               <a:t>&lt;#&gt;</a:t>
             </a:fld>
           </a:p>
@@ -8351,7 +8351,7 @@
         <p:txBody>
           <a:bodyPr/>
           <a:p>
-            <a:fld id="{278D2FAF-9BE7-48C7-B5B2-049930754267}" type="slidenum">
+            <a:fld id="{C6B60D88-77CC-4C46-B4E5-5DF03EFB935C}" type="slidenum">
               <a:t>&lt;#&gt;</a:t>
             </a:fld>
           </a:p>
@@ -8646,7 +8646,7 @@
         <p:txBody>
           <a:bodyPr/>
           <a:p>
-            <a:fld id="{9CF5EED7-91D2-4E23-8183-CC938AFDEEF1}" type="slidenum">
+            <a:fld id="{2A1AE49C-5C9E-45DC-BF48-3069BFCF784A}" type="slidenum">
               <a:t>&lt;#&gt;</a:t>
             </a:fld>
           </a:p>
@@ -9027,7 +9027,7 @@
         <p:txBody>
           <a:bodyPr/>
           <a:p>
-            <a:fld id="{B0D1DF71-C1C1-4439-8857-F6FAAAAA2C10}" type="slidenum">
+            <a:fld id="{6653D8C6-7587-48DF-9C03-0829E3C4C115}" type="slidenum">
               <a:t>&lt;#&gt;</a:t>
             </a:fld>
           </a:p>
@@ -9150,7 +9150,7 @@
         <p:txBody>
           <a:bodyPr/>
           <a:p>
-            <a:fld id="{EA02DEA7-0257-42B6-8C5B-C455462E876B}" type="slidenum">
+            <a:fld id="{B54B6D2B-D5E9-4AED-B724-CE52740E5817}" type="slidenum">
               <a:t>&lt;#&gt;</a:t>
             </a:fld>
           </a:p>
@@ -9271,7 +9271,7 @@
         <p:txBody>
           <a:bodyPr/>
           <a:p>
-            <a:fld id="{44396515-E619-4D68-BAD3-4BA1A9E19842}" type="slidenum">
+            <a:fld id="{532C8FD8-D426-48AF-A69C-A99A655BEB10}" type="slidenum">
               <a:t>&lt;#&gt;</a:t>
             </a:fld>
           </a:p>
@@ -9523,7 +9523,7 @@
         <p:txBody>
           <a:bodyPr/>
           <a:p>
-            <a:fld id="{7B7B2149-1BBD-43D5-B11B-5F601B56B899}" type="slidenum">
+            <a:fld id="{53B6181D-0892-4112-9554-A25C882C3917}" type="slidenum">
               <a:t>&lt;#&gt;</a:t>
             </a:fld>
           </a:p>
@@ -9775,7 +9775,7 @@
         <p:txBody>
           <a:bodyPr/>
           <a:p>
-            <a:fld id="{CAF15A29-EDC3-45B3-ABA9-F2F910D87763}" type="slidenum">
+            <a:fld id="{CD92B078-5944-4885-91A5-A86721999DBA}" type="slidenum">
               <a:t>&lt;#&gt;</a:t>
             </a:fld>
           </a:p>
@@ -10027,7 +10027,7 @@
         <p:txBody>
           <a:bodyPr/>
           <a:p>
-            <a:fld id="{20ECAF5B-3FC1-4069-80D4-34CFB20203FA}" type="slidenum">
+            <a:fld id="{EB3F7683-2630-4C04-8616-E2BAD6435D45}" type="slidenum">
               <a:t>&lt;#&gt;</a:t>
             </a:fld>
           </a:p>
@@ -10092,15 +10092,15 @@
         <p:spPr>
           <a:xfrm>
             <a:off x="0" y="0"/>
-            <a:ext cx="9142920" cy="303840"/>
+            <a:ext cx="9142560" cy="303480"/>
           </a:xfrm>
           <a:custGeom>
             <a:avLst/>
             <a:gdLst>
-              <a:gd name="textAreaLeft" fmla="*/ 0 w 9142920"/>
-              <a:gd name="textAreaRight" fmla="*/ 9144000 w 9142920"/>
-              <a:gd name="textAreaTop" fmla="*/ 0 h 303840"/>
-              <a:gd name="textAreaBottom" fmla="*/ 304920 h 303840"/>
+              <a:gd name="textAreaLeft" fmla="*/ 0 w 9142560"/>
+              <a:gd name="textAreaRight" fmla="*/ 9144000 w 9142560"/>
+              <a:gd name="textAreaTop" fmla="*/ 0 h 303480"/>
+              <a:gd name="textAreaBottom" fmla="*/ 304920 h 303480"/>
             </a:gdLst>
             <a:ahLst/>
             <a:rect l="textAreaLeft" t="textAreaTop" r="textAreaRight" b="textAreaBottom"/>
@@ -10167,15 +10167,15 @@
         <p:spPr>
           <a:xfrm>
             <a:off x="0" y="0"/>
-            <a:ext cx="9142920" cy="303840"/>
+            <a:ext cx="9142560" cy="303480"/>
           </a:xfrm>
           <a:custGeom>
             <a:avLst/>
             <a:gdLst>
-              <a:gd name="textAreaLeft" fmla="*/ 0 w 9142920"/>
-              <a:gd name="textAreaRight" fmla="*/ 9144000 w 9142920"/>
-              <a:gd name="textAreaTop" fmla="*/ 0 h 303840"/>
-              <a:gd name="textAreaBottom" fmla="*/ 304920 h 303840"/>
+              <a:gd name="textAreaLeft" fmla="*/ 0 w 9142560"/>
+              <a:gd name="textAreaRight" fmla="*/ 9144000 w 9142560"/>
+              <a:gd name="textAreaTop" fmla="*/ 0 h 303480"/>
+              <a:gd name="textAreaBottom" fmla="*/ 304920 h 303480"/>
             </a:gdLst>
             <a:ahLst/>
             <a:rect l="textAreaLeft" t="textAreaTop" r="textAreaRight" b="textAreaBottom"/>
@@ -10242,15 +10242,15 @@
         <p:spPr>
           <a:xfrm>
             <a:off x="685800" y="2832120"/>
-            <a:ext cx="7847640" cy="360"/>
+            <a:ext cx="7847280" cy="360"/>
           </a:xfrm>
           <a:custGeom>
             <a:avLst/>
             <a:gdLst>
-              <a:gd name="textAreaLeft" fmla="*/ 0 w 7847640"/>
-              <a:gd name="textAreaRight" fmla="*/ 7848720 w 7847640"/>
+              <a:gd name="textAreaLeft" fmla="*/ 0 w 7847280"/>
+              <a:gd name="textAreaRight" fmla="*/ 7848720 w 7847280"/>
               <a:gd name="textAreaTop" fmla="*/ 0 h 360"/>
-              <a:gd name="textAreaBottom" fmla="*/ 1440 h 360"/>
+              <a:gd name="textAreaBottom" fmla="*/ 2880 h 360"/>
             </a:gdLst>
             <a:ahLst/>
             <a:rect l="textAreaLeft" t="textAreaTop" r="textAreaRight" b="textAreaBottom"/>
@@ -10312,7 +10312,7 @@
         <p:spPr>
           <a:xfrm>
             <a:off x="3108960" y="5315040"/>
-            <a:ext cx="2925000" cy="284760"/>
+            <a:ext cx="2924640" cy="284400"/>
           </a:xfrm>
           <a:prstGeom prst="rect">
             <a:avLst/>
@@ -10384,7 +10384,7 @@
         <p:spPr>
           <a:xfrm>
             <a:off x="6583680" y="5315040"/>
-            <a:ext cx="2102040" cy="284760"/>
+            <a:ext cx="2101680" cy="284400"/>
           </a:xfrm>
           <a:prstGeom prst="rect">
             <a:avLst/>
@@ -10425,7 +10425,7 @@
                 <a:tab algn="l" pos="0"/>
               </a:tabLst>
             </a:pPr>
-            <a:fld id="{80A65E5D-315A-4D0A-A871-79D8C538D88B}" type="slidenum">
+            <a:fld id="{E72564F5-37AE-46FD-9734-4BEAE6755ADD}" type="slidenum">
               <a:rPr b="0" lang="fr-FR" sz="1400" spc="-1" strike="noStrike">
                 <a:solidFill>
                   <a:srgbClr val="b2b2b2"/>
@@ -10456,7 +10456,7 @@
         <p:spPr>
           <a:xfrm>
             <a:off x="457200" y="5315040"/>
-            <a:ext cx="2102040" cy="284760"/>
+            <a:ext cx="2101680" cy="284400"/>
           </a:xfrm>
           <a:prstGeom prst="rect">
             <a:avLst/>
@@ -10830,15 +10830,15 @@
         <p:spPr>
           <a:xfrm>
             <a:off x="0" y="0"/>
-            <a:ext cx="9142920" cy="303840"/>
+            <a:ext cx="9142560" cy="303480"/>
           </a:xfrm>
           <a:custGeom>
             <a:avLst/>
             <a:gdLst>
-              <a:gd name="textAreaLeft" fmla="*/ 0 w 9142920"/>
-              <a:gd name="textAreaRight" fmla="*/ 9144000 w 9142920"/>
-              <a:gd name="textAreaTop" fmla="*/ 0 h 303840"/>
-              <a:gd name="textAreaBottom" fmla="*/ 304920 h 303840"/>
+              <a:gd name="textAreaLeft" fmla="*/ 0 w 9142560"/>
+              <a:gd name="textAreaRight" fmla="*/ 9144000 w 9142560"/>
+              <a:gd name="textAreaTop" fmla="*/ 0 h 303480"/>
+              <a:gd name="textAreaBottom" fmla="*/ 304920 h 303480"/>
             </a:gdLst>
             <a:ahLst/>
             <a:rect l="textAreaLeft" t="textAreaTop" r="textAreaRight" b="textAreaBottom"/>
@@ -10909,7 +10909,7 @@
         <p:spPr>
           <a:xfrm>
             <a:off x="3108960" y="5315040"/>
-            <a:ext cx="2925000" cy="284760"/>
+            <a:ext cx="2924640" cy="284400"/>
           </a:xfrm>
           <a:prstGeom prst="rect">
             <a:avLst/>
@@ -10981,7 +10981,7 @@
         <p:spPr>
           <a:xfrm>
             <a:off x="6583680" y="5315040"/>
-            <a:ext cx="2102040" cy="284760"/>
+            <a:ext cx="2101680" cy="284400"/>
           </a:xfrm>
           <a:prstGeom prst="rect">
             <a:avLst/>
@@ -11022,7 +11022,7 @@
                 <a:tab algn="l" pos="0"/>
               </a:tabLst>
             </a:pPr>
-            <a:fld id="{0D0E0D8B-6579-4A3F-9856-E607E935ED55}" type="slidenum">
+            <a:fld id="{459107C9-F49E-44D9-A246-F4F64695C28A}" type="slidenum">
               <a:rPr b="0" lang="fr-FR" sz="1400" spc="-1" strike="noStrike">
                 <a:solidFill>
                   <a:srgbClr val="b2b2b2"/>
@@ -11053,7 +11053,7 @@
         <p:spPr>
           <a:xfrm>
             <a:off x="457200" y="5315040"/>
-            <a:ext cx="2102040" cy="284760"/>
+            <a:ext cx="2101680" cy="284400"/>
           </a:xfrm>
           <a:prstGeom prst="rect">
             <a:avLst/>
@@ -11427,15 +11427,15 @@
         <p:spPr>
           <a:xfrm>
             <a:off x="0" y="0"/>
-            <a:ext cx="9142920" cy="303840"/>
+            <a:ext cx="9142560" cy="303480"/>
           </a:xfrm>
           <a:custGeom>
             <a:avLst/>
             <a:gdLst>
-              <a:gd name="textAreaLeft" fmla="*/ 0 w 9142920"/>
-              <a:gd name="textAreaRight" fmla="*/ 9144000 w 9142920"/>
-              <a:gd name="textAreaTop" fmla="*/ 0 h 303840"/>
-              <a:gd name="textAreaBottom" fmla="*/ 304920 h 303840"/>
+              <a:gd name="textAreaLeft" fmla="*/ 0 w 9142560"/>
+              <a:gd name="textAreaRight" fmla="*/ 9144000 w 9142560"/>
+              <a:gd name="textAreaTop" fmla="*/ 0 h 303480"/>
+              <a:gd name="textAreaBottom" fmla="*/ 304920 h 303480"/>
             </a:gdLst>
             <a:ahLst/>
             <a:rect l="textAreaLeft" t="textAreaTop" r="textAreaRight" b="textAreaBottom"/>
@@ -11502,15 +11502,15 @@
         <p:spPr>
           <a:xfrm>
             <a:off x="0" y="374400"/>
-            <a:ext cx="9142920" cy="5339880"/>
+            <a:ext cx="9142560" cy="5339520"/>
           </a:xfrm>
           <a:custGeom>
             <a:avLst/>
             <a:gdLst>
-              <a:gd name="textAreaLeft" fmla="*/ 0 w 9142920"/>
-              <a:gd name="textAreaRight" fmla="*/ 9144000 w 9142920"/>
-              <a:gd name="textAreaTop" fmla="*/ 0 h 5339880"/>
-              <a:gd name="textAreaBottom" fmla="*/ 5340960 h 5339880"/>
+              <a:gd name="textAreaLeft" fmla="*/ 0 w 9142560"/>
+              <a:gd name="textAreaRight" fmla="*/ 9144000 w 9142560"/>
+              <a:gd name="textAreaTop" fmla="*/ 0 h 5339520"/>
+              <a:gd name="textAreaBottom" fmla="*/ 5340960 h 5339520"/>
             </a:gdLst>
             <a:ahLst/>
             <a:rect l="textAreaLeft" t="textAreaTop" r="textAreaRight" b="textAreaBottom"/>
@@ -11577,15 +11577,15 @@
         <p:spPr>
           <a:xfrm>
             <a:off x="0" y="304920"/>
-            <a:ext cx="9142920" cy="68760"/>
+            <a:ext cx="9142560" cy="68400"/>
           </a:xfrm>
           <a:custGeom>
             <a:avLst/>
             <a:gdLst>
-              <a:gd name="textAreaLeft" fmla="*/ 0 w 9142920"/>
-              <a:gd name="textAreaRight" fmla="*/ 9144000 w 9142920"/>
-              <a:gd name="textAreaTop" fmla="*/ 0 h 68760"/>
-              <a:gd name="textAreaBottom" fmla="*/ 69840 h 68760"/>
+              <a:gd name="textAreaLeft" fmla="*/ 0 w 9142560"/>
+              <a:gd name="textAreaRight" fmla="*/ 9144000 w 9142560"/>
+              <a:gd name="textAreaTop" fmla="*/ 0 h 68400"/>
+              <a:gd name="textAreaBottom" fmla="*/ 69840 h 68400"/>
             </a:gdLst>
             <a:ahLst/>
             <a:rect l="textAreaLeft" t="textAreaTop" r="textAreaRight" b="textAreaBottom"/>
@@ -11652,15 +11652,15 @@
         <p:spPr>
           <a:xfrm>
             <a:off x="0" y="0"/>
-            <a:ext cx="9142920" cy="303840"/>
+            <a:ext cx="9142560" cy="303480"/>
           </a:xfrm>
           <a:custGeom>
             <a:avLst/>
             <a:gdLst>
-              <a:gd name="textAreaLeft" fmla="*/ 0 w 9142920"/>
-              <a:gd name="textAreaRight" fmla="*/ 9144000 w 9142920"/>
-              <a:gd name="textAreaTop" fmla="*/ 0 h 303840"/>
-              <a:gd name="textAreaBottom" fmla="*/ 304920 h 303840"/>
+              <a:gd name="textAreaLeft" fmla="*/ 0 w 9142560"/>
+              <a:gd name="textAreaRight" fmla="*/ 9144000 w 9142560"/>
+              <a:gd name="textAreaTop" fmla="*/ 0 h 303480"/>
+              <a:gd name="textAreaBottom" fmla="*/ 304920 h 303480"/>
             </a:gdLst>
             <a:ahLst/>
             <a:rect l="textAreaLeft" t="textAreaTop" r="textAreaRight" b="textAreaBottom"/>
@@ -11727,15 +11727,15 @@
         <p:spPr>
           <a:xfrm>
             <a:off x="731520" y="3832920"/>
-            <a:ext cx="7847640" cy="360"/>
+            <a:ext cx="7847280" cy="360"/>
           </a:xfrm>
           <a:custGeom>
             <a:avLst/>
             <a:gdLst>
-              <a:gd name="textAreaLeft" fmla="*/ 0 w 7847640"/>
-              <a:gd name="textAreaRight" fmla="*/ 7848720 w 7847640"/>
+              <a:gd name="textAreaLeft" fmla="*/ 0 w 7847280"/>
+              <a:gd name="textAreaRight" fmla="*/ 7848720 w 7847280"/>
               <a:gd name="textAreaTop" fmla="*/ 0 h 360"/>
-              <a:gd name="textAreaBottom" fmla="*/ 1440 h 360"/>
+              <a:gd name="textAreaBottom" fmla="*/ 2880 h 360"/>
             </a:gdLst>
             <a:ahLst/>
             <a:rect l="textAreaLeft" t="textAreaTop" r="textAreaRight" b="textAreaBottom"/>
@@ -11797,7 +11797,7 @@
         <p:spPr>
           <a:xfrm>
             <a:off x="3108960" y="5315040"/>
-            <a:ext cx="2925000" cy="284760"/>
+            <a:ext cx="2924640" cy="284400"/>
           </a:xfrm>
           <a:prstGeom prst="rect">
             <a:avLst/>
@@ -11869,7 +11869,7 @@
         <p:spPr>
           <a:xfrm>
             <a:off x="6583680" y="5315040"/>
-            <a:ext cx="2102040" cy="284760"/>
+            <a:ext cx="2101680" cy="284400"/>
           </a:xfrm>
           <a:prstGeom prst="rect">
             <a:avLst/>
@@ -11910,7 +11910,7 @@
                 <a:tab algn="l" pos="0"/>
               </a:tabLst>
             </a:pPr>
-            <a:fld id="{A8FBE6B1-A170-4103-91CC-FA79C28F5C91}" type="slidenum">
+            <a:fld id="{EC70FEC6-770F-471C-8A1B-0D5BA554115F}" type="slidenum">
               <a:rPr b="0" lang="fr-FR" sz="1400" spc="-1" strike="noStrike">
                 <a:solidFill>
                   <a:srgbClr val="b2b2b2"/>
@@ -11941,7 +11941,7 @@
         <p:spPr>
           <a:xfrm>
             <a:off x="457200" y="5315040"/>
-            <a:ext cx="2102040" cy="284760"/>
+            <a:ext cx="2101680" cy="284400"/>
           </a:xfrm>
           <a:prstGeom prst="rect">
             <a:avLst/>
@@ -12315,15 +12315,15 @@
         <p:spPr>
           <a:xfrm>
             <a:off x="0" y="0"/>
-            <a:ext cx="9142920" cy="303840"/>
+            <a:ext cx="9142560" cy="303480"/>
           </a:xfrm>
           <a:custGeom>
             <a:avLst/>
             <a:gdLst>
-              <a:gd name="textAreaLeft" fmla="*/ 0 w 9142920"/>
-              <a:gd name="textAreaRight" fmla="*/ 9144000 w 9142920"/>
-              <a:gd name="textAreaTop" fmla="*/ 0 h 303840"/>
-              <a:gd name="textAreaBottom" fmla="*/ 304920 h 303840"/>
+              <a:gd name="textAreaLeft" fmla="*/ 0 w 9142560"/>
+              <a:gd name="textAreaRight" fmla="*/ 9144000 w 9142560"/>
+              <a:gd name="textAreaTop" fmla="*/ 0 h 303480"/>
+              <a:gd name="textAreaBottom" fmla="*/ 304920 h 303480"/>
             </a:gdLst>
             <a:ahLst/>
             <a:rect l="textAreaLeft" t="textAreaTop" r="textAreaRight" b="textAreaBottom"/>
@@ -12390,15 +12390,15 @@
         <p:spPr>
           <a:xfrm>
             <a:off x="0" y="374400"/>
-            <a:ext cx="9142920" cy="5339880"/>
+            <a:ext cx="9142560" cy="5339520"/>
           </a:xfrm>
           <a:custGeom>
             <a:avLst/>
             <a:gdLst>
-              <a:gd name="textAreaLeft" fmla="*/ 0 w 9142920"/>
-              <a:gd name="textAreaRight" fmla="*/ 9144000 w 9142920"/>
-              <a:gd name="textAreaTop" fmla="*/ 0 h 5339880"/>
-              <a:gd name="textAreaBottom" fmla="*/ 5340960 h 5339880"/>
+              <a:gd name="textAreaLeft" fmla="*/ 0 w 9142560"/>
+              <a:gd name="textAreaRight" fmla="*/ 9144000 w 9142560"/>
+              <a:gd name="textAreaTop" fmla="*/ 0 h 5339520"/>
+              <a:gd name="textAreaBottom" fmla="*/ 5340960 h 5339520"/>
             </a:gdLst>
             <a:ahLst/>
             <a:rect l="textAreaLeft" t="textAreaTop" r="textAreaRight" b="textAreaBottom"/>
@@ -12465,15 +12465,15 @@
         <p:spPr>
           <a:xfrm>
             <a:off x="0" y="304920"/>
-            <a:ext cx="9142920" cy="68760"/>
+            <a:ext cx="9142560" cy="68400"/>
           </a:xfrm>
           <a:custGeom>
             <a:avLst/>
             <a:gdLst>
-              <a:gd name="textAreaLeft" fmla="*/ 0 w 9142920"/>
-              <a:gd name="textAreaRight" fmla="*/ 9144000 w 9142920"/>
-              <a:gd name="textAreaTop" fmla="*/ 0 h 68760"/>
-              <a:gd name="textAreaBottom" fmla="*/ 69840 h 68760"/>
+              <a:gd name="textAreaLeft" fmla="*/ 0 w 9142560"/>
+              <a:gd name="textAreaRight" fmla="*/ 9144000 w 9142560"/>
+              <a:gd name="textAreaTop" fmla="*/ 0 h 68400"/>
+              <a:gd name="textAreaBottom" fmla="*/ 69840 h 68400"/>
             </a:gdLst>
             <a:ahLst/>
             <a:rect l="textAreaLeft" t="textAreaTop" r="textAreaRight" b="textAreaBottom"/>
@@ -12540,15 +12540,15 @@
         <p:spPr>
           <a:xfrm>
             <a:off x="0" y="0"/>
-            <a:ext cx="9142920" cy="303840"/>
+            <a:ext cx="9142560" cy="303480"/>
           </a:xfrm>
           <a:custGeom>
             <a:avLst/>
             <a:gdLst>
-              <a:gd name="textAreaLeft" fmla="*/ 0 w 9142920"/>
-              <a:gd name="textAreaRight" fmla="*/ 9144000 w 9142920"/>
-              <a:gd name="textAreaTop" fmla="*/ 0 h 303840"/>
-              <a:gd name="textAreaBottom" fmla="*/ 304920 h 303840"/>
+              <a:gd name="textAreaLeft" fmla="*/ 0 w 9142560"/>
+              <a:gd name="textAreaRight" fmla="*/ 9144000 w 9142560"/>
+              <a:gd name="textAreaTop" fmla="*/ 0 h 303480"/>
+              <a:gd name="textAreaBottom" fmla="*/ 304920 h 303480"/>
             </a:gdLst>
             <a:ahLst/>
             <a:rect l="textAreaLeft" t="textAreaTop" r="textAreaRight" b="textAreaBottom"/>
@@ -12615,15 +12615,15 @@
         <p:spPr>
           <a:xfrm>
             <a:off x="731520" y="3832920"/>
-            <a:ext cx="7847640" cy="360"/>
+            <a:ext cx="7847280" cy="360"/>
           </a:xfrm>
           <a:custGeom>
             <a:avLst/>
             <a:gdLst>
-              <a:gd name="textAreaLeft" fmla="*/ 0 w 7847640"/>
-              <a:gd name="textAreaRight" fmla="*/ 7848720 w 7847640"/>
+              <a:gd name="textAreaLeft" fmla="*/ 0 w 7847280"/>
+              <a:gd name="textAreaRight" fmla="*/ 7848720 w 7847280"/>
               <a:gd name="textAreaTop" fmla="*/ 0 h 360"/>
-              <a:gd name="textAreaBottom" fmla="*/ 1440 h 360"/>
+              <a:gd name="textAreaBottom" fmla="*/ 2880 h 360"/>
             </a:gdLst>
             <a:ahLst/>
             <a:rect l="textAreaLeft" t="textAreaTop" r="textAreaRight" b="textAreaBottom"/>
@@ -12685,7 +12685,7 @@
         <p:spPr>
           <a:xfrm>
             <a:off x="3108960" y="5315040"/>
-            <a:ext cx="2925000" cy="284760"/>
+            <a:ext cx="2924640" cy="284400"/>
           </a:xfrm>
           <a:prstGeom prst="rect">
             <a:avLst/>
@@ -12757,7 +12757,7 @@
         <p:spPr>
           <a:xfrm>
             <a:off x="6583680" y="5315040"/>
-            <a:ext cx="2102040" cy="284760"/>
+            <a:ext cx="2101680" cy="284400"/>
           </a:xfrm>
           <a:prstGeom prst="rect">
             <a:avLst/>
@@ -12798,7 +12798,7 @@
                 <a:tab algn="l" pos="0"/>
               </a:tabLst>
             </a:pPr>
-            <a:fld id="{77482E64-C93B-48C5-87B3-99E6ABC083DC}" type="slidenum">
+            <a:fld id="{2F910621-6B06-4E04-8B7F-C62D95047D56}" type="slidenum">
               <a:rPr b="0" lang="fr-FR" sz="1400" spc="-1" strike="noStrike">
                 <a:solidFill>
                   <a:srgbClr val="b2b2b2"/>
@@ -12829,7 +12829,7 @@
         <p:spPr>
           <a:xfrm>
             <a:off x="457200" y="5315040"/>
-            <a:ext cx="2102040" cy="284760"/>
+            <a:ext cx="2101680" cy="284400"/>
           </a:xfrm>
           <a:prstGeom prst="rect">
             <a:avLst/>
@@ -13200,7 +13200,7 @@
         <p:spPr>
           <a:xfrm>
             <a:off x="764640" y="848520"/>
-            <a:ext cx="7708320" cy="1840320"/>
+            <a:ext cx="7707960" cy="1839960"/>
           </a:xfrm>
           <a:prstGeom prst="rect">
             <a:avLst/>
@@ -13237,7 +13237,7 @@
               <a:t>PROJET</a:t>
             </a:r>
             <a:r>
-              <a:rPr b="0" lang="fr-FR" sz="4000" spc="701" strike="noStrike">
+              <a:rPr b="0" lang="fr-FR" sz="4000" spc="698" strike="noStrike">
                 <a:solidFill>
                   <a:srgbClr val="d2523b"/>
                 </a:solidFill>
@@ -13255,7 +13255,7 @@
               <a:t>4</a:t>
             </a:r>
             <a:r>
-              <a:rPr b="0" lang="fr-FR" sz="4000" spc="746" strike="noStrike">
+              <a:rPr b="0" lang="fr-FR" sz="4000" spc="744" strike="noStrike">
                 <a:solidFill>
                   <a:srgbClr val="d2523b"/>
                 </a:solidFill>
@@ -13273,7 +13273,7 @@
               <a:t>–</a:t>
             </a:r>
             <a:r>
-              <a:rPr b="0" lang="fr-FR" sz="4000" spc="766" strike="noStrike">
+              <a:rPr b="0" lang="fr-FR" sz="4000" spc="763" strike="noStrike">
                 <a:solidFill>
                   <a:srgbClr val="d2523b"/>
                 </a:solidFill>
@@ -13291,7 +13291,7 @@
               <a:t>«</a:t>
             </a:r>
             <a:r>
-              <a:rPr b="0" lang="fr-FR" sz="4000" spc="772" strike="noStrike">
+              <a:rPr b="0" lang="fr-FR" sz="4000" spc="769" strike="noStrike">
                 <a:solidFill>
                   <a:srgbClr val="d2523b"/>
                 </a:solidFill>
@@ -13309,7 +13309,7 @@
               <a:t>ANTICIPEZ</a:t>
             </a:r>
             <a:r>
-              <a:rPr b="0" lang="fr-FR" sz="4000" spc="746" strike="noStrike">
+              <a:rPr b="0" lang="fr-FR" sz="4000" spc="744" strike="noStrike">
                 <a:solidFill>
                   <a:srgbClr val="d2523b"/>
                 </a:solidFill>
@@ -13336,25 +13336,25 @@
               <a:t>BESOINS</a:t>
             </a:r>
             <a:r>
+              <a:rPr b="0" lang="fr-FR" sz="4000" spc="60" strike="noStrike">
+                <a:solidFill>
+                  <a:srgbClr val="d2523b"/>
+                </a:solidFill>
+                <a:latin typeface="Arial"/>
+              </a:rPr>
+              <a:t>  </a:t>
+            </a:r>
+            <a:r>
+              <a:rPr b="0" lang="fr-FR" sz="4000" spc="-1" strike="noStrike">
+                <a:solidFill>
+                  <a:srgbClr val="d2523b"/>
+                </a:solidFill>
+                <a:latin typeface="Arial"/>
+              </a:rPr>
+              <a:t>EN</a:t>
+            </a:r>
+            <a:r>
               <a:rPr b="0" lang="fr-FR" sz="4000" spc="63" strike="noStrike">
-                <a:solidFill>
-                  <a:srgbClr val="d2523b"/>
-                </a:solidFill>
-                <a:latin typeface="Arial"/>
-              </a:rPr>
-              <a:t>  </a:t>
-            </a:r>
-            <a:r>
-              <a:rPr b="0" lang="fr-FR" sz="4000" spc="-1" strike="noStrike">
-                <a:solidFill>
-                  <a:srgbClr val="d2523b"/>
-                </a:solidFill>
-                <a:latin typeface="Arial"/>
-              </a:rPr>
-              <a:t>EN</a:t>
-            </a:r>
-            <a:r>
-              <a:rPr b="0" lang="fr-FR" sz="4000" spc="66" strike="noStrike">
                 <a:solidFill>
                   <a:srgbClr val="d2523b"/>
                 </a:solidFill>
@@ -13456,7 +13456,7 @@
         <p:spPr>
           <a:xfrm>
             <a:off x="764640" y="2873880"/>
-            <a:ext cx="2927520" cy="3326040"/>
+            <a:ext cx="2927160" cy="3325680"/>
           </a:xfrm>
           <a:prstGeom prst="rect">
             <a:avLst/>
@@ -13493,7 +13493,7 @@
               <a:t>Soutenance</a:t>
             </a:r>
             <a:r>
-              <a:rPr b="0" lang="fr-FR" sz="2400" spc="18" strike="noStrike">
+              <a:rPr b="0" lang="fr-FR" sz="2400" spc="15" strike="noStrike">
                 <a:solidFill>
                   <a:srgbClr val="56566d"/>
                 </a:solidFill>
@@ -13527,15 +13527,6 @@
                 <a:latin typeface="Arial"/>
               </a:rPr>
               <a:t>projet </a:t>
-            </a:r>
-            <a:r>
-              <a:rPr b="0" lang="fr-FR" sz="2400" spc="-1" strike="noStrike">
-                <a:solidFill>
-                  <a:srgbClr val="56566d"/>
-                </a:solidFill>
-                <a:latin typeface="Arial"/>
-              </a:rPr>
-              <a:t>Décembre </a:t>
             </a:r>
             <a:r>
               <a:rPr b="0" lang="fr-FR" sz="2400" spc="-21" strike="noStrike">
@@ -13568,7 +13559,7 @@
         <p:spPr>
           <a:xfrm>
             <a:off x="8100360" y="4585680"/>
-            <a:ext cx="718920" cy="718920"/>
+            <a:ext cx="718560" cy="718560"/>
           </a:xfrm>
           <a:prstGeom prst="rect">
             <a:avLst/>
@@ -13587,7 +13578,7 @@
         <p:spPr>
           <a:xfrm>
             <a:off x="7700040" y="27000"/>
-            <a:ext cx="123840" cy="226080"/>
+            <a:ext cx="123480" cy="226080"/>
           </a:xfrm>
           <a:prstGeom prst="rect">
             <a:avLst/>
@@ -13674,15 +13665,15 @@
         <p:spPr>
           <a:xfrm>
             <a:off x="0" y="0"/>
-            <a:ext cx="9142920" cy="303840"/>
+            <a:ext cx="9142560" cy="303480"/>
           </a:xfrm>
           <a:custGeom>
             <a:avLst/>
             <a:gdLst>
-              <a:gd name="textAreaLeft" fmla="*/ 0 w 9142920"/>
-              <a:gd name="textAreaRight" fmla="*/ 9144000 w 9142920"/>
-              <a:gd name="textAreaTop" fmla="*/ 0 h 303840"/>
-              <a:gd name="textAreaBottom" fmla="*/ 304920 h 303840"/>
+              <a:gd name="textAreaLeft" fmla="*/ 0 w 9142560"/>
+              <a:gd name="textAreaRight" fmla="*/ 9144000 w 9142560"/>
+              <a:gd name="textAreaTop" fmla="*/ 0 h 303480"/>
+              <a:gd name="textAreaBottom" fmla="*/ 304920 h 303480"/>
             </a:gdLst>
             <a:ahLst/>
             <a:rect l="textAreaLeft" t="textAreaTop" r="textAreaRight" b="textAreaBottom"/>
@@ -13749,7 +13740,7 @@
         <p:spPr>
           <a:xfrm>
             <a:off x="5580000" y="204480"/>
-            <a:ext cx="3319200" cy="987840"/>
+            <a:ext cx="3318840" cy="987840"/>
           </a:xfrm>
           <a:prstGeom prst="rect">
             <a:avLst/>
@@ -13839,7 +13830,7 @@
         <p:spPr>
           <a:xfrm>
             <a:off x="4520160" y="1186200"/>
-            <a:ext cx="328320" cy="181800"/>
+            <a:ext cx="327960" cy="181800"/>
           </a:xfrm>
           <a:prstGeom prst="rect">
             <a:avLst/>
@@ -13893,7 +13884,7 @@
         <p:spPr>
           <a:xfrm>
             <a:off x="7700040" y="27000"/>
-            <a:ext cx="222480" cy="226080"/>
+            <a:ext cx="222120" cy="226080"/>
           </a:xfrm>
           <a:prstGeom prst="rect">
             <a:avLst/>
@@ -13954,7 +13945,7 @@
         <p:spPr>
           <a:xfrm>
             <a:off x="60480" y="379080"/>
-            <a:ext cx="5108760" cy="5299560"/>
+            <a:ext cx="5108400" cy="5299200"/>
           </a:xfrm>
           <a:prstGeom prst="rect">
             <a:avLst/>
@@ -13973,7 +13964,7 @@
         <p:spPr>
           <a:xfrm>
             <a:off x="5587920" y="1117800"/>
-            <a:ext cx="3272400" cy="1398240"/>
+            <a:ext cx="3272040" cy="1398240"/>
           </a:xfrm>
           <a:prstGeom prst="rect">
             <a:avLst/>
@@ -14279,7 +14270,7 @@
         <p:spPr>
           <a:xfrm>
             <a:off x="5587920" y="2783160"/>
-            <a:ext cx="3353760" cy="2510280"/>
+            <a:ext cx="3353400" cy="2510280"/>
           </a:xfrm>
           <a:prstGeom prst="rect">
             <a:avLst/>
@@ -14854,7 +14845,7 @@
               <a:t>LargestPropertyUseTypeGFA</a:t>
             </a:r>
             <a:r>
-              <a:rPr b="0" lang="fr-FR" sz="900" spc="52" strike="noStrike">
+              <a:rPr b="0" lang="fr-FR" sz="900" spc="49" strike="noStrike">
                 <a:solidFill>
                   <a:srgbClr val="292934"/>
                 </a:solidFill>
@@ -14874,7 +14865,7 @@
               <a:t>et</a:t>
             </a:r>
             <a:r>
-              <a:rPr b="0" lang="fr-FR" sz="900" spc="103" strike="noStrike">
+              <a:rPr b="0" lang="fr-FR" sz="900" spc="100" strike="noStrike">
                 <a:solidFill>
                   <a:srgbClr val="292934"/>
                 </a:solidFill>
@@ -15135,7 +15126,7 @@
         <p:spPr>
           <a:xfrm>
             <a:off x="801000" y="2264400"/>
-            <a:ext cx="4844520" cy="1474560"/>
+            <a:ext cx="4844160" cy="1474200"/>
           </a:xfrm>
           <a:prstGeom prst="rect">
             <a:avLst/>
@@ -15252,7 +15243,7 @@
         <p:spPr>
           <a:xfrm>
             <a:off x="7700040" y="27000"/>
-            <a:ext cx="204840" cy="226080"/>
+            <a:ext cx="204480" cy="226080"/>
           </a:xfrm>
           <a:prstGeom prst="rect">
             <a:avLst/>
@@ -15339,9 +15330,9 @@
         <p:grpSpPr>
           <a:xfrm>
             <a:off x="2267640" y="1273320"/>
-            <a:ext cx="4694040" cy="3599280"/>
+            <a:ext cx="4693680" cy="3598920"/>
             <a:chOff x="2267640" y="1273320"/>
-            <a:chExt cx="4694040" cy="3599280"/>
+            <a:chExt cx="4693680" cy="3598920"/>
           </a:xfrm>
         </p:grpSpPr>
         <p:sp>
@@ -15353,15 +15344,15 @@
           <p:spPr>
             <a:xfrm>
               <a:off x="2267640" y="1273320"/>
-              <a:ext cx="4694040" cy="3599280"/>
+              <a:ext cx="4693680" cy="3598920"/>
             </a:xfrm>
             <a:custGeom>
               <a:avLst/>
               <a:gdLst>
-                <a:gd name="textAreaLeft" fmla="*/ 0 w 4694040"/>
-                <a:gd name="textAreaRight" fmla="*/ 4695120 w 4694040"/>
-                <a:gd name="textAreaTop" fmla="*/ 0 h 3599280"/>
-                <a:gd name="textAreaBottom" fmla="*/ 3600360 h 3599280"/>
+                <a:gd name="textAreaLeft" fmla="*/ 0 w 4693680"/>
+                <a:gd name="textAreaRight" fmla="*/ 4695120 w 4693680"/>
+                <a:gd name="textAreaTop" fmla="*/ 0 h 3598920"/>
+                <a:gd name="textAreaBottom" fmla="*/ 3600360 h 3598920"/>
               </a:gdLst>
               <a:ahLst/>
               <a:rect l="textAreaLeft" t="textAreaTop" r="textAreaRight" b="textAreaBottom"/>
@@ -15428,15 +15419,15 @@
           <p:spPr>
             <a:xfrm>
               <a:off x="2267640" y="1273320"/>
-              <a:ext cx="4694040" cy="3599280"/>
+              <a:ext cx="4693680" cy="3598920"/>
             </a:xfrm>
             <a:custGeom>
               <a:avLst/>
               <a:gdLst>
-                <a:gd name="textAreaLeft" fmla="*/ 0 w 4694040"/>
-                <a:gd name="textAreaRight" fmla="*/ 4695120 w 4694040"/>
-                <a:gd name="textAreaTop" fmla="*/ 0 h 3599280"/>
-                <a:gd name="textAreaBottom" fmla="*/ 3600360 h 3599280"/>
+                <a:gd name="textAreaLeft" fmla="*/ 0 w 4693680"/>
+                <a:gd name="textAreaRight" fmla="*/ 4695120 w 4693680"/>
+                <a:gd name="textAreaTop" fmla="*/ 0 h 3598920"/>
+                <a:gd name="textAreaBottom" fmla="*/ 3600360 h 3598920"/>
               </a:gdLst>
               <a:ahLst/>
               <a:rect l="textAreaLeft" t="textAreaTop" r="textAreaRight" b="textAreaBottom"/>
@@ -15504,15 +15495,15 @@
           <p:spPr>
             <a:xfrm>
               <a:off x="2271600" y="2634840"/>
-              <a:ext cx="304920" cy="357120"/>
+              <a:ext cx="304560" cy="356760"/>
             </a:xfrm>
             <a:custGeom>
               <a:avLst/>
               <a:gdLst>
-                <a:gd name="textAreaLeft" fmla="*/ 0 w 304920"/>
-                <a:gd name="textAreaRight" fmla="*/ 306000 w 304920"/>
-                <a:gd name="textAreaTop" fmla="*/ 0 h 357120"/>
-                <a:gd name="textAreaBottom" fmla="*/ 358200 h 357120"/>
+                <a:gd name="textAreaLeft" fmla="*/ 0 w 304560"/>
+                <a:gd name="textAreaRight" fmla="*/ 306000 w 304560"/>
+                <a:gd name="textAreaTop" fmla="*/ 0 h 356760"/>
+                <a:gd name="textAreaBottom" fmla="*/ 358200 h 356760"/>
               </a:gdLst>
               <a:ahLst/>
               <a:rect l="textAreaLeft" t="textAreaTop" r="textAreaRight" b="textAreaBottom"/>
@@ -15588,15 +15579,15 @@
           <p:spPr>
             <a:xfrm>
               <a:off x="2704320" y="2127240"/>
-              <a:ext cx="1441800" cy="1371960"/>
+              <a:ext cx="1441440" cy="1371600"/>
             </a:xfrm>
             <a:custGeom>
               <a:avLst/>
               <a:gdLst>
-                <a:gd name="textAreaLeft" fmla="*/ 0 w 1441800"/>
-                <a:gd name="textAreaRight" fmla="*/ 1442880 w 1441800"/>
-                <a:gd name="textAreaTop" fmla="*/ 0 h 1371960"/>
-                <a:gd name="textAreaBottom" fmla="*/ 1373040 h 1371960"/>
+                <a:gd name="textAreaLeft" fmla="*/ 0 w 1441440"/>
+                <a:gd name="textAreaRight" fmla="*/ 1442880 w 1441440"/>
+                <a:gd name="textAreaTop" fmla="*/ 0 h 1371600"/>
+                <a:gd name="textAreaBottom" fmla="*/ 1373040 h 1371600"/>
               </a:gdLst>
               <a:ahLst/>
               <a:rect l="textAreaLeft" t="textAreaTop" r="textAreaRight" b="textAreaBottom"/>
@@ -15723,15 +15714,15 @@
           <p:spPr>
             <a:xfrm>
               <a:off x="2704320" y="2127240"/>
-              <a:ext cx="1441800" cy="1371960"/>
+              <a:ext cx="1441440" cy="1371600"/>
             </a:xfrm>
             <a:custGeom>
               <a:avLst/>
               <a:gdLst>
-                <a:gd name="textAreaLeft" fmla="*/ 0 w 1441800"/>
-                <a:gd name="textAreaRight" fmla="*/ 1442880 w 1441800"/>
-                <a:gd name="textAreaTop" fmla="*/ 0 h 1371960"/>
-                <a:gd name="textAreaBottom" fmla="*/ 1373040 h 1371960"/>
+                <a:gd name="textAreaLeft" fmla="*/ 0 w 1441440"/>
+                <a:gd name="textAreaRight" fmla="*/ 1442880 w 1441440"/>
+                <a:gd name="textAreaTop" fmla="*/ 0 h 1371600"/>
+                <a:gd name="textAreaBottom" fmla="*/ 1373040 h 1371600"/>
               </a:gdLst>
               <a:ahLst/>
               <a:rect l="textAreaLeft" t="textAreaTop" r="textAreaRight" b="textAreaBottom"/>
@@ -15864,7 +15855,7 @@
         <p:spPr>
           <a:xfrm>
             <a:off x="536040" y="526320"/>
-            <a:ext cx="7740720" cy="965880"/>
+            <a:ext cx="7740360" cy="965520"/>
           </a:xfrm>
           <a:prstGeom prst="rect">
             <a:avLst/>
@@ -15972,7 +15963,7 @@
         <p:spPr>
           <a:xfrm>
             <a:off x="7700040" y="27000"/>
-            <a:ext cx="222480" cy="226080"/>
+            <a:ext cx="222120" cy="226080"/>
           </a:xfrm>
           <a:prstGeom prst="rect">
             <a:avLst/>
@@ -16029,9 +16020,9 @@
         <p:grpSpPr>
           <a:xfrm>
             <a:off x="684720" y="2127240"/>
-            <a:ext cx="1441800" cy="1371960"/>
+            <a:ext cx="1441440" cy="1371600"/>
             <a:chOff x="684720" y="2127240"/>
-            <a:chExt cx="1441800" cy="1371960"/>
+            <a:chExt cx="1441440" cy="1371600"/>
           </a:xfrm>
         </p:grpSpPr>
         <p:sp>
@@ -16043,15 +16034,15 @@
           <p:spPr>
             <a:xfrm>
               <a:off x="684720" y="2127240"/>
-              <a:ext cx="1441800" cy="1371960"/>
+              <a:ext cx="1441440" cy="1371600"/>
             </a:xfrm>
             <a:custGeom>
               <a:avLst/>
               <a:gdLst>
-                <a:gd name="textAreaLeft" fmla="*/ 0 w 1441800"/>
-                <a:gd name="textAreaRight" fmla="*/ 1442880 w 1441800"/>
-                <a:gd name="textAreaTop" fmla="*/ 0 h 1371960"/>
-                <a:gd name="textAreaBottom" fmla="*/ 1373040 h 1371960"/>
+                <a:gd name="textAreaLeft" fmla="*/ 0 w 1441440"/>
+                <a:gd name="textAreaRight" fmla="*/ 1442880 w 1441440"/>
+                <a:gd name="textAreaTop" fmla="*/ 0 h 1371600"/>
+                <a:gd name="textAreaBottom" fmla="*/ 1373040 h 1371600"/>
               </a:gdLst>
               <a:ahLst/>
               <a:rect l="textAreaLeft" t="textAreaTop" r="textAreaRight" b="textAreaBottom"/>
@@ -16178,15 +16169,15 @@
           <p:spPr>
             <a:xfrm>
               <a:off x="684720" y="2127240"/>
-              <a:ext cx="1441800" cy="1371960"/>
+              <a:ext cx="1441440" cy="1371600"/>
             </a:xfrm>
             <a:custGeom>
               <a:avLst/>
               <a:gdLst>
-                <a:gd name="textAreaLeft" fmla="*/ 0 w 1441800"/>
-                <a:gd name="textAreaRight" fmla="*/ 1442880 w 1441800"/>
-                <a:gd name="textAreaTop" fmla="*/ 0 h 1371960"/>
-                <a:gd name="textAreaBottom" fmla="*/ 1373040 h 1371960"/>
+                <a:gd name="textAreaLeft" fmla="*/ 0 w 1441440"/>
+                <a:gd name="textAreaRight" fmla="*/ 1442880 w 1441440"/>
+                <a:gd name="textAreaTop" fmla="*/ 0 h 1371600"/>
+                <a:gd name="textAreaBottom" fmla="*/ 1373040 h 1371600"/>
               </a:gdLst>
               <a:ahLst/>
               <a:rect l="textAreaLeft" t="textAreaTop" r="textAreaRight" b="textAreaBottom"/>
@@ -16315,7 +16306,7 @@
         <p:spPr>
           <a:xfrm>
             <a:off x="819000" y="2313000"/>
-            <a:ext cx="1172520" cy="952920"/>
+            <a:ext cx="1172160" cy="952920"/>
           </a:xfrm>
           <a:prstGeom prst="rect">
             <a:avLst/>
@@ -16474,7 +16465,7 @@
         <p:spPr>
           <a:xfrm>
             <a:off x="2842560" y="2585880"/>
-            <a:ext cx="1179360" cy="411480"/>
+            <a:ext cx="1179000" cy="411480"/>
           </a:xfrm>
           <a:prstGeom prst="rect">
             <a:avLst/>
@@ -16584,9 +16575,9 @@
         <p:grpSpPr>
           <a:xfrm>
             <a:off x="4291200" y="2127240"/>
-            <a:ext cx="2141640" cy="1371960"/>
+            <a:ext cx="2141280" cy="1371600"/>
             <a:chOff x="4291200" y="2127240"/>
-            <a:chExt cx="2141640" cy="1371960"/>
+            <a:chExt cx="2141280" cy="1371600"/>
           </a:xfrm>
         </p:grpSpPr>
         <p:sp>
@@ -16598,15 +16589,15 @@
           <p:spPr>
             <a:xfrm>
               <a:off x="4291200" y="2634840"/>
-              <a:ext cx="304920" cy="357120"/>
+              <a:ext cx="304560" cy="356760"/>
             </a:xfrm>
             <a:custGeom>
               <a:avLst/>
               <a:gdLst>
-                <a:gd name="textAreaLeft" fmla="*/ 0 w 304920"/>
-                <a:gd name="textAreaRight" fmla="*/ 306000 w 304920"/>
-                <a:gd name="textAreaTop" fmla="*/ 0 h 357120"/>
-                <a:gd name="textAreaBottom" fmla="*/ 358200 h 357120"/>
+                <a:gd name="textAreaLeft" fmla="*/ 0 w 304560"/>
+                <a:gd name="textAreaRight" fmla="*/ 306000 w 304560"/>
+                <a:gd name="textAreaTop" fmla="*/ 0 h 356760"/>
+                <a:gd name="textAreaBottom" fmla="*/ 358200 h 356760"/>
               </a:gdLst>
               <a:ahLst/>
               <a:rect l="textAreaLeft" t="textAreaTop" r="textAreaRight" b="textAreaBottom"/>
@@ -16682,15 +16673,15 @@
           <p:spPr>
             <a:xfrm>
               <a:off x="4723920" y="2127240"/>
-              <a:ext cx="1708920" cy="1371960"/>
+              <a:ext cx="1708560" cy="1371600"/>
             </a:xfrm>
             <a:custGeom>
               <a:avLst/>
               <a:gdLst>
-                <a:gd name="textAreaLeft" fmla="*/ 0 w 1708920"/>
-                <a:gd name="textAreaRight" fmla="*/ 1710000 w 1708920"/>
-                <a:gd name="textAreaTop" fmla="*/ 0 h 1371960"/>
-                <a:gd name="textAreaBottom" fmla="*/ 1373040 h 1371960"/>
+                <a:gd name="textAreaLeft" fmla="*/ 0 w 1708560"/>
+                <a:gd name="textAreaRight" fmla="*/ 1710000 w 1708560"/>
+                <a:gd name="textAreaTop" fmla="*/ 0 h 1371600"/>
+                <a:gd name="textAreaBottom" fmla="*/ 1373040 h 1371600"/>
               </a:gdLst>
               <a:ahLst/>
               <a:rect l="textAreaLeft" t="textAreaTop" r="textAreaRight" b="textAreaBottom"/>
@@ -16817,15 +16808,15 @@
           <p:spPr>
             <a:xfrm>
               <a:off x="4723920" y="2127240"/>
-              <a:ext cx="1708920" cy="1371960"/>
+              <a:ext cx="1708560" cy="1371600"/>
             </a:xfrm>
             <a:custGeom>
               <a:avLst/>
               <a:gdLst>
-                <a:gd name="textAreaLeft" fmla="*/ 0 w 1708920"/>
-                <a:gd name="textAreaRight" fmla="*/ 1710000 w 1708920"/>
-                <a:gd name="textAreaTop" fmla="*/ 0 h 1371960"/>
-                <a:gd name="textAreaBottom" fmla="*/ 1373040 h 1371960"/>
+                <a:gd name="textAreaLeft" fmla="*/ 0 w 1708560"/>
+                <a:gd name="textAreaRight" fmla="*/ 1710000 w 1708560"/>
+                <a:gd name="textAreaTop" fmla="*/ 0 h 1371600"/>
+                <a:gd name="textAreaBottom" fmla="*/ 1373040 h 1371600"/>
               </a:gdLst>
               <a:ahLst/>
               <a:rect l="textAreaLeft" t="textAreaTop" r="textAreaRight" b="textAreaBottom"/>
@@ -16954,7 +16945,7 @@
         <p:spPr>
           <a:xfrm>
             <a:off x="4818240" y="2176560"/>
-            <a:ext cx="1405440" cy="1216440"/>
+            <a:ext cx="1405080" cy="1216440"/>
           </a:xfrm>
           <a:prstGeom prst="rect">
             <a:avLst/>
@@ -17263,9 +17254,9 @@
         <p:grpSpPr>
           <a:xfrm>
             <a:off x="6577920" y="2127240"/>
-            <a:ext cx="2024280" cy="1371960"/>
+            <a:ext cx="2023920" cy="1371600"/>
             <a:chOff x="6577920" y="2127240"/>
-            <a:chExt cx="2024280" cy="1371960"/>
+            <a:chExt cx="2023920" cy="1371600"/>
           </a:xfrm>
         </p:grpSpPr>
         <p:sp>
@@ -17277,15 +17268,15 @@
           <p:spPr>
             <a:xfrm>
               <a:off x="6577920" y="2634840"/>
-              <a:ext cx="304920" cy="357120"/>
+              <a:ext cx="304560" cy="356760"/>
             </a:xfrm>
             <a:custGeom>
               <a:avLst/>
               <a:gdLst>
-                <a:gd name="textAreaLeft" fmla="*/ 0 w 304920"/>
-                <a:gd name="textAreaRight" fmla="*/ 306000 w 304920"/>
-                <a:gd name="textAreaTop" fmla="*/ 0 h 357120"/>
-                <a:gd name="textAreaBottom" fmla="*/ 358200 h 357120"/>
+                <a:gd name="textAreaLeft" fmla="*/ 0 w 304560"/>
+                <a:gd name="textAreaRight" fmla="*/ 306000 w 304560"/>
+                <a:gd name="textAreaTop" fmla="*/ 0 h 356760"/>
+                <a:gd name="textAreaBottom" fmla="*/ 358200 h 356760"/>
               </a:gdLst>
               <a:ahLst/>
               <a:rect l="textAreaLeft" t="textAreaTop" r="textAreaRight" b="textAreaBottom"/>
@@ -17361,15 +17352,15 @@
           <p:spPr>
             <a:xfrm>
               <a:off x="7010640" y="2127240"/>
-              <a:ext cx="1591560" cy="1371960"/>
+              <a:ext cx="1591200" cy="1371600"/>
             </a:xfrm>
             <a:custGeom>
               <a:avLst/>
               <a:gdLst>
-                <a:gd name="textAreaLeft" fmla="*/ 0 w 1591560"/>
-                <a:gd name="textAreaRight" fmla="*/ 1592640 w 1591560"/>
-                <a:gd name="textAreaTop" fmla="*/ 0 h 1371960"/>
-                <a:gd name="textAreaBottom" fmla="*/ 1373040 h 1371960"/>
+                <a:gd name="textAreaLeft" fmla="*/ 0 w 1591200"/>
+                <a:gd name="textAreaRight" fmla="*/ 1592640 w 1591200"/>
+                <a:gd name="textAreaTop" fmla="*/ 0 h 1371600"/>
+                <a:gd name="textAreaBottom" fmla="*/ 1373040 h 1371600"/>
               </a:gdLst>
               <a:ahLst/>
               <a:rect l="textAreaLeft" t="textAreaTop" r="textAreaRight" b="textAreaBottom"/>
@@ -17496,15 +17487,15 @@
           <p:spPr>
             <a:xfrm>
               <a:off x="7010640" y="2127240"/>
-              <a:ext cx="1591560" cy="1371960"/>
+              <a:ext cx="1591200" cy="1371600"/>
             </a:xfrm>
             <a:custGeom>
               <a:avLst/>
               <a:gdLst>
-                <a:gd name="textAreaLeft" fmla="*/ 0 w 1591560"/>
-                <a:gd name="textAreaRight" fmla="*/ 1592640 w 1591560"/>
-                <a:gd name="textAreaTop" fmla="*/ 0 h 1371960"/>
-                <a:gd name="textAreaBottom" fmla="*/ 1373040 h 1371960"/>
+                <a:gd name="textAreaLeft" fmla="*/ 0 w 1591200"/>
+                <a:gd name="textAreaRight" fmla="*/ 1592640 w 1591200"/>
+                <a:gd name="textAreaTop" fmla="*/ 0 h 1371600"/>
+                <a:gd name="textAreaBottom" fmla="*/ 1373040 h 1371600"/>
               </a:gdLst>
               <a:ahLst/>
               <a:rect l="textAreaLeft" t="textAreaTop" r="textAreaRight" b="textAreaBottom"/>
@@ -17633,7 +17624,7 @@
         <p:spPr>
           <a:xfrm>
             <a:off x="7097760" y="2401560"/>
-            <a:ext cx="1418040" cy="775080"/>
+            <a:ext cx="1417680" cy="775080"/>
           </a:xfrm>
           <a:prstGeom prst="rect">
             <a:avLst/>
@@ -17800,9 +17791,9 @@
         <p:grpSpPr>
           <a:xfrm>
             <a:off x="3679200" y="3721680"/>
-            <a:ext cx="1655640" cy="287280"/>
+            <a:ext cx="1655280" cy="286920"/>
             <a:chOff x="3679200" y="3721680"/>
-            <a:chExt cx="1655640" cy="287280"/>
+            <a:chExt cx="1655280" cy="286920"/>
           </a:xfrm>
         </p:grpSpPr>
         <p:sp>
@@ -17814,15 +17805,15 @@
           <p:spPr>
             <a:xfrm>
               <a:off x="3679200" y="3721680"/>
-              <a:ext cx="834480" cy="287280"/>
+              <a:ext cx="834120" cy="286920"/>
             </a:xfrm>
             <a:custGeom>
               <a:avLst/>
               <a:gdLst>
-                <a:gd name="textAreaLeft" fmla="*/ 0 w 834480"/>
-                <a:gd name="textAreaRight" fmla="*/ 835560 w 834480"/>
-                <a:gd name="textAreaTop" fmla="*/ 0 h 287280"/>
-                <a:gd name="textAreaBottom" fmla="*/ 288360 h 287280"/>
+                <a:gd name="textAreaLeft" fmla="*/ 0 w 834120"/>
+                <a:gd name="textAreaRight" fmla="*/ 835560 w 834120"/>
+                <a:gd name="textAreaTop" fmla="*/ 0 h 286920"/>
+                <a:gd name="textAreaBottom" fmla="*/ 288360 h 286920"/>
               </a:gdLst>
               <a:ahLst/>
               <a:rect l="textAreaLeft" t="textAreaTop" r="textAreaRight" b="textAreaBottom"/>
@@ -17976,15 +17967,15 @@
           <p:spPr>
             <a:xfrm>
               <a:off x="4500000" y="3721680"/>
-              <a:ext cx="834480" cy="287280"/>
+              <a:ext cx="834120" cy="286920"/>
             </a:xfrm>
             <a:custGeom>
               <a:avLst/>
               <a:gdLst>
-                <a:gd name="textAreaLeft" fmla="*/ 0 w 834480"/>
-                <a:gd name="textAreaRight" fmla="*/ 835560 w 834480"/>
-                <a:gd name="textAreaTop" fmla="*/ 0 h 287280"/>
-                <a:gd name="textAreaBottom" fmla="*/ 288360 h 287280"/>
+                <a:gd name="textAreaLeft" fmla="*/ 0 w 834120"/>
+                <a:gd name="textAreaRight" fmla="*/ 835560 w 834120"/>
+                <a:gd name="textAreaTop" fmla="*/ 0 h 286920"/>
+                <a:gd name="textAreaBottom" fmla="*/ 288360 h 286920"/>
               </a:gdLst>
               <a:ahLst/>
               <a:rect l="textAreaLeft" t="textAreaTop" r="textAreaRight" b="textAreaBottom"/>
@@ -18144,15 +18135,15 @@
           <p:spPr>
             <a:xfrm>
               <a:off x="3679200" y="3721680"/>
-              <a:ext cx="1655640" cy="287280"/>
+              <a:ext cx="1655280" cy="286920"/>
             </a:xfrm>
             <a:custGeom>
               <a:avLst/>
               <a:gdLst>
-                <a:gd name="textAreaLeft" fmla="*/ 0 w 1655640"/>
-                <a:gd name="textAreaRight" fmla="*/ 1656720 w 1655640"/>
-                <a:gd name="textAreaTop" fmla="*/ 0 h 287280"/>
-                <a:gd name="textAreaBottom" fmla="*/ 288360 h 287280"/>
+                <a:gd name="textAreaLeft" fmla="*/ 0 w 1655280"/>
+                <a:gd name="textAreaRight" fmla="*/ 1656720 w 1655280"/>
+                <a:gd name="textAreaTop" fmla="*/ 0 h 286920"/>
+                <a:gd name="textAreaBottom" fmla="*/ 288360 h 286920"/>
               </a:gdLst>
               <a:ahLst/>
               <a:rect l="textAreaLeft" t="textAreaTop" r="textAreaRight" b="textAreaBottom"/>
@@ -18406,7 +18397,7 @@
         <p:spPr>
           <a:xfrm>
             <a:off x="3745080" y="4039200"/>
-            <a:ext cx="1420560" cy="498600"/>
+            <a:ext cx="1420200" cy="498600"/>
           </a:xfrm>
           <a:prstGeom prst="rect">
             <a:avLst/>
@@ -18496,7 +18487,7 @@
         <p:spPr>
           <a:xfrm>
             <a:off x="2359440" y="1300680"/>
-            <a:ext cx="2746440" cy="286560"/>
+            <a:ext cx="2746080" cy="286560"/>
           </a:xfrm>
           <a:prstGeom prst="rect">
             <a:avLst/>
@@ -18583,7 +18574,7 @@
         <p:spPr>
           <a:xfrm>
             <a:off x="474480" y="5047560"/>
-            <a:ext cx="5430600" cy="377280"/>
+            <a:ext cx="5430240" cy="377280"/>
           </a:xfrm>
           <a:prstGeom prst="rect">
             <a:avLst/>
@@ -18934,7 +18925,7 @@
         <p:spPr>
           <a:xfrm>
             <a:off x="536040" y="526320"/>
-            <a:ext cx="8463960" cy="1230840"/>
+            <a:ext cx="8463600" cy="1230480"/>
           </a:xfrm>
           <a:prstGeom prst="rect">
             <a:avLst/>
@@ -19042,7 +19033,7 @@
         <p:spPr>
           <a:xfrm>
             <a:off x="7700040" y="27000"/>
-            <a:ext cx="222480" cy="226080"/>
+            <a:ext cx="222120" cy="226080"/>
           </a:xfrm>
           <a:prstGeom prst="rect">
             <a:avLst/>
@@ -19475,7 +19466,7 @@
                         <a:t>,</a:t>
                       </a:r>
                       <a:r>
-                        <a:rPr b="0" lang="fr-FR" sz="1800" spc="4" strike="noStrike">
+                        <a:rPr b="0" lang="fr-FR" sz="1800" spc="1" strike="noStrike">
                           <a:solidFill>
                             <a:srgbClr val="292934"/>
                           </a:solidFill>
@@ -19644,7 +19635,7 @@
                         <a:t>7</a:t>
                       </a:r>
                       <a:r>
-                        <a:rPr b="0" lang="fr-FR" sz="1800" spc="253" strike="noStrike" baseline="25000">
+                        <a:rPr b="0" lang="fr-FR" sz="1800" spc="250" strike="noStrike" baseline="25000">
                           <a:solidFill>
                             <a:srgbClr val="292934"/>
                           </a:solidFill>
@@ -20006,7 +19997,7 @@
                         <a:t>...</a:t>
                       </a:r>
                       <a:r>
-                        <a:rPr b="0" lang="fr-FR" sz="1800" spc="4" strike="noStrike">
+                        <a:rPr b="0" lang="fr-FR" sz="1800" spc="1" strike="noStrike">
                           <a:solidFill>
                             <a:srgbClr val="292934"/>
                           </a:solidFill>
@@ -20024,7 +20015,7 @@
                         <a:t>,</a:t>
                       </a:r>
                       <a:r>
-                        <a:rPr b="0" lang="fr-FR" sz="1800" spc="4" strike="noStrike">
+                        <a:rPr b="0" lang="fr-FR" sz="1800" spc="1" strike="noStrike">
                           <a:solidFill>
                             <a:srgbClr val="292934"/>
                           </a:solidFill>
@@ -21995,7 +21986,7 @@
         <p:spPr>
           <a:xfrm>
             <a:off x="402480" y="4758120"/>
-            <a:ext cx="3934080" cy="286560"/>
+            <a:ext cx="3933720" cy="286560"/>
           </a:xfrm>
           <a:prstGeom prst="rect">
             <a:avLst/>
@@ -22142,9 +22133,9 @@
         <p:grpSpPr>
           <a:xfrm>
             <a:off x="3004920" y="3005640"/>
-            <a:ext cx="5985720" cy="2179080"/>
+            <a:ext cx="5985360" cy="2178720"/>
             <a:chOff x="3004920" y="3005640"/>
-            <a:chExt cx="5985720" cy="2179080"/>
+            <a:chExt cx="5985360" cy="2178720"/>
           </a:xfrm>
         </p:grpSpPr>
         <p:pic>
@@ -22160,7 +22151,7 @@
           <p:spPr>
             <a:xfrm>
               <a:off x="3004920" y="3005640"/>
-              <a:ext cx="5985720" cy="2179080"/>
+              <a:ext cx="5985360" cy="2178720"/>
             </a:xfrm>
             <a:prstGeom prst="rect">
               <a:avLst/>
@@ -22179,15 +22170,15 @@
           <p:spPr>
             <a:xfrm>
               <a:off x="3492000" y="4801680"/>
-              <a:ext cx="1078920" cy="358920"/>
+              <a:ext cx="1078560" cy="358560"/>
             </a:xfrm>
             <a:custGeom>
               <a:avLst/>
               <a:gdLst>
-                <a:gd name="textAreaLeft" fmla="*/ 0 w 1078920"/>
-                <a:gd name="textAreaRight" fmla="*/ 1080000 w 1078920"/>
-                <a:gd name="textAreaTop" fmla="*/ 0 h 358920"/>
-                <a:gd name="textAreaBottom" fmla="*/ 360000 h 358920"/>
+                <a:gd name="textAreaLeft" fmla="*/ 0 w 1078560"/>
+                <a:gd name="textAreaRight" fmla="*/ 1080000 w 1078560"/>
+                <a:gd name="textAreaTop" fmla="*/ 0 h 358560"/>
+                <a:gd name="textAreaBottom" fmla="*/ 360000 h 358560"/>
               </a:gdLst>
               <a:ahLst/>
               <a:rect l="textAreaLeft" t="textAreaTop" r="textAreaRight" b="textAreaBottom"/>
@@ -22260,7 +22251,7 @@
         <p:spPr>
           <a:xfrm>
             <a:off x="330120" y="283320"/>
-            <a:ext cx="6329880" cy="987840"/>
+            <a:ext cx="6329520" cy="987480"/>
           </a:xfrm>
           <a:prstGeom prst="rect">
             <a:avLst/>
@@ -22350,7 +22341,7 @@
         <p:spPr>
           <a:xfrm>
             <a:off x="7700040" y="27000"/>
-            <a:ext cx="222480" cy="226080"/>
+            <a:ext cx="222120" cy="226080"/>
           </a:xfrm>
           <a:prstGeom prst="rect">
             <a:avLst/>
@@ -22407,15 +22398,15 @@
         <p:spPr>
           <a:xfrm>
             <a:off x="4500000" y="1057320"/>
-            <a:ext cx="1439280" cy="1511640"/>
+            <a:ext cx="1438920" cy="1511280"/>
           </a:xfrm>
           <a:custGeom>
             <a:avLst/>
             <a:gdLst>
-              <a:gd name="textAreaLeft" fmla="*/ 0 w 1439280"/>
-              <a:gd name="textAreaRight" fmla="*/ 1440360 w 1439280"/>
-              <a:gd name="textAreaTop" fmla="*/ 0 h 1511640"/>
-              <a:gd name="textAreaBottom" fmla="*/ 1512720 h 1511640"/>
+              <a:gd name="textAreaLeft" fmla="*/ 0 w 1438920"/>
+              <a:gd name="textAreaRight" fmla="*/ 1440360 w 1438920"/>
+              <a:gd name="textAreaTop" fmla="*/ 0 h 1511280"/>
+              <a:gd name="textAreaBottom" fmla="*/ 1512720 h 1511280"/>
             </a:gdLst>
             <a:ahLst/>
             <a:rect l="textAreaLeft" t="textAreaTop" r="textAreaRight" b="textAreaBottom"/>
@@ -22483,7 +22474,7 @@
         <p:spPr>
           <a:xfrm>
             <a:off x="330120" y="771120"/>
-            <a:ext cx="2911680" cy="4279680"/>
+            <a:ext cx="2911320" cy="4279680"/>
           </a:xfrm>
           <a:prstGeom prst="rect">
             <a:avLst/>
@@ -23241,7 +23232,7 @@
         <p:spPr>
           <a:xfrm>
             <a:off x="4481280" y="481320"/>
-            <a:ext cx="4626000" cy="2329920"/>
+            <a:ext cx="4625640" cy="2329560"/>
           </a:xfrm>
           <a:prstGeom prst="rect">
             <a:avLst/>
@@ -23290,7 +23281,7 @@
         <p:spPr>
           <a:xfrm>
             <a:off x="7700040" y="27000"/>
-            <a:ext cx="222480" cy="226080"/>
+            <a:ext cx="222120" cy="226080"/>
           </a:xfrm>
           <a:prstGeom prst="rect">
             <a:avLst/>
@@ -23351,7 +23342,7 @@
         <p:spPr>
           <a:xfrm>
             <a:off x="536040" y="221400"/>
-            <a:ext cx="6446880" cy="1855800"/>
+            <a:ext cx="6446520" cy="1855440"/>
           </a:xfrm>
           <a:prstGeom prst="rect">
             <a:avLst/>
@@ -23686,7 +23677,7 @@
         <p:spPr>
           <a:xfrm>
             <a:off x="536040" y="5083920"/>
-            <a:ext cx="7020720" cy="438480"/>
+            <a:ext cx="7020360" cy="438480"/>
           </a:xfrm>
           <a:prstGeom prst="rect">
             <a:avLst/>
@@ -24033,9 +24024,9 @@
         <p:grpSpPr>
           <a:xfrm>
             <a:off x="690120" y="1783800"/>
-            <a:ext cx="1966680" cy="2866680"/>
+            <a:ext cx="1966320" cy="2866320"/>
             <a:chOff x="690120" y="1783800"/>
-            <a:chExt cx="1966680" cy="2866680"/>
+            <a:chExt cx="1966320" cy="2866320"/>
           </a:xfrm>
         </p:grpSpPr>
         <p:sp>
@@ -24047,15 +24038,15 @@
           <p:spPr>
             <a:xfrm>
               <a:off x="690120" y="1783800"/>
-              <a:ext cx="1966680" cy="2866680"/>
+              <a:ext cx="1966320" cy="2866320"/>
             </a:xfrm>
             <a:custGeom>
               <a:avLst/>
               <a:gdLst>
-                <a:gd name="textAreaLeft" fmla="*/ 0 w 1966680"/>
-                <a:gd name="textAreaRight" fmla="*/ 1967760 w 1966680"/>
-                <a:gd name="textAreaTop" fmla="*/ 0 h 2866680"/>
-                <a:gd name="textAreaBottom" fmla="*/ 2867760 h 2866680"/>
+                <a:gd name="textAreaLeft" fmla="*/ 0 w 1966320"/>
+                <a:gd name="textAreaRight" fmla="*/ 1967760 w 1966320"/>
+                <a:gd name="textAreaTop" fmla="*/ 0 h 2866320"/>
+                <a:gd name="textAreaBottom" fmla="*/ 2867760 h 2866320"/>
               </a:gdLst>
               <a:ahLst/>
               <a:rect l="textAreaLeft" t="textAreaTop" r="textAreaRight" b="textAreaBottom"/>
@@ -24206,15 +24197,15 @@
           <p:spPr>
             <a:xfrm>
               <a:off x="690120" y="1783800"/>
-              <a:ext cx="1966680" cy="2866680"/>
+              <a:ext cx="1966320" cy="2866320"/>
             </a:xfrm>
             <a:custGeom>
               <a:avLst/>
               <a:gdLst>
-                <a:gd name="textAreaLeft" fmla="*/ 0 w 1966680"/>
-                <a:gd name="textAreaRight" fmla="*/ 1967760 w 1966680"/>
-                <a:gd name="textAreaTop" fmla="*/ 0 h 2866680"/>
-                <a:gd name="textAreaBottom" fmla="*/ 2867760 h 2866680"/>
+                <a:gd name="textAreaLeft" fmla="*/ 0 w 1966320"/>
+                <a:gd name="textAreaRight" fmla="*/ 1967760 w 1966320"/>
+                <a:gd name="textAreaTop" fmla="*/ 0 h 2866320"/>
+                <a:gd name="textAreaBottom" fmla="*/ 2867760 h 2866320"/>
               </a:gdLst>
               <a:ahLst/>
               <a:rect l="textAreaLeft" t="textAreaTop" r="textAreaRight" b="textAreaBottom"/>
@@ -24367,7 +24358,7 @@
         <p:spPr>
           <a:xfrm>
             <a:off x="788760" y="1850400"/>
-            <a:ext cx="1477800" cy="627120"/>
+            <a:ext cx="1477440" cy="627120"/>
           </a:xfrm>
           <a:prstGeom prst="rect">
             <a:avLst/>
@@ -24532,7 +24523,7 @@
               <a:t>Toutes</a:t>
             </a:r>
             <a:r>
-              <a:rPr b="0" lang="fr-FR" sz="1100" spc="262" strike="noStrike">
+              <a:rPr b="0" lang="fr-FR" sz="1100" spc="259" strike="noStrike">
                 <a:solidFill>
                   <a:srgbClr val="ffffff"/>
                 </a:solidFill>
@@ -24589,7 +24580,7 @@
         <p:spPr>
           <a:xfrm>
             <a:off x="788760" y="2634120"/>
-            <a:ext cx="1622520" cy="470520"/>
+            <a:ext cx="1622160" cy="470520"/>
           </a:xfrm>
           <a:prstGeom prst="rect">
             <a:avLst/>
@@ -24775,7 +24766,7 @@
         <p:spPr>
           <a:xfrm>
             <a:off x="788760" y="3261960"/>
-            <a:ext cx="1657080" cy="180360"/>
+            <a:ext cx="1656720" cy="180360"/>
           </a:xfrm>
           <a:prstGeom prst="rect">
             <a:avLst/>
@@ -24931,15 +24922,15 @@
         <p:spPr>
           <a:xfrm>
             <a:off x="2854080" y="2973600"/>
-            <a:ext cx="416160" cy="487080"/>
+            <a:ext cx="415800" cy="486720"/>
           </a:xfrm>
           <a:custGeom>
             <a:avLst/>
             <a:gdLst>
-              <a:gd name="textAreaLeft" fmla="*/ 0 w 416160"/>
-              <a:gd name="textAreaRight" fmla="*/ 417240 w 416160"/>
-              <a:gd name="textAreaTop" fmla="*/ 0 h 487080"/>
-              <a:gd name="textAreaBottom" fmla="*/ 488160 h 487080"/>
+              <a:gd name="textAreaLeft" fmla="*/ 0 w 415800"/>
+              <a:gd name="textAreaRight" fmla="*/ 417240 w 415800"/>
+              <a:gd name="textAreaTop" fmla="*/ 0 h 486720"/>
+              <a:gd name="textAreaBottom" fmla="*/ 488160 h 486720"/>
             </a:gdLst>
             <a:ahLst/>
             <a:rect l="textAreaLeft" t="textAreaTop" r="textAreaRight" b="textAreaBottom"/>
@@ -25015,9 +25006,9 @@
         <p:grpSpPr>
           <a:xfrm>
             <a:off x="3444480" y="1793520"/>
-            <a:ext cx="1966320" cy="2847600"/>
+            <a:ext cx="1965960" cy="2847240"/>
             <a:chOff x="3444480" y="1793520"/>
-            <a:chExt cx="1966320" cy="2847600"/>
+            <a:chExt cx="1965960" cy="2847240"/>
           </a:xfrm>
         </p:grpSpPr>
         <p:sp>
@@ -25029,15 +25020,15 @@
           <p:spPr>
             <a:xfrm>
               <a:off x="3444480" y="1793520"/>
-              <a:ext cx="1966320" cy="2847600"/>
+              <a:ext cx="1965960" cy="2847240"/>
             </a:xfrm>
             <a:custGeom>
               <a:avLst/>
               <a:gdLst>
-                <a:gd name="textAreaLeft" fmla="*/ 0 w 1966320"/>
-                <a:gd name="textAreaRight" fmla="*/ 1967400 w 1966320"/>
-                <a:gd name="textAreaTop" fmla="*/ 0 h 2847600"/>
-                <a:gd name="textAreaBottom" fmla="*/ 2848680 h 2847600"/>
+                <a:gd name="textAreaLeft" fmla="*/ 0 w 1965960"/>
+                <a:gd name="textAreaRight" fmla="*/ 1967400 w 1965960"/>
+                <a:gd name="textAreaTop" fmla="*/ 0 h 2847240"/>
+                <a:gd name="textAreaBottom" fmla="*/ 2848680 h 2847240"/>
               </a:gdLst>
               <a:ahLst/>
               <a:rect l="textAreaLeft" t="textAreaTop" r="textAreaRight" b="textAreaBottom"/>
@@ -25188,15 +25179,15 @@
           <p:spPr>
             <a:xfrm>
               <a:off x="3444480" y="1793520"/>
-              <a:ext cx="1966320" cy="2847600"/>
+              <a:ext cx="1965960" cy="2847240"/>
             </a:xfrm>
             <a:custGeom>
               <a:avLst/>
               <a:gdLst>
-                <a:gd name="textAreaLeft" fmla="*/ 0 w 1966320"/>
-                <a:gd name="textAreaRight" fmla="*/ 1967400 w 1966320"/>
-                <a:gd name="textAreaTop" fmla="*/ 0 h 2847600"/>
-                <a:gd name="textAreaBottom" fmla="*/ 2848680 h 2847600"/>
+                <a:gd name="textAreaLeft" fmla="*/ 0 w 1965960"/>
+                <a:gd name="textAreaRight" fmla="*/ 1967400 w 1965960"/>
+                <a:gd name="textAreaTop" fmla="*/ 0 h 2847240"/>
+                <a:gd name="textAreaBottom" fmla="*/ 2848680 h 2847240"/>
               </a:gdLst>
               <a:ahLst/>
               <a:rect l="textAreaLeft" t="textAreaTop" r="textAreaRight" b="textAreaBottom"/>
@@ -25349,7 +25340,7 @@
         <p:spPr>
           <a:xfrm>
             <a:off x="3543120" y="1860120"/>
-            <a:ext cx="1478520" cy="772560"/>
+            <a:ext cx="1478160" cy="772560"/>
           </a:xfrm>
           <a:prstGeom prst="rect">
             <a:avLst/>
@@ -25561,7 +25552,7 @@
         <p:spPr>
           <a:xfrm>
             <a:off x="3543120" y="2788200"/>
-            <a:ext cx="1623240" cy="466920"/>
+            <a:ext cx="1622880" cy="466920"/>
           </a:xfrm>
           <a:prstGeom prst="rect">
             <a:avLst/>
@@ -25747,7 +25738,7 @@
         <p:spPr>
           <a:xfrm>
             <a:off x="3543120" y="3414960"/>
-            <a:ext cx="1310040" cy="325800"/>
+            <a:ext cx="1309680" cy="325800"/>
           </a:xfrm>
           <a:prstGeom prst="rect">
             <a:avLst/>
@@ -25883,15 +25874,15 @@
         <p:spPr>
           <a:xfrm>
             <a:off x="5608440" y="2973600"/>
-            <a:ext cx="416160" cy="487080"/>
+            <a:ext cx="415800" cy="486720"/>
           </a:xfrm>
           <a:custGeom>
             <a:avLst/>
             <a:gdLst>
-              <a:gd name="textAreaLeft" fmla="*/ 0 w 416160"/>
-              <a:gd name="textAreaRight" fmla="*/ 417240 w 416160"/>
-              <a:gd name="textAreaTop" fmla="*/ 0 h 487080"/>
-              <a:gd name="textAreaBottom" fmla="*/ 488160 h 487080"/>
+              <a:gd name="textAreaLeft" fmla="*/ 0 w 415800"/>
+              <a:gd name="textAreaRight" fmla="*/ 417240 w 415800"/>
+              <a:gd name="textAreaTop" fmla="*/ 0 h 486720"/>
+              <a:gd name="textAreaBottom" fmla="*/ 488160 h 486720"/>
             </a:gdLst>
             <a:ahLst/>
             <a:rect l="textAreaLeft" t="textAreaTop" r="textAreaRight" b="textAreaBottom"/>
@@ -25967,9 +25958,9 @@
         <p:grpSpPr>
           <a:xfrm>
             <a:off x="6198480" y="1793520"/>
-            <a:ext cx="1966680" cy="2847600"/>
+            <a:ext cx="1966320" cy="2847240"/>
             <a:chOff x="6198480" y="1793520"/>
-            <a:chExt cx="1966680" cy="2847600"/>
+            <a:chExt cx="1966320" cy="2847240"/>
           </a:xfrm>
         </p:grpSpPr>
         <p:sp>
@@ -25981,15 +25972,15 @@
           <p:spPr>
             <a:xfrm>
               <a:off x="6198480" y="1793520"/>
-              <a:ext cx="1966680" cy="2847600"/>
+              <a:ext cx="1966320" cy="2847240"/>
             </a:xfrm>
             <a:custGeom>
               <a:avLst/>
               <a:gdLst>
-                <a:gd name="textAreaLeft" fmla="*/ 0 w 1966680"/>
-                <a:gd name="textAreaRight" fmla="*/ 1967760 w 1966680"/>
-                <a:gd name="textAreaTop" fmla="*/ 0 h 2847600"/>
-                <a:gd name="textAreaBottom" fmla="*/ 2848680 h 2847600"/>
+                <a:gd name="textAreaLeft" fmla="*/ 0 w 1966320"/>
+                <a:gd name="textAreaRight" fmla="*/ 1967760 w 1966320"/>
+                <a:gd name="textAreaTop" fmla="*/ 0 h 2847240"/>
+                <a:gd name="textAreaBottom" fmla="*/ 2848680 h 2847240"/>
               </a:gdLst>
               <a:ahLst/>
               <a:rect l="textAreaLeft" t="textAreaTop" r="textAreaRight" b="textAreaBottom"/>
@@ -26140,15 +26131,15 @@
           <p:spPr>
             <a:xfrm>
               <a:off x="6198480" y="1793520"/>
-              <a:ext cx="1966680" cy="2847600"/>
+              <a:ext cx="1966320" cy="2847240"/>
             </a:xfrm>
             <a:custGeom>
               <a:avLst/>
               <a:gdLst>
-                <a:gd name="textAreaLeft" fmla="*/ 0 w 1966680"/>
-                <a:gd name="textAreaRight" fmla="*/ 1967760 w 1966680"/>
-                <a:gd name="textAreaTop" fmla="*/ 0 h 2847600"/>
-                <a:gd name="textAreaBottom" fmla="*/ 2848680 h 2847600"/>
+                <a:gd name="textAreaLeft" fmla="*/ 0 w 1966320"/>
+                <a:gd name="textAreaRight" fmla="*/ 1967760 w 1966320"/>
+                <a:gd name="textAreaTop" fmla="*/ 0 h 2847240"/>
+                <a:gd name="textAreaBottom" fmla="*/ 2848680 h 2847240"/>
               </a:gdLst>
               <a:ahLst/>
               <a:rect l="textAreaLeft" t="textAreaTop" r="textAreaRight" b="textAreaBottom"/>
@@ -26301,7 +26292,7 @@
         <p:spPr>
           <a:xfrm>
             <a:off x="6272640" y="1860120"/>
-            <a:ext cx="1743120" cy="917280"/>
+            <a:ext cx="1742760" cy="917280"/>
           </a:xfrm>
           <a:prstGeom prst="rect">
             <a:avLst/>
@@ -26543,7 +26534,7 @@
         <p:spPr>
           <a:xfrm>
             <a:off x="6297840" y="2933280"/>
-            <a:ext cx="1622520" cy="325800"/>
+            <a:ext cx="1622160" cy="325800"/>
           </a:xfrm>
           <a:prstGeom prst="rect">
             <a:avLst/>
@@ -26699,7 +26690,7 @@
         <p:spPr>
           <a:xfrm>
             <a:off x="6297840" y="3414960"/>
-            <a:ext cx="1231920" cy="325800"/>
+            <a:ext cx="1231560" cy="325800"/>
           </a:xfrm>
           <a:prstGeom prst="rect">
             <a:avLst/>
@@ -26865,7 +26856,7 @@
         <p:spPr>
           <a:xfrm>
             <a:off x="801000" y="2264400"/>
-            <a:ext cx="6584400" cy="1474560"/>
+            <a:ext cx="6584040" cy="1474560"/>
           </a:xfrm>
           <a:prstGeom prst="rect">
             <a:avLst/>
@@ -26992,7 +26983,7 @@
         <p:spPr>
           <a:xfrm>
             <a:off x="801000" y="3882240"/>
-            <a:ext cx="5290200" cy="378000"/>
+            <a:ext cx="5289840" cy="378000"/>
           </a:xfrm>
           <a:prstGeom prst="rect">
             <a:avLst/>
@@ -27119,7 +27110,7 @@
         <p:spPr>
           <a:xfrm>
             <a:off x="7700040" y="27000"/>
-            <a:ext cx="222480" cy="226080"/>
+            <a:ext cx="222120" cy="226080"/>
           </a:xfrm>
           <a:prstGeom prst="rect">
             <a:avLst/>
@@ -27210,7 +27201,7 @@
         <p:spPr>
           <a:xfrm>
             <a:off x="5194440" y="2130840"/>
-            <a:ext cx="3294720" cy="1208520"/>
+            <a:ext cx="3294360" cy="1208160"/>
           </a:xfrm>
           <a:prstGeom prst="rect">
             <a:avLst/>
@@ -27229,9 +27220,9 @@
         <p:grpSpPr>
           <a:xfrm>
             <a:off x="513000" y="1686240"/>
-            <a:ext cx="4470120" cy="3013560"/>
+            <a:ext cx="4469760" cy="3013200"/>
             <a:chOff x="513000" y="1686240"/>
-            <a:chExt cx="4470120" cy="3013560"/>
+            <a:chExt cx="4469760" cy="3013200"/>
           </a:xfrm>
         </p:grpSpPr>
         <p:pic>
@@ -27247,7 +27238,7 @@
           <p:spPr>
             <a:xfrm>
               <a:off x="513000" y="1686240"/>
-              <a:ext cx="4470120" cy="2813400"/>
+              <a:ext cx="4469760" cy="2813040"/>
             </a:xfrm>
             <a:prstGeom prst="rect">
               <a:avLst/>
@@ -27266,15 +27257,15 @@
           <p:spPr>
             <a:xfrm>
               <a:off x="1091160" y="2386440"/>
-              <a:ext cx="1732320" cy="2313360"/>
+              <a:ext cx="1731960" cy="2313000"/>
             </a:xfrm>
             <a:custGeom>
               <a:avLst/>
               <a:gdLst>
-                <a:gd name="textAreaLeft" fmla="*/ 0 w 1732320"/>
-                <a:gd name="textAreaRight" fmla="*/ 1733400 w 1732320"/>
-                <a:gd name="textAreaTop" fmla="*/ 0 h 2313360"/>
-                <a:gd name="textAreaBottom" fmla="*/ 2314440 h 2313360"/>
+                <a:gd name="textAreaLeft" fmla="*/ 0 w 1731960"/>
+                <a:gd name="textAreaRight" fmla="*/ 1733400 w 1731960"/>
+                <a:gd name="textAreaTop" fmla="*/ 0 h 2313000"/>
+                <a:gd name="textAreaBottom" fmla="*/ 2314440 h 2313000"/>
               </a:gdLst>
               <a:ahLst/>
               <a:rect l="textAreaLeft" t="textAreaTop" r="textAreaRight" b="textAreaBottom"/>
@@ -27353,7 +27344,7 @@
         <p:spPr>
           <a:xfrm>
             <a:off x="536040" y="319320"/>
-            <a:ext cx="7356600" cy="1805400"/>
+            <a:ext cx="7356240" cy="1805040"/>
           </a:xfrm>
           <a:prstGeom prst="rect">
             <a:avLst/>
@@ -27544,7 +27535,7 @@
         <p:spPr>
           <a:xfrm>
             <a:off x="7700040" y="27000"/>
-            <a:ext cx="222480" cy="226080"/>
+            <a:ext cx="222120" cy="226080"/>
           </a:xfrm>
           <a:prstGeom prst="rect">
             <a:avLst/>
@@ -27601,15 +27592,15 @@
         <p:spPr>
           <a:xfrm>
             <a:off x="5220000" y="2641320"/>
-            <a:ext cx="3250080" cy="215280"/>
+            <a:ext cx="3249720" cy="214920"/>
           </a:xfrm>
           <a:custGeom>
             <a:avLst/>
             <a:gdLst>
-              <a:gd name="textAreaLeft" fmla="*/ 0 w 3250080"/>
-              <a:gd name="textAreaRight" fmla="*/ 3251160 w 3250080"/>
-              <a:gd name="textAreaTop" fmla="*/ 0 h 215280"/>
-              <a:gd name="textAreaBottom" fmla="*/ 216360 h 215280"/>
+              <a:gd name="textAreaLeft" fmla="*/ 0 w 3249720"/>
+              <a:gd name="textAreaRight" fmla="*/ 3251160 w 3249720"/>
+              <a:gd name="textAreaTop" fmla="*/ 0 h 214920"/>
+              <a:gd name="textAreaBottom" fmla="*/ 216360 h 214920"/>
             </a:gdLst>
             <a:ahLst/>
             <a:rect l="textAreaLeft" t="textAreaTop" r="textAreaRight" b="textAreaBottom"/>
@@ -27677,7 +27668,7 @@
         <p:spPr>
           <a:xfrm>
             <a:off x="186480" y="4830120"/>
-            <a:ext cx="4940640" cy="835200"/>
+            <a:ext cx="4940280" cy="835200"/>
           </a:xfrm>
           <a:prstGeom prst="rect">
             <a:avLst/>
@@ -27998,7 +27989,7 @@
         <p:spPr>
           <a:xfrm>
             <a:off x="5431320" y="3701520"/>
-            <a:ext cx="2693880" cy="1989720"/>
+            <a:ext cx="2693520" cy="1989360"/>
           </a:xfrm>
           <a:prstGeom prst="rect">
             <a:avLst/>
@@ -28047,9 +28038,9 @@
         <p:grpSpPr>
           <a:xfrm>
             <a:off x="21960" y="1914840"/>
-            <a:ext cx="9064080" cy="3539520"/>
+            <a:ext cx="9063720" cy="3539160"/>
             <a:chOff x="21960" y="1914840"/>
-            <a:chExt cx="9064080" cy="3539520"/>
+            <a:chExt cx="9063720" cy="3539160"/>
           </a:xfrm>
         </p:grpSpPr>
         <p:pic>
@@ -28065,7 +28056,7 @@
           <p:spPr>
             <a:xfrm>
               <a:off x="21960" y="1914840"/>
-              <a:ext cx="8999280" cy="3539520"/>
+              <a:ext cx="8998920" cy="3539160"/>
             </a:xfrm>
             <a:prstGeom prst="rect">
               <a:avLst/>
@@ -28084,15 +28075,15 @@
           <p:spPr>
             <a:xfrm>
               <a:off x="4971960" y="2425320"/>
-              <a:ext cx="2407320" cy="2393640"/>
+              <a:ext cx="2406960" cy="2393280"/>
             </a:xfrm>
             <a:custGeom>
               <a:avLst/>
               <a:gdLst>
-                <a:gd name="textAreaLeft" fmla="*/ 0 w 2407320"/>
-                <a:gd name="textAreaRight" fmla="*/ 2408400 w 2407320"/>
-                <a:gd name="textAreaTop" fmla="*/ 0 h 2393640"/>
-                <a:gd name="textAreaBottom" fmla="*/ 2394720 h 2393640"/>
+                <a:gd name="textAreaLeft" fmla="*/ 0 w 2406960"/>
+                <a:gd name="textAreaRight" fmla="*/ 2408400 w 2406960"/>
+                <a:gd name="textAreaTop" fmla="*/ 0 h 2393280"/>
+                <a:gd name="textAreaBottom" fmla="*/ 2394720 h 2393280"/>
               </a:gdLst>
               <a:ahLst/>
               <a:rect l="textAreaLeft" t="textAreaTop" r="textAreaRight" b="textAreaBottom"/>
@@ -28150,15 +28141,15 @@
           <p:spPr>
             <a:xfrm>
               <a:off x="6959880" y="2601360"/>
-              <a:ext cx="2126160" cy="2259360"/>
+              <a:ext cx="2125800" cy="2259000"/>
             </a:xfrm>
             <a:custGeom>
               <a:avLst/>
               <a:gdLst>
-                <a:gd name="textAreaLeft" fmla="*/ 0 w 2126160"/>
-                <a:gd name="textAreaRight" fmla="*/ 2127240 w 2126160"/>
-                <a:gd name="textAreaTop" fmla="*/ 0 h 2259360"/>
-                <a:gd name="textAreaBottom" fmla="*/ 2260440 h 2259360"/>
+                <a:gd name="textAreaLeft" fmla="*/ 0 w 2125800"/>
+                <a:gd name="textAreaRight" fmla="*/ 2127240 w 2125800"/>
+                <a:gd name="textAreaTop" fmla="*/ 0 h 2259000"/>
+                <a:gd name="textAreaBottom" fmla="*/ 2260440 h 2259000"/>
               </a:gdLst>
               <a:ahLst/>
               <a:rect l="textAreaLeft" t="textAreaTop" r="textAreaRight" b="textAreaBottom"/>
@@ -28658,15 +28649,15 @@
           <p:spPr>
             <a:xfrm>
               <a:off x="3291480" y="3217680"/>
-              <a:ext cx="1063800" cy="450360"/>
+              <a:ext cx="1063440" cy="450000"/>
             </a:xfrm>
             <a:custGeom>
               <a:avLst/>
               <a:gdLst>
-                <a:gd name="textAreaLeft" fmla="*/ 0 w 1063800"/>
-                <a:gd name="textAreaRight" fmla="*/ 1064880 w 1063800"/>
-                <a:gd name="textAreaTop" fmla="*/ 0 h 450360"/>
-                <a:gd name="textAreaBottom" fmla="*/ 451440 h 450360"/>
+                <a:gd name="textAreaLeft" fmla="*/ 0 w 1063440"/>
+                <a:gd name="textAreaRight" fmla="*/ 1064880 w 1063440"/>
+                <a:gd name="textAreaTop" fmla="*/ 0 h 450000"/>
+                <a:gd name="textAreaBottom" fmla="*/ 451440 h 450000"/>
               </a:gdLst>
               <a:ahLst/>
               <a:rect l="textAreaLeft" t="textAreaTop" r="textAreaRight" b="textAreaBottom"/>
@@ -28742,15 +28733,15 @@
           <p:spPr>
             <a:xfrm>
               <a:off x="3291480" y="3217680"/>
-              <a:ext cx="1063800" cy="450360"/>
+              <a:ext cx="1063440" cy="450000"/>
             </a:xfrm>
             <a:custGeom>
               <a:avLst/>
               <a:gdLst>
-                <a:gd name="textAreaLeft" fmla="*/ 0 w 1063800"/>
-                <a:gd name="textAreaRight" fmla="*/ 1064880 w 1063800"/>
-                <a:gd name="textAreaTop" fmla="*/ 0 h 450360"/>
-                <a:gd name="textAreaBottom" fmla="*/ 451440 h 450360"/>
+                <a:gd name="textAreaLeft" fmla="*/ 0 w 1063440"/>
+                <a:gd name="textAreaRight" fmla="*/ 1064880 w 1063440"/>
+                <a:gd name="textAreaTop" fmla="*/ 0 h 450000"/>
+                <a:gd name="textAreaBottom" fmla="*/ 451440 h 450000"/>
               </a:gdLst>
               <a:ahLst/>
               <a:rect l="textAreaLeft" t="textAreaTop" r="textAreaRight" b="textAreaBottom"/>
@@ -28832,7 +28823,7 @@
         <p:spPr>
           <a:xfrm>
             <a:off x="536040" y="526320"/>
-            <a:ext cx="7740720" cy="965880"/>
+            <a:ext cx="7740360" cy="965520"/>
           </a:xfrm>
           <a:prstGeom prst="rect">
             <a:avLst/>
@@ -28922,7 +28913,7 @@
         <p:spPr>
           <a:xfrm>
             <a:off x="536040" y="1359360"/>
-            <a:ext cx="2850840" cy="378000"/>
+            <a:ext cx="2850480" cy="378000"/>
           </a:xfrm>
           <a:prstGeom prst="rect">
             <a:avLst/>
@@ -29028,7 +29019,7 @@
         <p:spPr>
           <a:xfrm>
             <a:off x="7700040" y="27000"/>
-            <a:ext cx="222480" cy="226080"/>
+            <a:ext cx="222120" cy="226080"/>
           </a:xfrm>
           <a:prstGeom prst="rect">
             <a:avLst/>
@@ -29085,7 +29076,7 @@
         <p:spPr>
           <a:xfrm>
             <a:off x="3499200" y="3273840"/>
-            <a:ext cx="416880" cy="286560"/>
+            <a:ext cx="416520" cy="286560"/>
           </a:xfrm>
           <a:prstGeom prst="rect">
             <a:avLst/>
@@ -29176,7 +29167,7 @@
         <p:spPr>
           <a:xfrm>
             <a:off x="536040" y="526320"/>
-            <a:ext cx="7740720" cy="965880"/>
+            <a:ext cx="7740360" cy="965520"/>
           </a:xfrm>
           <a:prstGeom prst="rect">
             <a:avLst/>
@@ -29306,7 +29297,7 @@
         <p:spPr>
           <a:xfrm>
             <a:off x="536040" y="1359360"/>
-            <a:ext cx="8019000" cy="3909960"/>
+            <a:ext cx="8018640" cy="3909600"/>
           </a:xfrm>
           <a:prstGeom prst="rect">
             <a:avLst/>
@@ -29570,7 +29561,7 @@
               <a:t>Random</a:t>
             </a:r>
             <a:r>
-              <a:rPr b="0" lang="fr-FR" sz="2400" spc="4" strike="noStrike">
+              <a:rPr b="0" lang="fr-FR" sz="2400" spc="1" strike="noStrike">
                 <a:solidFill>
                   <a:srgbClr val="292934"/>
                 </a:solidFill>
@@ -29694,142 +29685,142 @@
               <a:t>obtenue</a:t>
             </a:r>
             <a:r>
+              <a:rPr b="0" lang="fr-FR" sz="2400" spc="1" strike="noStrike">
+                <a:solidFill>
+                  <a:srgbClr val="292934"/>
+                </a:solidFill>
+                <a:latin typeface="Arial"/>
+              </a:rPr>
+              <a:t> </a:t>
+            </a:r>
+            <a:r>
+              <a:rPr b="0" lang="fr-FR" sz="2400" spc="-1" strike="noStrike">
+                <a:solidFill>
+                  <a:srgbClr val="292934"/>
+                </a:solidFill>
+                <a:latin typeface="Arial"/>
+              </a:rPr>
+              <a:t>sur</a:t>
+            </a:r>
+            <a:r>
+              <a:rPr b="0" lang="fr-FR" sz="2400" spc="-12" strike="noStrike">
+                <a:solidFill>
+                  <a:srgbClr val="292934"/>
+                </a:solidFill>
+                <a:latin typeface="Arial"/>
+              </a:rPr>
+              <a:t> </a:t>
+            </a:r>
+            <a:r>
+              <a:rPr b="0" lang="fr-FR" sz="2400" spc="-1" strike="noStrike">
+                <a:solidFill>
+                  <a:srgbClr val="292934"/>
+                </a:solidFill>
+                <a:latin typeface="Arial"/>
+              </a:rPr>
+              <a:t>jeu</a:t>
+            </a:r>
+            <a:r>
+              <a:rPr b="0" lang="fr-FR" sz="2400" spc="-21" strike="noStrike">
+                <a:solidFill>
+                  <a:srgbClr val="292934"/>
+                </a:solidFill>
+                <a:latin typeface="Arial"/>
+              </a:rPr>
+              <a:t> </a:t>
+            </a:r>
+            <a:r>
+              <a:rPr b="0" lang="fr-FR" sz="2400" spc="-1" strike="noStrike">
+                <a:solidFill>
+                  <a:srgbClr val="292934"/>
+                </a:solidFill>
+                <a:latin typeface="Arial"/>
+              </a:rPr>
+              <a:t>de test</a:t>
+            </a:r>
+            <a:r>
+              <a:rPr b="0" lang="fr-FR" sz="2400" spc="-26" strike="noStrike">
+                <a:solidFill>
+                  <a:srgbClr val="292934"/>
+                </a:solidFill>
+                <a:latin typeface="Arial"/>
+              </a:rPr>
+              <a:t> </a:t>
+            </a:r>
+            <a:r>
+              <a:rPr b="0" lang="fr-FR" sz="2400" spc="-1" strike="noStrike">
+                <a:solidFill>
+                  <a:srgbClr val="292934"/>
+                </a:solidFill>
+                <a:latin typeface="Arial"/>
+              </a:rPr>
+              <a:t>:</a:t>
+            </a:r>
+            <a:r>
+              <a:rPr b="0" lang="fr-FR" sz="2400" spc="-26" strike="noStrike">
+                <a:solidFill>
+                  <a:srgbClr val="292934"/>
+                </a:solidFill>
+                <a:latin typeface="Arial"/>
+              </a:rPr>
+              <a:t> </a:t>
+            </a:r>
+            <a:r>
+              <a:rPr b="0" lang="fr-FR" sz="2400" spc="-1" strike="noStrike">
+                <a:solidFill>
+                  <a:srgbClr val="ff0000"/>
+                </a:solidFill>
+                <a:latin typeface="Arial"/>
+              </a:rPr>
+              <a:t>1,14</a:t>
+            </a:r>
+            <a:r>
+              <a:rPr b="0" lang="fr-FR" sz="2400" spc="-15" strike="noStrike">
+                <a:solidFill>
+                  <a:srgbClr val="ff0000"/>
+                </a:solidFill>
+                <a:latin typeface="Arial"/>
+              </a:rPr>
+              <a:t> </a:t>
+            </a:r>
+            <a:r>
+              <a:rPr b="0" lang="fr-FR" sz="2400" spc="-1" strike="noStrike">
+                <a:solidFill>
+                  <a:srgbClr val="ff0000"/>
+                </a:solidFill>
+                <a:latin typeface="Arial"/>
+              </a:rPr>
+              <a:t>&lt;</a:t>
+            </a:r>
+            <a:r>
+              <a:rPr b="0" lang="fr-FR" sz="2400" spc="-12" strike="noStrike">
+                <a:solidFill>
+                  <a:srgbClr val="ff0000"/>
+                </a:solidFill>
+                <a:latin typeface="Arial"/>
+              </a:rPr>
+              <a:t> 1,26</a:t>
+            </a:r>
+            <a:r>
+              <a:rPr b="0" lang="fr-FR" sz="2400" spc="-140" strike="noStrike">
+                <a:solidFill>
+                  <a:srgbClr val="ff0000"/>
+                </a:solidFill>
+                <a:latin typeface="Arial"/>
+              </a:rPr>
+              <a:t> </a:t>
+            </a:r>
+            <a:r>
+              <a:rPr b="0" lang="fr-FR" sz="2400" spc="-1" strike="noStrike">
+                <a:solidFill>
+                  <a:srgbClr val="292934"/>
+                </a:solidFill>
+                <a:latin typeface="Arial"/>
+              </a:rPr>
+              <a:t>Améliore</a:t>
+            </a:r>
+            <a:r>
               <a:rPr b="0" lang="fr-FR" sz="2400" spc="4" strike="noStrike">
-                <a:solidFill>
-                  <a:srgbClr val="292934"/>
-                </a:solidFill>
-                <a:latin typeface="Arial"/>
-              </a:rPr>
-              <a:t> </a:t>
-            </a:r>
-            <a:r>
-              <a:rPr b="0" lang="fr-FR" sz="2400" spc="-1" strike="noStrike">
-                <a:solidFill>
-                  <a:srgbClr val="292934"/>
-                </a:solidFill>
-                <a:latin typeface="Arial"/>
-              </a:rPr>
-              <a:t>sur</a:t>
-            </a:r>
-            <a:r>
-              <a:rPr b="0" lang="fr-FR" sz="2400" spc="-12" strike="noStrike">
-                <a:solidFill>
-                  <a:srgbClr val="292934"/>
-                </a:solidFill>
-                <a:latin typeface="Arial"/>
-              </a:rPr>
-              <a:t> </a:t>
-            </a:r>
-            <a:r>
-              <a:rPr b="0" lang="fr-FR" sz="2400" spc="-1" strike="noStrike">
-                <a:solidFill>
-                  <a:srgbClr val="292934"/>
-                </a:solidFill>
-                <a:latin typeface="Arial"/>
-              </a:rPr>
-              <a:t>jeu</a:t>
-            </a:r>
-            <a:r>
-              <a:rPr b="0" lang="fr-FR" sz="2400" spc="-21" strike="noStrike">
-                <a:solidFill>
-                  <a:srgbClr val="292934"/>
-                </a:solidFill>
-                <a:latin typeface="Arial"/>
-              </a:rPr>
-              <a:t> </a:t>
-            </a:r>
-            <a:r>
-              <a:rPr b="0" lang="fr-FR" sz="2400" spc="-1" strike="noStrike">
-                <a:solidFill>
-                  <a:srgbClr val="292934"/>
-                </a:solidFill>
-                <a:latin typeface="Arial"/>
-              </a:rPr>
-              <a:t>de test</a:t>
-            </a:r>
-            <a:r>
-              <a:rPr b="0" lang="fr-FR" sz="2400" spc="-26" strike="noStrike">
-                <a:solidFill>
-                  <a:srgbClr val="292934"/>
-                </a:solidFill>
-                <a:latin typeface="Arial"/>
-              </a:rPr>
-              <a:t> </a:t>
-            </a:r>
-            <a:r>
-              <a:rPr b="0" lang="fr-FR" sz="2400" spc="-1" strike="noStrike">
-                <a:solidFill>
-                  <a:srgbClr val="292934"/>
-                </a:solidFill>
-                <a:latin typeface="Arial"/>
-              </a:rPr>
-              <a:t>:</a:t>
-            </a:r>
-            <a:r>
-              <a:rPr b="0" lang="fr-FR" sz="2400" spc="-26" strike="noStrike">
-                <a:solidFill>
-                  <a:srgbClr val="292934"/>
-                </a:solidFill>
-                <a:latin typeface="Arial"/>
-              </a:rPr>
-              <a:t> </a:t>
-            </a:r>
-            <a:r>
-              <a:rPr b="0" lang="fr-FR" sz="2400" spc="-1" strike="noStrike">
-                <a:solidFill>
-                  <a:srgbClr val="ff0000"/>
-                </a:solidFill>
-                <a:latin typeface="Arial"/>
-              </a:rPr>
-              <a:t>1,14</a:t>
-            </a:r>
-            <a:r>
-              <a:rPr b="0" lang="fr-FR" sz="2400" spc="-15" strike="noStrike">
-                <a:solidFill>
-                  <a:srgbClr val="ff0000"/>
-                </a:solidFill>
-                <a:latin typeface="Arial"/>
-              </a:rPr>
-              <a:t> </a:t>
-            </a:r>
-            <a:r>
-              <a:rPr b="0" lang="fr-FR" sz="2400" spc="-1" strike="noStrike">
-                <a:solidFill>
-                  <a:srgbClr val="ff0000"/>
-                </a:solidFill>
-                <a:latin typeface="Arial"/>
-              </a:rPr>
-              <a:t>&lt;</a:t>
-            </a:r>
-            <a:r>
-              <a:rPr b="0" lang="fr-FR" sz="2400" spc="-12" strike="noStrike">
-                <a:solidFill>
-                  <a:srgbClr val="ff0000"/>
-                </a:solidFill>
-                <a:latin typeface="Arial"/>
-              </a:rPr>
-              <a:t> 1,26</a:t>
-            </a:r>
-            <a:r>
-              <a:rPr b="0" lang="fr-FR" sz="2400" spc="-140" strike="noStrike">
-                <a:solidFill>
-                  <a:srgbClr val="ff0000"/>
-                </a:solidFill>
-                <a:latin typeface="Arial"/>
-              </a:rPr>
-              <a:t> </a:t>
-            </a:r>
-            <a:r>
-              <a:rPr b="0" lang="fr-FR" sz="2400" spc="-1" strike="noStrike">
-                <a:solidFill>
-                  <a:srgbClr val="292934"/>
-                </a:solidFill>
-                <a:latin typeface="Arial"/>
-              </a:rPr>
-              <a:t>Améliore</a:t>
-            </a:r>
-            <a:r>
-              <a:rPr b="0" lang="fr-FR" sz="2400" spc="7" strike="noStrike">
                 <a:solidFill>
                   <a:srgbClr val="292934"/>
                 </a:solidFill>
@@ -30015,7 +30006,7 @@
               <a:t>réaliser</a:t>
             </a:r>
             <a:r>
-              <a:rPr b="0" lang="fr-FR" sz="2400" spc="12" strike="noStrike">
+              <a:rPr b="0" lang="fr-FR" sz="2400" spc="9" strike="noStrike">
                 <a:solidFill>
                   <a:srgbClr val="292934"/>
                 </a:solidFill>
@@ -30235,7 +30226,7 @@
         <p:spPr>
           <a:xfrm>
             <a:off x="7700040" y="27000"/>
-            <a:ext cx="222480" cy="226080"/>
+            <a:ext cx="222120" cy="226080"/>
           </a:xfrm>
           <a:prstGeom prst="rect">
             <a:avLst/>
@@ -30326,7 +30317,7 @@
         <p:spPr>
           <a:xfrm>
             <a:off x="536040" y="526320"/>
-            <a:ext cx="7740720" cy="965880"/>
+            <a:ext cx="7740360" cy="965520"/>
           </a:xfrm>
           <a:prstGeom prst="rect">
             <a:avLst/>
@@ -30380,7 +30371,7 @@
         <p:spPr>
           <a:xfrm>
             <a:off x="536040" y="1357560"/>
-            <a:ext cx="5763960" cy="3588120"/>
+            <a:ext cx="5763600" cy="3588120"/>
           </a:xfrm>
           <a:prstGeom prst="rect">
             <a:avLst/>
@@ -30849,7 +30840,7 @@
         <p:spPr>
           <a:xfrm>
             <a:off x="7700040" y="27000"/>
-            <a:ext cx="123840" cy="226080"/>
+            <a:ext cx="123480" cy="226080"/>
           </a:xfrm>
           <a:prstGeom prst="rect">
             <a:avLst/>
@@ -30940,7 +30931,7 @@
         <p:spPr>
           <a:xfrm>
             <a:off x="536040" y="526320"/>
-            <a:ext cx="7740720" cy="965880"/>
+            <a:ext cx="7740360" cy="965520"/>
           </a:xfrm>
           <a:prstGeom prst="rect">
             <a:avLst/>
@@ -31048,7 +31039,7 @@
         <p:spPr>
           <a:xfrm>
             <a:off x="536040" y="1359360"/>
-            <a:ext cx="4647600" cy="378000"/>
+            <a:ext cx="4647240" cy="378000"/>
           </a:xfrm>
           <a:prstGeom prst="rect">
             <a:avLst/>
@@ -31174,7 +31165,7 @@
         <p:spPr>
           <a:xfrm>
             <a:off x="7700040" y="27000"/>
-            <a:ext cx="222480" cy="226080"/>
+            <a:ext cx="222120" cy="226080"/>
           </a:xfrm>
           <a:prstGeom prst="rect">
             <a:avLst/>
@@ -31231,9 +31222,9 @@
         <p:grpSpPr>
           <a:xfrm>
             <a:off x="5990040" y="3270600"/>
-            <a:ext cx="513360" cy="885960"/>
+            <a:ext cx="513000" cy="885600"/>
             <a:chOff x="5990040" y="3270600"/>
-            <a:chExt cx="513360" cy="885960"/>
+            <a:chExt cx="513000" cy="885600"/>
           </a:xfrm>
         </p:grpSpPr>
         <p:pic>
@@ -31249,7 +31240,7 @@
           <p:spPr>
             <a:xfrm>
               <a:off x="6305760" y="3613320"/>
-              <a:ext cx="197640" cy="197640"/>
+              <a:ext cx="197280" cy="197280"/>
             </a:xfrm>
             <a:prstGeom prst="rect">
               <a:avLst/>
@@ -31272,7 +31263,7 @@
           <p:spPr>
             <a:xfrm>
               <a:off x="5990040" y="3613320"/>
-              <a:ext cx="197640" cy="197640"/>
+              <a:ext cx="197280" cy="197280"/>
             </a:xfrm>
             <a:prstGeom prst="rect">
               <a:avLst/>
@@ -31291,15 +31282,15 @@
           <p:spPr>
             <a:xfrm>
               <a:off x="6037920" y="3270600"/>
-              <a:ext cx="171720" cy="171720"/>
+              <a:ext cx="171360" cy="171360"/>
             </a:xfrm>
             <a:custGeom>
               <a:avLst/>
               <a:gdLst>
-                <a:gd name="textAreaLeft" fmla="*/ 0 w 171720"/>
-                <a:gd name="textAreaRight" fmla="*/ 172800 w 171720"/>
-                <a:gd name="textAreaTop" fmla="*/ 0 h 171720"/>
-                <a:gd name="textAreaBottom" fmla="*/ 172800 h 171720"/>
+                <a:gd name="textAreaLeft" fmla="*/ 0 w 171360"/>
+                <a:gd name="textAreaRight" fmla="*/ 172800 w 171360"/>
+                <a:gd name="textAreaTop" fmla="*/ 0 h 171360"/>
+                <a:gd name="textAreaBottom" fmla="*/ 172800 h 171360"/>
               </a:gdLst>
               <a:ahLst/>
               <a:rect l="textAreaLeft" t="textAreaTop" r="textAreaRight" b="textAreaBottom"/>
@@ -31402,15 +31393,15 @@
           <p:spPr>
             <a:xfrm>
               <a:off x="6037920" y="3270600"/>
-              <a:ext cx="171720" cy="171720"/>
+              <a:ext cx="171360" cy="171360"/>
             </a:xfrm>
             <a:custGeom>
               <a:avLst/>
               <a:gdLst>
-                <a:gd name="textAreaLeft" fmla="*/ 0 w 171720"/>
-                <a:gd name="textAreaRight" fmla="*/ 172800 w 171720"/>
-                <a:gd name="textAreaTop" fmla="*/ 0 h 171720"/>
-                <a:gd name="textAreaBottom" fmla="*/ 172800 h 171720"/>
+                <a:gd name="textAreaLeft" fmla="*/ 0 w 171360"/>
+                <a:gd name="textAreaRight" fmla="*/ 172800 w 171360"/>
+                <a:gd name="textAreaTop" fmla="*/ 0 h 171360"/>
+                <a:gd name="textAreaBottom" fmla="*/ 172800 h 171360"/>
               </a:gdLst>
               <a:ahLst/>
               <a:rect l="textAreaLeft" t="textAreaTop" r="textAreaRight" b="textAreaBottom"/>
@@ -31514,15 +31505,15 @@
           <p:spPr>
             <a:xfrm>
               <a:off x="6192360" y="3425400"/>
-              <a:ext cx="171720" cy="171720"/>
+              <a:ext cx="171360" cy="171360"/>
             </a:xfrm>
             <a:custGeom>
               <a:avLst/>
               <a:gdLst>
-                <a:gd name="textAreaLeft" fmla="*/ 0 w 171720"/>
-                <a:gd name="textAreaRight" fmla="*/ 172800 w 171720"/>
-                <a:gd name="textAreaTop" fmla="*/ 0 h 171720"/>
-                <a:gd name="textAreaBottom" fmla="*/ 172800 h 171720"/>
+                <a:gd name="textAreaLeft" fmla="*/ 0 w 171360"/>
+                <a:gd name="textAreaRight" fmla="*/ 172800 w 171360"/>
+                <a:gd name="textAreaTop" fmla="*/ 0 h 171360"/>
+                <a:gd name="textAreaBottom" fmla="*/ 172800 h 171360"/>
               </a:gdLst>
               <a:ahLst/>
               <a:rect l="textAreaLeft" t="textAreaTop" r="textAreaRight" b="textAreaBottom"/>
@@ -31625,15 +31616,15 @@
           <p:spPr>
             <a:xfrm>
               <a:off x="6192360" y="3425400"/>
-              <a:ext cx="171720" cy="171720"/>
+              <a:ext cx="171360" cy="171360"/>
             </a:xfrm>
             <a:custGeom>
               <a:avLst/>
               <a:gdLst>
-                <a:gd name="textAreaLeft" fmla="*/ 0 w 171720"/>
-                <a:gd name="textAreaRight" fmla="*/ 172800 w 171720"/>
-                <a:gd name="textAreaTop" fmla="*/ 0 h 171720"/>
-                <a:gd name="textAreaBottom" fmla="*/ 172800 h 171720"/>
+                <a:gd name="textAreaLeft" fmla="*/ 0 w 171360"/>
+                <a:gd name="textAreaRight" fmla="*/ 172800 w 171360"/>
+                <a:gd name="textAreaTop" fmla="*/ 0 h 171360"/>
+                <a:gd name="textAreaBottom" fmla="*/ 172800 h 171360"/>
               </a:gdLst>
               <a:ahLst/>
               <a:rect l="textAreaLeft" t="textAreaTop" r="textAreaRight" b="textAreaBottom"/>
@@ -31737,15 +31728,15 @@
           <p:spPr>
             <a:xfrm>
               <a:off x="6037920" y="3984840"/>
-              <a:ext cx="171720" cy="171720"/>
+              <a:ext cx="171360" cy="171360"/>
             </a:xfrm>
             <a:custGeom>
               <a:avLst/>
               <a:gdLst>
-                <a:gd name="textAreaLeft" fmla="*/ 0 w 171720"/>
-                <a:gd name="textAreaRight" fmla="*/ 172800 w 171720"/>
-                <a:gd name="textAreaTop" fmla="*/ 0 h 171720"/>
-                <a:gd name="textAreaBottom" fmla="*/ 172800 h 171720"/>
+                <a:gd name="textAreaLeft" fmla="*/ 0 w 171360"/>
+                <a:gd name="textAreaRight" fmla="*/ 172800 w 171360"/>
+                <a:gd name="textAreaTop" fmla="*/ 0 h 171360"/>
+                <a:gd name="textAreaBottom" fmla="*/ 172800 h 171360"/>
               </a:gdLst>
               <a:ahLst/>
               <a:rect l="textAreaLeft" t="textAreaTop" r="textAreaRight" b="textAreaBottom"/>
@@ -31848,15 +31839,15 @@
           <p:spPr>
             <a:xfrm>
               <a:off x="6037920" y="3984840"/>
-              <a:ext cx="171720" cy="171720"/>
+              <a:ext cx="171360" cy="171360"/>
             </a:xfrm>
             <a:custGeom>
               <a:avLst/>
               <a:gdLst>
-                <a:gd name="textAreaLeft" fmla="*/ 0 w 171720"/>
-                <a:gd name="textAreaRight" fmla="*/ 172800 w 171720"/>
-                <a:gd name="textAreaTop" fmla="*/ 0 h 171720"/>
-                <a:gd name="textAreaBottom" fmla="*/ 172800 h 171720"/>
+                <a:gd name="textAreaLeft" fmla="*/ 0 w 171360"/>
+                <a:gd name="textAreaRight" fmla="*/ 172800 w 171360"/>
+                <a:gd name="textAreaTop" fmla="*/ 0 h 171360"/>
+                <a:gd name="textAreaBottom" fmla="*/ 172800 h 171360"/>
               </a:gdLst>
               <a:ahLst/>
               <a:rect l="textAreaLeft" t="textAreaTop" r="textAreaRight" b="textAreaBottom"/>
@@ -31960,15 +31951,15 @@
           <p:spPr>
             <a:xfrm>
               <a:off x="6202080" y="3831120"/>
-              <a:ext cx="171720" cy="171720"/>
+              <a:ext cx="171360" cy="171360"/>
             </a:xfrm>
             <a:custGeom>
               <a:avLst/>
               <a:gdLst>
-                <a:gd name="textAreaLeft" fmla="*/ 0 w 171720"/>
-                <a:gd name="textAreaRight" fmla="*/ 172800 w 171720"/>
-                <a:gd name="textAreaTop" fmla="*/ 0 h 171720"/>
-                <a:gd name="textAreaBottom" fmla="*/ 172800 h 171720"/>
+                <a:gd name="textAreaLeft" fmla="*/ 0 w 171360"/>
+                <a:gd name="textAreaRight" fmla="*/ 172800 w 171360"/>
+                <a:gd name="textAreaTop" fmla="*/ 0 h 171360"/>
+                <a:gd name="textAreaBottom" fmla="*/ 172800 h 171360"/>
               </a:gdLst>
               <a:ahLst/>
               <a:rect l="textAreaLeft" t="textAreaTop" r="textAreaRight" b="textAreaBottom"/>
@@ -32071,15 +32062,15 @@
           <p:spPr>
             <a:xfrm>
               <a:off x="6202080" y="3831120"/>
-              <a:ext cx="171720" cy="171720"/>
+              <a:ext cx="171360" cy="171360"/>
             </a:xfrm>
             <a:custGeom>
               <a:avLst/>
               <a:gdLst>
-                <a:gd name="textAreaLeft" fmla="*/ 0 w 171720"/>
-                <a:gd name="textAreaRight" fmla="*/ 172800 w 171720"/>
-                <a:gd name="textAreaTop" fmla="*/ 0 h 171720"/>
-                <a:gd name="textAreaBottom" fmla="*/ 172800 h 171720"/>
+                <a:gd name="textAreaLeft" fmla="*/ 0 w 171360"/>
+                <a:gd name="textAreaRight" fmla="*/ 172800 w 171360"/>
+                <a:gd name="textAreaTop" fmla="*/ 0 h 171360"/>
+                <a:gd name="textAreaBottom" fmla="*/ 172800 h 171360"/>
               </a:gdLst>
               <a:ahLst/>
               <a:rect l="textAreaLeft" t="textAreaTop" r="textAreaRight" b="textAreaBottom"/>
@@ -32188,7 +32179,7 @@
         <p:spPr>
           <a:xfrm>
             <a:off x="5675040" y="3613320"/>
-            <a:ext cx="197640" cy="197640"/>
+            <a:ext cx="197280" cy="197280"/>
           </a:xfrm>
           <a:prstGeom prst="rect">
             <a:avLst/>
@@ -32211,7 +32202,7 @@
         <p:spPr>
           <a:xfrm>
             <a:off x="5359320" y="3613320"/>
-            <a:ext cx="197640" cy="197640"/>
+            <a:ext cx="197280" cy="197280"/>
           </a:xfrm>
           <a:prstGeom prst="rect">
             <a:avLst/>
@@ -32234,7 +32225,7 @@
         <p:spPr>
           <a:xfrm>
             <a:off x="5043240" y="3613320"/>
-            <a:ext cx="198000" cy="197640"/>
+            <a:ext cx="197640" cy="197280"/>
           </a:xfrm>
           <a:prstGeom prst="rect">
             <a:avLst/>
@@ -32253,9 +32244,9 @@
         <p:grpSpPr>
           <a:xfrm>
             <a:off x="4568760" y="3540240"/>
-            <a:ext cx="344520" cy="343800"/>
+            <a:ext cx="344160" cy="343440"/>
             <a:chOff x="4568760" y="3540240"/>
-            <a:chExt cx="344520" cy="343800"/>
+            <a:chExt cx="344160" cy="343440"/>
           </a:xfrm>
         </p:grpSpPr>
         <p:sp>
@@ -32267,15 +32258,15 @@
           <p:spPr>
             <a:xfrm>
               <a:off x="4568760" y="3540240"/>
-              <a:ext cx="344520" cy="343800"/>
+              <a:ext cx="344160" cy="343440"/>
             </a:xfrm>
             <a:custGeom>
               <a:avLst/>
               <a:gdLst>
-                <a:gd name="textAreaLeft" fmla="*/ 0 w 344520"/>
-                <a:gd name="textAreaRight" fmla="*/ 345600 w 344520"/>
-                <a:gd name="textAreaTop" fmla="*/ 0 h 343800"/>
-                <a:gd name="textAreaBottom" fmla="*/ 344880 h 343800"/>
+                <a:gd name="textAreaLeft" fmla="*/ 0 w 344160"/>
+                <a:gd name="textAreaRight" fmla="*/ 345600 w 344160"/>
+                <a:gd name="textAreaTop" fmla="*/ 0 h 343440"/>
+                <a:gd name="textAreaBottom" fmla="*/ 344880 h 343440"/>
               </a:gdLst>
               <a:ahLst/>
               <a:rect l="textAreaLeft" t="textAreaTop" r="textAreaRight" b="textAreaBottom"/>
@@ -32402,15 +32393,15 @@
           <p:spPr>
             <a:xfrm>
               <a:off x="4568760" y="3540240"/>
-              <a:ext cx="344520" cy="343800"/>
+              <a:ext cx="344160" cy="343440"/>
             </a:xfrm>
             <a:custGeom>
               <a:avLst/>
               <a:gdLst>
-                <a:gd name="textAreaLeft" fmla="*/ 0 w 344520"/>
-                <a:gd name="textAreaRight" fmla="*/ 345600 w 344520"/>
-                <a:gd name="textAreaTop" fmla="*/ 0 h 343800"/>
-                <a:gd name="textAreaBottom" fmla="*/ 344880 h 343800"/>
+                <a:gd name="textAreaLeft" fmla="*/ 0 w 344160"/>
+                <a:gd name="textAreaRight" fmla="*/ 345600 w 344160"/>
+                <a:gd name="textAreaTop" fmla="*/ 0 h 343440"/>
+                <a:gd name="textAreaBottom" fmla="*/ 344880 h 343440"/>
               </a:gdLst>
               <a:ahLst/>
               <a:rect l="textAreaLeft" t="textAreaTop" r="textAreaRight" b="textAreaBottom"/>
@@ -32539,9 +32530,9 @@
         <p:grpSpPr>
           <a:xfrm>
             <a:off x="2694240" y="2837160"/>
-            <a:ext cx="1743840" cy="1743840"/>
+            <a:ext cx="1743480" cy="1743480"/>
             <a:chOff x="2694240" y="2837160"/>
-            <a:chExt cx="1743840" cy="1743840"/>
+            <a:chExt cx="1743480" cy="1743480"/>
           </a:xfrm>
         </p:grpSpPr>
         <p:sp>
@@ -32553,15 +32544,15 @@
           <p:spPr>
             <a:xfrm>
               <a:off x="2694240" y="2837160"/>
-              <a:ext cx="1743840" cy="1743840"/>
+              <a:ext cx="1743480" cy="1743480"/>
             </a:xfrm>
             <a:custGeom>
               <a:avLst/>
               <a:gdLst>
-                <a:gd name="textAreaLeft" fmla="*/ 0 w 1743840"/>
-                <a:gd name="textAreaRight" fmla="*/ 1744920 w 1743840"/>
-                <a:gd name="textAreaTop" fmla="*/ 0 h 1743840"/>
-                <a:gd name="textAreaBottom" fmla="*/ 1744920 h 1743840"/>
+                <a:gd name="textAreaLeft" fmla="*/ 0 w 1743480"/>
+                <a:gd name="textAreaRight" fmla="*/ 1744920 w 1743480"/>
+                <a:gd name="textAreaTop" fmla="*/ 0 h 1743480"/>
+                <a:gd name="textAreaBottom" fmla="*/ 1744920 h 1743480"/>
               </a:gdLst>
               <a:ahLst/>
               <a:rect l="textAreaLeft" t="textAreaTop" r="textAreaRight" b="textAreaBottom"/>
@@ -32976,15 +32967,15 @@
           <p:spPr>
             <a:xfrm>
               <a:off x="2694240" y="2837160"/>
-              <a:ext cx="1743840" cy="1743840"/>
+              <a:ext cx="1743480" cy="1743480"/>
             </a:xfrm>
             <a:custGeom>
               <a:avLst/>
               <a:gdLst>
-                <a:gd name="textAreaLeft" fmla="*/ 0 w 1743840"/>
-                <a:gd name="textAreaRight" fmla="*/ 1744920 w 1743840"/>
-                <a:gd name="textAreaTop" fmla="*/ 0 h 1743840"/>
-                <a:gd name="textAreaBottom" fmla="*/ 1744920 h 1743840"/>
+                <a:gd name="textAreaLeft" fmla="*/ 0 w 1743480"/>
+                <a:gd name="textAreaRight" fmla="*/ 1744920 w 1743480"/>
+                <a:gd name="textAreaTop" fmla="*/ 0 h 1743480"/>
+                <a:gd name="textAreaBottom" fmla="*/ 1744920 h 1743480"/>
               </a:gdLst>
               <a:ahLst/>
               <a:rect l="textAreaLeft" t="textAreaTop" r="textAreaRight" b="textAreaBottom"/>
@@ -33401,7 +33392,7 @@
         <p:spPr>
           <a:xfrm>
             <a:off x="2979000" y="3420360"/>
-            <a:ext cx="1177560" cy="525600"/>
+            <a:ext cx="1177200" cy="525600"/>
           </a:xfrm>
           <a:prstGeom prst="rect">
             <a:avLst/>
@@ -33465,7 +33456,7 @@
         <p:spPr>
           <a:xfrm>
             <a:off x="2211840" y="2269080"/>
-            <a:ext cx="198000" cy="197640"/>
+            <a:ext cx="197640" cy="197280"/>
           </a:xfrm>
           <a:prstGeom prst="rect">
             <a:avLst/>
@@ -33488,7 +33479,7 @@
         <p:spPr>
           <a:xfrm>
             <a:off x="1856520" y="2269080"/>
-            <a:ext cx="197640" cy="197640"/>
+            <a:ext cx="197280" cy="197280"/>
           </a:xfrm>
           <a:prstGeom prst="rect">
             <a:avLst/>
@@ -33511,7 +33502,7 @@
         <p:spPr>
           <a:xfrm>
             <a:off x="1500840" y="2269080"/>
-            <a:ext cx="198000" cy="197640"/>
+            <a:ext cx="197640" cy="197280"/>
           </a:xfrm>
           <a:prstGeom prst="rect">
             <a:avLst/>
@@ -33534,7 +33525,7 @@
         <p:spPr>
           <a:xfrm>
             <a:off x="1145520" y="2269080"/>
-            <a:ext cx="197640" cy="197640"/>
+            <a:ext cx="197280" cy="197280"/>
           </a:xfrm>
           <a:prstGeom prst="rect">
             <a:avLst/>
@@ -33557,7 +33548,7 @@
         <p:spPr>
           <a:xfrm>
             <a:off x="789480" y="2269080"/>
-            <a:ext cx="198000" cy="197640"/>
+            <a:ext cx="197640" cy="197280"/>
           </a:xfrm>
           <a:prstGeom prst="rect">
             <a:avLst/>
@@ -33580,7 +33571,7 @@
         <p:spPr>
           <a:xfrm>
             <a:off x="434160" y="2269080"/>
-            <a:ext cx="198000" cy="197640"/>
+            <a:ext cx="197640" cy="197280"/>
           </a:xfrm>
           <a:prstGeom prst="rect">
             <a:avLst/>
@@ -33599,9 +33590,9 @@
         <p:grpSpPr>
           <a:xfrm>
             <a:off x="2210040" y="2382480"/>
-            <a:ext cx="910080" cy="2816280"/>
+            <a:ext cx="909720" cy="2815920"/>
             <a:chOff x="2210040" y="2382480"/>
-            <a:chExt cx="910080" cy="2816280"/>
+            <a:chExt cx="909720" cy="2815920"/>
           </a:xfrm>
         </p:grpSpPr>
         <p:sp>
@@ -33613,15 +33604,15 @@
           <p:spPr>
             <a:xfrm>
               <a:off x="2775600" y="2556720"/>
-              <a:ext cx="344520" cy="343800"/>
+              <a:ext cx="344160" cy="343440"/>
             </a:xfrm>
             <a:custGeom>
               <a:avLst/>
               <a:gdLst>
-                <a:gd name="textAreaLeft" fmla="*/ 0 w 344520"/>
-                <a:gd name="textAreaRight" fmla="*/ 345600 w 344520"/>
-                <a:gd name="textAreaTop" fmla="*/ 0 h 343800"/>
-                <a:gd name="textAreaBottom" fmla="*/ 344880 h 343800"/>
+                <a:gd name="textAreaLeft" fmla="*/ 0 w 344160"/>
+                <a:gd name="textAreaRight" fmla="*/ 345600 w 344160"/>
+                <a:gd name="textAreaTop" fmla="*/ 0 h 343440"/>
+                <a:gd name="textAreaBottom" fmla="*/ 344880 h 343440"/>
               </a:gdLst>
               <a:ahLst/>
               <a:rect l="textAreaLeft" t="textAreaTop" r="textAreaRight" b="textAreaBottom"/>
@@ -33748,15 +33739,15 @@
           <p:spPr>
             <a:xfrm>
               <a:off x="2775600" y="2556720"/>
-              <a:ext cx="344520" cy="343800"/>
+              <a:ext cx="344160" cy="343440"/>
             </a:xfrm>
             <a:custGeom>
               <a:avLst/>
               <a:gdLst>
-                <a:gd name="textAreaLeft" fmla="*/ 0 w 344520"/>
-                <a:gd name="textAreaRight" fmla="*/ 345600 w 344520"/>
-                <a:gd name="textAreaTop" fmla="*/ 0 h 343800"/>
-                <a:gd name="textAreaBottom" fmla="*/ 344880 h 343800"/>
+                <a:gd name="textAreaLeft" fmla="*/ 0 w 344160"/>
+                <a:gd name="textAreaRight" fmla="*/ 345600 w 344160"/>
+                <a:gd name="textAreaTop" fmla="*/ 0 h 343440"/>
+                <a:gd name="textAreaBottom" fmla="*/ 344880 h 343440"/>
               </a:gdLst>
               <a:ahLst/>
               <a:rect l="textAreaLeft" t="textAreaTop" r="textAreaRight" b="textAreaBottom"/>
@@ -33888,7 +33879,7 @@
           <p:spPr>
             <a:xfrm>
               <a:off x="2567520" y="2382480"/>
-              <a:ext cx="198000" cy="197640"/>
+              <a:ext cx="197640" cy="197280"/>
             </a:xfrm>
             <a:prstGeom prst="rect">
               <a:avLst/>
@@ -33907,15 +33898,15 @@
           <p:spPr>
             <a:xfrm>
               <a:off x="2320560" y="3096720"/>
-              <a:ext cx="344520" cy="343800"/>
+              <a:ext cx="344160" cy="343440"/>
             </a:xfrm>
             <a:custGeom>
               <a:avLst/>
               <a:gdLst>
-                <a:gd name="textAreaLeft" fmla="*/ 0 w 344520"/>
-                <a:gd name="textAreaRight" fmla="*/ 345600 w 344520"/>
-                <a:gd name="textAreaTop" fmla="*/ 0 h 343800"/>
-                <a:gd name="textAreaBottom" fmla="*/ 344880 h 343800"/>
+                <a:gd name="textAreaLeft" fmla="*/ 0 w 344160"/>
+                <a:gd name="textAreaRight" fmla="*/ 345600 w 344160"/>
+                <a:gd name="textAreaTop" fmla="*/ 0 h 343440"/>
+                <a:gd name="textAreaBottom" fmla="*/ 344880 h 343440"/>
               </a:gdLst>
               <a:ahLst/>
               <a:rect l="textAreaLeft" t="textAreaTop" r="textAreaRight" b="textAreaBottom"/>
@@ -34042,15 +34033,15 @@
           <p:spPr>
             <a:xfrm>
               <a:off x="2320560" y="3096720"/>
-              <a:ext cx="344520" cy="343800"/>
+              <a:ext cx="344160" cy="343440"/>
             </a:xfrm>
             <a:custGeom>
               <a:avLst/>
               <a:gdLst>
-                <a:gd name="textAreaLeft" fmla="*/ 0 w 344520"/>
-                <a:gd name="textAreaRight" fmla="*/ 345600 w 344520"/>
-                <a:gd name="textAreaTop" fmla="*/ 0 h 343800"/>
-                <a:gd name="textAreaBottom" fmla="*/ 344880 h 343800"/>
+                <a:gd name="textAreaLeft" fmla="*/ 0 w 344160"/>
+                <a:gd name="textAreaRight" fmla="*/ 345600 w 344160"/>
+                <a:gd name="textAreaTop" fmla="*/ 0 h 343440"/>
+                <a:gd name="textAreaBottom" fmla="*/ 344880 h 343440"/>
               </a:gdLst>
               <a:ahLst/>
               <a:rect l="textAreaLeft" t="textAreaTop" r="textAreaRight" b="textAreaBottom"/>
@@ -34178,15 +34169,15 @@
           <p:spPr>
             <a:xfrm>
               <a:off x="2320560" y="3925080"/>
-              <a:ext cx="344520" cy="343800"/>
+              <a:ext cx="344160" cy="343440"/>
             </a:xfrm>
             <a:custGeom>
               <a:avLst/>
               <a:gdLst>
-                <a:gd name="textAreaLeft" fmla="*/ 0 w 344520"/>
-                <a:gd name="textAreaRight" fmla="*/ 345600 w 344520"/>
-                <a:gd name="textAreaTop" fmla="*/ 0 h 343800"/>
-                <a:gd name="textAreaBottom" fmla="*/ 344880 h 343800"/>
+                <a:gd name="textAreaLeft" fmla="*/ 0 w 344160"/>
+                <a:gd name="textAreaRight" fmla="*/ 345600 w 344160"/>
+                <a:gd name="textAreaTop" fmla="*/ 0 h 343440"/>
+                <a:gd name="textAreaBottom" fmla="*/ 344880 h 343440"/>
               </a:gdLst>
               <a:ahLst/>
               <a:rect l="textAreaLeft" t="textAreaTop" r="textAreaRight" b="textAreaBottom"/>
@@ -34313,15 +34304,15 @@
           <p:spPr>
             <a:xfrm>
               <a:off x="2320560" y="3925080"/>
-              <a:ext cx="344520" cy="343800"/>
+              <a:ext cx="344160" cy="343440"/>
             </a:xfrm>
             <a:custGeom>
               <a:avLst/>
               <a:gdLst>
-                <a:gd name="textAreaLeft" fmla="*/ 0 w 344520"/>
-                <a:gd name="textAreaRight" fmla="*/ 345600 w 344520"/>
-                <a:gd name="textAreaTop" fmla="*/ 0 h 343800"/>
-                <a:gd name="textAreaBottom" fmla="*/ 344880 h 343800"/>
+                <a:gd name="textAreaLeft" fmla="*/ 0 w 344160"/>
+                <a:gd name="textAreaRight" fmla="*/ 345600 w 344160"/>
+                <a:gd name="textAreaTop" fmla="*/ 0 h 343440"/>
+                <a:gd name="textAreaBottom" fmla="*/ 344880 h 343440"/>
               </a:gdLst>
               <a:ahLst/>
               <a:rect l="textAreaLeft" t="textAreaTop" r="textAreaRight" b="textAreaBottom"/>
@@ -34449,15 +34440,15 @@
           <p:spPr>
             <a:xfrm>
               <a:off x="2775600" y="4520520"/>
-              <a:ext cx="344520" cy="343800"/>
+              <a:ext cx="344160" cy="343440"/>
             </a:xfrm>
             <a:custGeom>
               <a:avLst/>
               <a:gdLst>
-                <a:gd name="textAreaLeft" fmla="*/ 0 w 344520"/>
-                <a:gd name="textAreaRight" fmla="*/ 345600 w 344520"/>
-                <a:gd name="textAreaTop" fmla="*/ 0 h 343800"/>
-                <a:gd name="textAreaBottom" fmla="*/ 344880 h 343800"/>
+                <a:gd name="textAreaLeft" fmla="*/ 0 w 344160"/>
+                <a:gd name="textAreaRight" fmla="*/ 345600 w 344160"/>
+                <a:gd name="textAreaTop" fmla="*/ 0 h 343440"/>
+                <a:gd name="textAreaBottom" fmla="*/ 344880 h 343440"/>
               </a:gdLst>
               <a:ahLst/>
               <a:rect l="textAreaLeft" t="textAreaTop" r="textAreaRight" b="textAreaBottom"/>
@@ -34584,15 +34575,15 @@
           <p:spPr>
             <a:xfrm>
               <a:off x="2775600" y="4520520"/>
-              <a:ext cx="344520" cy="343800"/>
+              <a:ext cx="344160" cy="343440"/>
             </a:xfrm>
             <a:custGeom>
               <a:avLst/>
               <a:gdLst>
-                <a:gd name="textAreaLeft" fmla="*/ 0 w 344520"/>
-                <a:gd name="textAreaRight" fmla="*/ 345600 w 344520"/>
-                <a:gd name="textAreaTop" fmla="*/ 0 h 343800"/>
-                <a:gd name="textAreaBottom" fmla="*/ 344880 h 343800"/>
+                <a:gd name="textAreaLeft" fmla="*/ 0 w 344160"/>
+                <a:gd name="textAreaRight" fmla="*/ 345600 w 344160"/>
+                <a:gd name="textAreaTop" fmla="*/ 0 h 343440"/>
+                <a:gd name="textAreaBottom" fmla="*/ 344880 h 343440"/>
               </a:gdLst>
               <a:ahLst/>
               <a:rect l="textAreaLeft" t="textAreaTop" r="textAreaRight" b="textAreaBottom"/>
@@ -34724,7 +34715,7 @@
           <p:spPr>
             <a:xfrm>
               <a:off x="2564640" y="4838040"/>
-              <a:ext cx="198000" cy="198000"/>
+              <a:ext cx="197640" cy="197640"/>
             </a:xfrm>
             <a:prstGeom prst="rect">
               <a:avLst/>
@@ -34747,7 +34738,7 @@
           <p:spPr>
             <a:xfrm>
               <a:off x="2210040" y="5000760"/>
-              <a:ext cx="197640" cy="198000"/>
+              <a:ext cx="197280" cy="197640"/>
             </a:xfrm>
             <a:prstGeom prst="rect">
               <a:avLst/>
@@ -34767,7 +34758,7 @@
         <p:spPr>
           <a:xfrm>
             <a:off x="432360" y="2029680"/>
-            <a:ext cx="1818360" cy="255240"/>
+            <a:ext cx="1818000" cy="255240"/>
           </a:xfrm>
           <a:prstGeom prst="rect">
             <a:avLst/>
@@ -34868,7 +34859,7 @@
         <p:spPr>
           <a:xfrm>
             <a:off x="2021760" y="3154320"/>
-            <a:ext cx="197640" cy="197640"/>
+            <a:ext cx="197280" cy="197280"/>
           </a:xfrm>
           <a:prstGeom prst="rect">
             <a:avLst/>
@@ -34891,7 +34882,7 @@
         <p:spPr>
           <a:xfrm>
             <a:off x="1693440" y="3154320"/>
-            <a:ext cx="198000" cy="197640"/>
+            <a:ext cx="197640" cy="197280"/>
           </a:xfrm>
           <a:prstGeom prst="rect">
             <a:avLst/>
@@ -34914,7 +34905,7 @@
         <p:spPr>
           <a:xfrm>
             <a:off x="1366200" y="3154320"/>
-            <a:ext cx="197640" cy="197640"/>
+            <a:ext cx="197280" cy="197280"/>
           </a:xfrm>
           <a:prstGeom prst="rect">
             <a:avLst/>
@@ -34937,7 +34928,7 @@
         <p:spPr>
           <a:xfrm>
             <a:off x="1038960" y="3154320"/>
-            <a:ext cx="198000" cy="197640"/>
+            <a:ext cx="197640" cy="197280"/>
           </a:xfrm>
           <a:prstGeom prst="rect">
             <a:avLst/>
@@ -34960,7 +34951,7 @@
         <p:spPr>
           <a:xfrm>
             <a:off x="711000" y="3154320"/>
-            <a:ext cx="198000" cy="197640"/>
+            <a:ext cx="197640" cy="197280"/>
           </a:xfrm>
           <a:prstGeom prst="rect">
             <a:avLst/>
@@ -34983,7 +34974,7 @@
         <p:spPr>
           <a:xfrm>
             <a:off x="383400" y="3154320"/>
-            <a:ext cx="198000" cy="197640"/>
+            <a:ext cx="197640" cy="197280"/>
           </a:xfrm>
           <a:prstGeom prst="rect">
             <a:avLst/>
@@ -35002,7 +34993,7 @@
         <p:spPr>
           <a:xfrm>
             <a:off x="383040" y="2916360"/>
-            <a:ext cx="1197720" cy="255240"/>
+            <a:ext cx="1197360" cy="255240"/>
           </a:xfrm>
           <a:prstGeom prst="rect">
             <a:avLst/>
@@ -35083,7 +35074,7 @@
         <p:spPr>
           <a:xfrm>
             <a:off x="2021760" y="4116960"/>
-            <a:ext cx="197640" cy="197640"/>
+            <a:ext cx="197280" cy="197280"/>
           </a:xfrm>
           <a:prstGeom prst="rect">
             <a:avLst/>
@@ -35106,7 +35097,7 @@
         <p:spPr>
           <a:xfrm>
             <a:off x="1693440" y="4116960"/>
-            <a:ext cx="198000" cy="197640"/>
+            <a:ext cx="197640" cy="197280"/>
           </a:xfrm>
           <a:prstGeom prst="rect">
             <a:avLst/>
@@ -35129,7 +35120,7 @@
         <p:spPr>
           <a:xfrm>
             <a:off x="1366200" y="4116960"/>
-            <a:ext cx="197640" cy="197640"/>
+            <a:ext cx="197280" cy="197280"/>
           </a:xfrm>
           <a:prstGeom prst="rect">
             <a:avLst/>
@@ -35152,7 +35143,7 @@
         <p:spPr>
           <a:xfrm>
             <a:off x="1038960" y="4116960"/>
-            <a:ext cx="198000" cy="197640"/>
+            <a:ext cx="197640" cy="197280"/>
           </a:xfrm>
           <a:prstGeom prst="rect">
             <a:avLst/>
@@ -35175,7 +35166,7 @@
         <p:spPr>
           <a:xfrm>
             <a:off x="711000" y="4116960"/>
-            <a:ext cx="198000" cy="197640"/>
+            <a:ext cx="197640" cy="197280"/>
           </a:xfrm>
           <a:prstGeom prst="rect">
             <a:avLst/>
@@ -35198,7 +35189,7 @@
         <p:spPr>
           <a:xfrm>
             <a:off x="383400" y="4116960"/>
-            <a:ext cx="198000" cy="197640"/>
+            <a:ext cx="197640" cy="197280"/>
           </a:xfrm>
           <a:prstGeom prst="rect">
             <a:avLst/>
@@ -35217,7 +35208,7 @@
         <p:spPr>
           <a:xfrm>
             <a:off x="383040" y="3666960"/>
-            <a:ext cx="1705320" cy="468000"/>
+            <a:ext cx="1704960" cy="468000"/>
           </a:xfrm>
           <a:prstGeom prst="rect">
             <a:avLst/>
@@ -35328,7 +35319,7 @@
         <p:spPr>
           <a:xfrm>
             <a:off x="1854360" y="5000760"/>
-            <a:ext cx="198000" cy="198000"/>
+            <a:ext cx="197640" cy="197640"/>
           </a:xfrm>
           <a:prstGeom prst="rect">
             <a:avLst/>
@@ -35351,7 +35342,7 @@
         <p:spPr>
           <a:xfrm>
             <a:off x="1499760" y="5000760"/>
-            <a:ext cx="197640" cy="198000"/>
+            <a:ext cx="197280" cy="197640"/>
           </a:xfrm>
           <a:prstGeom prst="rect">
             <a:avLst/>
@@ -35374,7 +35365,7 @@
         <p:spPr>
           <a:xfrm>
             <a:off x="1144800" y="5000760"/>
-            <a:ext cx="198000" cy="198000"/>
+            <a:ext cx="197640" cy="197640"/>
           </a:xfrm>
           <a:prstGeom prst="rect">
             <a:avLst/>
@@ -35397,7 +35388,7 @@
         <p:spPr>
           <a:xfrm>
             <a:off x="789480" y="5000760"/>
-            <a:ext cx="198000" cy="198000"/>
+            <a:ext cx="197640" cy="197640"/>
           </a:xfrm>
           <a:prstGeom prst="rect">
             <a:avLst/>
@@ -35420,7 +35411,7 @@
         <p:spPr>
           <a:xfrm>
             <a:off x="434880" y="5000760"/>
-            <a:ext cx="198000" cy="198000"/>
+            <a:ext cx="197640" cy="197640"/>
           </a:xfrm>
           <a:prstGeom prst="rect">
             <a:avLst/>
@@ -35439,7 +35430,7 @@
         <p:spPr>
           <a:xfrm>
             <a:off x="432360" y="4755960"/>
-            <a:ext cx="1792080" cy="255240"/>
+            <a:ext cx="1791720" cy="255240"/>
           </a:xfrm>
           <a:prstGeom prst="rect">
             <a:avLst/>
@@ -35516,7 +35507,7 @@
         <p:spPr>
           <a:xfrm>
             <a:off x="7020360" y="3073680"/>
-            <a:ext cx="1439280" cy="894960"/>
+            <a:ext cx="1438920" cy="894960"/>
           </a:xfrm>
           <a:prstGeom prst="rect">
             <a:avLst/>
@@ -35594,7 +35585,7 @@
         <p:spPr>
           <a:xfrm>
             <a:off x="6668280" y="4397760"/>
-            <a:ext cx="2112120" cy="560880"/>
+            <a:ext cx="2111760" cy="560880"/>
           </a:xfrm>
           <a:prstGeom prst="rect">
             <a:avLst/>
@@ -35718,7 +35709,7 @@
         <p:spPr>
           <a:xfrm>
             <a:off x="6408000" y="1105920"/>
-            <a:ext cx="2663280" cy="1859760"/>
+            <a:ext cx="2662920" cy="1859400"/>
           </a:xfrm>
           <a:prstGeom prst="rect">
             <a:avLst/>
@@ -35771,7 +35762,7 @@
         <p:spPr>
           <a:xfrm>
             <a:off x="2057760" y="2264400"/>
-            <a:ext cx="5117040" cy="2205720"/>
+            <a:ext cx="5116680" cy="2205360"/>
           </a:xfrm>
           <a:prstGeom prst="rect">
             <a:avLst/>
@@ -35870,7 +35861,7 @@
         <p:spPr>
           <a:xfrm>
             <a:off x="7700040" y="27000"/>
-            <a:ext cx="222480" cy="226080"/>
+            <a:ext cx="222120" cy="226080"/>
           </a:xfrm>
           <a:prstGeom prst="rect">
             <a:avLst/>
@@ -35957,7 +35948,7 @@
         <p:spPr>
           <a:xfrm>
             <a:off x="801000" y="2312280"/>
-            <a:ext cx="7658280" cy="743400"/>
+            <a:ext cx="7657920" cy="743400"/>
           </a:xfrm>
           <a:prstGeom prst="rect">
             <a:avLst/>
@@ -36054,7 +36045,7 @@
         <p:spPr>
           <a:xfrm>
             <a:off x="801000" y="3809160"/>
-            <a:ext cx="4343760" cy="1218960"/>
+            <a:ext cx="4343400" cy="1218960"/>
           </a:xfrm>
           <a:prstGeom prst="rect">
             <a:avLst/>
@@ -36227,7 +36218,7 @@
         <p:spPr>
           <a:xfrm>
             <a:off x="7700040" y="27000"/>
-            <a:ext cx="123840" cy="226080"/>
+            <a:ext cx="123480" cy="226080"/>
           </a:xfrm>
           <a:prstGeom prst="rect">
             <a:avLst/>
@@ -36318,7 +36309,7 @@
         <p:spPr>
           <a:xfrm>
             <a:off x="536040" y="526320"/>
-            <a:ext cx="7740720" cy="966240"/>
+            <a:ext cx="7740360" cy="965880"/>
           </a:xfrm>
           <a:prstGeom prst="rect">
             <a:avLst/>
@@ -36426,7 +36417,7 @@
         <p:spPr>
           <a:xfrm>
             <a:off x="536040" y="1322280"/>
-            <a:ext cx="7917480" cy="3544560"/>
+            <a:ext cx="7917120" cy="3543840"/>
           </a:xfrm>
           <a:prstGeom prst="rect">
             <a:avLst/>
@@ -36535,7 +36526,7 @@
               <a:t>disponibles</a:t>
             </a:r>
             <a:r>
-              <a:rPr b="0" lang="fr-FR" sz="2400" spc="26" strike="noStrike">
+              <a:rPr b="0" lang="fr-FR" sz="2400" spc="24" strike="noStrike">
                 <a:solidFill>
                   <a:srgbClr val="292934"/>
                 </a:solidFill>
@@ -36712,17 +36703,7 @@
                 <a:latin typeface="Arial"/>
                 <a:ea typeface="DejaVu Sans"/>
               </a:rPr>
-              <a:t>l’</a:t>
-            </a:r>
-            <a:r>
-              <a:rPr b="0" lang="fr-FR" sz="2400" spc="-1" strike="noStrike">
-                <a:solidFill>
-                  <a:srgbClr val="292934"/>
-                </a:solidFill>
-                <a:latin typeface="Arial"/>
-                <a:ea typeface="DejaVu Sans"/>
-              </a:rPr>
-              <a:t>année</a:t>
+              <a:t>l’année</a:t>
             </a:r>
             <a:r>
               <a:rPr b="0" lang="fr-FR" sz="2400" spc="-15" strike="noStrike">
@@ -37672,7 +37653,7 @@
         <p:spPr>
           <a:xfrm>
             <a:off x="7255800" y="625320"/>
-            <a:ext cx="1582560" cy="459360"/>
+            <a:ext cx="1582200" cy="459000"/>
           </a:xfrm>
           <a:prstGeom prst="rect">
             <a:avLst/>
@@ -37691,7 +37672,7 @@
         <p:spPr>
           <a:xfrm>
             <a:off x="7700040" y="27000"/>
-            <a:ext cx="123840" cy="226080"/>
+            <a:ext cx="123480" cy="226080"/>
           </a:xfrm>
           <a:prstGeom prst="rect">
             <a:avLst/>
@@ -37782,7 +37763,7 @@
         <p:spPr>
           <a:xfrm>
             <a:off x="536040" y="526320"/>
-            <a:ext cx="7740720" cy="966240"/>
+            <a:ext cx="7740360" cy="965880"/>
           </a:xfrm>
           <a:prstGeom prst="rect">
             <a:avLst/>
@@ -37890,7 +37871,7 @@
         <p:spPr>
           <a:xfrm>
             <a:off x="536040" y="1286280"/>
-            <a:ext cx="8054640" cy="4007160"/>
+            <a:ext cx="8054280" cy="4007160"/>
           </a:xfrm>
           <a:prstGeom prst="rect">
             <a:avLst/>
@@ -38831,7 +38812,7 @@
         <p:spPr>
           <a:xfrm>
             <a:off x="7700040" y="27000"/>
-            <a:ext cx="123840" cy="226080"/>
+            <a:ext cx="123480" cy="226080"/>
           </a:xfrm>
           <a:prstGeom prst="rect">
             <a:avLst/>
@@ -38892,7 +38873,7 @@
         <p:spPr>
           <a:xfrm>
             <a:off x="7255800" y="625320"/>
-            <a:ext cx="1582560" cy="459360"/>
+            <a:ext cx="1582200" cy="459000"/>
           </a:xfrm>
           <a:prstGeom prst="rect">
             <a:avLst/>
@@ -38941,7 +38922,7 @@
         <p:spPr>
           <a:xfrm>
             <a:off x="801000" y="2264400"/>
-            <a:ext cx="7414560" cy="1474560"/>
+            <a:ext cx="7414200" cy="1474560"/>
           </a:xfrm>
           <a:prstGeom prst="rect">
             <a:avLst/>
@@ -39108,7 +39089,7 @@
         <p:spPr>
           <a:xfrm>
             <a:off x="801000" y="3809160"/>
-            <a:ext cx="2750400" cy="1231920"/>
+            <a:ext cx="2750040" cy="1231920"/>
           </a:xfrm>
           <a:prstGeom prst="rect">
             <a:avLst/>
@@ -39211,7 +39192,7 @@
         <p:spPr>
           <a:xfrm>
             <a:off x="7700040" y="27000"/>
-            <a:ext cx="123840" cy="226080"/>
+            <a:ext cx="123480" cy="226080"/>
           </a:xfrm>
           <a:prstGeom prst="rect">
             <a:avLst/>
@@ -39302,7 +39283,7 @@
         <p:spPr>
           <a:xfrm>
             <a:off x="536040" y="526320"/>
-            <a:ext cx="7740720" cy="965880"/>
+            <a:ext cx="7740360" cy="965520"/>
           </a:xfrm>
           <a:prstGeom prst="rect">
             <a:avLst/>
@@ -39356,7 +39337,7 @@
         <p:spPr>
           <a:xfrm>
             <a:off x="258120" y="1308960"/>
-            <a:ext cx="6373800" cy="2798280"/>
+            <a:ext cx="6373440" cy="2797560"/>
           </a:xfrm>
           <a:prstGeom prst="rect">
             <a:avLst/>
@@ -40565,16 +40546,10 @@
             </a:endParaRPr>
           </a:p>
           <a:p>
-            <a:pPr lvl="1" marL="469440" indent="-182160">
+            <a:pPr>
               <a:lnSpc>
                 <a:spcPts val="1511"/>
               </a:lnSpc>
-              <a:buClr>
-                <a:srgbClr val="92a199"/>
-              </a:buClr>
-              <a:buSzPct val="86000"/>
-              <a:buFont typeface="Symbol"/>
-              <a:buChar char=""/>
               <a:tabLst>
                 <a:tab algn="l" pos="469440"/>
                 <a:tab algn="l" pos="469800"/>
@@ -40598,7 +40573,7 @@
         <p:spPr>
           <a:xfrm>
             <a:off x="7700040" y="27000"/>
-            <a:ext cx="123840" cy="226080"/>
+            <a:ext cx="123480" cy="226080"/>
           </a:xfrm>
           <a:prstGeom prst="rect">
             <a:avLst/>
@@ -40659,7 +40634,7 @@
         <p:spPr>
           <a:xfrm>
             <a:off x="7568640" y="625320"/>
-            <a:ext cx="1467000" cy="2632680"/>
+            <a:ext cx="1466640" cy="2632320"/>
           </a:xfrm>
           <a:prstGeom prst="rect">
             <a:avLst/>
@@ -40682,7 +40657,7 @@
         <p:spPr>
           <a:xfrm>
             <a:off x="6665760" y="3802680"/>
-            <a:ext cx="2426040" cy="1741320"/>
+            <a:ext cx="2425680" cy="1740960"/>
           </a:xfrm>
           <a:prstGeom prst="rect">
             <a:avLst/>
@@ -40731,9 +40706,9 @@
         <p:grpSpPr>
           <a:xfrm>
             <a:off x="6732360" y="3721680"/>
-            <a:ext cx="2252520" cy="1943280"/>
+            <a:ext cx="2252160" cy="1942920"/>
             <a:chOff x="6732360" y="3721680"/>
-            <a:chExt cx="2252520" cy="1943280"/>
+            <a:chExt cx="2252160" cy="1942920"/>
           </a:xfrm>
         </p:grpSpPr>
         <p:sp>
@@ -40745,15 +40720,15 @@
           <p:spPr>
             <a:xfrm>
               <a:off x="6732360" y="3721680"/>
-              <a:ext cx="2252520" cy="1943280"/>
+              <a:ext cx="2252160" cy="1942920"/>
             </a:xfrm>
             <a:custGeom>
               <a:avLst/>
               <a:gdLst>
-                <a:gd name="textAreaLeft" fmla="*/ 0 w 2252520"/>
-                <a:gd name="textAreaRight" fmla="*/ 2253600 w 2252520"/>
-                <a:gd name="textAreaTop" fmla="*/ 0 h 1943280"/>
-                <a:gd name="textAreaBottom" fmla="*/ 1944360 h 1943280"/>
+                <a:gd name="textAreaLeft" fmla="*/ 0 w 2252160"/>
+                <a:gd name="textAreaRight" fmla="*/ 2253600 w 2252160"/>
+                <a:gd name="textAreaTop" fmla="*/ 0 h 1942920"/>
+                <a:gd name="textAreaBottom" fmla="*/ 1944360 h 1942920"/>
               </a:gdLst>
               <a:ahLst/>
               <a:rect l="textAreaLeft" t="textAreaTop" r="textAreaRight" b="textAreaBottom"/>
@@ -40820,15 +40795,15 @@
           <p:spPr>
             <a:xfrm>
               <a:off x="6732360" y="3721680"/>
-              <a:ext cx="2252520" cy="1943280"/>
+              <a:ext cx="2252160" cy="1942920"/>
             </a:xfrm>
             <a:custGeom>
               <a:avLst/>
               <a:gdLst>
-                <a:gd name="textAreaLeft" fmla="*/ 0 w 2252520"/>
-                <a:gd name="textAreaRight" fmla="*/ 2253600 w 2252520"/>
-                <a:gd name="textAreaTop" fmla="*/ 0 h 1943280"/>
-                <a:gd name="textAreaBottom" fmla="*/ 1944360 h 1943280"/>
+                <a:gd name="textAreaLeft" fmla="*/ 0 w 2252160"/>
+                <a:gd name="textAreaRight" fmla="*/ 2253600 w 2252160"/>
+                <a:gd name="textAreaTop" fmla="*/ 0 h 1942920"/>
+                <a:gd name="textAreaBottom" fmla="*/ 1944360 h 1942920"/>
               </a:gdLst>
               <a:ahLst/>
               <a:rect l="textAreaLeft" t="textAreaTop" r="textAreaRight" b="textAreaBottom"/>
@@ -40896,15 +40871,15 @@
           <p:spPr>
             <a:xfrm>
               <a:off x="7668720" y="3794040"/>
-              <a:ext cx="1187640" cy="849240"/>
+              <a:ext cx="1187280" cy="848880"/>
             </a:xfrm>
             <a:custGeom>
               <a:avLst/>
               <a:gdLst>
-                <a:gd name="textAreaLeft" fmla="*/ 0 w 1187640"/>
-                <a:gd name="textAreaRight" fmla="*/ 1188720 w 1187640"/>
-                <a:gd name="textAreaTop" fmla="*/ 0 h 849240"/>
-                <a:gd name="textAreaBottom" fmla="*/ 850320 h 849240"/>
+                <a:gd name="textAreaLeft" fmla="*/ 0 w 1187280"/>
+                <a:gd name="textAreaRight" fmla="*/ 1188720 w 1187280"/>
+                <a:gd name="textAreaTop" fmla="*/ 0 h 848880"/>
+                <a:gd name="textAreaBottom" fmla="*/ 850320 h 848880"/>
               </a:gdLst>
               <a:ahLst/>
               <a:rect l="textAreaLeft" t="textAreaTop" r="textAreaRight" b="textAreaBottom"/>
@@ -41033,15 +41008,15 @@
           <p:spPr>
             <a:xfrm>
               <a:off x="7668720" y="3794040"/>
-              <a:ext cx="1187640" cy="849240"/>
+              <a:ext cx="1187280" cy="848880"/>
             </a:xfrm>
             <a:custGeom>
               <a:avLst/>
               <a:gdLst>
-                <a:gd name="textAreaLeft" fmla="*/ 0 w 1187640"/>
-                <a:gd name="textAreaRight" fmla="*/ 1188720 w 1187640"/>
-                <a:gd name="textAreaTop" fmla="*/ 0 h 849240"/>
-                <a:gd name="textAreaBottom" fmla="*/ 850320 h 849240"/>
+                <a:gd name="textAreaLeft" fmla="*/ 0 w 1187280"/>
+                <a:gd name="textAreaRight" fmla="*/ 1188720 w 1187280"/>
+                <a:gd name="textAreaTop" fmla="*/ 0 h 848880"/>
+                <a:gd name="textAreaBottom" fmla="*/ 850320 h 848880"/>
               </a:gdLst>
               <a:ahLst/>
               <a:rect l="textAreaLeft" t="textAreaTop" r="textAreaRight" b="textAreaBottom"/>
@@ -41174,7 +41149,7 @@
         <p:spPr>
           <a:xfrm>
             <a:off x="536040" y="526320"/>
-            <a:ext cx="8463960" cy="1230840"/>
+            <a:ext cx="8463600" cy="1230480"/>
           </a:xfrm>
           <a:prstGeom prst="rect">
             <a:avLst/>
@@ -41246,7 +41221,7 @@
         <p:spPr>
           <a:xfrm>
             <a:off x="536040" y="1117800"/>
-            <a:ext cx="6550920" cy="2020680"/>
+            <a:ext cx="6550560" cy="2020680"/>
           </a:xfrm>
           <a:prstGeom prst="rect">
             <a:avLst/>
@@ -42563,7 +42538,7 @@
         <p:spPr>
           <a:xfrm>
             <a:off x="536040" y="3048480"/>
-            <a:ext cx="5221800" cy="1437120"/>
+            <a:ext cx="5221440" cy="1437120"/>
           </a:xfrm>
           <a:prstGeom prst="rect">
             <a:avLst/>
@@ -43986,7 +43961,7 @@
         <p:spPr>
           <a:xfrm>
             <a:off x="536040" y="4612320"/>
-            <a:ext cx="3053880" cy="194760"/>
+            <a:ext cx="3053520" cy="194760"/>
           </a:xfrm>
           <a:prstGeom prst="rect">
             <a:avLst/>
@@ -44103,7 +44078,7 @@
         <p:spPr>
           <a:xfrm>
             <a:off x="7700040" y="27000"/>
-            <a:ext cx="123840" cy="226080"/>
+            <a:ext cx="123480" cy="226080"/>
           </a:xfrm>
           <a:prstGeom prst="rect">
             <a:avLst/>
@@ -44164,7 +44139,7 @@
         <p:spPr>
           <a:xfrm>
             <a:off x="5393520" y="5017680"/>
-            <a:ext cx="833760" cy="658800"/>
+            <a:ext cx="833400" cy="658440"/>
           </a:xfrm>
           <a:prstGeom prst="rect">
             <a:avLst/>
@@ -44183,9 +44158,9 @@
         <p:grpSpPr>
           <a:xfrm>
             <a:off x="4025160" y="5038920"/>
-            <a:ext cx="1295280" cy="628920"/>
+            <a:ext cx="1294920" cy="628560"/>
             <a:chOff x="4025160" y="5038920"/>
-            <a:chExt cx="1295280" cy="628920"/>
+            <a:chExt cx="1294920" cy="628560"/>
           </a:xfrm>
         </p:grpSpPr>
         <p:pic>
@@ -44201,7 +44176,7 @@
           <p:spPr>
             <a:xfrm>
               <a:off x="4025160" y="5038920"/>
-              <a:ext cx="894240" cy="628920"/>
+              <a:ext cx="893880" cy="628560"/>
             </a:xfrm>
             <a:prstGeom prst="rect">
               <a:avLst/>
@@ -44220,15 +44195,15 @@
           <p:spPr>
             <a:xfrm>
               <a:off x="4961520" y="5292360"/>
-              <a:ext cx="358920" cy="142920"/>
+              <a:ext cx="358560" cy="142560"/>
             </a:xfrm>
             <a:custGeom>
               <a:avLst/>
               <a:gdLst>
-                <a:gd name="textAreaLeft" fmla="*/ 0 w 358920"/>
-                <a:gd name="textAreaRight" fmla="*/ 360000 w 358920"/>
-                <a:gd name="textAreaTop" fmla="*/ 0 h 142920"/>
-                <a:gd name="textAreaBottom" fmla="*/ 144000 h 142920"/>
+                <a:gd name="textAreaLeft" fmla="*/ 0 w 358560"/>
+                <a:gd name="textAreaRight" fmla="*/ 360000 w 358560"/>
+                <a:gd name="textAreaTop" fmla="*/ 0 h 142560"/>
+                <a:gd name="textAreaBottom" fmla="*/ 144000 h 142560"/>
               </a:gdLst>
               <a:ahLst/>
               <a:rect l="textAreaLeft" t="textAreaTop" r="textAreaRight" b="textAreaBottom"/>
@@ -44304,15 +44279,15 @@
           <p:spPr>
             <a:xfrm>
               <a:off x="4961520" y="5292360"/>
-              <a:ext cx="358920" cy="142920"/>
+              <a:ext cx="358560" cy="142560"/>
             </a:xfrm>
             <a:custGeom>
               <a:avLst/>
               <a:gdLst>
-                <a:gd name="textAreaLeft" fmla="*/ 0 w 358920"/>
-                <a:gd name="textAreaRight" fmla="*/ 360000 w 358920"/>
-                <a:gd name="textAreaTop" fmla="*/ 0 h 142920"/>
-                <a:gd name="textAreaBottom" fmla="*/ 144000 h 142920"/>
+                <a:gd name="textAreaLeft" fmla="*/ 0 w 358560"/>
+                <a:gd name="textAreaRight" fmla="*/ 360000 w 358560"/>
+                <a:gd name="textAreaTop" fmla="*/ 0 h 142560"/>
+                <a:gd name="textAreaBottom" fmla="*/ 144000 h 142560"/>
               </a:gdLst>
               <a:ahLst/>
               <a:rect l="textAreaLeft" t="textAreaTop" r="textAreaRight" b="textAreaBottom"/>
@@ -44390,7 +44365,7 @@
         <p:spPr>
           <a:xfrm>
             <a:off x="7719120" y="3804120"/>
-            <a:ext cx="1051200" cy="696240"/>
+            <a:ext cx="1050840" cy="696240"/>
           </a:xfrm>
           <a:prstGeom prst="rect">
             <a:avLst/>
@@ -44598,9 +44573,9 @@
         <p:grpSpPr>
           <a:xfrm>
             <a:off x="6876360" y="3794040"/>
-            <a:ext cx="791280" cy="849240"/>
+            <a:ext cx="790920" cy="848880"/>
             <a:chOff x="6876360" y="3794040"/>
-            <a:chExt cx="791280" cy="849240"/>
+            <a:chExt cx="790920" cy="848880"/>
           </a:xfrm>
         </p:grpSpPr>
         <p:sp>
@@ -44612,15 +44587,15 @@
           <p:spPr>
             <a:xfrm>
               <a:off x="6876360" y="3794040"/>
-              <a:ext cx="791280" cy="849240"/>
+              <a:ext cx="790920" cy="848880"/>
             </a:xfrm>
             <a:custGeom>
               <a:avLst/>
               <a:gdLst>
-                <a:gd name="textAreaLeft" fmla="*/ 0 w 791280"/>
-                <a:gd name="textAreaRight" fmla="*/ 792360 w 791280"/>
-                <a:gd name="textAreaTop" fmla="*/ 0 h 849240"/>
-                <a:gd name="textAreaBottom" fmla="*/ 850320 h 849240"/>
+                <a:gd name="textAreaLeft" fmla="*/ 0 w 790920"/>
+                <a:gd name="textAreaRight" fmla="*/ 792360 w 790920"/>
+                <a:gd name="textAreaTop" fmla="*/ 0 h 848880"/>
+                <a:gd name="textAreaBottom" fmla="*/ 850320 h 848880"/>
               </a:gdLst>
               <a:ahLst/>
               <a:rect l="textAreaLeft" t="textAreaTop" r="textAreaRight" b="textAreaBottom"/>
@@ -44747,15 +44722,15 @@
           <p:spPr>
             <a:xfrm>
               <a:off x="6876360" y="3794040"/>
-              <a:ext cx="791280" cy="849240"/>
+              <a:ext cx="790920" cy="848880"/>
             </a:xfrm>
             <a:custGeom>
               <a:avLst/>
               <a:gdLst>
-                <a:gd name="textAreaLeft" fmla="*/ 0 w 791280"/>
-                <a:gd name="textAreaRight" fmla="*/ 792360 w 791280"/>
-                <a:gd name="textAreaTop" fmla="*/ 0 h 849240"/>
-                <a:gd name="textAreaBottom" fmla="*/ 850320 h 849240"/>
+                <a:gd name="textAreaLeft" fmla="*/ 0 w 790920"/>
+                <a:gd name="textAreaRight" fmla="*/ 792360 w 790920"/>
+                <a:gd name="textAreaTop" fmla="*/ 0 h 848880"/>
+                <a:gd name="textAreaBottom" fmla="*/ 850320 h 848880"/>
               </a:gdLst>
               <a:ahLst/>
               <a:rect l="textAreaLeft" t="textAreaTop" r="textAreaRight" b="textAreaBottom"/>
@@ -44884,7 +44859,7 @@
         <p:spPr>
           <a:xfrm>
             <a:off x="7012800" y="3819960"/>
-            <a:ext cx="533520" cy="753480"/>
+            <a:ext cx="533160" cy="753480"/>
           </a:xfrm>
           <a:prstGeom prst="rect">
             <a:avLst/>
@@ -45001,9 +44976,9 @@
         <p:grpSpPr>
           <a:xfrm>
             <a:off x="7668720" y="4728960"/>
-            <a:ext cx="1187640" cy="849240"/>
+            <a:ext cx="1187280" cy="848880"/>
             <a:chOff x="7668720" y="4728960"/>
-            <a:chExt cx="1187640" cy="849240"/>
+            <a:chExt cx="1187280" cy="848880"/>
           </a:xfrm>
         </p:grpSpPr>
         <p:sp>
@@ -45015,15 +44990,15 @@
           <p:spPr>
             <a:xfrm>
               <a:off x="7668720" y="4728960"/>
-              <a:ext cx="1187640" cy="849240"/>
+              <a:ext cx="1187280" cy="848880"/>
             </a:xfrm>
             <a:custGeom>
               <a:avLst/>
               <a:gdLst>
-                <a:gd name="textAreaLeft" fmla="*/ 0 w 1187640"/>
-                <a:gd name="textAreaRight" fmla="*/ 1188720 w 1187640"/>
-                <a:gd name="textAreaTop" fmla="*/ 0 h 849240"/>
-                <a:gd name="textAreaBottom" fmla="*/ 850320 h 849240"/>
+                <a:gd name="textAreaLeft" fmla="*/ 0 w 1187280"/>
+                <a:gd name="textAreaRight" fmla="*/ 1188720 w 1187280"/>
+                <a:gd name="textAreaTop" fmla="*/ 0 h 848880"/>
+                <a:gd name="textAreaBottom" fmla="*/ 850320 h 848880"/>
               </a:gdLst>
               <a:ahLst/>
               <a:rect l="textAreaLeft" t="textAreaTop" r="textAreaRight" b="textAreaBottom"/>
@@ -45152,15 +45127,15 @@
           <p:spPr>
             <a:xfrm>
               <a:off x="7668720" y="4728960"/>
-              <a:ext cx="1187640" cy="849240"/>
+              <a:ext cx="1187280" cy="848880"/>
             </a:xfrm>
             <a:custGeom>
               <a:avLst/>
               <a:gdLst>
-                <a:gd name="textAreaLeft" fmla="*/ 0 w 1187640"/>
-                <a:gd name="textAreaRight" fmla="*/ 1188720 w 1187640"/>
-                <a:gd name="textAreaTop" fmla="*/ 0 h 849240"/>
-                <a:gd name="textAreaBottom" fmla="*/ 850320 h 849240"/>
+                <a:gd name="textAreaLeft" fmla="*/ 0 w 1187280"/>
+                <a:gd name="textAreaRight" fmla="*/ 1188720 w 1187280"/>
+                <a:gd name="textAreaTop" fmla="*/ 0 h 848880"/>
+                <a:gd name="textAreaBottom" fmla="*/ 850320 h 848880"/>
               </a:gdLst>
               <a:ahLst/>
               <a:rect l="textAreaLeft" t="textAreaTop" r="textAreaRight" b="textAreaBottom"/>
@@ -45289,7 +45264,7 @@
         <p:spPr>
           <a:xfrm>
             <a:off x="7719120" y="4739040"/>
-            <a:ext cx="1051200" cy="695880"/>
+            <a:ext cx="1050840" cy="695880"/>
           </a:xfrm>
           <a:prstGeom prst="rect">
             <a:avLst/>
@@ -45497,9 +45472,9 @@
         <p:grpSpPr>
           <a:xfrm>
             <a:off x="6876360" y="4728960"/>
-            <a:ext cx="791280" cy="849240"/>
+            <a:ext cx="790920" cy="848880"/>
             <a:chOff x="6876360" y="4728960"/>
-            <a:chExt cx="791280" cy="849240"/>
+            <a:chExt cx="790920" cy="848880"/>
           </a:xfrm>
         </p:grpSpPr>
         <p:sp>
@@ -45511,15 +45486,15 @@
           <p:spPr>
             <a:xfrm>
               <a:off x="6876360" y="4728960"/>
-              <a:ext cx="791280" cy="849240"/>
+              <a:ext cx="790920" cy="848880"/>
             </a:xfrm>
             <a:custGeom>
               <a:avLst/>
               <a:gdLst>
-                <a:gd name="textAreaLeft" fmla="*/ 0 w 791280"/>
-                <a:gd name="textAreaRight" fmla="*/ 792360 w 791280"/>
-                <a:gd name="textAreaTop" fmla="*/ 0 h 849240"/>
-                <a:gd name="textAreaBottom" fmla="*/ 850320 h 849240"/>
+                <a:gd name="textAreaLeft" fmla="*/ 0 w 790920"/>
+                <a:gd name="textAreaRight" fmla="*/ 792360 w 790920"/>
+                <a:gd name="textAreaTop" fmla="*/ 0 h 848880"/>
+                <a:gd name="textAreaBottom" fmla="*/ 850320 h 848880"/>
               </a:gdLst>
               <a:ahLst/>
               <a:rect l="textAreaLeft" t="textAreaTop" r="textAreaRight" b="textAreaBottom"/>
@@ -45646,15 +45621,15 @@
           <p:spPr>
             <a:xfrm>
               <a:off x="6876360" y="4728960"/>
-              <a:ext cx="791280" cy="849240"/>
+              <a:ext cx="790920" cy="848880"/>
             </a:xfrm>
             <a:custGeom>
               <a:avLst/>
               <a:gdLst>
-                <a:gd name="textAreaLeft" fmla="*/ 0 w 791280"/>
-                <a:gd name="textAreaRight" fmla="*/ 792360 w 791280"/>
-                <a:gd name="textAreaTop" fmla="*/ 0 h 849240"/>
-                <a:gd name="textAreaBottom" fmla="*/ 850320 h 849240"/>
+                <a:gd name="textAreaLeft" fmla="*/ 0 w 790920"/>
+                <a:gd name="textAreaRight" fmla="*/ 792360 w 790920"/>
+                <a:gd name="textAreaTop" fmla="*/ 0 h 848880"/>
+                <a:gd name="textAreaBottom" fmla="*/ 850320 h 848880"/>
               </a:gdLst>
               <a:ahLst/>
               <a:rect l="textAreaLeft" t="textAreaTop" r="textAreaRight" b="textAreaBottom"/>
@@ -45783,7 +45758,7 @@
         <p:spPr>
           <a:xfrm>
             <a:off x="7012800" y="4755240"/>
-            <a:ext cx="533520" cy="759960"/>
+            <a:ext cx="533160" cy="759960"/>
           </a:xfrm>
           <a:prstGeom prst="rect">
             <a:avLst/>
@@ -45930,15 +45905,15 @@
         <p:spPr>
           <a:xfrm>
             <a:off x="0" y="0"/>
-            <a:ext cx="9142920" cy="303840"/>
+            <a:ext cx="9142560" cy="303480"/>
           </a:xfrm>
           <a:custGeom>
             <a:avLst/>
             <a:gdLst>
-              <a:gd name="textAreaLeft" fmla="*/ 0 w 9142920"/>
-              <a:gd name="textAreaRight" fmla="*/ 9144000 w 9142920"/>
-              <a:gd name="textAreaTop" fmla="*/ 0 h 303840"/>
-              <a:gd name="textAreaBottom" fmla="*/ 304920 h 303840"/>
+              <a:gd name="textAreaLeft" fmla="*/ 0 w 9142560"/>
+              <a:gd name="textAreaRight" fmla="*/ 9144000 w 9142560"/>
+              <a:gd name="textAreaTop" fmla="*/ 0 h 303480"/>
+              <a:gd name="textAreaBottom" fmla="*/ 304920 h 303480"/>
             </a:gdLst>
             <a:ahLst/>
             <a:rect l="textAreaLeft" t="textAreaTop" r="textAreaRight" b="textAreaBottom"/>
@@ -46009,7 +45984,7 @@
         <p:spPr>
           <a:xfrm>
             <a:off x="107280" y="347040"/>
-            <a:ext cx="2442240" cy="965880"/>
+            <a:ext cx="2441880" cy="965520"/>
           </a:xfrm>
           <a:prstGeom prst="rect">
             <a:avLst/>
@@ -46063,7 +46038,7 @@
         <p:spPr>
           <a:xfrm>
             <a:off x="7700040" y="27000"/>
-            <a:ext cx="123840" cy="226080"/>
+            <a:ext cx="123480" cy="226080"/>
           </a:xfrm>
           <a:prstGeom prst="rect">
             <a:avLst/>
@@ -46124,7 +46099,7 @@
         <p:spPr>
           <a:xfrm>
             <a:off x="251640" y="878040"/>
-            <a:ext cx="4266360" cy="2236680"/>
+            <a:ext cx="4266000" cy="2236320"/>
           </a:xfrm>
           <a:prstGeom prst="rect">
             <a:avLst/>
@@ -46147,7 +46122,7 @@
         <p:spPr>
           <a:xfrm>
             <a:off x="370080" y="3210120"/>
-            <a:ext cx="4112640" cy="2163600"/>
+            <a:ext cx="4112280" cy="2163240"/>
           </a:xfrm>
           <a:prstGeom prst="rect">
             <a:avLst/>
@@ -46170,7 +46145,7 @@
         <p:spPr>
           <a:xfrm>
             <a:off x="4880520" y="918720"/>
-            <a:ext cx="4051440" cy="2180160"/>
+            <a:ext cx="4051080" cy="2179800"/>
           </a:xfrm>
           <a:prstGeom prst="rect">
             <a:avLst/>
@@ -46193,7 +46168,7 @@
         <p:spPr>
           <a:xfrm>
             <a:off x="4808520" y="3300480"/>
-            <a:ext cx="4119840" cy="2167560"/>
+            <a:ext cx="4119480" cy="2167200"/>
           </a:xfrm>
           <a:prstGeom prst="rect">
             <a:avLst/>
